--- a/presentations/ecosystem-positioning/Ecosystem_Positioning_Requirements_Evidence_Canonical_v1.2.pptx
+++ b/presentations/ecosystem-positioning/Ecosystem_Positioning_Requirements_Evidence_Canonical_v1.2.pptx
@@ -72,20 +72,21 @@
             <a:noAutofit/>
           </a:bodyPr>
           <a:p>
-            <a:r>
-              <a:rPr b="0" lang="en-US" sz="1800" spc="-1" strike="noStrike">
-                <a:solidFill>
-                  <a:schemeClr val="dk1"/>
-                </a:solidFill>
-                <a:latin typeface="Calibri"/>
+            <a:pPr algn="ctr"/>
+            <a:r>
+              <a:rPr b="0" lang="en-US" sz="4400" spc="-1" strike="noStrike">
+                <a:solidFill>
+                  <a:srgbClr val="000000"/>
+                </a:solidFill>
+                <a:latin typeface="Arial"/>
               </a:rPr>
               <a:t>Click to move the slide</a:t>
             </a:r>
-            <a:endParaRPr b="0" lang="en-US" sz="1800" spc="-1" strike="noStrike">
-              <a:solidFill>
-                <a:schemeClr val="dk1"/>
-              </a:solidFill>
-              <a:latin typeface="Calibri"/>
+            <a:endParaRPr b="0" lang="en-US" sz="4400" spc="-1" strike="noStrike">
+              <a:solidFill>
+                <a:srgbClr val="000000"/>
+              </a:solidFill>
+              <a:latin typeface="Arial"/>
             </a:endParaRPr>
           </a:p>
         </p:txBody>
@@ -350,7 +351,7 @@
             <a:pPr indent="0" algn="r">
               <a:buNone/>
             </a:pPr>
-            <a:fld id="{BEDBE30B-F0D5-43D8-A5DB-97FF9354A430}" type="slidenum">
+            <a:fld id="{31D61ABB-DDF3-41FB-B776-221996EF0285}" type="slidenum">
               <a:rPr b="0" lang="en-US" sz="1400" spc="-1" strike="noStrike">
                 <a:solidFill>
                   <a:srgbClr val="000000"/>
@@ -485,7 +486,7 @@
             <a:pPr indent="0">
               <a:buNone/>
             </a:pPr>
-            <a:endParaRPr b="0" lang="en-US" sz="1800" spc="-1" strike="noStrike">
+            <a:endParaRPr b="0" lang="en-US" sz="1400" spc="-1" strike="noStrike">
               <a:solidFill>
                 <a:srgbClr val="000000"/>
               </a:solidFill>
@@ -610,7 +611,7 @@
             <a:pPr indent="0">
               <a:buNone/>
             </a:pPr>
-            <a:endParaRPr b="0" lang="en-US" sz="1800" spc="-1" strike="noStrike">
+            <a:endParaRPr b="0" lang="en-US" sz="1400" spc="-1" strike="noStrike">
               <a:solidFill>
                 <a:srgbClr val="000000"/>
               </a:solidFill>
@@ -735,7 +736,7 @@
             <a:pPr indent="0">
               <a:buNone/>
             </a:pPr>
-            <a:endParaRPr b="0" lang="en-US" sz="1800" spc="-1" strike="noStrike">
+            <a:endParaRPr b="0" lang="en-US" sz="1400" spc="-1" strike="noStrike">
               <a:solidFill>
                 <a:srgbClr val="000000"/>
               </a:solidFill>
@@ -860,7 +861,7 @@
             <a:pPr indent="0">
               <a:buNone/>
             </a:pPr>
-            <a:endParaRPr b="0" lang="en-US" sz="1800" spc="-1" strike="noStrike">
+            <a:endParaRPr b="0" lang="en-US" sz="1400" spc="-1" strike="noStrike">
               <a:solidFill>
                 <a:srgbClr val="000000"/>
               </a:solidFill>
@@ -985,7 +986,7 @@
             <a:pPr indent="0">
               <a:buNone/>
             </a:pPr>
-            <a:endParaRPr b="0" lang="en-US" sz="1800" spc="-1" strike="noStrike">
+            <a:endParaRPr b="0" lang="en-US" sz="1400" spc="-1" strike="noStrike">
               <a:solidFill>
                 <a:srgbClr val="000000"/>
               </a:solidFill>
@@ -1110,7 +1111,7 @@
             <a:pPr indent="0">
               <a:buNone/>
             </a:pPr>
-            <a:endParaRPr b="0" lang="en-US" sz="1800" spc="-1" strike="noStrike">
+            <a:endParaRPr b="0" lang="en-US" sz="1400" spc="-1" strike="noStrike">
               <a:solidFill>
                 <a:srgbClr val="000000"/>
               </a:solidFill>
@@ -1235,7 +1236,7 @@
             <a:pPr indent="0">
               <a:buNone/>
             </a:pPr>
-            <a:endParaRPr b="0" lang="en-US" sz="1800" spc="-1" strike="noStrike">
+            <a:endParaRPr b="0" lang="en-US" sz="1400" spc="-1" strike="noStrike">
               <a:solidFill>
                 <a:srgbClr val="000000"/>
               </a:solidFill>
@@ -1360,7 +1361,7 @@
             <a:pPr indent="0">
               <a:buNone/>
             </a:pPr>
-            <a:endParaRPr b="0" lang="en-US" sz="1800" spc="-1" strike="noStrike">
+            <a:endParaRPr b="0" lang="en-US" sz="1400" spc="-1" strike="noStrike">
               <a:solidFill>
                 <a:srgbClr val="000000"/>
               </a:solidFill>
@@ -1485,7 +1486,7 @@
             <a:pPr indent="0">
               <a:buNone/>
             </a:pPr>
-            <a:endParaRPr b="0" lang="en-US" sz="1800" spc="-1" strike="noStrike">
+            <a:endParaRPr b="0" lang="en-US" sz="1400" spc="-1" strike="noStrike">
               <a:solidFill>
                 <a:srgbClr val="000000"/>
               </a:solidFill>
@@ -1610,7 +1611,7 @@
             <a:pPr indent="0">
               <a:buNone/>
             </a:pPr>
-            <a:endParaRPr b="0" lang="en-US" sz="1800" spc="-1" strike="noStrike">
+            <a:endParaRPr b="0" lang="en-US" sz="1400" spc="-1" strike="noStrike">
               <a:solidFill>
                 <a:srgbClr val="000000"/>
               </a:solidFill>
@@ -1735,7 +1736,7 @@
             <a:pPr indent="0">
               <a:buNone/>
             </a:pPr>
-            <a:endParaRPr b="0" lang="en-US" sz="1800" spc="-1" strike="noStrike">
+            <a:endParaRPr b="0" lang="en-US" sz="1400" spc="-1" strike="noStrike">
               <a:solidFill>
                 <a:srgbClr val="000000"/>
               </a:solidFill>
@@ -1860,7 +1861,7 @@
             <a:pPr indent="0">
               <a:buNone/>
             </a:pPr>
-            <a:endParaRPr b="0" lang="en-US" sz="1800" spc="-1" strike="noStrike">
+            <a:endParaRPr b="0" lang="en-US" sz="1400" spc="-1" strike="noStrike">
               <a:solidFill>
                 <a:srgbClr val="000000"/>
               </a:solidFill>
@@ -1905,7 +1906,7 @@
         <p:txBody>
           <a:bodyPr/>
           <a:p>
-            <a:fld id="{41E63248-CE97-4AD4-A366-0A302E88D58B}" type="slidenum">
+            <a:fld id="{B29D2BFA-4BB7-4C19-BB58-BCD85D3EB5AB}" type="slidenum">
               <a:t>&lt;#&gt;</a:t>
             </a:fld>
           </a:p>
@@ -2097,7 +2098,7 @@
         <p:spPr>
           <a:xfrm>
             <a:off x="567000" y="6546960"/>
-            <a:ext cx="3245760" cy="164160"/>
+            <a:ext cx="3245400" cy="163800"/>
           </a:xfrm>
           <a:prstGeom prst="rect">
             <a:avLst/>
@@ -2145,7 +2146,7 @@
         <p:spPr>
           <a:xfrm>
             <a:off x="4187880" y="6546960"/>
-            <a:ext cx="3382920" cy="164160"/>
+            <a:ext cx="3382560" cy="163800"/>
           </a:xfrm>
           <a:prstGeom prst="rect">
             <a:avLst/>
@@ -2206,7 +2207,7 @@
         <p:spPr>
           <a:xfrm>
             <a:off x="11064240" y="6537960"/>
-            <a:ext cx="502560" cy="164160"/>
+            <a:ext cx="502200" cy="163800"/>
           </a:xfrm>
           <a:prstGeom prst="rect">
             <a:avLst/>
@@ -2226,6 +2227,9 @@
                 <a:spcPct val="100000"/>
               </a:lnSpc>
               <a:buNone/>
+              <a:tabLst>
+                <a:tab algn="l" pos="0"/>
+              </a:tabLst>
               <a:defRPr b="1" lang="en-US" sz="750" spc="-1" strike="noStrike">
                 <a:solidFill>
                   <a:srgbClr val="1b273f"/>
@@ -2241,8 +2245,11 @@
                 <a:spcPct val="100000"/>
               </a:lnSpc>
               <a:buNone/>
-            </a:pPr>
-            <a:fld id="{815E5DE0-2FFD-42AA-A2CC-55EA9D219E75}" type="slidenum">
+              <a:tabLst>
+                <a:tab algn="l" pos="0"/>
+              </a:tabLst>
+            </a:pPr>
+            <a:fld id="{880E8621-4C71-4EDD-ADEC-10CC32681508}" type="slidenum">
               <a:rPr b="1" lang="en-US" sz="750" spc="-1" strike="noStrike">
                 <a:solidFill>
                   <a:srgbClr val="1b273f"/>
@@ -2289,23 +2296,23 @@
             <a:noAutofit/>
           </a:bodyPr>
           <a:p>
-            <a:pPr indent="0">
+            <a:pPr indent="0" algn="ctr">
               <a:buNone/>
             </a:pPr>
             <a:r>
-              <a:rPr b="0" lang="en-US" sz="1800" spc="-1" strike="noStrike">
-                <a:solidFill>
-                  <a:schemeClr val="dk1"/>
-                </a:solidFill>
-                <a:latin typeface="Calibri"/>
+              <a:rPr b="0" lang="en-US" sz="4400" spc="-1" strike="noStrike">
+                <a:solidFill>
+                  <a:srgbClr val="000000"/>
+                </a:solidFill>
+                <a:latin typeface="Arial"/>
               </a:rPr>
               <a:t>Click to edit the title text format</a:t>
             </a:r>
-            <a:endParaRPr b="0" lang="en-US" sz="1800" spc="-1" strike="noStrike">
-              <a:solidFill>
-                <a:schemeClr val="dk1"/>
-              </a:solidFill>
-              <a:latin typeface="Calibri"/>
+            <a:endParaRPr b="0" lang="en-US" sz="4400" spc="-1" strike="noStrike">
+              <a:solidFill>
+                <a:srgbClr val="000000"/>
+              </a:solidFill>
+              <a:latin typeface="Arial"/>
             </a:endParaRPr>
           </a:p>
         </p:txBody>
@@ -2352,17 +2359,17 @@
             <a:r>
               <a:rPr b="0" lang="en-US" sz="3200" spc="-1" strike="noStrike">
                 <a:solidFill>
-                  <a:schemeClr val="dk1"/>
-                </a:solidFill>
-                <a:latin typeface="Calibri"/>
+                  <a:srgbClr val="000000"/>
+                </a:solidFill>
+                <a:latin typeface="Arial"/>
               </a:rPr>
               <a:t>Click to edit the outline text format</a:t>
             </a:r>
             <a:endParaRPr b="0" lang="en-US" sz="3200" spc="-1" strike="noStrike">
               <a:solidFill>
-                <a:schemeClr val="dk1"/>
-              </a:solidFill>
-              <a:latin typeface="Calibri"/>
+                <a:srgbClr val="000000"/>
+              </a:solidFill>
+              <a:latin typeface="Arial"/>
             </a:endParaRPr>
           </a:p>
           <a:p>
@@ -2378,19 +2385,19 @@
               <a:buChar char=""/>
             </a:pPr>
             <a:r>
-              <a:rPr b="0" lang="en-US" sz="2400" spc="-1" strike="noStrike">
-                <a:solidFill>
-                  <a:schemeClr val="dk1"/>
-                </a:solidFill>
-                <a:latin typeface="Calibri"/>
+              <a:rPr b="0" lang="en-US" sz="2800" spc="-1" strike="noStrike">
+                <a:solidFill>
+                  <a:srgbClr val="000000"/>
+                </a:solidFill>
+                <a:latin typeface="Arial"/>
               </a:rPr>
               <a:t>Second Outline Level</a:t>
             </a:r>
-            <a:endParaRPr b="0" lang="en-US" sz="2400" spc="-1" strike="noStrike">
-              <a:solidFill>
-                <a:schemeClr val="dk1"/>
-              </a:solidFill>
-              <a:latin typeface="Calibri"/>
+            <a:endParaRPr b="0" lang="en-US" sz="2800" spc="-1" strike="noStrike">
+              <a:solidFill>
+                <a:srgbClr val="000000"/>
+              </a:solidFill>
+              <a:latin typeface="Arial"/>
             </a:endParaRPr>
           </a:p>
           <a:p>
@@ -2406,19 +2413,19 @@
               <a:buChar char=""/>
             </a:pPr>
             <a:r>
-              <a:rPr b="0" lang="en-US" sz="2000" spc="-1" strike="noStrike">
-                <a:solidFill>
-                  <a:schemeClr val="dk1"/>
-                </a:solidFill>
-                <a:latin typeface="Calibri"/>
+              <a:rPr b="0" lang="en-US" sz="2400" spc="-1" strike="noStrike">
+                <a:solidFill>
+                  <a:srgbClr val="000000"/>
+                </a:solidFill>
+                <a:latin typeface="Arial"/>
               </a:rPr>
               <a:t>Third Outline Level</a:t>
             </a:r>
-            <a:endParaRPr b="0" lang="en-US" sz="2000" spc="-1" strike="noStrike">
-              <a:solidFill>
-                <a:schemeClr val="dk1"/>
-              </a:solidFill>
-              <a:latin typeface="Calibri"/>
+            <a:endParaRPr b="0" lang="en-US" sz="2400" spc="-1" strike="noStrike">
+              <a:solidFill>
+                <a:srgbClr val="000000"/>
+              </a:solidFill>
+              <a:latin typeface="Arial"/>
             </a:endParaRPr>
           </a:p>
           <a:p>
@@ -2436,17 +2443,17 @@
             <a:r>
               <a:rPr b="0" lang="en-US" sz="2000" spc="-1" strike="noStrike">
                 <a:solidFill>
-                  <a:schemeClr val="dk1"/>
-                </a:solidFill>
-                <a:latin typeface="Calibri"/>
+                  <a:srgbClr val="000000"/>
+                </a:solidFill>
+                <a:latin typeface="Arial"/>
               </a:rPr>
               <a:t>Fourth Outline Level</a:t>
             </a:r>
             <a:endParaRPr b="0" lang="en-US" sz="2000" spc="-1" strike="noStrike">
               <a:solidFill>
-                <a:schemeClr val="dk1"/>
-              </a:solidFill>
-              <a:latin typeface="Calibri"/>
+                <a:srgbClr val="000000"/>
+              </a:solidFill>
+              <a:latin typeface="Arial"/>
             </a:endParaRPr>
           </a:p>
           <a:p>
@@ -2464,17 +2471,17 @@
             <a:r>
               <a:rPr b="0" lang="en-US" sz="2000" spc="-1" strike="noStrike">
                 <a:solidFill>
-                  <a:schemeClr val="dk1"/>
-                </a:solidFill>
-                <a:latin typeface="Calibri"/>
+                  <a:srgbClr val="000000"/>
+                </a:solidFill>
+                <a:latin typeface="Arial"/>
               </a:rPr>
               <a:t>Fifth Outline Level</a:t>
             </a:r>
             <a:endParaRPr b="0" lang="en-US" sz="2000" spc="-1" strike="noStrike">
               <a:solidFill>
-                <a:schemeClr val="dk1"/>
-              </a:solidFill>
-              <a:latin typeface="Calibri"/>
+                <a:srgbClr val="000000"/>
+              </a:solidFill>
+              <a:latin typeface="Arial"/>
             </a:endParaRPr>
           </a:p>
           <a:p>
@@ -2492,17 +2499,17 @@
             <a:r>
               <a:rPr b="0" lang="en-US" sz="2000" spc="-1" strike="noStrike">
                 <a:solidFill>
-                  <a:schemeClr val="dk1"/>
-                </a:solidFill>
-                <a:latin typeface="Calibri"/>
+                  <a:srgbClr val="000000"/>
+                </a:solidFill>
+                <a:latin typeface="Arial"/>
               </a:rPr>
               <a:t>Sixth Outline Level</a:t>
             </a:r>
             <a:endParaRPr b="0" lang="en-US" sz="2000" spc="-1" strike="noStrike">
               <a:solidFill>
-                <a:schemeClr val="dk1"/>
-              </a:solidFill>
-              <a:latin typeface="Calibri"/>
+                <a:srgbClr val="000000"/>
+              </a:solidFill>
+              <a:latin typeface="Arial"/>
             </a:endParaRPr>
           </a:p>
           <a:p>
@@ -2520,17 +2527,17 @@
             <a:r>
               <a:rPr b="0" lang="en-US" sz="2000" spc="-1" strike="noStrike">
                 <a:solidFill>
-                  <a:schemeClr val="dk1"/>
-                </a:solidFill>
-                <a:latin typeface="Calibri"/>
+                  <a:srgbClr val="000000"/>
+                </a:solidFill>
+                <a:latin typeface="Arial"/>
               </a:rPr>
               <a:t>Seventh Outline Level</a:t>
             </a:r>
             <a:endParaRPr b="0" lang="en-US" sz="2000" spc="-1" strike="noStrike">
               <a:solidFill>
-                <a:schemeClr val="dk1"/>
-              </a:solidFill>
-              <a:latin typeface="Calibri"/>
+                <a:srgbClr val="000000"/>
+              </a:solidFill>
+              <a:latin typeface="Arial"/>
             </a:endParaRPr>
           </a:p>
         </p:txBody>
@@ -2596,23 +2603,23 @@
             <a:noAutofit/>
           </a:bodyPr>
           <a:p>
-            <a:pPr indent="0">
+            <a:pPr indent="0" algn="ctr">
               <a:buNone/>
             </a:pPr>
             <a:r>
-              <a:rPr b="0" lang="en-US" sz="1800" spc="-1" strike="noStrike">
-                <a:solidFill>
-                  <a:schemeClr val="dk1"/>
-                </a:solidFill>
-                <a:latin typeface="Calibri"/>
+              <a:rPr b="0" lang="en-US" sz="4400" spc="-1" strike="noStrike">
+                <a:solidFill>
+                  <a:srgbClr val="000000"/>
+                </a:solidFill>
+                <a:latin typeface="Arial"/>
               </a:rPr>
               <a:t>Click to edit the title text format</a:t>
             </a:r>
-            <a:endParaRPr b="0" lang="en-US" sz="1800" spc="-1" strike="noStrike">
-              <a:solidFill>
-                <a:schemeClr val="dk1"/>
-              </a:solidFill>
-              <a:latin typeface="Calibri"/>
+            <a:endParaRPr b="0" lang="en-US" sz="4400" spc="-1" strike="noStrike">
+              <a:solidFill>
+                <a:srgbClr val="000000"/>
+              </a:solidFill>
+              <a:latin typeface="Arial"/>
             </a:endParaRPr>
           </a:p>
         </p:txBody>
@@ -2659,17 +2666,17 @@
             <a:r>
               <a:rPr b="0" lang="en-US" sz="3200" spc="-1" strike="noStrike">
                 <a:solidFill>
-                  <a:schemeClr val="dk1"/>
-                </a:solidFill>
-                <a:latin typeface="Calibri"/>
+                  <a:srgbClr val="000000"/>
+                </a:solidFill>
+                <a:latin typeface="Arial"/>
               </a:rPr>
               <a:t>Click to edit the outline text format</a:t>
             </a:r>
             <a:endParaRPr b="0" lang="en-US" sz="3200" spc="-1" strike="noStrike">
               <a:solidFill>
-                <a:schemeClr val="dk1"/>
-              </a:solidFill>
-              <a:latin typeface="Calibri"/>
+                <a:srgbClr val="000000"/>
+              </a:solidFill>
+              <a:latin typeface="Arial"/>
             </a:endParaRPr>
           </a:p>
           <a:p>
@@ -2685,19 +2692,19 @@
               <a:buChar char=""/>
             </a:pPr>
             <a:r>
-              <a:rPr b="0" lang="en-US" sz="2400" spc="-1" strike="noStrike">
-                <a:solidFill>
-                  <a:schemeClr val="dk1"/>
-                </a:solidFill>
-                <a:latin typeface="Calibri"/>
+              <a:rPr b="0" lang="en-US" sz="2800" spc="-1" strike="noStrike">
+                <a:solidFill>
+                  <a:srgbClr val="000000"/>
+                </a:solidFill>
+                <a:latin typeface="Arial"/>
               </a:rPr>
               <a:t>Second Outline Level</a:t>
             </a:r>
-            <a:endParaRPr b="0" lang="en-US" sz="2400" spc="-1" strike="noStrike">
-              <a:solidFill>
-                <a:schemeClr val="dk1"/>
-              </a:solidFill>
-              <a:latin typeface="Calibri"/>
+            <a:endParaRPr b="0" lang="en-US" sz="2800" spc="-1" strike="noStrike">
+              <a:solidFill>
+                <a:srgbClr val="000000"/>
+              </a:solidFill>
+              <a:latin typeface="Arial"/>
             </a:endParaRPr>
           </a:p>
           <a:p>
@@ -2713,19 +2720,19 @@
               <a:buChar char=""/>
             </a:pPr>
             <a:r>
-              <a:rPr b="0" lang="en-US" sz="2000" spc="-1" strike="noStrike">
-                <a:solidFill>
-                  <a:schemeClr val="dk1"/>
-                </a:solidFill>
-                <a:latin typeface="Calibri"/>
+              <a:rPr b="0" lang="en-US" sz="2400" spc="-1" strike="noStrike">
+                <a:solidFill>
+                  <a:srgbClr val="000000"/>
+                </a:solidFill>
+                <a:latin typeface="Arial"/>
               </a:rPr>
               <a:t>Third Outline Level</a:t>
             </a:r>
-            <a:endParaRPr b="0" lang="en-US" sz="2000" spc="-1" strike="noStrike">
-              <a:solidFill>
-                <a:schemeClr val="dk1"/>
-              </a:solidFill>
-              <a:latin typeface="Calibri"/>
+            <a:endParaRPr b="0" lang="en-US" sz="2400" spc="-1" strike="noStrike">
+              <a:solidFill>
+                <a:srgbClr val="000000"/>
+              </a:solidFill>
+              <a:latin typeface="Arial"/>
             </a:endParaRPr>
           </a:p>
           <a:p>
@@ -2743,17 +2750,17 @@
             <a:r>
               <a:rPr b="0" lang="en-US" sz="2000" spc="-1" strike="noStrike">
                 <a:solidFill>
-                  <a:schemeClr val="dk1"/>
-                </a:solidFill>
-                <a:latin typeface="Calibri"/>
+                  <a:srgbClr val="000000"/>
+                </a:solidFill>
+                <a:latin typeface="Arial"/>
               </a:rPr>
               <a:t>Fourth Outline Level</a:t>
             </a:r>
             <a:endParaRPr b="0" lang="en-US" sz="2000" spc="-1" strike="noStrike">
               <a:solidFill>
-                <a:schemeClr val="dk1"/>
-              </a:solidFill>
-              <a:latin typeface="Calibri"/>
+                <a:srgbClr val="000000"/>
+              </a:solidFill>
+              <a:latin typeface="Arial"/>
             </a:endParaRPr>
           </a:p>
           <a:p>
@@ -2771,17 +2778,17 @@
             <a:r>
               <a:rPr b="0" lang="en-US" sz="2000" spc="-1" strike="noStrike">
                 <a:solidFill>
-                  <a:schemeClr val="dk1"/>
-                </a:solidFill>
-                <a:latin typeface="Calibri"/>
+                  <a:srgbClr val="000000"/>
+                </a:solidFill>
+                <a:latin typeface="Arial"/>
               </a:rPr>
               <a:t>Fifth Outline Level</a:t>
             </a:r>
             <a:endParaRPr b="0" lang="en-US" sz="2000" spc="-1" strike="noStrike">
               <a:solidFill>
-                <a:schemeClr val="dk1"/>
-              </a:solidFill>
-              <a:latin typeface="Calibri"/>
+                <a:srgbClr val="000000"/>
+              </a:solidFill>
+              <a:latin typeface="Arial"/>
             </a:endParaRPr>
           </a:p>
           <a:p>
@@ -2799,17 +2806,17 @@
             <a:r>
               <a:rPr b="0" lang="en-US" sz="2000" spc="-1" strike="noStrike">
                 <a:solidFill>
-                  <a:schemeClr val="dk1"/>
-                </a:solidFill>
-                <a:latin typeface="Calibri"/>
+                  <a:srgbClr val="000000"/>
+                </a:solidFill>
+                <a:latin typeface="Arial"/>
               </a:rPr>
               <a:t>Sixth Outline Level</a:t>
             </a:r>
             <a:endParaRPr b="0" lang="en-US" sz="2000" spc="-1" strike="noStrike">
               <a:solidFill>
-                <a:schemeClr val="dk1"/>
-              </a:solidFill>
-              <a:latin typeface="Calibri"/>
+                <a:srgbClr val="000000"/>
+              </a:solidFill>
+              <a:latin typeface="Arial"/>
             </a:endParaRPr>
           </a:p>
           <a:p>
@@ -2827,17 +2834,17 @@
             <a:r>
               <a:rPr b="0" lang="en-US" sz="2000" spc="-1" strike="noStrike">
                 <a:solidFill>
-                  <a:schemeClr val="dk1"/>
-                </a:solidFill>
-                <a:latin typeface="Calibri"/>
+                  <a:srgbClr val="000000"/>
+                </a:solidFill>
+                <a:latin typeface="Arial"/>
               </a:rPr>
               <a:t>Seventh Outline Level</a:t>
             </a:r>
             <a:endParaRPr b="0" lang="en-US" sz="2000" spc="-1" strike="noStrike">
               <a:solidFill>
-                <a:schemeClr val="dk1"/>
-              </a:solidFill>
-              <a:latin typeface="Calibri"/>
+                <a:srgbClr val="000000"/>
+              </a:solidFill>
+              <a:latin typeface="Arial"/>
             </a:endParaRPr>
           </a:p>
         </p:txBody>
@@ -2884,7 +2891,7 @@
         <p:spPr>
           <a:xfrm>
             <a:off x="9795960" y="365760"/>
-            <a:ext cx="1828440" cy="228240"/>
+            <a:ext cx="1828080" cy="227880"/>
           </a:xfrm>
           <a:prstGeom prst="rect">
             <a:avLst/>
@@ -3025,7 +3032,7 @@
         <p:spPr>
           <a:xfrm>
             <a:off x="567000" y="1783080"/>
-            <a:ext cx="7040520" cy="1333080"/>
+            <a:ext cx="7315200" cy="1335024"/>
           </a:xfrm>
           <a:prstGeom prst="rect">
             <a:avLst/>
@@ -3050,9 +3057,15 @@
               <a:lnSpc>
                 <a:spcPct val="95000"/>
               </a:lnSpc>
-            </a:pPr>
-            <a:r>
-              <a:rPr b="1" lang="en-US" sz="4600" spc="-100" strike="noStrike" u="sng">
+              <a:spcBef>
+                <a:spcPts val="0"/>
+              </a:spcBef>
+              <a:spcAft>
+                <a:spcPts val="0"/>
+              </a:spcAft>
+            </a:pPr>
+            <a:r>
+              <a:rPr b="1" lang="en-US" sz="4000" spc="-100" strike="noStrike" u="sng">
                 <a:solidFill>
                   <a:srgbClr val="0563c1"/>
                 </a:solidFill>
@@ -3075,9 +3088,15 @@
               <a:lnSpc>
                 <a:spcPct val="95000"/>
               </a:lnSpc>
-            </a:pPr>
-            <a:r>
-              <a:rPr b="1" lang="en-US" sz="4600" spc="-100" strike="noStrike" u="sng">
+              <a:spcBef>
+                <a:spcPts val="0"/>
+              </a:spcBef>
+              <a:spcAft>
+                <a:spcPts val="0"/>
+              </a:spcAft>
+            </a:pPr>
+            <a:r>
+              <a:rPr b="1" lang="en-US" sz="4000" spc="-100" strike="noStrike" u="sng">
                 <a:solidFill>
                   <a:srgbClr val="0563c1"/>
                 </a:solidFill>
@@ -3106,7 +3125,7 @@
         <p:spPr>
           <a:xfrm>
             <a:off x="567000" y="3383280"/>
-            <a:ext cx="6309000" cy="472680"/>
+            <a:ext cx="6308640" cy="472320"/>
           </a:xfrm>
           <a:prstGeom prst="rect">
             <a:avLst/>
@@ -3160,7 +3179,7 @@
         <p:spPr>
           <a:xfrm>
             <a:off x="631080" y="4928760"/>
-            <a:ext cx="292320" cy="292320"/>
+            <a:ext cx="291960" cy="291960"/>
           </a:xfrm>
           <a:prstGeom prst="ellipse">
             <a:avLst/>
@@ -3214,7 +3233,7 @@
         <p:spPr>
           <a:xfrm>
             <a:off x="2560320" y="4937760"/>
-            <a:ext cx="273960" cy="273960"/>
+            <a:ext cx="273600" cy="273600"/>
           </a:xfrm>
           <a:prstGeom prst="rect">
             <a:avLst/>
@@ -3268,7 +3287,7 @@
         <p:spPr>
           <a:xfrm>
             <a:off x="4480560" y="4937760"/>
-            <a:ext cx="273960" cy="273960"/>
+            <a:ext cx="273600" cy="273600"/>
           </a:xfrm>
           <a:prstGeom prst="rect">
             <a:avLst/>
@@ -3322,7 +3341,7 @@
         <p:spPr>
           <a:xfrm>
             <a:off x="6400800" y="4937760"/>
-            <a:ext cx="273960" cy="273960"/>
+            <a:ext cx="273600" cy="273600"/>
           </a:xfrm>
           <a:prstGeom prst="rect">
             <a:avLst/>
@@ -3523,7 +3542,7 @@
         <p:spPr>
           <a:xfrm>
             <a:off x="1188720" y="4782240"/>
-            <a:ext cx="1096920" cy="122040"/>
+            <a:ext cx="1096560" cy="121680"/>
           </a:xfrm>
           <a:prstGeom prst="rect">
             <a:avLst/>
@@ -3577,7 +3596,7 @@
         <p:spPr>
           <a:xfrm>
             <a:off x="3108960" y="4782240"/>
-            <a:ext cx="1096920" cy="122040"/>
+            <a:ext cx="1096560" cy="121680"/>
           </a:xfrm>
           <a:prstGeom prst="rect">
             <a:avLst/>
@@ -3631,7 +3650,7 @@
         <p:spPr>
           <a:xfrm>
             <a:off x="5029200" y="4782240"/>
-            <a:ext cx="1096920" cy="122040"/>
+            <a:ext cx="1096560" cy="121680"/>
           </a:xfrm>
           <a:prstGeom prst="rect">
             <a:avLst/>
@@ -3685,7 +3704,7 @@
         <p:spPr>
           <a:xfrm>
             <a:off x="137160" y="5330880"/>
-            <a:ext cx="1279800" cy="129960"/>
+            <a:ext cx="1279440" cy="129600"/>
           </a:xfrm>
           <a:prstGeom prst="rect">
             <a:avLst/>
@@ -3712,7 +3731,7 @@
               </a:lnSpc>
             </a:pPr>
             <a:r>
-              <a:rPr b="0" lang="en-US" sz="850" spc="128" strike="noStrike">
+              <a:rPr b="0" lang="en-US" sz="850" spc="126" strike="noStrike">
                 <a:solidFill>
                   <a:srgbClr val="a6abb5"/>
                 </a:solidFill>
@@ -3739,7 +3758,7 @@
         <p:spPr>
           <a:xfrm>
             <a:off x="2057400" y="5330880"/>
-            <a:ext cx="1279800" cy="129960"/>
+            <a:ext cx="1279440" cy="129600"/>
           </a:xfrm>
           <a:prstGeom prst="rect">
             <a:avLst/>
@@ -3766,7 +3785,7 @@
               </a:lnSpc>
             </a:pPr>
             <a:r>
-              <a:rPr b="0" lang="en-US" sz="850" spc="128" strike="noStrike">
+              <a:rPr b="0" lang="en-US" sz="850" spc="126" strike="noStrike">
                 <a:solidFill>
                   <a:srgbClr val="a6abb5"/>
                 </a:solidFill>
@@ -3793,7 +3812,7 @@
         <p:spPr>
           <a:xfrm>
             <a:off x="3977640" y="5330880"/>
-            <a:ext cx="1279800" cy="129960"/>
+            <a:ext cx="1279440" cy="129600"/>
           </a:xfrm>
           <a:prstGeom prst="rect">
             <a:avLst/>
@@ -3820,7 +3839,7 @@
               </a:lnSpc>
             </a:pPr>
             <a:r>
-              <a:rPr b="0" lang="en-US" sz="850" spc="128" strike="noStrike">
+              <a:rPr b="0" lang="en-US" sz="850" spc="126" strike="noStrike">
                 <a:solidFill>
                   <a:srgbClr val="a6abb5"/>
                 </a:solidFill>
@@ -3847,7 +3866,7 @@
         <p:spPr>
           <a:xfrm>
             <a:off x="5897880" y="5330880"/>
-            <a:ext cx="1279800" cy="129960"/>
+            <a:ext cx="1279440" cy="129600"/>
           </a:xfrm>
           <a:prstGeom prst="rect">
             <a:avLst/>
@@ -3874,7 +3893,7 @@
               </a:lnSpc>
             </a:pPr>
             <a:r>
-              <a:rPr b="0" lang="en-US" sz="850" spc="128" strike="noStrike">
+              <a:rPr b="0" lang="en-US" sz="850" spc="126" strike="noStrike">
                 <a:solidFill>
                   <a:srgbClr val="a6abb5"/>
                 </a:solidFill>
@@ -3901,7 +3920,7 @@
         <p:spPr>
           <a:xfrm>
             <a:off x="5440680" y="5550480"/>
-            <a:ext cx="2194200" cy="122040"/>
+            <a:ext cx="2193840" cy="121680"/>
           </a:xfrm>
           <a:prstGeom prst="rect">
             <a:avLst/>
@@ -3955,7 +3974,7 @@
         <p:spPr>
           <a:xfrm>
             <a:off x="8001000" y="1371600"/>
-            <a:ext cx="3620520" cy="3428640"/>
+            <a:ext cx="3620160" cy="3428280"/>
           </a:xfrm>
           <a:prstGeom prst="rect">
             <a:avLst/>
@@ -4011,7 +4030,7 @@
         <p:spPr>
           <a:xfrm>
             <a:off x="8001000" y="1371600"/>
-            <a:ext cx="40680" cy="3428640"/>
+            <a:ext cx="40320" cy="3428280"/>
           </a:xfrm>
           <a:prstGeom prst="rect">
             <a:avLst/>
@@ -4064,7 +4083,7 @@
         <p:spPr>
           <a:xfrm>
             <a:off x="8275320" y="1627560"/>
-            <a:ext cx="3163320" cy="137880"/>
+            <a:ext cx="3162960" cy="137520"/>
           </a:xfrm>
           <a:prstGeom prst="rect">
             <a:avLst/>
@@ -4118,7 +4137,7 @@
         <p:spPr>
           <a:xfrm>
             <a:off x="8275320" y="1938600"/>
-            <a:ext cx="3163320" cy="739080"/>
+            <a:ext cx="3162960" cy="738720"/>
           </a:xfrm>
           <a:prstGeom prst="rect">
             <a:avLst/>
@@ -4172,7 +4191,7 @@
         <p:spPr>
           <a:xfrm>
             <a:off x="8275320" y="2788920"/>
-            <a:ext cx="3071880" cy="618480"/>
+            <a:ext cx="3071520" cy="618120"/>
           </a:xfrm>
           <a:prstGeom prst="rect">
             <a:avLst/>
@@ -4272,7 +4291,7 @@
         <p:spPr>
           <a:xfrm>
             <a:off x="8275320" y="4114800"/>
-            <a:ext cx="3163320" cy="686520"/>
+            <a:ext cx="3162960" cy="686520"/>
           </a:xfrm>
           <a:prstGeom prst="rect">
             <a:avLst/>
@@ -4387,7 +4406,7 @@
         <p:spPr>
           <a:xfrm>
             <a:off x="10527480" y="6291000"/>
-            <a:ext cx="1096920" cy="273960"/>
+            <a:ext cx="1096560" cy="273600"/>
           </a:xfrm>
           <a:prstGeom prst="rect">
             <a:avLst/>
@@ -4432,7 +4451,7 @@
         <p:spPr>
           <a:xfrm>
             <a:off x="1383120" y="6510600"/>
-            <a:ext cx="1933560" cy="104040"/>
+            <a:ext cx="1933200" cy="103680"/>
           </a:xfrm>
           <a:prstGeom prst="rect">
             <a:avLst/>
@@ -4535,7 +4554,7 @@
         <p:spPr>
           <a:xfrm>
             <a:off x="1524600" y="320040"/>
-            <a:ext cx="3350880" cy="333360"/>
+            <a:ext cx="3350520" cy="333360"/>
           </a:xfrm>
           <a:prstGeom prst="rect">
             <a:avLst/>
@@ -4589,7 +4608,7 @@
         <p:spPr>
           <a:xfrm>
             <a:off x="11114280" y="320040"/>
-            <a:ext cx="447840" cy="303120"/>
+            <a:ext cx="447480" cy="303120"/>
           </a:xfrm>
           <a:prstGeom prst="rect">
             <a:avLst/>
@@ -4643,7 +4662,7 @@
         <p:spPr>
           <a:xfrm>
             <a:off x="685800" y="713160"/>
-            <a:ext cx="10972440" cy="13320"/>
+            <a:ext cx="10972080" cy="12960"/>
           </a:xfrm>
           <a:prstGeom prst="rect">
             <a:avLst/>
@@ -4696,7 +4715,7 @@
         <p:spPr>
           <a:xfrm>
             <a:off x="685800" y="822960"/>
-            <a:ext cx="10972440" cy="13320"/>
+            <a:ext cx="10972080" cy="12960"/>
           </a:xfrm>
           <a:prstGeom prst="rect">
             <a:avLst/>
@@ -4749,7 +4768,7 @@
         <p:spPr>
           <a:xfrm>
             <a:off x="3396960" y="1965960"/>
-            <a:ext cx="5550120" cy="546840"/>
+            <a:ext cx="5549760" cy="546840"/>
           </a:xfrm>
           <a:prstGeom prst="rect">
             <a:avLst/>
@@ -4805,7 +4824,7 @@
         <p:spPr>
           <a:xfrm>
             <a:off x="685800" y="2743200"/>
-            <a:ext cx="10515240" cy="577080"/>
+            <a:ext cx="10514880" cy="577080"/>
           </a:xfrm>
           <a:prstGeom prst="rect">
             <a:avLst/>
@@ -4859,7 +4878,7 @@
         <p:spPr>
           <a:xfrm>
             <a:off x="4527000" y="6400800"/>
-            <a:ext cx="3198600" cy="242280"/>
+            <a:ext cx="3198240" cy="242280"/>
           </a:xfrm>
           <a:prstGeom prst="rect">
             <a:avLst/>
@@ -4913,7 +4932,7 @@
         <p:spPr>
           <a:xfrm>
             <a:off x="1113480" y="6510600"/>
-            <a:ext cx="2472840" cy="104040"/>
+            <a:ext cx="2472480" cy="103680"/>
           </a:xfrm>
           <a:prstGeom prst="rect">
             <a:avLst/>
@@ -5009,7 +5028,7 @@
         <p:spPr>
           <a:xfrm>
             <a:off x="567000" y="164520"/>
-            <a:ext cx="3200040" cy="129960"/>
+            <a:ext cx="3199680" cy="129600"/>
           </a:xfrm>
           <a:prstGeom prst="rect">
             <a:avLst/>
@@ -5063,7 +5082,7 @@
         <p:spPr>
           <a:xfrm>
             <a:off x="10716840" y="164520"/>
-            <a:ext cx="685440" cy="129960"/>
+            <a:ext cx="685080" cy="129600"/>
           </a:xfrm>
           <a:prstGeom prst="rect">
             <a:avLst/>
@@ -5117,7 +5136,7 @@
         <p:spPr>
           <a:xfrm>
             <a:off x="567000" y="640080"/>
-            <a:ext cx="10515240" cy="358560"/>
+            <a:ext cx="10514880" cy="358200"/>
           </a:xfrm>
           <a:prstGeom prst="rect">
             <a:avLst/>
@@ -5171,7 +5190,7 @@
         <p:spPr>
           <a:xfrm>
             <a:off x="567000" y="1078920"/>
-            <a:ext cx="10515240" cy="328680"/>
+            <a:ext cx="10514880" cy="328680"/>
           </a:xfrm>
           <a:prstGeom prst="rect">
             <a:avLst/>
@@ -5225,7 +5244,7 @@
         <p:spPr>
           <a:xfrm>
             <a:off x="567000" y="457200"/>
-            <a:ext cx="10835280" cy="10440"/>
+            <a:ext cx="10834920" cy="10080"/>
           </a:xfrm>
           <a:prstGeom prst="rect">
             <a:avLst/>
@@ -5281,7 +5300,7 @@
         <p:spPr>
           <a:xfrm>
             <a:off x="567000" y="1572840"/>
-            <a:ext cx="5257440" cy="1416960"/>
+            <a:ext cx="5257080" cy="1416600"/>
           </a:xfrm>
           <a:prstGeom prst="roundRect">
             <a:avLst>
@@ -5339,7 +5358,7 @@
         <p:spPr>
           <a:xfrm>
             <a:off x="567000" y="1572840"/>
-            <a:ext cx="50040" cy="1416960"/>
+            <a:ext cx="49680" cy="1416600"/>
           </a:xfrm>
           <a:prstGeom prst="rect">
             <a:avLst/>
@@ -5395,7 +5414,7 @@
         <p:spPr>
           <a:xfrm>
             <a:off x="713160" y="1700640"/>
-            <a:ext cx="4983120" cy="190800"/>
+            <a:ext cx="4982760" cy="190440"/>
           </a:xfrm>
           <a:prstGeom prst="rect">
             <a:avLst/>
@@ -5449,7 +5468,7 @@
         <p:spPr>
           <a:xfrm>
             <a:off x="713160" y="2011680"/>
-            <a:ext cx="4983120" cy="293400"/>
+            <a:ext cx="4982760" cy="293040"/>
           </a:xfrm>
           <a:prstGeom prst="rect">
             <a:avLst/>
@@ -5503,7 +5522,7 @@
         <p:spPr>
           <a:xfrm>
             <a:off x="713160" y="2770560"/>
-            <a:ext cx="4983120" cy="128160"/>
+            <a:ext cx="4982760" cy="127800"/>
           </a:xfrm>
           <a:prstGeom prst="rect">
             <a:avLst/>
@@ -5559,7 +5578,7 @@
         <p:spPr>
           <a:xfrm>
             <a:off x="6144840" y="1572840"/>
-            <a:ext cx="5257440" cy="1416960"/>
+            <a:ext cx="5257080" cy="1416600"/>
           </a:xfrm>
           <a:prstGeom prst="roundRect">
             <a:avLst>
@@ -5617,7 +5636,7 @@
         <p:spPr>
           <a:xfrm>
             <a:off x="6144840" y="1572840"/>
-            <a:ext cx="50040" cy="1416960"/>
+            <a:ext cx="49680" cy="1416600"/>
           </a:xfrm>
           <a:prstGeom prst="rect">
             <a:avLst/>
@@ -5673,7 +5692,7 @@
         <p:spPr>
           <a:xfrm>
             <a:off x="6291000" y="1700640"/>
-            <a:ext cx="4983120" cy="190800"/>
+            <a:ext cx="4982760" cy="190440"/>
           </a:xfrm>
           <a:prstGeom prst="rect">
             <a:avLst/>
@@ -5727,7 +5746,7 @@
         <p:spPr>
           <a:xfrm>
             <a:off x="6291000" y="2011680"/>
-            <a:ext cx="4983120" cy="439920"/>
+            <a:ext cx="4982760" cy="439560"/>
           </a:xfrm>
           <a:prstGeom prst="rect">
             <a:avLst/>
@@ -5781,7 +5800,7 @@
         <p:spPr>
           <a:xfrm>
             <a:off x="6291000" y="2770560"/>
-            <a:ext cx="4983120" cy="128160"/>
+            <a:ext cx="4982760" cy="127800"/>
           </a:xfrm>
           <a:prstGeom prst="rect">
             <a:avLst/>
@@ -5837,7 +5856,7 @@
         <p:spPr>
           <a:xfrm>
             <a:off x="567000" y="3218760"/>
-            <a:ext cx="5257440" cy="1416960"/>
+            <a:ext cx="5257080" cy="1416600"/>
           </a:xfrm>
           <a:prstGeom prst="roundRect">
             <a:avLst>
@@ -5895,7 +5914,7 @@
         <p:spPr>
           <a:xfrm>
             <a:off x="567000" y="3218760"/>
-            <a:ext cx="50040" cy="1416960"/>
+            <a:ext cx="49680" cy="1416600"/>
           </a:xfrm>
           <a:prstGeom prst="rect">
             <a:avLst/>
@@ -5951,7 +5970,7 @@
         <p:spPr>
           <a:xfrm>
             <a:off x="713160" y="3346560"/>
-            <a:ext cx="4983120" cy="190800"/>
+            <a:ext cx="4982760" cy="190440"/>
           </a:xfrm>
           <a:prstGeom prst="rect">
             <a:avLst/>
@@ -6005,7 +6024,7 @@
         <p:spPr>
           <a:xfrm>
             <a:off x="713160" y="3657600"/>
-            <a:ext cx="4983120" cy="293400"/>
+            <a:ext cx="4982760" cy="293040"/>
           </a:xfrm>
           <a:prstGeom prst="rect">
             <a:avLst/>
@@ -6059,7 +6078,7 @@
         <p:spPr>
           <a:xfrm>
             <a:off x="713160" y="4416480"/>
-            <a:ext cx="4983120" cy="128160"/>
+            <a:ext cx="4982760" cy="127800"/>
           </a:xfrm>
           <a:prstGeom prst="rect">
             <a:avLst/>
@@ -6115,7 +6134,7 @@
         <p:spPr>
           <a:xfrm>
             <a:off x="6144840" y="3218760"/>
-            <a:ext cx="5257440" cy="1416960"/>
+            <a:ext cx="5257080" cy="1416600"/>
           </a:xfrm>
           <a:prstGeom prst="roundRect">
             <a:avLst>
@@ -6173,7 +6192,7 @@
         <p:spPr>
           <a:xfrm>
             <a:off x="6144840" y="3218760"/>
-            <a:ext cx="50040" cy="1416960"/>
+            <a:ext cx="49680" cy="1416600"/>
           </a:xfrm>
           <a:prstGeom prst="rect">
             <a:avLst/>
@@ -6229,7 +6248,7 @@
         <p:spPr>
           <a:xfrm>
             <a:off x="6291000" y="3346560"/>
-            <a:ext cx="4983120" cy="190800"/>
+            <a:ext cx="4982760" cy="190440"/>
           </a:xfrm>
           <a:prstGeom prst="rect">
             <a:avLst/>
@@ -6283,7 +6302,7 @@
         <p:spPr>
           <a:xfrm>
             <a:off x="6291000" y="3657600"/>
-            <a:ext cx="4983120" cy="439920"/>
+            <a:ext cx="4982760" cy="439560"/>
           </a:xfrm>
           <a:prstGeom prst="rect">
             <a:avLst/>
@@ -6337,7 +6356,7 @@
         <p:spPr>
           <a:xfrm>
             <a:off x="6291000" y="4416480"/>
-            <a:ext cx="4983120" cy="128160"/>
+            <a:ext cx="4982760" cy="127800"/>
           </a:xfrm>
           <a:prstGeom prst="rect">
             <a:avLst/>
@@ -6393,7 +6412,7 @@
         <p:spPr>
           <a:xfrm>
             <a:off x="567000" y="4956120"/>
-            <a:ext cx="10835280" cy="895680"/>
+            <a:ext cx="10834920" cy="895320"/>
           </a:xfrm>
           <a:prstGeom prst="roundRect">
             <a:avLst>
@@ -6451,7 +6470,7 @@
         <p:spPr>
           <a:xfrm>
             <a:off x="804600" y="5139000"/>
-            <a:ext cx="1874160" cy="131400"/>
+            <a:ext cx="1873800" cy="131040"/>
           </a:xfrm>
           <a:prstGeom prst="rect">
             <a:avLst/>
@@ -6505,7 +6524,7 @@
         <p:spPr>
           <a:xfrm>
             <a:off x="2670120" y="5083920"/>
-            <a:ext cx="8366400" cy="470520"/>
+            <a:ext cx="8366040" cy="470520"/>
           </a:xfrm>
           <a:prstGeom prst="rect">
             <a:avLst/>
@@ -6559,7 +6578,7 @@
         <p:spPr>
           <a:xfrm>
             <a:off x="8458200" y="5596200"/>
-            <a:ext cx="2578320" cy="128160"/>
+            <a:ext cx="2577960" cy="127800"/>
           </a:xfrm>
           <a:prstGeom prst="rect">
             <a:avLst/>
@@ -6615,7 +6634,7 @@
         <p:spPr>
           <a:xfrm>
             <a:off x="567000" y="6236280"/>
-            <a:ext cx="10835280" cy="10440"/>
+            <a:ext cx="10834920" cy="10080"/>
           </a:xfrm>
           <a:prstGeom prst="rect">
             <a:avLst/>
@@ -6671,7 +6690,7 @@
         <p:spPr>
           <a:xfrm>
             <a:off x="4069080" y="6355080"/>
-            <a:ext cx="3657240" cy="110160"/>
+            <a:ext cx="3656880" cy="109800"/>
           </a:xfrm>
           <a:prstGeom prst="rect">
             <a:avLst/>
@@ -6725,7 +6744,7 @@
         <p:spPr>
           <a:xfrm>
             <a:off x="11045880" y="6355080"/>
-            <a:ext cx="273960" cy="129960"/>
+            <a:ext cx="273600" cy="129600"/>
           </a:xfrm>
           <a:prstGeom prst="rect">
             <a:avLst/>
@@ -6779,7 +6798,7 @@
         <p:spPr>
           <a:xfrm>
             <a:off x="1202400" y="6510600"/>
-            <a:ext cx="2294640" cy="104040"/>
+            <a:ext cx="2294280" cy="103680"/>
           </a:xfrm>
           <a:prstGeom prst="rect">
             <a:avLst/>
@@ -6875,7 +6894,7 @@
         <p:spPr>
           <a:xfrm>
             <a:off x="567000" y="164520"/>
-            <a:ext cx="3200040" cy="129960"/>
+            <a:ext cx="3199680" cy="129600"/>
           </a:xfrm>
           <a:prstGeom prst="rect">
             <a:avLst/>
@@ -6929,7 +6948,7 @@
         <p:spPr>
           <a:xfrm>
             <a:off x="10716840" y="164520"/>
-            <a:ext cx="685440" cy="129960"/>
+            <a:ext cx="685080" cy="129600"/>
           </a:xfrm>
           <a:prstGeom prst="rect">
             <a:avLst/>
@@ -6983,7 +7002,7 @@
         <p:spPr>
           <a:xfrm>
             <a:off x="567000" y="640080"/>
-            <a:ext cx="10515240" cy="358560"/>
+            <a:ext cx="10514880" cy="358200"/>
           </a:xfrm>
           <a:prstGeom prst="rect">
             <a:avLst/>
@@ -7037,7 +7056,7 @@
         <p:spPr>
           <a:xfrm>
             <a:off x="567000" y="1078920"/>
-            <a:ext cx="10515240" cy="171000"/>
+            <a:ext cx="10514880" cy="170640"/>
           </a:xfrm>
           <a:prstGeom prst="rect">
             <a:avLst/>
@@ -7091,7 +7110,7 @@
         <p:spPr>
           <a:xfrm>
             <a:off x="567000" y="457200"/>
-            <a:ext cx="10835280" cy="10440"/>
+            <a:ext cx="10834920" cy="10080"/>
           </a:xfrm>
           <a:prstGeom prst="rect">
             <a:avLst/>
@@ -7147,7 +7166,7 @@
         <p:spPr>
           <a:xfrm>
             <a:off x="567000" y="1572840"/>
-            <a:ext cx="2541600" cy="1078560"/>
+            <a:ext cx="2541240" cy="1078200"/>
           </a:xfrm>
           <a:prstGeom prst="roundRect">
             <a:avLst>
@@ -7205,7 +7224,7 @@
         <p:spPr>
           <a:xfrm>
             <a:off x="676800" y="1664280"/>
-            <a:ext cx="383760" cy="153000"/>
+            <a:ext cx="383400" cy="152640"/>
           </a:xfrm>
           <a:prstGeom prst="rect">
             <a:avLst/>
@@ -7259,7 +7278,7 @@
         <p:spPr>
           <a:xfrm>
             <a:off x="1097280" y="1664280"/>
-            <a:ext cx="1883160" cy="178920"/>
+            <a:ext cx="1882800" cy="178560"/>
           </a:xfrm>
           <a:prstGeom prst="rect">
             <a:avLst/>
@@ -7313,7 +7332,7 @@
         <p:spPr>
           <a:xfrm>
             <a:off x="676800" y="2002680"/>
-            <a:ext cx="2322360" cy="275400"/>
+            <a:ext cx="2322000" cy="275040"/>
           </a:xfrm>
           <a:prstGeom prst="rect">
             <a:avLst/>
@@ -7367,7 +7386,7 @@
         <p:spPr>
           <a:xfrm>
             <a:off x="3319200" y="1572840"/>
-            <a:ext cx="2541600" cy="1078560"/>
+            <a:ext cx="2541240" cy="1078200"/>
           </a:xfrm>
           <a:prstGeom prst="roundRect">
             <a:avLst>
@@ -7425,7 +7444,7 @@
         <p:spPr>
           <a:xfrm>
             <a:off x="3429000" y="1664280"/>
-            <a:ext cx="383760" cy="153000"/>
+            <a:ext cx="383400" cy="152640"/>
           </a:xfrm>
           <a:prstGeom prst="rect">
             <a:avLst/>
@@ -7479,7 +7498,7 @@
         <p:spPr>
           <a:xfrm>
             <a:off x="3849480" y="1664280"/>
-            <a:ext cx="1883160" cy="178920"/>
+            <a:ext cx="1882800" cy="178560"/>
           </a:xfrm>
           <a:prstGeom prst="rect">
             <a:avLst/>
@@ -7533,7 +7552,7 @@
         <p:spPr>
           <a:xfrm>
             <a:off x="3429000" y="2002680"/>
-            <a:ext cx="2322360" cy="412920"/>
+            <a:ext cx="2322000" cy="412560"/>
           </a:xfrm>
           <a:prstGeom prst="rect">
             <a:avLst/>
@@ -7587,7 +7606,7 @@
         <p:spPr>
           <a:xfrm>
             <a:off x="6071760" y="1572840"/>
-            <a:ext cx="2541600" cy="1078560"/>
+            <a:ext cx="2541240" cy="1078200"/>
           </a:xfrm>
           <a:prstGeom prst="roundRect">
             <a:avLst>
@@ -7645,7 +7664,7 @@
         <p:spPr>
           <a:xfrm>
             <a:off x="6181200" y="1664280"/>
-            <a:ext cx="383760" cy="153000"/>
+            <a:ext cx="383400" cy="152640"/>
           </a:xfrm>
           <a:prstGeom prst="rect">
             <a:avLst/>
@@ -7699,7 +7718,7 @@
         <p:spPr>
           <a:xfrm>
             <a:off x="6602040" y="1664280"/>
-            <a:ext cx="1883160" cy="356760"/>
+            <a:ext cx="1882800" cy="356760"/>
           </a:xfrm>
           <a:prstGeom prst="rect">
             <a:avLst/>
@@ -7753,7 +7772,7 @@
         <p:spPr>
           <a:xfrm>
             <a:off x="6181200" y="2002680"/>
-            <a:ext cx="2322360" cy="412920"/>
+            <a:ext cx="2322000" cy="412560"/>
           </a:xfrm>
           <a:prstGeom prst="rect">
             <a:avLst/>
@@ -7807,7 +7826,7 @@
         <p:spPr>
           <a:xfrm>
             <a:off x="8823960" y="1572840"/>
-            <a:ext cx="2541600" cy="1078560"/>
+            <a:ext cx="2541240" cy="1078200"/>
           </a:xfrm>
           <a:prstGeom prst="roundRect">
             <a:avLst>
@@ -7865,7 +7884,7 @@
         <p:spPr>
           <a:xfrm>
             <a:off x="8933760" y="1664280"/>
-            <a:ext cx="383760" cy="153000"/>
+            <a:ext cx="383400" cy="152640"/>
           </a:xfrm>
           <a:prstGeom prst="rect">
             <a:avLst/>
@@ -7919,7 +7938,7 @@
         <p:spPr>
           <a:xfrm>
             <a:off x="9354240" y="1664280"/>
-            <a:ext cx="1883160" cy="178920"/>
+            <a:ext cx="1882800" cy="178560"/>
           </a:xfrm>
           <a:prstGeom prst="rect">
             <a:avLst/>
@@ -7973,7 +7992,7 @@
         <p:spPr>
           <a:xfrm>
             <a:off x="8933760" y="2002680"/>
-            <a:ext cx="2322360" cy="412920"/>
+            <a:ext cx="2322000" cy="412560"/>
           </a:xfrm>
           <a:prstGeom prst="rect">
             <a:avLst/>
@@ -8027,7 +8046,7 @@
         <p:spPr>
           <a:xfrm>
             <a:off x="567000" y="2907720"/>
-            <a:ext cx="5348880" cy="2331360"/>
+            <a:ext cx="5348520" cy="2331000"/>
           </a:xfrm>
           <a:prstGeom prst="roundRect">
             <a:avLst>
@@ -8085,7 +8104,7 @@
         <p:spPr>
           <a:xfrm>
             <a:off x="768240" y="3090600"/>
-            <a:ext cx="4937400" cy="134280"/>
+            <a:ext cx="4937040" cy="133920"/>
           </a:xfrm>
           <a:prstGeom prst="rect">
             <a:avLst/>
@@ -8139,7 +8158,7 @@
         <p:spPr>
           <a:xfrm>
             <a:off x="768240" y="3401640"/>
-            <a:ext cx="4864320" cy="1088280"/>
+            <a:ext cx="4863960" cy="1088280"/>
           </a:xfrm>
           <a:prstGeom prst="rect">
             <a:avLst/>
@@ -8229,7 +8248,7 @@
         <p:spPr>
           <a:xfrm>
             <a:off x="768240" y="4754880"/>
-            <a:ext cx="2422800" cy="134280"/>
+            <a:ext cx="2422440" cy="133920"/>
           </a:xfrm>
           <a:prstGeom prst="rect">
             <a:avLst/>
@@ -8285,7 +8304,7 @@
         <p:spPr>
           <a:xfrm>
             <a:off x="3127320" y="4754880"/>
-            <a:ext cx="2422800" cy="134280"/>
+            <a:ext cx="2422440" cy="133920"/>
           </a:xfrm>
           <a:prstGeom prst="rect">
             <a:avLst/>
@@ -8341,7 +8360,7 @@
         <p:spPr>
           <a:xfrm>
             <a:off x="6144840" y="2907720"/>
-            <a:ext cx="5257440" cy="2331360"/>
+            <a:ext cx="5257080" cy="2331000"/>
           </a:xfrm>
           <a:prstGeom prst="roundRect">
             <a:avLst>
@@ -8399,7 +8418,7 @@
         <p:spPr>
           <a:xfrm>
             <a:off x="6346080" y="3090600"/>
-            <a:ext cx="4754520" cy="134280"/>
+            <a:ext cx="4754160" cy="133920"/>
           </a:xfrm>
           <a:prstGeom prst="rect">
             <a:avLst/>
@@ -8453,7 +8472,7 @@
         <p:spPr>
           <a:xfrm>
             <a:off x="6346080" y="3401640"/>
-            <a:ext cx="4717800" cy="1033560"/>
+            <a:ext cx="4717440" cy="1033200"/>
           </a:xfrm>
           <a:prstGeom prst="rect">
             <a:avLst/>
@@ -8546,7 +8565,7 @@
         <p:spPr>
           <a:xfrm>
             <a:off x="6346080" y="4754880"/>
-            <a:ext cx="4388760" cy="134280"/>
+            <a:ext cx="4388400" cy="133920"/>
           </a:xfrm>
           <a:prstGeom prst="rect">
             <a:avLst/>
@@ -8602,7 +8621,7 @@
         <p:spPr>
           <a:xfrm>
             <a:off x="567000" y="5449680"/>
-            <a:ext cx="10835280" cy="529920"/>
+            <a:ext cx="10834920" cy="529560"/>
           </a:xfrm>
           <a:prstGeom prst="roundRect">
             <a:avLst>
@@ -8660,7 +8679,7 @@
         <p:spPr>
           <a:xfrm>
             <a:off x="768240" y="5577840"/>
-            <a:ext cx="10378080" cy="298440"/>
+            <a:ext cx="10377720" cy="298440"/>
           </a:xfrm>
           <a:prstGeom prst="rect">
             <a:avLst/>
@@ -8713,8 +8732,8 @@
         </p:nvSpPr>
         <p:spPr>
           <a:xfrm>
-            <a:off x="868680" y="6510600"/>
-            <a:ext cx="2962080" cy="104040"/>
+            <a:off x="785520" y="6510600"/>
+            <a:ext cx="3128400" cy="103680"/>
           </a:xfrm>
           <a:prstGeom prst="rect">
             <a:avLst/>
@@ -8832,7 +8851,7 @@
         <p:spPr>
           <a:xfrm>
             <a:off x="567000" y="164520"/>
-            <a:ext cx="2194200" cy="164160"/>
+            <a:ext cx="2193840" cy="163800"/>
           </a:xfrm>
           <a:prstGeom prst="rect">
             <a:avLst/>
@@ -8889,7 +8908,7 @@
         <p:spPr>
           <a:xfrm>
             <a:off x="10927080" y="164520"/>
-            <a:ext cx="639720" cy="164160"/>
+            <a:ext cx="639360" cy="163800"/>
           </a:xfrm>
           <a:prstGeom prst="rect">
             <a:avLst/>
@@ -8946,7 +8965,7 @@
         <p:spPr>
           <a:xfrm>
             <a:off x="567000" y="658440"/>
-            <a:ext cx="10972440" cy="383760"/>
+            <a:ext cx="10972080" cy="383400"/>
           </a:xfrm>
           <a:prstGeom prst="rect">
             <a:avLst/>
@@ -9005,7 +9024,7 @@
         <p:spPr>
           <a:xfrm>
             <a:off x="567000" y="1115640"/>
-            <a:ext cx="10972440" cy="347040"/>
+            <a:ext cx="10972080" cy="346680"/>
           </a:xfrm>
           <a:prstGeom prst="rect">
             <a:avLst/>
@@ -9062,7 +9081,7 @@
         <p:spPr>
           <a:xfrm>
             <a:off x="594360" y="1591200"/>
-            <a:ext cx="1188360" cy="164160"/>
+            <a:ext cx="1188000" cy="163800"/>
           </a:xfrm>
           <a:prstGeom prst="rect">
             <a:avLst/>
@@ -9119,7 +9138,7 @@
         <p:spPr>
           <a:xfrm>
             <a:off x="1965960" y="1517760"/>
-            <a:ext cx="2148480" cy="347040"/>
+            <a:ext cx="2148120" cy="346680"/>
           </a:xfrm>
           <a:prstGeom prst="roundRect">
             <a:avLst>
@@ -9171,7 +9190,7 @@
         <p:spPr>
           <a:xfrm>
             <a:off x="2039040" y="1609200"/>
-            <a:ext cx="2002320" cy="127800"/>
+            <a:ext cx="2001960" cy="127440"/>
           </a:xfrm>
           <a:prstGeom prst="rect">
             <a:avLst/>
@@ -9228,7 +9247,7 @@
         <p:spPr>
           <a:xfrm>
             <a:off x="4233600" y="1517760"/>
-            <a:ext cx="1508400" cy="347040"/>
+            <a:ext cx="1508040" cy="346680"/>
           </a:xfrm>
           <a:prstGeom prst="roundRect">
             <a:avLst>
@@ -9280,7 +9299,7 @@
         <p:spPr>
           <a:xfrm>
             <a:off x="4306680" y="1609200"/>
-            <a:ext cx="1362240" cy="127800"/>
+            <a:ext cx="1361880" cy="127440"/>
           </a:xfrm>
           <a:prstGeom prst="rect">
             <a:avLst/>
@@ -9337,7 +9356,7 @@
         <p:spPr>
           <a:xfrm>
             <a:off x="5861160" y="1517760"/>
-            <a:ext cx="1572480" cy="347040"/>
+            <a:ext cx="1572120" cy="346680"/>
           </a:xfrm>
           <a:prstGeom prst="roundRect">
             <a:avLst>
@@ -9389,7 +9408,7 @@
         <p:spPr>
           <a:xfrm>
             <a:off x="5934600" y="1609200"/>
-            <a:ext cx="1425960" cy="127800"/>
+            <a:ext cx="1425600" cy="127440"/>
           </a:xfrm>
           <a:prstGeom prst="rect">
             <a:avLst/>
@@ -9446,7 +9465,7 @@
         <p:spPr>
           <a:xfrm>
             <a:off x="7552800" y="1517760"/>
-            <a:ext cx="1416960" cy="347040"/>
+            <a:ext cx="1416600" cy="346680"/>
           </a:xfrm>
           <a:prstGeom prst="roundRect">
             <a:avLst>
@@ -9498,7 +9517,7 @@
         <p:spPr>
           <a:xfrm>
             <a:off x="7626240" y="1609200"/>
-            <a:ext cx="1270800" cy="127800"/>
+            <a:ext cx="1270440" cy="127440"/>
           </a:xfrm>
           <a:prstGeom prst="rect">
             <a:avLst/>
@@ -9555,7 +9574,7 @@
         <p:spPr>
           <a:xfrm>
             <a:off x="685800" y="2514600"/>
-            <a:ext cx="1737000" cy="1234080"/>
+            <a:ext cx="1736640" cy="1233720"/>
           </a:xfrm>
           <a:prstGeom prst="roundRect">
             <a:avLst>
@@ -9607,7 +9626,7 @@
         <p:spPr>
           <a:xfrm>
             <a:off x="795600" y="2715840"/>
-            <a:ext cx="1517400" cy="310680"/>
+            <a:ext cx="1517040" cy="310320"/>
           </a:xfrm>
           <a:prstGeom prst="rect">
             <a:avLst/>
@@ -9664,7 +9683,7 @@
         <p:spPr>
           <a:xfrm>
             <a:off x="795600" y="3108960"/>
-            <a:ext cx="1517400" cy="383760"/>
+            <a:ext cx="1517040" cy="383400"/>
           </a:xfrm>
           <a:prstGeom prst="rect">
             <a:avLst/>
@@ -9764,7 +9783,7 @@
         <p:spPr>
           <a:xfrm>
             <a:off x="2880360" y="2514600"/>
-            <a:ext cx="1737000" cy="1234080"/>
+            <a:ext cx="1736640" cy="1233720"/>
           </a:xfrm>
           <a:prstGeom prst="roundRect">
             <a:avLst>
@@ -9816,7 +9835,7 @@
         <p:spPr>
           <a:xfrm>
             <a:off x="2990160" y="2715840"/>
-            <a:ext cx="1517400" cy="310680"/>
+            <a:ext cx="1517040" cy="310320"/>
           </a:xfrm>
           <a:prstGeom prst="rect">
             <a:avLst/>
@@ -9873,7 +9892,7 @@
         <p:spPr>
           <a:xfrm>
             <a:off x="2990160" y="3108960"/>
-            <a:ext cx="1517400" cy="383760"/>
+            <a:ext cx="1517040" cy="383400"/>
           </a:xfrm>
           <a:prstGeom prst="rect">
             <a:avLst/>
@@ -9973,7 +9992,7 @@
         <p:spPr>
           <a:xfrm>
             <a:off x="5166360" y="2514600"/>
-            <a:ext cx="1737000" cy="1234080"/>
+            <a:ext cx="1736640" cy="1233720"/>
           </a:xfrm>
           <a:prstGeom prst="roundRect">
             <a:avLst>
@@ -10025,7 +10044,7 @@
         <p:spPr>
           <a:xfrm>
             <a:off x="5276160" y="2715840"/>
-            <a:ext cx="1517400" cy="310680"/>
+            <a:ext cx="1517040" cy="310320"/>
           </a:xfrm>
           <a:prstGeom prst="rect">
             <a:avLst/>
@@ -10082,7 +10101,7 @@
         <p:spPr>
           <a:xfrm>
             <a:off x="5276160" y="3108960"/>
-            <a:ext cx="1517400" cy="383760"/>
+            <a:ext cx="1517040" cy="383400"/>
           </a:xfrm>
           <a:prstGeom prst="rect">
             <a:avLst/>
@@ -10182,7 +10201,7 @@
         <p:spPr>
           <a:xfrm>
             <a:off x="7452360" y="2514600"/>
-            <a:ext cx="1737000" cy="1234080"/>
+            <a:ext cx="1736640" cy="1233720"/>
           </a:xfrm>
           <a:prstGeom prst="roundRect">
             <a:avLst>
@@ -10234,7 +10253,7 @@
         <p:spPr>
           <a:xfrm>
             <a:off x="7562160" y="2715840"/>
-            <a:ext cx="1517400" cy="310680"/>
+            <a:ext cx="1517040" cy="310320"/>
           </a:xfrm>
           <a:prstGeom prst="rect">
             <a:avLst/>
@@ -10291,7 +10310,7 @@
         <p:spPr>
           <a:xfrm>
             <a:off x="7562160" y="3108960"/>
-            <a:ext cx="1517400" cy="383760"/>
+            <a:ext cx="1517040" cy="383400"/>
           </a:xfrm>
           <a:prstGeom prst="rect">
             <a:avLst/>
@@ -10391,7 +10410,7 @@
         <p:spPr>
           <a:xfrm>
             <a:off x="9646920" y="2514600"/>
-            <a:ext cx="1737000" cy="1234080"/>
+            <a:ext cx="1736640" cy="1233720"/>
           </a:xfrm>
           <a:prstGeom prst="roundRect">
             <a:avLst>
@@ -10443,7 +10462,7 @@
         <p:spPr>
           <a:xfrm>
             <a:off x="9756720" y="2715840"/>
-            <a:ext cx="1517400" cy="310680"/>
+            <a:ext cx="1517040" cy="310320"/>
           </a:xfrm>
           <a:prstGeom prst="rect">
             <a:avLst/>
@@ -10500,7 +10519,7 @@
         <p:spPr>
           <a:xfrm>
             <a:off x="9756720" y="3108960"/>
-            <a:ext cx="1517400" cy="383760"/>
+            <a:ext cx="1517040" cy="383400"/>
           </a:xfrm>
           <a:prstGeom prst="rect">
             <a:avLst/>
@@ -10557,7 +10576,7 @@
         <p:spPr>
           <a:xfrm>
             <a:off x="2423160" y="4316040"/>
-            <a:ext cx="7360560" cy="1115280"/>
+            <a:ext cx="7360200" cy="1114920"/>
           </a:xfrm>
           <a:prstGeom prst="roundRect">
             <a:avLst>
@@ -10609,7 +10628,7 @@
         <p:spPr>
           <a:xfrm>
             <a:off x="2651760" y="4553640"/>
-            <a:ext cx="2285640" cy="420120"/>
+            <a:ext cx="2285280" cy="419760"/>
           </a:xfrm>
           <a:prstGeom prst="rect">
             <a:avLst/>
@@ -10666,7 +10685,7 @@
         <p:spPr>
           <a:xfrm>
             <a:off x="2651760" y="5010840"/>
-            <a:ext cx="5120280" cy="273960"/>
+            <a:ext cx="5119920" cy="273600"/>
           </a:xfrm>
           <a:prstGeom prst="rect">
             <a:avLst/>
@@ -10723,7 +10742,7 @@
         <p:spPr>
           <a:xfrm>
             <a:off x="8028360" y="4645080"/>
-            <a:ext cx="639720" cy="164160"/>
+            <a:ext cx="639360" cy="163800"/>
           </a:xfrm>
           <a:prstGeom prst="rect">
             <a:avLst/>
@@ -10814,7 +10833,7 @@
         <p:spPr>
           <a:xfrm>
             <a:off x="8796600" y="4645080"/>
-            <a:ext cx="639720" cy="164160"/>
+            <a:ext cx="639360" cy="163800"/>
           </a:xfrm>
           <a:prstGeom prst="rect">
             <a:avLst/>
@@ -10862,7 +10881,7 @@
         <p:spPr>
           <a:xfrm>
             <a:off x="749880" y="5760720"/>
-            <a:ext cx="10652400" cy="383760"/>
+            <a:ext cx="10652040" cy="383400"/>
           </a:xfrm>
           <a:prstGeom prst="rect">
             <a:avLst/>
@@ -10923,7 +10942,7 @@
         <p:spPr>
           <a:xfrm>
             <a:off x="11064240" y="6537960"/>
-            <a:ext cx="502560" cy="164160"/>
+            <a:ext cx="502200" cy="163800"/>
           </a:xfrm>
           <a:prstGeom prst="rect">
             <a:avLst/>
@@ -10943,6 +10962,9 @@
                 <a:spcPct val="100000"/>
               </a:lnSpc>
               <a:buNone/>
+              <a:tabLst>
+                <a:tab algn="l" pos="0"/>
+              </a:tabLst>
               <a:defRPr b="0" lang="en-US" sz="850" spc="-1" strike="noStrike">
                 <a:solidFill>
                   <a:srgbClr val="5d6775"/>
@@ -10958,6 +10980,9 @@
                 <a:spcPct val="100000"/>
               </a:lnSpc>
               <a:buNone/>
+              <a:tabLst>
+                <a:tab algn="l" pos="0"/>
+              </a:tabLst>
             </a:pPr>
             <a:r>
               <a:rPr b="0" lang="en-US" sz="850" spc="-1" strike="noStrike">
@@ -11083,7 +11108,7 @@
         <p:spPr>
           <a:xfrm>
             <a:off x="7818120" y="4462200"/>
-            <a:ext cx="1965600" cy="868320"/>
+            <a:ext cx="1965240" cy="867960"/>
           </a:xfrm>
           <a:prstGeom prst="rect">
             <a:avLst/>
@@ -11136,7 +11161,7 @@
         <p:spPr>
           <a:xfrm>
             <a:off x="8001000" y="4617720"/>
-            <a:ext cx="776880" cy="203400"/>
+            <a:ext cx="776520" cy="203400"/>
           </a:xfrm>
           <a:prstGeom prst="rect">
             <a:avLst/>
@@ -11190,7 +11215,7 @@
         <p:spPr>
           <a:xfrm>
             <a:off x="8778240" y="4617720"/>
-            <a:ext cx="822600" cy="203400"/>
+            <a:ext cx="822240" cy="203400"/>
           </a:xfrm>
           <a:prstGeom prst="rect">
             <a:avLst/>
@@ -11244,7 +11269,7 @@
         <p:spPr>
           <a:xfrm>
             <a:off x="8321040" y="4873680"/>
-            <a:ext cx="109440" cy="219240"/>
+            <a:ext cx="109080" cy="218880"/>
           </a:xfrm>
           <a:prstGeom prst="downArrow">
             <a:avLst>
@@ -11299,8 +11324,8 @@
         </p:nvSpPr>
         <p:spPr>
           <a:xfrm rot="10800000">
-            <a:off x="9098640" y="4874040"/>
-            <a:ext cx="109440" cy="219240"/>
+            <a:off x="9099000" y="4874400"/>
+            <a:ext cx="109080" cy="218880"/>
           </a:xfrm>
           <a:prstGeom prst="downArrow">
             <a:avLst>
@@ -11356,7 +11381,7 @@
         <p:spPr>
           <a:xfrm>
             <a:off x="1189440" y="6510600"/>
-            <a:ext cx="2320560" cy="104040"/>
+            <a:ext cx="2320200" cy="103680"/>
           </a:xfrm>
           <a:prstGeom prst="rect">
             <a:avLst/>
@@ -11452,7 +11477,7 @@
         <p:spPr>
           <a:xfrm>
             <a:off x="567000" y="164520"/>
-            <a:ext cx="2194200" cy="164160"/>
+            <a:ext cx="2193840" cy="163800"/>
           </a:xfrm>
           <a:prstGeom prst="rect">
             <a:avLst/>
@@ -11509,7 +11534,7 @@
         <p:spPr>
           <a:xfrm>
             <a:off x="10927080" y="164520"/>
-            <a:ext cx="639720" cy="164160"/>
+            <a:ext cx="639360" cy="163800"/>
           </a:xfrm>
           <a:prstGeom prst="rect">
             <a:avLst/>
@@ -11566,7 +11591,7 @@
         <p:spPr>
           <a:xfrm>
             <a:off x="567000" y="658440"/>
-            <a:ext cx="10972440" cy="383760"/>
+            <a:ext cx="10972080" cy="383400"/>
           </a:xfrm>
           <a:prstGeom prst="rect">
             <a:avLst/>
@@ -11625,7 +11650,7 @@
         <p:spPr>
           <a:xfrm>
             <a:off x="567000" y="1115640"/>
-            <a:ext cx="10972440" cy="347040"/>
+            <a:ext cx="10972080" cy="346680"/>
           </a:xfrm>
           <a:prstGeom prst="rect">
             <a:avLst/>
@@ -11682,7 +11707,7 @@
         <p:spPr>
           <a:xfrm>
             <a:off x="640080" y="1691640"/>
-            <a:ext cx="3154320" cy="1261440"/>
+            <a:ext cx="3153960" cy="1261080"/>
           </a:xfrm>
           <a:prstGeom prst="roundRect">
             <a:avLst>
@@ -11734,7 +11759,7 @@
         <p:spPr>
           <a:xfrm>
             <a:off x="640080" y="1691640"/>
-            <a:ext cx="50040" cy="1261440"/>
+            <a:ext cx="49680" cy="1261080"/>
           </a:xfrm>
           <a:prstGeom prst="rect">
             <a:avLst/>
@@ -11784,7 +11809,7 @@
         <p:spPr>
           <a:xfrm>
             <a:off x="804600" y="1810440"/>
-            <a:ext cx="2898360" cy="255600"/>
+            <a:ext cx="2898000" cy="255240"/>
           </a:xfrm>
           <a:prstGeom prst="rect">
             <a:avLst/>
@@ -11841,7 +11866,7 @@
         <p:spPr>
           <a:xfrm>
             <a:off x="804600" y="2121480"/>
-            <a:ext cx="2880000" cy="731160"/>
+            <a:ext cx="2879640" cy="730800"/>
           </a:xfrm>
           <a:prstGeom prst="rect">
             <a:avLst/>
@@ -11898,7 +11923,7 @@
         <p:spPr>
           <a:xfrm>
             <a:off x="4178880" y="1700640"/>
-            <a:ext cx="3154320" cy="1261440"/>
+            <a:ext cx="3153960" cy="1261080"/>
           </a:xfrm>
           <a:prstGeom prst="roundRect">
             <a:avLst>
@@ -11950,7 +11975,7 @@
         <p:spPr>
           <a:xfrm>
             <a:off x="4160520" y="1691640"/>
-            <a:ext cx="50040" cy="1261440"/>
+            <a:ext cx="49680" cy="1261080"/>
           </a:xfrm>
           <a:prstGeom prst="rect">
             <a:avLst/>
@@ -12000,7 +12025,7 @@
         <p:spPr>
           <a:xfrm>
             <a:off x="4325040" y="1810440"/>
-            <a:ext cx="2898360" cy="255600"/>
+            <a:ext cx="2898000" cy="255240"/>
           </a:xfrm>
           <a:prstGeom prst="rect">
             <a:avLst/>
@@ -12057,7 +12082,7 @@
         <p:spPr>
           <a:xfrm>
             <a:off x="4325040" y="2121480"/>
-            <a:ext cx="2880000" cy="731160"/>
+            <a:ext cx="2879640" cy="730800"/>
           </a:xfrm>
           <a:prstGeom prst="rect">
             <a:avLst/>
@@ -12114,7 +12139,7 @@
         <p:spPr>
           <a:xfrm>
             <a:off x="7680960" y="1691640"/>
-            <a:ext cx="3154320" cy="1261440"/>
+            <a:ext cx="3153960" cy="1261080"/>
           </a:xfrm>
           <a:prstGeom prst="roundRect">
             <a:avLst>
@@ -12166,7 +12191,7 @@
         <p:spPr>
           <a:xfrm>
             <a:off x="7680960" y="1691640"/>
-            <a:ext cx="50040" cy="1261440"/>
+            <a:ext cx="49680" cy="1261080"/>
           </a:xfrm>
           <a:prstGeom prst="rect">
             <a:avLst/>
@@ -12216,7 +12241,7 @@
         <p:spPr>
           <a:xfrm>
             <a:off x="7845480" y="1810440"/>
-            <a:ext cx="2898360" cy="255600"/>
+            <a:ext cx="2898000" cy="255240"/>
           </a:xfrm>
           <a:prstGeom prst="rect">
             <a:avLst/>
@@ -12273,7 +12298,7 @@
         <p:spPr>
           <a:xfrm>
             <a:off x="7845480" y="2121480"/>
-            <a:ext cx="2880000" cy="731160"/>
+            <a:ext cx="2879640" cy="730800"/>
           </a:xfrm>
           <a:prstGeom prst="rect">
             <a:avLst/>
@@ -12330,7 +12355,7 @@
         <p:spPr>
           <a:xfrm>
             <a:off x="640080" y="3246120"/>
-            <a:ext cx="3154320" cy="1261440"/>
+            <a:ext cx="3153960" cy="1261080"/>
           </a:xfrm>
           <a:prstGeom prst="roundRect">
             <a:avLst>
@@ -12382,7 +12407,7 @@
         <p:spPr>
           <a:xfrm>
             <a:off x="640080" y="3246120"/>
-            <a:ext cx="50040" cy="1261440"/>
+            <a:ext cx="49680" cy="1261080"/>
           </a:xfrm>
           <a:prstGeom prst="rect">
             <a:avLst/>
@@ -12432,7 +12457,7 @@
         <p:spPr>
           <a:xfrm>
             <a:off x="804600" y="3364920"/>
-            <a:ext cx="2898360" cy="255600"/>
+            <a:ext cx="2898000" cy="255240"/>
           </a:xfrm>
           <a:prstGeom prst="rect">
             <a:avLst/>
@@ -12489,7 +12514,7 @@
         <p:spPr>
           <a:xfrm>
             <a:off x="804600" y="3675960"/>
-            <a:ext cx="2880000" cy="731160"/>
+            <a:ext cx="2879640" cy="730800"/>
           </a:xfrm>
           <a:prstGeom prst="rect">
             <a:avLst/>
@@ -12546,7 +12571,7 @@
         <p:spPr>
           <a:xfrm>
             <a:off x="4160520" y="3246120"/>
-            <a:ext cx="3154320" cy="1261440"/>
+            <a:ext cx="3153960" cy="1261080"/>
           </a:xfrm>
           <a:prstGeom prst="roundRect">
             <a:avLst>
@@ -12598,7 +12623,7 @@
         <p:spPr>
           <a:xfrm>
             <a:off x="4160520" y="3246120"/>
-            <a:ext cx="50040" cy="1261440"/>
+            <a:ext cx="49680" cy="1261080"/>
           </a:xfrm>
           <a:prstGeom prst="rect">
             <a:avLst/>
@@ -12648,7 +12673,7 @@
         <p:spPr>
           <a:xfrm>
             <a:off x="4325040" y="3364920"/>
-            <a:ext cx="2898360" cy="255600"/>
+            <a:ext cx="2898000" cy="255240"/>
           </a:xfrm>
           <a:prstGeom prst="rect">
             <a:avLst/>
@@ -12705,7 +12730,7 @@
         <p:spPr>
           <a:xfrm>
             <a:off x="4325040" y="3675960"/>
-            <a:ext cx="2880000" cy="731160"/>
+            <a:ext cx="2879640" cy="730800"/>
           </a:xfrm>
           <a:prstGeom prst="rect">
             <a:avLst/>
@@ -12762,7 +12787,7 @@
         <p:spPr>
           <a:xfrm>
             <a:off x="7680960" y="3246120"/>
-            <a:ext cx="3154320" cy="1261440"/>
+            <a:ext cx="3153960" cy="1261080"/>
           </a:xfrm>
           <a:prstGeom prst="roundRect">
             <a:avLst>
@@ -12814,7 +12839,7 @@
         <p:spPr>
           <a:xfrm>
             <a:off x="7680960" y="3246120"/>
-            <a:ext cx="50040" cy="1261440"/>
+            <a:ext cx="49680" cy="1261080"/>
           </a:xfrm>
           <a:prstGeom prst="rect">
             <a:avLst/>
@@ -12864,7 +12889,7 @@
         <p:spPr>
           <a:xfrm>
             <a:off x="7845480" y="3364920"/>
-            <a:ext cx="2898360" cy="255600"/>
+            <a:ext cx="2898000" cy="255240"/>
           </a:xfrm>
           <a:prstGeom prst="rect">
             <a:avLst/>
@@ -12921,7 +12946,7 @@
         <p:spPr>
           <a:xfrm>
             <a:off x="7845480" y="3675960"/>
-            <a:ext cx="2880000" cy="731160"/>
+            <a:ext cx="2879640" cy="730800"/>
           </a:xfrm>
           <a:prstGeom prst="rect">
             <a:avLst/>
@@ -12978,7 +13003,7 @@
         <p:spPr>
           <a:xfrm>
             <a:off x="658440" y="5074920"/>
-            <a:ext cx="10652400" cy="804240"/>
+            <a:ext cx="10652040" cy="803880"/>
           </a:xfrm>
           <a:prstGeom prst="roundRect">
             <a:avLst>
@@ -13030,7 +13055,7 @@
         <p:spPr>
           <a:xfrm>
             <a:off x="896040" y="5266800"/>
-            <a:ext cx="1919880" cy="164160"/>
+            <a:ext cx="1919520" cy="163800"/>
           </a:xfrm>
           <a:prstGeom prst="rect">
             <a:avLst/>
@@ -13087,7 +13112,7 @@
         <p:spPr>
           <a:xfrm>
             <a:off x="2743200" y="5193720"/>
-            <a:ext cx="8229240" cy="347040"/>
+            <a:ext cx="8228880" cy="346680"/>
           </a:xfrm>
           <a:prstGeom prst="rect">
             <a:avLst/>
@@ -13148,7 +13173,7 @@
         <p:spPr>
           <a:xfrm>
             <a:off x="11064240" y="6537960"/>
-            <a:ext cx="502560" cy="164160"/>
+            <a:ext cx="502200" cy="163800"/>
           </a:xfrm>
           <a:prstGeom prst="rect">
             <a:avLst/>
@@ -13168,6 +13193,9 @@
                 <a:spcPct val="100000"/>
               </a:lnSpc>
               <a:buNone/>
+              <a:tabLst>
+                <a:tab algn="l" pos="0"/>
+              </a:tabLst>
               <a:defRPr b="0" lang="en-US" sz="850" spc="-1" strike="noStrike">
                 <a:solidFill>
                   <a:srgbClr val="5d6775"/>
@@ -13183,6 +13211,9 @@
                 <a:spcPct val="100000"/>
               </a:lnSpc>
               <a:buNone/>
+              <a:tabLst>
+                <a:tab algn="l" pos="0"/>
+              </a:tabLst>
             </a:pPr>
             <a:r>
               <a:rPr b="0" lang="en-US" sz="850" spc="-1" strike="noStrike">
@@ -13212,7 +13243,7 @@
         <p:spPr>
           <a:xfrm>
             <a:off x="658440" y="4553640"/>
-            <a:ext cx="10652400" cy="429480"/>
+            <a:ext cx="10652040" cy="429120"/>
           </a:xfrm>
           <a:prstGeom prst="roundRect">
             <a:avLst>
@@ -13322,7 +13353,7 @@
         <p:spPr>
           <a:xfrm>
             <a:off x="1411200" y="6510600"/>
-            <a:ext cx="1877040" cy="104040"/>
+            <a:ext cx="1876680" cy="103680"/>
           </a:xfrm>
           <a:prstGeom prst="rect">
             <a:avLst/>
@@ -13440,7 +13471,7 @@
         <p:spPr>
           <a:xfrm>
             <a:off x="567000" y="164520"/>
-            <a:ext cx="2834280" cy="125280"/>
+            <a:ext cx="2833920" cy="124920"/>
           </a:xfrm>
           <a:prstGeom prst="rect">
             <a:avLst/>
@@ -13494,7 +13525,7 @@
         <p:spPr>
           <a:xfrm>
             <a:off x="10881360" y="164520"/>
-            <a:ext cx="658080" cy="125280"/>
+            <a:ext cx="657720" cy="124920"/>
           </a:xfrm>
           <a:prstGeom prst="rect">
             <a:avLst/>
@@ -13548,7 +13579,7 @@
         <p:spPr>
           <a:xfrm>
             <a:off x="567000" y="649080"/>
-            <a:ext cx="10606680" cy="366120"/>
+            <a:ext cx="10606320" cy="365760"/>
           </a:xfrm>
           <a:prstGeom prst="rect">
             <a:avLst/>
@@ -13602,7 +13633,7 @@
         <p:spPr>
           <a:xfrm>
             <a:off x="567000" y="1078920"/>
-            <a:ext cx="10606680" cy="175680"/>
+            <a:ext cx="10606320" cy="175320"/>
           </a:xfrm>
           <a:prstGeom prst="rect">
             <a:avLst/>
@@ -13656,7 +13687,7 @@
         <p:spPr>
           <a:xfrm>
             <a:off x="11064240" y="6409800"/>
-            <a:ext cx="319680" cy="129960"/>
+            <a:ext cx="319320" cy="129600"/>
           </a:xfrm>
           <a:prstGeom prst="rect">
             <a:avLst/>
@@ -13710,7 +13741,7 @@
         <p:spPr>
           <a:xfrm>
             <a:off x="658440" y="1627560"/>
-            <a:ext cx="2925720" cy="1663920"/>
+            <a:ext cx="2925360" cy="1663560"/>
           </a:xfrm>
           <a:prstGeom prst="roundRect">
             <a:avLst>
@@ -13768,7 +13799,7 @@
         <p:spPr>
           <a:xfrm>
             <a:off x="658440" y="1627560"/>
-            <a:ext cx="63720" cy="1663920"/>
+            <a:ext cx="63360" cy="1663560"/>
           </a:xfrm>
           <a:prstGeom prst="rect">
             <a:avLst/>
@@ -13824,7 +13855,7 @@
         <p:spPr>
           <a:xfrm>
             <a:off x="786240" y="1682640"/>
-            <a:ext cx="511560" cy="129960"/>
+            <a:ext cx="511200" cy="129600"/>
           </a:xfrm>
           <a:prstGeom prst="rect">
             <a:avLst/>
@@ -13878,7 +13909,7 @@
         <p:spPr>
           <a:xfrm>
             <a:off x="822960" y="1828800"/>
-            <a:ext cx="2669760" cy="201600"/>
+            <a:ext cx="2669400" cy="219456"/>
           </a:xfrm>
           <a:prstGeom prst="rect">
             <a:avLst/>
@@ -13905,7 +13936,7 @@
               </a:lnSpc>
             </a:pPr>
             <a:r>
-              <a:rPr b="1" lang="en-US" sz="1320" spc="-1" strike="noStrike" u="sng">
+              <a:rPr b="1" lang="en-US" sz="1050" spc="-1" strike="noStrike" u="sng">
                 <a:solidFill>
                   <a:srgbClr val="0563c1"/>
                 </a:solidFill>
@@ -13934,7 +13965,7 @@
         <p:spPr>
           <a:xfrm>
             <a:off x="822960" y="2139840"/>
-            <a:ext cx="2669760" cy="777960"/>
+            <a:ext cx="2669400" cy="777600"/>
           </a:xfrm>
           <a:prstGeom prst="rect">
             <a:avLst/>
@@ -13988,7 +14019,7 @@
         <p:spPr>
           <a:xfrm>
             <a:off x="3959280" y="1627560"/>
-            <a:ext cx="2925720" cy="1663920"/>
+            <a:ext cx="2925360" cy="1663560"/>
           </a:xfrm>
           <a:prstGeom prst="roundRect">
             <a:avLst>
@@ -14046,7 +14077,7 @@
         <p:spPr>
           <a:xfrm>
             <a:off x="3959280" y="1627560"/>
-            <a:ext cx="63720" cy="1663920"/>
+            <a:ext cx="63360" cy="1663560"/>
           </a:xfrm>
           <a:prstGeom prst="rect">
             <a:avLst/>
@@ -14102,7 +14133,7 @@
         <p:spPr>
           <a:xfrm>
             <a:off x="4087440" y="1682640"/>
-            <a:ext cx="511560" cy="129960"/>
+            <a:ext cx="511200" cy="129600"/>
           </a:xfrm>
           <a:prstGeom prst="rect">
             <a:avLst/>
@@ -14156,7 +14187,7 @@
         <p:spPr>
           <a:xfrm>
             <a:off x="4123800" y="1828800"/>
-            <a:ext cx="2669760" cy="201600"/>
+            <a:ext cx="2669400" cy="219456"/>
           </a:xfrm>
           <a:prstGeom prst="rect">
             <a:avLst/>
@@ -14183,7 +14214,7 @@
               </a:lnSpc>
             </a:pPr>
             <a:r>
-              <a:rPr b="1" lang="en-US" sz="1320" spc="-1" strike="noStrike" u="sng">
+              <a:rPr b="1" lang="en-US" sz="1050" spc="-1" strike="noStrike" u="sng">
                 <a:solidFill>
                   <a:srgbClr val="0563c1"/>
                 </a:solidFill>
@@ -14212,7 +14243,7 @@
         <p:spPr>
           <a:xfrm>
             <a:off x="4123800" y="2139840"/>
-            <a:ext cx="2669760" cy="777960"/>
+            <a:ext cx="2669400" cy="777600"/>
           </a:xfrm>
           <a:prstGeom prst="rect">
             <a:avLst/>
@@ -14266,7 +14297,7 @@
         <p:spPr>
           <a:xfrm>
             <a:off x="7260480" y="1627560"/>
-            <a:ext cx="2925720" cy="1663920"/>
+            <a:ext cx="2925360" cy="1663560"/>
           </a:xfrm>
           <a:prstGeom prst="roundRect">
             <a:avLst>
@@ -14324,7 +14355,7 @@
         <p:spPr>
           <a:xfrm>
             <a:off x="7260480" y="1627560"/>
-            <a:ext cx="63720" cy="1663920"/>
+            <a:ext cx="63360" cy="1663560"/>
           </a:xfrm>
           <a:prstGeom prst="rect">
             <a:avLst/>
@@ -14380,7 +14411,7 @@
         <p:spPr>
           <a:xfrm>
             <a:off x="7388280" y="1682640"/>
-            <a:ext cx="511560" cy="129960"/>
+            <a:ext cx="511200" cy="129600"/>
           </a:xfrm>
           <a:prstGeom prst="rect">
             <a:avLst/>
@@ -14434,7 +14465,7 @@
         <p:spPr>
           <a:xfrm>
             <a:off x="7425000" y="1828800"/>
-            <a:ext cx="2669760" cy="201600"/>
+            <a:ext cx="2669400" cy="219456"/>
           </a:xfrm>
           <a:prstGeom prst="rect">
             <a:avLst/>
@@ -14461,7 +14492,7 @@
               </a:lnSpc>
             </a:pPr>
             <a:r>
-              <a:rPr b="1" lang="en-US" sz="1320" spc="-1" strike="noStrike" u="sng">
+              <a:rPr b="1" lang="en-US" sz="1050" spc="-1" strike="noStrike" u="sng">
                 <a:solidFill>
                   <a:srgbClr val="0563c1"/>
                 </a:solidFill>
@@ -14490,7 +14521,7 @@
         <p:spPr>
           <a:xfrm>
             <a:off x="7425000" y="2139840"/>
-            <a:ext cx="2669760" cy="777960"/>
+            <a:ext cx="2669400" cy="777600"/>
           </a:xfrm>
           <a:prstGeom prst="rect">
             <a:avLst/>
@@ -14544,7 +14575,7 @@
         <p:spPr>
           <a:xfrm>
             <a:off x="658440" y="3675960"/>
-            <a:ext cx="2925720" cy="1663920"/>
+            <a:ext cx="2925360" cy="1663560"/>
           </a:xfrm>
           <a:prstGeom prst="roundRect">
             <a:avLst>
@@ -14602,7 +14633,7 @@
         <p:spPr>
           <a:xfrm>
             <a:off x="658440" y="3675960"/>
-            <a:ext cx="63720" cy="1663920"/>
+            <a:ext cx="63360" cy="1663560"/>
           </a:xfrm>
           <a:prstGeom prst="rect">
             <a:avLst/>
@@ -14658,7 +14689,7 @@
         <p:spPr>
           <a:xfrm>
             <a:off x="786240" y="3730680"/>
-            <a:ext cx="511560" cy="129960"/>
+            <a:ext cx="511200" cy="129600"/>
           </a:xfrm>
           <a:prstGeom prst="rect">
             <a:avLst/>
@@ -14712,7 +14743,7 @@
         <p:spPr>
           <a:xfrm>
             <a:off x="822960" y="3877200"/>
-            <a:ext cx="2669760" cy="201600"/>
+            <a:ext cx="2669400" cy="219456"/>
           </a:xfrm>
           <a:prstGeom prst="rect">
             <a:avLst/>
@@ -14739,7 +14770,7 @@
               </a:lnSpc>
             </a:pPr>
             <a:r>
-              <a:rPr b="1" lang="en-US" sz="1320" spc="-1" strike="noStrike" u="sng">
+              <a:rPr b="1" lang="en-US" sz="1050" spc="-1" strike="noStrike" u="sng">
                 <a:solidFill>
                   <a:srgbClr val="0563c1"/>
                 </a:solidFill>
@@ -14768,7 +14799,7 @@
         <p:spPr>
           <a:xfrm>
             <a:off x="822960" y="4187880"/>
-            <a:ext cx="2669760" cy="622440"/>
+            <a:ext cx="2669400" cy="622080"/>
           </a:xfrm>
           <a:prstGeom prst="rect">
             <a:avLst/>
@@ -14822,7 +14853,7 @@
         <p:spPr>
           <a:xfrm>
             <a:off x="3959280" y="3675960"/>
-            <a:ext cx="2925720" cy="1663920"/>
+            <a:ext cx="2925360" cy="1663560"/>
           </a:xfrm>
           <a:prstGeom prst="roundRect">
             <a:avLst>
@@ -14880,7 +14911,7 @@
         <p:spPr>
           <a:xfrm>
             <a:off x="3959280" y="3675960"/>
-            <a:ext cx="63720" cy="1663920"/>
+            <a:ext cx="63360" cy="1663560"/>
           </a:xfrm>
           <a:prstGeom prst="rect">
             <a:avLst/>
@@ -14936,7 +14967,7 @@
         <p:spPr>
           <a:xfrm>
             <a:off x="4087440" y="3730680"/>
-            <a:ext cx="511560" cy="129960"/>
+            <a:ext cx="511200" cy="129600"/>
           </a:xfrm>
           <a:prstGeom prst="rect">
             <a:avLst/>
@@ -14990,7 +15021,7 @@
         <p:spPr>
           <a:xfrm>
             <a:off x="4123800" y="3877200"/>
-            <a:ext cx="2669760" cy="201600"/>
+            <a:ext cx="2669400" cy="219456"/>
           </a:xfrm>
           <a:prstGeom prst="rect">
             <a:avLst/>
@@ -15017,7 +15048,7 @@
               </a:lnSpc>
             </a:pPr>
             <a:r>
-              <a:rPr b="1" lang="en-US" sz="1320" spc="-1" strike="noStrike" u="sng">
+              <a:rPr b="1" lang="en-US" sz="1050" spc="-1" strike="noStrike" u="sng">
                 <a:solidFill>
                   <a:srgbClr val="0563c1"/>
                 </a:solidFill>
@@ -15046,7 +15077,7 @@
         <p:spPr>
           <a:xfrm>
             <a:off x="4123800" y="4187880"/>
-            <a:ext cx="2669760" cy="622440"/>
+            <a:ext cx="2669400" cy="622080"/>
           </a:xfrm>
           <a:prstGeom prst="rect">
             <a:avLst/>
@@ -15100,7 +15131,7 @@
         <p:spPr>
           <a:xfrm>
             <a:off x="7260480" y="3675960"/>
-            <a:ext cx="2925720" cy="1663920"/>
+            <a:ext cx="2925360" cy="1663560"/>
           </a:xfrm>
           <a:prstGeom prst="roundRect">
             <a:avLst>
@@ -15158,7 +15189,7 @@
         <p:spPr>
           <a:xfrm>
             <a:off x="7260480" y="3675960"/>
-            <a:ext cx="63720" cy="1663920"/>
+            <a:ext cx="63360" cy="1663560"/>
           </a:xfrm>
           <a:prstGeom prst="rect">
             <a:avLst/>
@@ -15214,7 +15245,7 @@
         <p:spPr>
           <a:xfrm>
             <a:off x="7388280" y="3730680"/>
-            <a:ext cx="511560" cy="129960"/>
+            <a:ext cx="511200" cy="129600"/>
           </a:xfrm>
           <a:prstGeom prst="rect">
             <a:avLst/>
@@ -15268,7 +15299,7 @@
         <p:spPr>
           <a:xfrm>
             <a:off x="7425000" y="3877200"/>
-            <a:ext cx="2669760" cy="201600"/>
+            <a:ext cx="2669400" cy="219456"/>
           </a:xfrm>
           <a:prstGeom prst="rect">
             <a:avLst/>
@@ -15295,7 +15326,7 @@
               </a:lnSpc>
             </a:pPr>
             <a:r>
-              <a:rPr b="1" lang="en-US" sz="1320" spc="-1" strike="noStrike" u="sng">
+              <a:rPr b="1" lang="en-US" sz="1050" spc="-1" strike="noStrike" u="sng">
                 <a:solidFill>
                   <a:srgbClr val="0563c1"/>
                 </a:solidFill>
@@ -15324,7 +15355,7 @@
         <p:spPr>
           <a:xfrm>
             <a:off x="7425000" y="4187880"/>
-            <a:ext cx="2669760" cy="777960"/>
+            <a:ext cx="2669400" cy="777600"/>
           </a:xfrm>
           <a:prstGeom prst="rect">
             <a:avLst/>
@@ -15378,7 +15409,7 @@
         <p:spPr>
           <a:xfrm>
             <a:off x="658440" y="6035040"/>
-            <a:ext cx="10853640" cy="411120"/>
+            <a:ext cx="10853280" cy="410760"/>
           </a:xfrm>
           <a:prstGeom prst="roundRect">
             <a:avLst>
@@ -15436,7 +15467,7 @@
         <p:spPr>
           <a:xfrm>
             <a:off x="786240" y="6144840"/>
-            <a:ext cx="10560960" cy="137880"/>
+            <a:ext cx="10560600" cy="137520"/>
           </a:xfrm>
           <a:prstGeom prst="rect">
             <a:avLst/>
@@ -15490,7 +15521,7 @@
         <p:spPr>
           <a:xfrm>
             <a:off x="1427400" y="6510600"/>
-            <a:ext cx="1845000" cy="104040"/>
+            <a:ext cx="1844640" cy="103680"/>
           </a:xfrm>
           <a:prstGeom prst="rect">
             <a:avLst/>
@@ -15586,7 +15617,7 @@
         <p:spPr>
           <a:xfrm>
             <a:off x="567000" y="164520"/>
-            <a:ext cx="2834280" cy="125280"/>
+            <a:ext cx="2833920" cy="124920"/>
           </a:xfrm>
           <a:prstGeom prst="rect">
             <a:avLst/>
@@ -15640,7 +15671,7 @@
         <p:spPr>
           <a:xfrm>
             <a:off x="10881360" y="164520"/>
-            <a:ext cx="658080" cy="125280"/>
+            <a:ext cx="657720" cy="124920"/>
           </a:xfrm>
           <a:prstGeom prst="rect">
             <a:avLst/>
@@ -15694,7 +15725,7 @@
         <p:spPr>
           <a:xfrm>
             <a:off x="567000" y="649080"/>
-            <a:ext cx="10606680" cy="731160"/>
+            <a:ext cx="10606320" cy="347472"/>
           </a:xfrm>
           <a:prstGeom prst="rect">
             <a:avLst/>
@@ -15721,7 +15752,7 @@
               </a:lnSpc>
             </a:pPr>
             <a:r>
-              <a:rPr b="1" lang="en-US" sz="2400" spc="-1" strike="noStrike">
+              <a:rPr b="1" lang="en-US" sz="1850" spc="-1" strike="noStrike">
                 <a:solidFill>
                   <a:srgbClr val="1f2d3d"/>
                 </a:solidFill>
@@ -15748,7 +15779,7 @@
         <p:spPr>
           <a:xfrm>
             <a:off x="567000" y="1078920"/>
-            <a:ext cx="10606680" cy="351000"/>
+            <a:ext cx="10606320" cy="350640"/>
           </a:xfrm>
           <a:prstGeom prst="rect">
             <a:avLst/>
@@ -15802,7 +15833,7 @@
         <p:spPr>
           <a:xfrm>
             <a:off x="11064240" y="6409800"/>
-            <a:ext cx="319680" cy="129960"/>
+            <a:ext cx="319320" cy="129600"/>
           </a:xfrm>
           <a:prstGeom prst="rect">
             <a:avLst/>
@@ -15856,7 +15887,7 @@
         <p:spPr>
           <a:xfrm>
             <a:off x="658440" y="1600200"/>
-            <a:ext cx="10853640" cy="3017160"/>
+            <a:ext cx="10853280" cy="3016800"/>
           </a:xfrm>
           <a:prstGeom prst="roundRect">
             <a:avLst>
@@ -15914,7 +15945,7 @@
         <p:spPr>
           <a:xfrm>
             <a:off x="841320" y="1719000"/>
-            <a:ext cx="3108600" cy="131400"/>
+            <a:ext cx="3108240" cy="131040"/>
           </a:xfrm>
           <a:prstGeom prst="rect">
             <a:avLst/>
@@ -15968,7 +15999,7 @@
         <p:spPr>
           <a:xfrm>
             <a:off x="877680" y="2011680"/>
-            <a:ext cx="45360" cy="456840"/>
+            <a:ext cx="45000" cy="456480"/>
           </a:xfrm>
           <a:prstGeom prst="rect">
             <a:avLst/>
@@ -16024,7 +16055,7 @@
         <p:spPr>
           <a:xfrm>
             <a:off x="969120" y="1993320"/>
-            <a:ext cx="2559960" cy="170280"/>
+            <a:ext cx="2559600" cy="170280"/>
           </a:xfrm>
           <a:prstGeom prst="rect">
             <a:avLst/>
@@ -16078,7 +16109,7 @@
         <p:spPr>
           <a:xfrm>
             <a:off x="1880280" y="2176200"/>
-            <a:ext cx="2748960" cy="145080"/>
+            <a:ext cx="2748600" cy="144720"/>
           </a:xfrm>
           <a:prstGeom prst="rect">
             <a:avLst/>
@@ -16156,7 +16187,7 @@
         <p:spPr>
           <a:xfrm>
             <a:off x="877680" y="2743200"/>
-            <a:ext cx="45360" cy="456840"/>
+            <a:ext cx="45000" cy="456480"/>
           </a:xfrm>
           <a:prstGeom prst="rect">
             <a:avLst/>
@@ -16212,7 +16243,7 @@
         <p:spPr>
           <a:xfrm>
             <a:off x="969120" y="2724840"/>
-            <a:ext cx="2559960" cy="170280"/>
+            <a:ext cx="2559600" cy="170280"/>
           </a:xfrm>
           <a:prstGeom prst="rect">
             <a:avLst/>
@@ -16266,7 +16297,7 @@
         <p:spPr>
           <a:xfrm>
             <a:off x="1598400" y="2907720"/>
-            <a:ext cx="3313080" cy="145080"/>
+            <a:ext cx="3312720" cy="144720"/>
           </a:xfrm>
           <a:prstGeom prst="rect">
             <a:avLst/>
@@ -16344,7 +16375,7 @@
         <p:spPr>
           <a:xfrm>
             <a:off x="877680" y="3474720"/>
-            <a:ext cx="45360" cy="456840"/>
+            <a:ext cx="45000" cy="456480"/>
           </a:xfrm>
           <a:prstGeom prst="rect">
             <a:avLst/>
@@ -16400,7 +16431,7 @@
         <p:spPr>
           <a:xfrm>
             <a:off x="969120" y="3456360"/>
-            <a:ext cx="2559960" cy="340920"/>
+            <a:ext cx="2559600" cy="201168"/>
           </a:xfrm>
           <a:prstGeom prst="rect">
             <a:avLst/>
@@ -16427,7 +16458,7 @@
               </a:lnSpc>
             </a:pPr>
             <a:r>
-              <a:rPr b="1" lang="en-US" sz="1120" spc="-1" strike="noStrike">
+              <a:rPr b="1" lang="en-US" sz="980" spc="-1" strike="noStrike">
                 <a:solidFill>
                   <a:srgbClr val="1f2d3d"/>
                 </a:solidFill>
@@ -16453,8 +16484,8 @@
         </p:nvSpPr>
         <p:spPr>
           <a:xfrm>
-            <a:off x="1353960" y="3639240"/>
-            <a:ext cx="3801960" cy="145080"/>
+            <a:off x="1353960" y="3730752"/>
+            <a:ext cx="3801600" cy="144720"/>
           </a:xfrm>
           <a:prstGeom prst="rect">
             <a:avLst/>
@@ -16510,7 +16541,7 @@
         <p:spPr>
           <a:xfrm>
             <a:off x="5989320" y="2011680"/>
-            <a:ext cx="45360" cy="456840"/>
+            <a:ext cx="45000" cy="456480"/>
           </a:xfrm>
           <a:prstGeom prst="rect">
             <a:avLst/>
@@ -16566,7 +16597,7 @@
         <p:spPr>
           <a:xfrm>
             <a:off x="6080760" y="1993320"/>
-            <a:ext cx="2559960" cy="170280"/>
+            <a:ext cx="2559600" cy="170280"/>
           </a:xfrm>
           <a:prstGeom prst="rect">
             <a:avLst/>
@@ -16620,7 +16651,7 @@
         <p:spPr>
           <a:xfrm>
             <a:off x="7000560" y="2176200"/>
-            <a:ext cx="2732040" cy="145080"/>
+            <a:ext cx="2731680" cy="144720"/>
           </a:xfrm>
           <a:prstGeom prst="rect">
             <a:avLst/>
@@ -16698,7 +16729,7 @@
         <p:spPr>
           <a:xfrm>
             <a:off x="5989320" y="2743200"/>
-            <a:ext cx="45360" cy="456840"/>
+            <a:ext cx="45000" cy="456480"/>
           </a:xfrm>
           <a:prstGeom prst="rect">
             <a:avLst/>
@@ -16754,7 +16785,7 @@
         <p:spPr>
           <a:xfrm>
             <a:off x="6080760" y="2724840"/>
-            <a:ext cx="2559960" cy="170280"/>
+            <a:ext cx="2559600" cy="170280"/>
           </a:xfrm>
           <a:prstGeom prst="rect">
             <a:avLst/>
@@ -16808,7 +16839,7 @@
         <p:spPr>
           <a:xfrm>
             <a:off x="6092280" y="2907720"/>
-            <a:ext cx="4548600" cy="145080"/>
+            <a:ext cx="4548240" cy="144720"/>
           </a:xfrm>
           <a:prstGeom prst="rect">
             <a:avLst/>
@@ -16864,7 +16895,7 @@
         <p:spPr>
           <a:xfrm>
             <a:off x="5989320" y="3474720"/>
-            <a:ext cx="45360" cy="456840"/>
+            <a:ext cx="45000" cy="456480"/>
           </a:xfrm>
           <a:prstGeom prst="rect">
             <a:avLst/>
@@ -16920,7 +16951,7 @@
         <p:spPr>
           <a:xfrm>
             <a:off x="6080760" y="3456360"/>
-            <a:ext cx="2559960" cy="170280"/>
+            <a:ext cx="2559600" cy="170280"/>
           </a:xfrm>
           <a:prstGeom prst="rect">
             <a:avLst/>
@@ -16974,7 +17005,7 @@
         <p:spPr>
           <a:xfrm>
             <a:off x="6544080" y="3639240"/>
-            <a:ext cx="3645000" cy="145080"/>
+            <a:ext cx="3644640" cy="144720"/>
           </a:xfrm>
           <a:prstGeom prst="rect">
             <a:avLst/>
@@ -17030,7 +17061,7 @@
         <p:spPr>
           <a:xfrm>
             <a:off x="841320" y="4773240"/>
-            <a:ext cx="3017160" cy="131400"/>
+            <a:ext cx="3016800" cy="131040"/>
           </a:xfrm>
           <a:prstGeom prst="rect">
             <a:avLst/>
@@ -17086,7 +17117,7 @@
         <p:spPr>
           <a:xfrm>
             <a:off x="658440" y="4983480"/>
-            <a:ext cx="3401280" cy="914040"/>
+            <a:ext cx="3400920" cy="913680"/>
           </a:xfrm>
           <a:prstGeom prst="roundRect">
             <a:avLst>
@@ -17144,7 +17175,7 @@
         <p:spPr>
           <a:xfrm>
             <a:off x="786240" y="5148000"/>
-            <a:ext cx="365400" cy="365400"/>
+            <a:ext cx="365040" cy="365040"/>
           </a:xfrm>
           <a:prstGeom prst="ellipse">
             <a:avLst/>
@@ -17200,7 +17231,7 @@
         <p:spPr>
           <a:xfrm>
             <a:off x="786240" y="5152680"/>
-            <a:ext cx="365400" cy="153000"/>
+            <a:ext cx="365040" cy="152640"/>
           </a:xfrm>
           <a:prstGeom prst="rect">
             <a:avLst/>
@@ -17254,7 +17285,7 @@
         <p:spPr>
           <a:xfrm>
             <a:off x="1225440" y="5074920"/>
-            <a:ext cx="2815920" cy="163080"/>
+            <a:ext cx="2815560" cy="162720"/>
           </a:xfrm>
           <a:prstGeom prst="rect">
             <a:avLst/>
@@ -17308,7 +17339,7 @@
         <p:spPr>
           <a:xfrm>
             <a:off x="1225440" y="5285160"/>
-            <a:ext cx="2697120" cy="407520"/>
+            <a:ext cx="2696760" cy="407160"/>
           </a:xfrm>
           <a:prstGeom prst="rect">
             <a:avLst/>
@@ -17362,7 +17393,7 @@
         <p:spPr>
           <a:xfrm>
             <a:off x="4389120" y="4983480"/>
-            <a:ext cx="3401280" cy="914040"/>
+            <a:ext cx="3400920" cy="913680"/>
           </a:xfrm>
           <a:prstGeom prst="roundRect">
             <a:avLst>
@@ -17420,7 +17451,7 @@
         <p:spPr>
           <a:xfrm>
             <a:off x="4517280" y="5148000"/>
-            <a:ext cx="365400" cy="365400"/>
+            <a:ext cx="365040" cy="365040"/>
           </a:xfrm>
           <a:prstGeom prst="ellipse">
             <a:avLst/>
@@ -17476,7 +17507,7 @@
         <p:spPr>
           <a:xfrm>
             <a:off x="4517280" y="5152680"/>
-            <a:ext cx="365400" cy="153000"/>
+            <a:ext cx="365040" cy="152640"/>
           </a:xfrm>
           <a:prstGeom prst="rect">
             <a:avLst/>
@@ -17530,7 +17561,7 @@
         <p:spPr>
           <a:xfrm>
             <a:off x="4956120" y="5074920"/>
-            <a:ext cx="2815920" cy="325080"/>
+            <a:ext cx="2815560" cy="292608"/>
           </a:xfrm>
           <a:prstGeom prst="rect">
             <a:avLst/>
@@ -17557,7 +17588,7 @@
               </a:lnSpc>
             </a:pPr>
             <a:r>
-              <a:rPr b="1" lang="en-US" sz="1070" spc="-1" strike="noStrike">
+              <a:rPr b="1" lang="en-US" sz="919" spc="-1" strike="noStrike">
                 <a:solidFill>
                   <a:srgbClr val="1f2d3d"/>
                 </a:solidFill>
@@ -17583,8 +17614,8 @@
         </p:nvSpPr>
         <p:spPr>
           <a:xfrm>
-            <a:off x="4956120" y="5285160"/>
-            <a:ext cx="2697120" cy="407520"/>
+            <a:off x="4956120" y="5431536"/>
+            <a:ext cx="2696760" cy="347472"/>
           </a:xfrm>
           <a:prstGeom prst="rect">
             <a:avLst/>
@@ -17611,7 +17642,7 @@
               </a:lnSpc>
             </a:pPr>
             <a:r>
-              <a:rPr b="0" lang="en-US" sz="889" spc="-1" strike="noStrike">
+              <a:rPr b="0" lang="en-US" sz="850" spc="-1" strike="noStrike">
                 <a:solidFill>
                   <a:srgbClr val="1f2d3d"/>
                 </a:solidFill>
@@ -17638,7 +17669,7 @@
         <p:spPr>
           <a:xfrm>
             <a:off x="8119800" y="4983480"/>
-            <a:ext cx="3401280" cy="914040"/>
+            <a:ext cx="3400920" cy="913680"/>
           </a:xfrm>
           <a:prstGeom prst="roundRect">
             <a:avLst>
@@ -17696,7 +17727,7 @@
         <p:spPr>
           <a:xfrm>
             <a:off x="8247960" y="5148000"/>
-            <a:ext cx="365400" cy="365400"/>
+            <a:ext cx="365040" cy="365040"/>
           </a:xfrm>
           <a:prstGeom prst="ellipse">
             <a:avLst/>
@@ -17752,7 +17783,7 @@
         <p:spPr>
           <a:xfrm>
             <a:off x="8247960" y="5152680"/>
-            <a:ext cx="365400" cy="153000"/>
+            <a:ext cx="365040" cy="152640"/>
           </a:xfrm>
           <a:prstGeom prst="rect">
             <a:avLst/>
@@ -17806,7 +17837,7 @@
         <p:spPr>
           <a:xfrm>
             <a:off x="8686800" y="5074920"/>
-            <a:ext cx="2815920" cy="310680"/>
+            <a:ext cx="2815560" cy="292608"/>
           </a:xfrm>
           <a:prstGeom prst="rect">
             <a:avLst/>
@@ -17833,7 +17864,7 @@
               </a:lnSpc>
             </a:pPr>
             <a:r>
-              <a:rPr b="1" lang="en-US" sz="1020" spc="-1" strike="noStrike">
+              <a:rPr b="1" lang="en-US" sz="900" spc="-1" strike="noStrike">
                 <a:solidFill>
                   <a:srgbClr val="1f2d3d"/>
                 </a:solidFill>
@@ -17859,8 +17890,8 @@
         </p:nvSpPr>
         <p:spPr>
           <a:xfrm>
-            <a:off x="8686800" y="5312520"/>
-            <a:ext cx="2697120" cy="397800"/>
+            <a:off x="8686800" y="5431536"/>
+            <a:ext cx="2696760" cy="347472"/>
           </a:xfrm>
           <a:prstGeom prst="rect">
             <a:avLst/>
@@ -17887,7 +17918,7 @@
               </a:lnSpc>
             </a:pPr>
             <a:r>
-              <a:rPr b="0" lang="en-US" sz="870" spc="-1" strike="noStrike">
+              <a:rPr b="0" lang="en-US" sz="830" spc="-1" strike="noStrike">
                 <a:solidFill>
                   <a:srgbClr val="1f2d3d"/>
                 </a:solidFill>
@@ -17914,7 +17945,7 @@
         <p:spPr>
           <a:xfrm>
             <a:off x="658440" y="6035040"/>
-            <a:ext cx="10853640" cy="411120"/>
+            <a:ext cx="10853280" cy="410760"/>
           </a:xfrm>
           <a:prstGeom prst="roundRect">
             <a:avLst>
@@ -17972,7 +18003,7 @@
         <p:spPr>
           <a:xfrm>
             <a:off x="786240" y="6144840"/>
-            <a:ext cx="10560960" cy="274680"/>
+            <a:ext cx="10560600" cy="274680"/>
           </a:xfrm>
           <a:prstGeom prst="rect">
             <a:avLst/>
@@ -18026,7 +18057,7 @@
         <p:spPr>
           <a:xfrm>
             <a:off x="1293120" y="6510600"/>
-            <a:ext cx="2113200" cy="104040"/>
+            <a:ext cx="2112840" cy="103680"/>
           </a:xfrm>
           <a:prstGeom prst="rect">
             <a:avLst/>
@@ -18122,7 +18153,7 @@
         <p:spPr>
           <a:xfrm>
             <a:off x="567000" y="164520"/>
-            <a:ext cx="2194200" cy="164160"/>
+            <a:ext cx="2193840" cy="163800"/>
           </a:xfrm>
           <a:prstGeom prst="rect">
             <a:avLst/>
@@ -18179,7 +18210,7 @@
         <p:spPr>
           <a:xfrm>
             <a:off x="10927080" y="164520"/>
-            <a:ext cx="639720" cy="164160"/>
+            <a:ext cx="639360" cy="163800"/>
           </a:xfrm>
           <a:prstGeom prst="rect">
             <a:avLst/>
@@ -18236,7 +18267,7 @@
         <p:spPr>
           <a:xfrm>
             <a:off x="567000" y="658440"/>
-            <a:ext cx="10972440" cy="383760"/>
+            <a:ext cx="10972080" cy="383400"/>
           </a:xfrm>
           <a:prstGeom prst="rect">
             <a:avLst/>
@@ -18295,7 +18326,7 @@
         <p:spPr>
           <a:xfrm>
             <a:off x="567000" y="1115640"/>
-            <a:ext cx="10972440" cy="347040"/>
+            <a:ext cx="10972080" cy="346680"/>
           </a:xfrm>
           <a:prstGeom prst="rect">
             <a:avLst/>
@@ -18352,7 +18383,7 @@
         <p:spPr>
           <a:xfrm>
             <a:off x="685800" y="1572840"/>
-            <a:ext cx="2377080" cy="164160"/>
+            <a:ext cx="2376720" cy="163800"/>
           </a:xfrm>
           <a:prstGeom prst="rect">
             <a:avLst/>
@@ -18409,7 +18440,7 @@
         <p:spPr>
           <a:xfrm>
             <a:off x="685800" y="1847160"/>
-            <a:ext cx="2925720" cy="1298160"/>
+            <a:ext cx="2925360" cy="1297800"/>
           </a:xfrm>
           <a:prstGeom prst="roundRect">
             <a:avLst>
@@ -18461,7 +18492,7 @@
         <p:spPr>
           <a:xfrm>
             <a:off x="831960" y="2011680"/>
-            <a:ext cx="2605680" cy="310680"/>
+            <a:ext cx="2605320" cy="310320"/>
           </a:xfrm>
           <a:prstGeom prst="rect">
             <a:avLst/>
@@ -18518,7 +18549,7 @@
         <p:spPr>
           <a:xfrm>
             <a:off x="831960" y="2404800"/>
-            <a:ext cx="2605680" cy="566640"/>
+            <a:ext cx="2605320" cy="566280"/>
           </a:xfrm>
           <a:prstGeom prst="rect">
             <a:avLst/>
@@ -18670,7 +18701,7 @@
         <p:spPr>
           <a:xfrm>
             <a:off x="4160520" y="1572840"/>
-            <a:ext cx="2377080" cy="164160"/>
+            <a:ext cx="2376720" cy="163800"/>
           </a:xfrm>
           <a:prstGeom prst="rect">
             <a:avLst/>
@@ -18727,7 +18758,7 @@
         <p:spPr>
           <a:xfrm>
             <a:off x="4160520" y="1847160"/>
-            <a:ext cx="2925720" cy="1298160"/>
+            <a:ext cx="2925360" cy="1297800"/>
           </a:xfrm>
           <a:prstGeom prst="roundRect">
             <a:avLst>
@@ -18779,7 +18810,7 @@
         <p:spPr>
           <a:xfrm>
             <a:off x="4306680" y="2011680"/>
-            <a:ext cx="2605680" cy="310680"/>
+            <a:ext cx="2605320" cy="310320"/>
           </a:xfrm>
           <a:prstGeom prst="rect">
             <a:avLst/>
@@ -18836,7 +18867,7 @@
         <p:spPr>
           <a:xfrm>
             <a:off x="4306680" y="2404800"/>
-            <a:ext cx="2605680" cy="566640"/>
+            <a:ext cx="2605320" cy="566280"/>
           </a:xfrm>
           <a:prstGeom prst="rect">
             <a:avLst/>
@@ -19014,7 +19045,7 @@
         <p:spPr>
           <a:xfrm>
             <a:off x="7635240" y="1572840"/>
-            <a:ext cx="2377080" cy="164160"/>
+            <a:ext cx="2376720" cy="163800"/>
           </a:xfrm>
           <a:prstGeom prst="rect">
             <a:avLst/>
@@ -19071,7 +19102,7 @@
         <p:spPr>
           <a:xfrm>
             <a:off x="7635240" y="1847160"/>
-            <a:ext cx="2925720" cy="1298160"/>
+            <a:ext cx="2925360" cy="1297800"/>
           </a:xfrm>
           <a:prstGeom prst="roundRect">
             <a:avLst>
@@ -19123,7 +19154,7 @@
         <p:spPr>
           <a:xfrm>
             <a:off x="7781400" y="2011680"/>
-            <a:ext cx="2605680" cy="310680"/>
+            <a:ext cx="2605320" cy="310320"/>
           </a:xfrm>
           <a:prstGeom prst="rect">
             <a:avLst/>
@@ -19180,7 +19211,7 @@
         <p:spPr>
           <a:xfrm>
             <a:off x="7781400" y="2404800"/>
-            <a:ext cx="2605680" cy="566640"/>
+            <a:ext cx="2605320" cy="566280"/>
           </a:xfrm>
           <a:prstGeom prst="rect">
             <a:avLst/>
@@ -19315,7 +19346,7 @@
         <p:spPr>
           <a:xfrm>
             <a:off x="713160" y="3383280"/>
-            <a:ext cx="2925720" cy="164160"/>
+            <a:ext cx="2925360" cy="163800"/>
           </a:xfrm>
           <a:prstGeom prst="rect">
             <a:avLst/>
@@ -19372,7 +19403,7 @@
         <p:spPr>
           <a:xfrm>
             <a:off x="685800" y="3675960"/>
-            <a:ext cx="3410280" cy="1490040"/>
+            <a:ext cx="3409920" cy="1874519"/>
           </a:xfrm>
           <a:prstGeom prst="roundRect">
             <a:avLst>
@@ -19424,7 +19455,7 @@
         <p:spPr>
           <a:xfrm>
             <a:off x="685800" y="3675960"/>
-            <a:ext cx="50040" cy="1490040"/>
+            <a:ext cx="49680" cy="1874519"/>
           </a:xfrm>
           <a:prstGeom prst="rect">
             <a:avLst/>
@@ -19474,7 +19505,7 @@
         <p:spPr>
           <a:xfrm>
             <a:off x="850320" y="3749040"/>
-            <a:ext cx="3154320" cy="420120"/>
+            <a:ext cx="3153960" cy="347472"/>
           </a:xfrm>
           <a:prstGeom prst="rect">
             <a:avLst/>
@@ -19504,7 +19535,7 @@
               </a:tabLst>
             </a:pPr>
             <a:r>
-              <a:rPr b="1" lang="en-US" sz="1400" spc="-1" strike="noStrike" u="sng">
+              <a:rPr b="1" lang="en-US" sz="1050" spc="-1" strike="noStrike" u="sng">
                 <a:solidFill>
                   <a:srgbClr val="0563c1"/>
                 </a:solidFill>
@@ -19532,8 +19563,8 @@
         </p:nvSpPr>
         <p:spPr>
           <a:xfrm>
-            <a:off x="850320" y="4206240"/>
-            <a:ext cx="3135960" cy="959760"/>
+            <a:off x="850320" y="4133087"/>
+            <a:ext cx="3135600" cy="1353312"/>
           </a:xfrm>
           <a:prstGeom prst="rect">
             <a:avLst/>
@@ -19558,12 +19589,18 @@
               <a:lnSpc>
                 <a:spcPct val="100000"/>
               </a:lnSpc>
+              <a:spcBef>
+                <a:spcPts val="0"/>
+              </a:spcBef>
+              <a:spcAft>
+                <a:spcPts val="0"/>
+              </a:spcAft>
               <a:tabLst>
                 <a:tab algn="l" pos="0"/>
               </a:tabLst>
             </a:pPr>
             <a:r>
-              <a:rPr b="0" lang="en-US" sz="960" spc="-1" strike="noStrike">
+              <a:rPr b="0" lang="en-US" sz="880" spc="-1" strike="noStrike">
                 <a:solidFill>
                   <a:srgbClr val="55595f"/>
                 </a:solidFill>
@@ -19584,6 +19621,12 @@
               <a:lnSpc>
                 <a:spcPct val="100000"/>
               </a:lnSpc>
+              <a:spcBef>
+                <a:spcPts val="0"/>
+              </a:spcBef>
+              <a:spcAft>
+                <a:spcPts val="0"/>
+              </a:spcAft>
               <a:tabLst>
                 <a:tab algn="l" pos="0"/>
               </a:tabLst>
@@ -19600,12 +19643,18 @@
               <a:lnSpc>
                 <a:spcPct val="100000"/>
               </a:lnSpc>
+              <a:spcBef>
+                <a:spcPts val="0"/>
+              </a:spcBef>
+              <a:spcAft>
+                <a:spcPts val="0"/>
+              </a:spcAft>
               <a:tabLst>
                 <a:tab algn="l" pos="0"/>
               </a:tabLst>
             </a:pPr>
             <a:r>
-              <a:rPr b="0" lang="en-US" sz="960" spc="-1" strike="noStrike">
+              <a:rPr b="0" lang="en-US" sz="880" spc="-1" strike="noStrike">
                 <a:solidFill>
                   <a:srgbClr val="55595f"/>
                 </a:solidFill>
@@ -19632,7 +19681,7 @@
         <p:spPr>
           <a:xfrm>
             <a:off x="4380120" y="3675960"/>
-            <a:ext cx="3410280" cy="1490040"/>
+            <a:ext cx="3409920" cy="1874519"/>
           </a:xfrm>
           <a:prstGeom prst="roundRect">
             <a:avLst>
@@ -19684,7 +19733,7 @@
         <p:spPr>
           <a:xfrm>
             <a:off x="4380120" y="3675960"/>
-            <a:ext cx="50040" cy="1490040"/>
+            <a:ext cx="49680" cy="1874519"/>
           </a:xfrm>
           <a:prstGeom prst="rect">
             <a:avLst/>
@@ -19734,7 +19783,7 @@
         <p:spPr>
           <a:xfrm>
             <a:off x="4544640" y="3749040"/>
-            <a:ext cx="3154320" cy="420120"/>
+            <a:ext cx="3153960" cy="347472"/>
           </a:xfrm>
           <a:prstGeom prst="rect">
             <a:avLst/>
@@ -19764,7 +19813,7 @@
               </a:tabLst>
             </a:pPr>
             <a:r>
-              <a:rPr b="1" lang="en-US" sz="1200" spc="-1" strike="noStrike" u="sng">
+              <a:rPr b="1" lang="en-US" sz="1050" spc="-1" strike="noStrike" u="sng">
                 <a:solidFill>
                   <a:srgbClr val="0563c1"/>
                 </a:solidFill>
@@ -19775,7 +19824,7 @@
               </a:rPr>
               <a:t>TYPE 1 · Unbounded unresolved uncertainty</a:t>
             </a:r>
-            <a:endParaRPr b="0" lang="en-US" sz="1400" spc="-1" strike="noStrike">
+            <a:endParaRPr b="0" lang="en-US" sz="1200" spc="-1" strike="noStrike">
               <a:solidFill>
                 <a:srgbClr val="000000"/>
               </a:solidFill>
@@ -19792,8 +19841,8 @@
         </p:nvSpPr>
         <p:spPr>
           <a:xfrm>
-            <a:off x="4544640" y="4206240"/>
-            <a:ext cx="3135960" cy="932400"/>
+            <a:off x="4544640" y="4133087"/>
+            <a:ext cx="3135600" cy="1353312"/>
           </a:xfrm>
           <a:prstGeom prst="rect">
             <a:avLst/>
@@ -19818,12 +19867,18 @@
               <a:lnSpc>
                 <a:spcPct val="100000"/>
               </a:lnSpc>
+              <a:spcBef>
+                <a:spcPts val="0"/>
+              </a:spcBef>
+              <a:spcAft>
+                <a:spcPts val="0"/>
+              </a:spcAft>
               <a:tabLst>
                 <a:tab algn="l" pos="0"/>
               </a:tabLst>
             </a:pPr>
             <a:r>
-              <a:rPr b="0" lang="en-US" sz="960" spc="-1" strike="noStrike">
+              <a:rPr b="0" lang="en-US" sz="880" spc="-1" strike="noStrike">
                 <a:solidFill>
                   <a:srgbClr val="55595f"/>
                 </a:solidFill>
@@ -19845,14 +19900,17 @@
                 <a:spcPct val="100000"/>
               </a:lnSpc>
               <a:spcBef>
-                <a:spcPts val="499"/>
+                <a:spcPts val="0"/>
               </a:spcBef>
+              <a:spcAft>
+                <a:spcPts val="0"/>
+              </a:spcAft>
               <a:tabLst>
                 <a:tab algn="l" pos="0"/>
               </a:tabLst>
             </a:pPr>
             <a:r>
-              <a:rPr b="0" lang="en-US" sz="960" spc="-1" strike="noStrike">
+              <a:rPr b="0" lang="en-US" sz="880" spc="-1" strike="noStrike">
                 <a:solidFill>
                   <a:srgbClr val="55595f"/>
                 </a:solidFill>
@@ -19879,7 +19937,7 @@
         <p:spPr>
           <a:xfrm>
             <a:off x="8074080" y="3675960"/>
-            <a:ext cx="3410280" cy="1490040"/>
+            <a:ext cx="3409920" cy="1874519"/>
           </a:xfrm>
           <a:prstGeom prst="roundRect">
             <a:avLst>
@@ -19931,7 +19989,7 @@
         <p:spPr>
           <a:xfrm>
             <a:off x="8074080" y="3675960"/>
-            <a:ext cx="50040" cy="1490040"/>
+            <a:ext cx="49680" cy="1874519"/>
           </a:xfrm>
           <a:prstGeom prst="rect">
             <a:avLst/>
@@ -19981,7 +20039,7 @@
         <p:spPr>
           <a:xfrm>
             <a:off x="8238600" y="3794760"/>
-            <a:ext cx="3154320" cy="255600"/>
+            <a:ext cx="3153960" cy="347472"/>
           </a:xfrm>
           <a:prstGeom prst="rect">
             <a:avLst/>
@@ -20011,7 +20069,7 @@
               </a:tabLst>
             </a:pPr>
             <a:r>
-              <a:rPr b="1" lang="en-US" sz="1400" spc="-1" strike="noStrike" u="sng">
+              <a:rPr b="1" lang="en-US" sz="1050" spc="-1" strike="noStrike" u="sng">
                 <a:solidFill>
                   <a:srgbClr val="0563c1"/>
                 </a:solidFill>
@@ -20039,8 +20097,8 @@
         </p:nvSpPr>
         <p:spPr>
           <a:xfrm>
-            <a:off x="8238600" y="4105800"/>
-            <a:ext cx="3135960" cy="959760"/>
+            <a:off x="8238600" y="4133087"/>
+            <a:ext cx="3135600" cy="1353312"/>
           </a:xfrm>
           <a:prstGeom prst="rect">
             <a:avLst/>
@@ -20065,12 +20123,18 @@
               <a:lnSpc>
                 <a:spcPct val="100000"/>
               </a:lnSpc>
+              <a:spcBef>
+                <a:spcPts val="0"/>
+              </a:spcBef>
+              <a:spcAft>
+                <a:spcPts val="0"/>
+              </a:spcAft>
               <a:tabLst>
                 <a:tab algn="l" pos="0"/>
               </a:tabLst>
             </a:pPr>
             <a:r>
-              <a:rPr b="0" lang="en-US" sz="960" spc="-1" strike="noStrike">
+              <a:rPr b="0" lang="en-US" sz="880" spc="-1" strike="noStrike">
                 <a:solidFill>
                   <a:srgbClr val="55595f"/>
                 </a:solidFill>
@@ -20092,14 +20156,17 @@
                 <a:spcPct val="100000"/>
               </a:lnSpc>
               <a:spcBef>
-                <a:spcPts val="499"/>
+                <a:spcPts val="0"/>
               </a:spcBef>
+              <a:spcAft>
+                <a:spcPts val="0"/>
+              </a:spcAft>
               <a:tabLst>
                 <a:tab algn="l" pos="0"/>
               </a:tabLst>
             </a:pPr>
             <a:r>
-              <a:rPr b="0" lang="en-US" sz="960" spc="-1" strike="noStrike">
+              <a:rPr b="0" lang="en-US" sz="880" spc="-1" strike="noStrike">
                 <a:solidFill>
                   <a:srgbClr val="55595f"/>
                 </a:solidFill>
@@ -20130,7 +20197,7 @@
         <p:spPr>
           <a:xfrm>
             <a:off x="11064240" y="6537960"/>
-            <a:ext cx="502560" cy="164160"/>
+            <a:ext cx="502200" cy="163800"/>
           </a:xfrm>
           <a:prstGeom prst="rect">
             <a:avLst/>
@@ -20150,6 +20217,9 @@
                 <a:spcPct val="100000"/>
               </a:lnSpc>
               <a:buNone/>
+              <a:tabLst>
+                <a:tab algn="l" pos="0"/>
+              </a:tabLst>
               <a:defRPr b="0" lang="en-US" sz="850" spc="-1" strike="noStrike">
                 <a:solidFill>
                   <a:srgbClr val="5d6775"/>
@@ -20165,6 +20235,9 @@
                 <a:spcPct val="100000"/>
               </a:lnSpc>
               <a:buNone/>
+              <a:tabLst>
+                <a:tab algn="l" pos="0"/>
+              </a:tabLst>
             </a:pPr>
             <a:r>
               <a:rPr b="0" lang="en-US" sz="850" spc="-1" strike="noStrike">
@@ -20194,7 +20267,7 @@
         <p:spPr>
           <a:xfrm>
             <a:off x="1073880" y="6510600"/>
-            <a:ext cx="2552040" cy="104040"/>
+            <a:ext cx="2551680" cy="103680"/>
           </a:xfrm>
           <a:prstGeom prst="rect">
             <a:avLst/>
@@ -20319,7 +20392,7 @@
         <p:spPr>
           <a:xfrm>
             <a:off x="585360" y="164520"/>
-            <a:ext cx="2925720" cy="131400"/>
+            <a:ext cx="2925360" cy="131040"/>
           </a:xfrm>
           <a:prstGeom prst="rect">
             <a:avLst/>
@@ -20373,7 +20446,7 @@
         <p:spPr>
           <a:xfrm>
             <a:off x="10744200" y="164520"/>
-            <a:ext cx="685440" cy="131400"/>
+            <a:ext cx="685080" cy="131040"/>
           </a:xfrm>
           <a:prstGeom prst="rect">
             <a:avLst/>
@@ -20427,7 +20500,7 @@
         <p:spPr>
           <a:xfrm>
             <a:off x="585360" y="457200"/>
-            <a:ext cx="10826280" cy="10440"/>
+            <a:ext cx="10825920" cy="10080"/>
           </a:xfrm>
           <a:prstGeom prst="rect">
             <a:avLst/>
@@ -20483,7 +20556,7 @@
         <p:spPr>
           <a:xfrm>
             <a:off x="585360" y="530280"/>
-            <a:ext cx="10826280" cy="5040"/>
+            <a:ext cx="10825920" cy="4680"/>
           </a:xfrm>
           <a:prstGeom prst="rect">
             <a:avLst/>
@@ -20539,7 +20612,7 @@
         <p:spPr>
           <a:xfrm>
             <a:off x="621720" y="713160"/>
-            <a:ext cx="10698120" cy="716040"/>
+            <a:ext cx="10697760" cy="384048"/>
           </a:xfrm>
           <a:prstGeom prst="rect">
             <a:avLst/>
@@ -20566,7 +20639,7 @@
               </a:lnSpc>
             </a:pPr>
             <a:r>
-              <a:rPr b="1" lang="en-US" sz="2350" spc="-1" strike="noStrike">
+              <a:rPr b="1" lang="en-US" sz="1800" spc="-1" strike="noStrike">
                 <a:solidFill>
                   <a:srgbClr val="24355b"/>
                 </a:solidFill>
@@ -20593,7 +20666,7 @@
         <p:spPr>
           <a:xfrm>
             <a:off x="621720" y="1161360"/>
-            <a:ext cx="10698120" cy="164880"/>
+            <a:ext cx="10697760" cy="164520"/>
           </a:xfrm>
           <a:prstGeom prst="rect">
             <a:avLst/>
@@ -20647,7 +20720,7 @@
         <p:spPr>
           <a:xfrm>
             <a:off x="585360" y="6446520"/>
-            <a:ext cx="10826280" cy="10440"/>
+            <a:ext cx="10825920" cy="10080"/>
           </a:xfrm>
           <a:prstGeom prst="rect">
             <a:avLst/>
@@ -20703,7 +20776,7 @@
         <p:spPr>
           <a:xfrm>
             <a:off x="4352400" y="6537960"/>
-            <a:ext cx="3456000" cy="117720"/>
+            <a:ext cx="3455640" cy="117360"/>
           </a:xfrm>
           <a:prstGeom prst="rect">
             <a:avLst/>
@@ -20757,7 +20830,7 @@
         <p:spPr>
           <a:xfrm>
             <a:off x="11018520" y="6537960"/>
-            <a:ext cx="273960" cy="129960"/>
+            <a:ext cx="273600" cy="129600"/>
           </a:xfrm>
           <a:prstGeom prst="rect">
             <a:avLst/>
@@ -20811,7 +20884,7 @@
         <p:spPr>
           <a:xfrm>
             <a:off x="820080" y="6510600"/>
-            <a:ext cx="3059640" cy="117720"/>
+            <a:ext cx="3059280" cy="117360"/>
           </a:xfrm>
           <a:prstGeom prst="rect">
             <a:avLst/>
@@ -20867,7 +20940,7 @@
         <p:spPr>
           <a:xfrm>
             <a:off x="621720" y="1627560"/>
-            <a:ext cx="3337200" cy="1416960"/>
+            <a:ext cx="3336840" cy="1416600"/>
           </a:xfrm>
           <a:prstGeom prst="roundRect">
             <a:avLst>
@@ -20925,7 +20998,7 @@
         <p:spPr>
           <a:xfrm>
             <a:off x="1051920" y="1761840"/>
-            <a:ext cx="336600" cy="535320"/>
+            <a:ext cx="336240" cy="535320"/>
           </a:xfrm>
           <a:prstGeom prst="rect">
             <a:avLst/>
@@ -20979,7 +21052,7 @@
         <p:spPr>
           <a:xfrm>
             <a:off x="1938240" y="1851120"/>
-            <a:ext cx="1599840" cy="146880"/>
+            <a:ext cx="1599480" cy="146880"/>
           </a:xfrm>
           <a:prstGeom prst="rect">
             <a:avLst/>
@@ -21087,7 +21160,7 @@
         <p:spPr>
           <a:xfrm>
             <a:off x="4160520" y="1627560"/>
-            <a:ext cx="3337200" cy="1416960"/>
+            <a:ext cx="3336840" cy="1416600"/>
           </a:xfrm>
           <a:prstGeom prst="roundRect">
             <a:avLst>
@@ -21145,7 +21218,7 @@
         <p:spPr>
           <a:xfrm>
             <a:off x="4440600" y="1761840"/>
-            <a:ext cx="636840" cy="535320"/>
+            <a:ext cx="636480" cy="535320"/>
           </a:xfrm>
           <a:prstGeom prst="rect">
             <a:avLst/>
@@ -21199,7 +21272,7 @@
         <p:spPr>
           <a:xfrm>
             <a:off x="5541840" y="1851120"/>
-            <a:ext cx="1470240" cy="146880"/>
+            <a:ext cx="1469880" cy="146880"/>
           </a:xfrm>
           <a:prstGeom prst="rect">
             <a:avLst/>
@@ -21307,7 +21380,7 @@
         <p:spPr>
           <a:xfrm>
             <a:off x="7699320" y="1627560"/>
-            <a:ext cx="3346200" cy="1416960"/>
+            <a:ext cx="3345840" cy="1416600"/>
           </a:xfrm>
           <a:prstGeom prst="roundRect">
             <a:avLst>
@@ -21365,7 +21438,7 @@
         <p:spPr>
           <a:xfrm>
             <a:off x="8129520" y="1761840"/>
-            <a:ext cx="336600" cy="535320"/>
+            <a:ext cx="336240" cy="535320"/>
           </a:xfrm>
           <a:prstGeom prst="rect">
             <a:avLst/>
@@ -21419,7 +21492,7 @@
         <p:spPr>
           <a:xfrm>
             <a:off x="9150840" y="1851120"/>
-            <a:ext cx="1339200" cy="146880"/>
+            <a:ext cx="1338840" cy="146880"/>
           </a:xfrm>
           <a:prstGeom prst="rect">
             <a:avLst/>
@@ -21527,7 +21600,7 @@
         <p:spPr>
           <a:xfrm>
             <a:off x="621720" y="3246120"/>
-            <a:ext cx="10945080" cy="1005480"/>
+            <a:ext cx="10944720" cy="1005120"/>
           </a:xfrm>
           <a:prstGeom prst="roundRect">
             <a:avLst>
@@ -21585,7 +21658,7 @@
         <p:spPr>
           <a:xfrm>
             <a:off x="1005480" y="3387240"/>
-            <a:ext cx="1014840" cy="146880"/>
+            <a:ext cx="1014480" cy="146880"/>
           </a:xfrm>
           <a:prstGeom prst="rect">
             <a:avLst/>
@@ -21639,7 +21712,7 @@
         <p:spPr>
           <a:xfrm>
             <a:off x="2148840" y="3328920"/>
-            <a:ext cx="8857800" cy="447480"/>
+            <a:ext cx="8857440" cy="447120"/>
           </a:xfrm>
           <a:prstGeom prst="rect">
             <a:avLst/>
@@ -21716,7 +21789,7 @@
         <p:spPr>
           <a:xfrm>
             <a:off x="2148840" y="3848040"/>
-            <a:ext cx="8857800" cy="209160"/>
+            <a:ext cx="8857440" cy="208800"/>
           </a:xfrm>
           <a:prstGeom prst="rect">
             <a:avLst/>
@@ -21770,7 +21843,7 @@
         <p:spPr>
           <a:xfrm>
             <a:off x="685800" y="4485960"/>
-            <a:ext cx="1810080" cy="144000"/>
+            <a:ext cx="1809720" cy="144000"/>
           </a:xfrm>
           <a:prstGeom prst="rect">
             <a:avLst/>
@@ -21824,7 +21897,7 @@
         <p:spPr>
           <a:xfrm>
             <a:off x="631080" y="4681800"/>
-            <a:ext cx="1325520" cy="511560"/>
+            <a:ext cx="1325160" cy="511200"/>
           </a:xfrm>
           <a:prstGeom prst="roundRect">
             <a:avLst>
@@ -21882,7 +21955,7 @@
         <p:spPr>
           <a:xfrm>
             <a:off x="1182600" y="4744800"/>
-            <a:ext cx="222120" cy="138960"/>
+            <a:ext cx="221760" cy="138960"/>
           </a:xfrm>
           <a:prstGeom prst="rect">
             <a:avLst/>
@@ -21938,7 +22011,7 @@
         <p:spPr>
           <a:xfrm>
             <a:off x="914400" y="4933440"/>
-            <a:ext cx="758520" cy="136080"/>
+            <a:ext cx="758160" cy="136080"/>
           </a:xfrm>
           <a:prstGeom prst="rect">
             <a:avLst/>
@@ -21994,7 +22067,7 @@
         <p:spPr>
           <a:xfrm>
             <a:off x="2066400" y="4681800"/>
-            <a:ext cx="1325520" cy="511560"/>
+            <a:ext cx="1325160" cy="511200"/>
           </a:xfrm>
           <a:prstGeom prst="roundRect">
             <a:avLst>
@@ -22052,7 +22125,7 @@
         <p:spPr>
           <a:xfrm>
             <a:off x="2617920" y="4744800"/>
-            <a:ext cx="222120" cy="138960"/>
+            <a:ext cx="221760" cy="138960"/>
           </a:xfrm>
           <a:prstGeom prst="rect">
             <a:avLst/>
@@ -22108,7 +22181,7 @@
         <p:spPr>
           <a:xfrm>
             <a:off x="2439720" y="4933440"/>
-            <a:ext cx="578880" cy="136080"/>
+            <a:ext cx="578520" cy="136080"/>
           </a:xfrm>
           <a:prstGeom prst="rect">
             <a:avLst/>
@@ -22164,7 +22237,7 @@
         <p:spPr>
           <a:xfrm>
             <a:off x="3502080" y="4681800"/>
-            <a:ext cx="1325520" cy="511560"/>
+            <a:ext cx="1325160" cy="511200"/>
           </a:xfrm>
           <a:prstGeom prst="roundRect">
             <a:avLst>
@@ -22222,7 +22295,7 @@
         <p:spPr>
           <a:xfrm>
             <a:off x="4053600" y="4744800"/>
-            <a:ext cx="222120" cy="138960"/>
+            <a:ext cx="221760" cy="138960"/>
           </a:xfrm>
           <a:prstGeom prst="rect">
             <a:avLst/>
@@ -22278,7 +22351,7 @@
         <p:spPr>
           <a:xfrm>
             <a:off x="3882240" y="4933440"/>
-            <a:ext cx="565200" cy="136080"/>
+            <a:ext cx="564840" cy="136080"/>
           </a:xfrm>
           <a:prstGeom prst="rect">
             <a:avLst/>
@@ -22334,7 +22407,7 @@
         <p:spPr>
           <a:xfrm>
             <a:off x="4937760" y="4681800"/>
-            <a:ext cx="1325520" cy="511560"/>
+            <a:ext cx="1325160" cy="511200"/>
           </a:xfrm>
           <a:prstGeom prst="roundRect">
             <a:avLst>
@@ -22392,7 +22465,7 @@
         <p:spPr>
           <a:xfrm>
             <a:off x="5489280" y="4744800"/>
-            <a:ext cx="222120" cy="138960"/>
+            <a:ext cx="221760" cy="138960"/>
           </a:xfrm>
           <a:prstGeom prst="rect">
             <a:avLst/>
@@ -22448,7 +22521,7 @@
         <p:spPr>
           <a:xfrm>
             <a:off x="5339880" y="4933440"/>
-            <a:ext cx="520920" cy="136080"/>
+            <a:ext cx="520560" cy="136080"/>
           </a:xfrm>
           <a:prstGeom prst="rect">
             <a:avLst/>
@@ -22504,7 +22577,7 @@
         <p:spPr>
           <a:xfrm>
             <a:off x="6373440" y="4681800"/>
-            <a:ext cx="1325520" cy="511560"/>
+            <a:ext cx="1325160" cy="511200"/>
           </a:xfrm>
           <a:prstGeom prst="roundRect">
             <a:avLst>
@@ -22562,7 +22635,7 @@
         <p:spPr>
           <a:xfrm>
             <a:off x="6924960" y="4744800"/>
-            <a:ext cx="222120" cy="138960"/>
+            <a:ext cx="221760" cy="138960"/>
           </a:xfrm>
           <a:prstGeom prst="rect">
             <a:avLst/>
@@ -22618,7 +22691,7 @@
         <p:spPr>
           <a:xfrm>
             <a:off x="6860880" y="4933440"/>
-            <a:ext cx="350280" cy="136080"/>
+            <a:ext cx="349920" cy="136080"/>
           </a:xfrm>
           <a:prstGeom prst="rect">
             <a:avLst/>
@@ -22674,7 +22747,7 @@
         <p:spPr>
           <a:xfrm>
             <a:off x="7809120" y="4681800"/>
-            <a:ext cx="1325520" cy="511560"/>
+            <a:ext cx="1325160" cy="511200"/>
           </a:xfrm>
           <a:prstGeom prst="roundRect">
             <a:avLst>
@@ -22732,7 +22805,7 @@
         <p:spPr>
           <a:xfrm>
             <a:off x="8360640" y="4744800"/>
-            <a:ext cx="222120" cy="138960"/>
+            <a:ext cx="221760" cy="138960"/>
           </a:xfrm>
           <a:prstGeom prst="rect">
             <a:avLst/>
@@ -22788,7 +22861,7 @@
         <p:spPr>
           <a:xfrm>
             <a:off x="8262360" y="4933440"/>
-            <a:ext cx="418680" cy="136080"/>
+            <a:ext cx="418320" cy="136080"/>
           </a:xfrm>
           <a:prstGeom prst="rect">
             <a:avLst/>
@@ -22844,7 +22917,7 @@
         <p:spPr>
           <a:xfrm>
             <a:off x="631080" y="5367600"/>
-            <a:ext cx="5284800" cy="566640"/>
+            <a:ext cx="5284440" cy="566280"/>
           </a:xfrm>
           <a:prstGeom prst="roundRect">
             <a:avLst>
@@ -22904,7 +22977,7 @@
         <p:spPr>
           <a:xfrm>
             <a:off x="2041200" y="5518440"/>
-            <a:ext cx="2445840" cy="154800"/>
+            <a:ext cx="2445480" cy="154800"/>
           </a:xfrm>
           <a:prstGeom prst="rect">
             <a:avLst/>
@@ -22958,7 +23031,7 @@
         <p:spPr>
           <a:xfrm>
             <a:off x="6089760" y="5367600"/>
-            <a:ext cx="3227400" cy="566640"/>
+            <a:ext cx="3227040" cy="566280"/>
           </a:xfrm>
           <a:prstGeom prst="roundRect">
             <a:avLst>
@@ -23018,7 +23091,7 @@
         <p:spPr>
           <a:xfrm>
             <a:off x="7104960" y="5518440"/>
-            <a:ext cx="1206720" cy="154800"/>
+            <a:ext cx="1206360" cy="154800"/>
           </a:xfrm>
           <a:prstGeom prst="rect">
             <a:avLst/>
@@ -23072,7 +23145,7 @@
         <p:spPr>
           <a:xfrm>
             <a:off x="9491400" y="5367600"/>
-            <a:ext cx="2075400" cy="566640"/>
+            <a:ext cx="2075040" cy="566280"/>
           </a:xfrm>
           <a:prstGeom prst="roundRect">
             <a:avLst>
@@ -23132,7 +23205,7 @@
         <p:spPr>
           <a:xfrm>
             <a:off x="10081080" y="5521680"/>
-            <a:ext cx="895680" cy="148320"/>
+            <a:ext cx="895320" cy="148320"/>
           </a:xfrm>
           <a:prstGeom prst="rect">
             <a:avLst/>
@@ -23186,7 +23259,7 @@
         <p:spPr>
           <a:xfrm>
             <a:off x="2605320" y="6022080"/>
-            <a:ext cx="5853240" cy="134640"/>
+            <a:ext cx="5852880" cy="134640"/>
           </a:xfrm>
           <a:prstGeom prst="rect">
             <a:avLst/>
@@ -23270,7 +23343,7 @@
         <p:spPr>
           <a:xfrm>
             <a:off x="567000" y="164520"/>
-            <a:ext cx="3200040" cy="129960"/>
+            <a:ext cx="3199680" cy="129600"/>
           </a:xfrm>
           <a:prstGeom prst="rect">
             <a:avLst/>
@@ -23324,7 +23397,7 @@
         <p:spPr>
           <a:xfrm>
             <a:off x="10716840" y="164520"/>
-            <a:ext cx="685440" cy="129960"/>
+            <a:ext cx="685080" cy="129600"/>
           </a:xfrm>
           <a:prstGeom prst="rect">
             <a:avLst/>
@@ -23378,7 +23451,7 @@
         <p:spPr>
           <a:xfrm>
             <a:off x="567000" y="640080"/>
-            <a:ext cx="10515240" cy="358560"/>
+            <a:ext cx="10514880" cy="358200"/>
           </a:xfrm>
           <a:prstGeom prst="rect">
             <a:avLst/>
@@ -23434,7 +23507,7 @@
         <p:spPr>
           <a:xfrm>
             <a:off x="567000" y="1078920"/>
-            <a:ext cx="10515240" cy="160200"/>
+            <a:ext cx="10514880" cy="159840"/>
           </a:xfrm>
           <a:prstGeom prst="rect">
             <a:avLst/>
@@ -23488,7 +23561,7 @@
         <p:spPr>
           <a:xfrm>
             <a:off x="567000" y="457200"/>
-            <a:ext cx="10835280" cy="10440"/>
+            <a:ext cx="10834920" cy="10080"/>
           </a:xfrm>
           <a:prstGeom prst="rect">
             <a:avLst/>
@@ -23544,7 +23617,7 @@
         <p:spPr>
           <a:xfrm>
             <a:off x="567000" y="1508760"/>
-            <a:ext cx="3456000" cy="749520"/>
+            <a:ext cx="3455640" cy="749160"/>
           </a:xfrm>
           <a:prstGeom prst="roundRect">
             <a:avLst>
@@ -23602,7 +23675,7 @@
         <p:spPr>
           <a:xfrm>
             <a:off x="676800" y="1581840"/>
-            <a:ext cx="347040" cy="142200"/>
+            <a:ext cx="346680" cy="141840"/>
           </a:xfrm>
           <a:prstGeom prst="rect">
             <a:avLst/>
@@ -23656,7 +23729,7 @@
         <p:spPr>
           <a:xfrm>
             <a:off x="1069920" y="1572840"/>
-            <a:ext cx="2697120" cy="163080"/>
+            <a:ext cx="2696760" cy="162720"/>
           </a:xfrm>
           <a:prstGeom prst="rect">
             <a:avLst/>
@@ -23710,7 +23783,7 @@
         <p:spPr>
           <a:xfrm>
             <a:off x="676800" y="1819800"/>
-            <a:ext cx="3236760" cy="259560"/>
+            <a:ext cx="3236400" cy="259200"/>
           </a:xfrm>
           <a:prstGeom prst="rect">
             <a:avLst/>
@@ -23764,7 +23837,7 @@
         <p:spPr>
           <a:xfrm>
             <a:off x="4087440" y="1508760"/>
-            <a:ext cx="3456000" cy="749520"/>
+            <a:ext cx="3455640" cy="749160"/>
           </a:xfrm>
           <a:prstGeom prst="roundRect">
             <a:avLst>
@@ -23822,7 +23895,7 @@
         <p:spPr>
           <a:xfrm>
             <a:off x="4197240" y="1581840"/>
-            <a:ext cx="347040" cy="142200"/>
+            <a:ext cx="346680" cy="141840"/>
           </a:xfrm>
           <a:prstGeom prst="rect">
             <a:avLst/>
@@ -23876,7 +23949,7 @@
         <p:spPr>
           <a:xfrm>
             <a:off x="4590360" y="1572840"/>
-            <a:ext cx="2697120" cy="163080"/>
+            <a:ext cx="2696760" cy="162720"/>
           </a:xfrm>
           <a:prstGeom prst="rect">
             <a:avLst/>
@@ -23930,7 +24003,7 @@
         <p:spPr>
           <a:xfrm>
             <a:off x="4197240" y="1819800"/>
-            <a:ext cx="3236760" cy="259560"/>
+            <a:ext cx="3236400" cy="259200"/>
           </a:xfrm>
           <a:prstGeom prst="rect">
             <a:avLst/>
@@ -23984,7 +24057,7 @@
         <p:spPr>
           <a:xfrm>
             <a:off x="7607880" y="1508760"/>
-            <a:ext cx="3456000" cy="749520"/>
+            <a:ext cx="3455640" cy="749160"/>
           </a:xfrm>
           <a:prstGeom prst="roundRect">
             <a:avLst>
@@ -24042,7 +24115,7 @@
         <p:spPr>
           <a:xfrm>
             <a:off x="7717680" y="1581840"/>
-            <a:ext cx="347040" cy="142200"/>
+            <a:ext cx="346680" cy="141840"/>
           </a:xfrm>
           <a:prstGeom prst="rect">
             <a:avLst/>
@@ -24096,7 +24169,7 @@
         <p:spPr>
           <a:xfrm>
             <a:off x="8110800" y="1572840"/>
-            <a:ext cx="2697120" cy="163080"/>
+            <a:ext cx="2696760" cy="162720"/>
           </a:xfrm>
           <a:prstGeom prst="rect">
             <a:avLst/>
@@ -24150,7 +24223,7 @@
         <p:spPr>
           <a:xfrm>
             <a:off x="7717680" y="1819800"/>
-            <a:ext cx="3236760" cy="259560"/>
+            <a:ext cx="3236400" cy="259200"/>
           </a:xfrm>
           <a:prstGeom prst="rect">
             <a:avLst/>
@@ -24204,7 +24277,7 @@
         <p:spPr>
           <a:xfrm>
             <a:off x="567000" y="2541960"/>
-            <a:ext cx="1618200" cy="914040"/>
+            <a:ext cx="1617840" cy="913680"/>
           </a:xfrm>
           <a:prstGeom prst="roundRect">
             <a:avLst>
@@ -24262,7 +24335,7 @@
         <p:spPr>
           <a:xfrm>
             <a:off x="640080" y="2615040"/>
-            <a:ext cx="319680" cy="134280"/>
+            <a:ext cx="319320" cy="133920"/>
           </a:xfrm>
           <a:prstGeom prst="rect">
             <a:avLst/>
@@ -24316,7 +24389,7 @@
         <p:spPr>
           <a:xfrm>
             <a:off x="640080" y="2825640"/>
-            <a:ext cx="1471680" cy="143640"/>
+            <a:ext cx="1471320" cy="143280"/>
           </a:xfrm>
           <a:prstGeom prst="rect">
             <a:avLst/>
@@ -24370,7 +24443,7 @@
         <p:spPr>
           <a:xfrm>
             <a:off x="640080" y="3108960"/>
-            <a:ext cx="1471680" cy="119160"/>
+            <a:ext cx="1471320" cy="118800"/>
           </a:xfrm>
           <a:prstGeom prst="rect">
             <a:avLst/>
@@ -24424,7 +24497,7 @@
         <p:spPr>
           <a:xfrm>
             <a:off x="2199240" y="2889360"/>
-            <a:ext cx="136800" cy="182520"/>
+            <a:ext cx="136440" cy="182520"/>
           </a:xfrm>
           <a:prstGeom prst="rect">
             <a:avLst/>
@@ -24478,7 +24551,7 @@
         <p:spPr>
           <a:xfrm>
             <a:off x="2350080" y="2541960"/>
-            <a:ext cx="1618200" cy="914040"/>
+            <a:ext cx="1617840" cy="913680"/>
           </a:xfrm>
           <a:prstGeom prst="roundRect">
             <a:avLst>
@@ -24536,7 +24609,7 @@
         <p:spPr>
           <a:xfrm>
             <a:off x="2423160" y="2615040"/>
-            <a:ext cx="319680" cy="134280"/>
+            <a:ext cx="319320" cy="133920"/>
           </a:xfrm>
           <a:prstGeom prst="rect">
             <a:avLst/>
@@ -24590,7 +24663,7 @@
         <p:spPr>
           <a:xfrm>
             <a:off x="2423160" y="2825640"/>
-            <a:ext cx="1471680" cy="143640"/>
+            <a:ext cx="1471320" cy="143280"/>
           </a:xfrm>
           <a:prstGeom prst="rect">
             <a:avLst/>
@@ -24644,7 +24717,7 @@
         <p:spPr>
           <a:xfrm>
             <a:off x="2423160" y="3108960"/>
-            <a:ext cx="1471680" cy="237240"/>
+            <a:ext cx="1471320" cy="237240"/>
           </a:xfrm>
           <a:prstGeom prst="rect">
             <a:avLst/>
@@ -24698,7 +24771,7 @@
         <p:spPr>
           <a:xfrm>
             <a:off x="3982320" y="2889360"/>
-            <a:ext cx="136800" cy="182520"/>
+            <a:ext cx="136440" cy="182520"/>
           </a:xfrm>
           <a:prstGeom prst="rect">
             <a:avLst/>
@@ -24752,7 +24825,7 @@
         <p:spPr>
           <a:xfrm>
             <a:off x="4133160" y="2541960"/>
-            <a:ext cx="1618200" cy="914040"/>
+            <a:ext cx="1617840" cy="913680"/>
           </a:xfrm>
           <a:prstGeom prst="roundRect">
             <a:avLst>
@@ -24810,7 +24883,7 @@
         <p:spPr>
           <a:xfrm>
             <a:off x="4206240" y="2615040"/>
-            <a:ext cx="319680" cy="134280"/>
+            <a:ext cx="319320" cy="133920"/>
           </a:xfrm>
           <a:prstGeom prst="rect">
             <a:avLst/>
@@ -24864,7 +24937,7 @@
         <p:spPr>
           <a:xfrm>
             <a:off x="4206240" y="2825640"/>
-            <a:ext cx="1471680" cy="143640"/>
+            <a:ext cx="1471320" cy="143280"/>
           </a:xfrm>
           <a:prstGeom prst="rect">
             <a:avLst/>
@@ -24918,7 +24991,7 @@
         <p:spPr>
           <a:xfrm>
             <a:off x="4206240" y="3108960"/>
-            <a:ext cx="1471680" cy="119160"/>
+            <a:ext cx="1471320" cy="118800"/>
           </a:xfrm>
           <a:prstGeom prst="rect">
             <a:avLst/>
@@ -24972,7 +25045,7 @@
         <p:spPr>
           <a:xfrm>
             <a:off x="5765400" y="2889360"/>
-            <a:ext cx="136800" cy="182520"/>
+            <a:ext cx="136440" cy="182520"/>
           </a:xfrm>
           <a:prstGeom prst="rect">
             <a:avLst/>
@@ -25026,7 +25099,7 @@
         <p:spPr>
           <a:xfrm>
             <a:off x="5916240" y="2541960"/>
-            <a:ext cx="1618200" cy="914040"/>
+            <a:ext cx="1617840" cy="913680"/>
           </a:xfrm>
           <a:prstGeom prst="roundRect">
             <a:avLst>
@@ -25084,7 +25157,7 @@
         <p:spPr>
           <a:xfrm>
             <a:off x="5989320" y="2615040"/>
-            <a:ext cx="319680" cy="134280"/>
+            <a:ext cx="319320" cy="133920"/>
           </a:xfrm>
           <a:prstGeom prst="rect">
             <a:avLst/>
@@ -25138,7 +25211,7 @@
         <p:spPr>
           <a:xfrm>
             <a:off x="5989320" y="2825640"/>
-            <a:ext cx="1471680" cy="143640"/>
+            <a:ext cx="1471320" cy="143280"/>
           </a:xfrm>
           <a:prstGeom prst="rect">
             <a:avLst/>
@@ -25192,7 +25265,7 @@
         <p:spPr>
           <a:xfrm>
             <a:off x="5989320" y="3108960"/>
-            <a:ext cx="1471680" cy="119160"/>
+            <a:ext cx="1471320" cy="118800"/>
           </a:xfrm>
           <a:prstGeom prst="rect">
             <a:avLst/>
@@ -25246,7 +25319,7 @@
         <p:spPr>
           <a:xfrm>
             <a:off x="7548480" y="2889360"/>
-            <a:ext cx="136800" cy="182520"/>
+            <a:ext cx="136440" cy="182520"/>
           </a:xfrm>
           <a:prstGeom prst="rect">
             <a:avLst/>
@@ -25300,7 +25373,7 @@
         <p:spPr>
           <a:xfrm>
             <a:off x="7699320" y="2541960"/>
-            <a:ext cx="1618200" cy="914040"/>
+            <a:ext cx="1617840" cy="913680"/>
           </a:xfrm>
           <a:prstGeom prst="roundRect">
             <a:avLst>
@@ -25358,7 +25431,7 @@
         <p:spPr>
           <a:xfrm>
             <a:off x="7772400" y="2615040"/>
-            <a:ext cx="319680" cy="134280"/>
+            <a:ext cx="319320" cy="133920"/>
           </a:xfrm>
           <a:prstGeom prst="rect">
             <a:avLst/>
@@ -25412,7 +25485,7 @@
         <p:spPr>
           <a:xfrm>
             <a:off x="7772400" y="2825640"/>
-            <a:ext cx="1471680" cy="286200"/>
+            <a:ext cx="1471320" cy="286200"/>
           </a:xfrm>
           <a:prstGeom prst="rect">
             <a:avLst/>
@@ -25466,7 +25539,7 @@
         <p:spPr>
           <a:xfrm>
             <a:off x="7772400" y="3108960"/>
-            <a:ext cx="1471680" cy="119160"/>
+            <a:ext cx="1471320" cy="118800"/>
           </a:xfrm>
           <a:prstGeom prst="rect">
             <a:avLst/>
@@ -25520,7 +25593,7 @@
         <p:spPr>
           <a:xfrm>
             <a:off x="9331560" y="2889360"/>
-            <a:ext cx="136800" cy="182520"/>
+            <a:ext cx="136440" cy="182520"/>
           </a:xfrm>
           <a:prstGeom prst="rect">
             <a:avLst/>
@@ -25574,7 +25647,7 @@
         <p:spPr>
           <a:xfrm>
             <a:off x="9482400" y="2541960"/>
-            <a:ext cx="1618200" cy="914040"/>
+            <a:ext cx="1617840" cy="913680"/>
           </a:xfrm>
           <a:prstGeom prst="roundRect">
             <a:avLst>
@@ -25632,7 +25705,7 @@
         <p:spPr>
           <a:xfrm>
             <a:off x="9555480" y="2615040"/>
-            <a:ext cx="319680" cy="134280"/>
+            <a:ext cx="319320" cy="133920"/>
           </a:xfrm>
           <a:prstGeom prst="rect">
             <a:avLst/>
@@ -25686,7 +25759,7 @@
         <p:spPr>
           <a:xfrm>
             <a:off x="9555480" y="2825640"/>
-            <a:ext cx="1471680" cy="143640"/>
+            <a:ext cx="1471320" cy="143280"/>
           </a:xfrm>
           <a:prstGeom prst="rect">
             <a:avLst/>
@@ -25740,7 +25813,7 @@
         <p:spPr>
           <a:xfrm>
             <a:off x="9555480" y="3108960"/>
-            <a:ext cx="1471680" cy="237240"/>
+            <a:ext cx="1471320" cy="237240"/>
           </a:xfrm>
           <a:prstGeom prst="rect">
             <a:avLst/>
@@ -25794,7 +25867,7 @@
         <p:spPr>
           <a:xfrm>
             <a:off x="567000" y="3703320"/>
-            <a:ext cx="5257440" cy="1425960"/>
+            <a:ext cx="5257080" cy="1425600"/>
           </a:xfrm>
           <a:prstGeom prst="roundRect">
             <a:avLst>
@@ -25852,7 +25925,7 @@
         <p:spPr>
           <a:xfrm>
             <a:off x="768240" y="3867840"/>
-            <a:ext cx="1279800" cy="258840"/>
+            <a:ext cx="1279440" cy="258840"/>
           </a:xfrm>
           <a:prstGeom prst="rect">
             <a:avLst/>
@@ -25906,7 +25979,7 @@
         <p:spPr>
           <a:xfrm>
             <a:off x="768240" y="4187880"/>
-            <a:ext cx="4681440" cy="586440"/>
+            <a:ext cx="4681080" cy="586080"/>
           </a:xfrm>
           <a:prstGeom prst="rect">
             <a:avLst/>
@@ -25960,7 +26033,7 @@
         <p:spPr>
           <a:xfrm>
             <a:off x="6144840" y="3703320"/>
-            <a:ext cx="5257440" cy="1425960"/>
+            <a:ext cx="5257080" cy="1425600"/>
           </a:xfrm>
           <a:prstGeom prst="roundRect">
             <a:avLst>
@@ -26018,7 +26091,7 @@
         <p:spPr>
           <a:xfrm>
             <a:off x="6346080" y="3867840"/>
-            <a:ext cx="1462680" cy="129960"/>
+            <a:ext cx="1462320" cy="129600"/>
           </a:xfrm>
           <a:prstGeom prst="rect">
             <a:avLst/>
@@ -26072,7 +26145,7 @@
         <p:spPr>
           <a:xfrm>
             <a:off x="6346080" y="4187880"/>
-            <a:ext cx="4681440" cy="586440"/>
+            <a:ext cx="4681080" cy="586080"/>
           </a:xfrm>
           <a:prstGeom prst="rect">
             <a:avLst/>
@@ -26126,7 +26199,7 @@
         <p:spPr>
           <a:xfrm>
             <a:off x="567000" y="5285160"/>
-            <a:ext cx="10835280" cy="694440"/>
+            <a:ext cx="10834920" cy="694080"/>
           </a:xfrm>
           <a:prstGeom prst="roundRect">
             <a:avLst>
@@ -26184,7 +26257,7 @@
         <p:spPr>
           <a:xfrm>
             <a:off x="768240" y="5394960"/>
-            <a:ext cx="3977280" cy="402120"/>
+            <a:ext cx="3976920" cy="401760"/>
           </a:xfrm>
           <a:prstGeom prst="rect">
             <a:avLst/>
@@ -26238,7 +26311,7 @@
         <p:spPr>
           <a:xfrm>
             <a:off x="567000" y="6236280"/>
-            <a:ext cx="10835280" cy="10440"/>
+            <a:ext cx="10834920" cy="10080"/>
           </a:xfrm>
           <a:prstGeom prst="rect">
             <a:avLst/>
@@ -26294,7 +26367,7 @@
         <p:spPr>
           <a:xfrm>
             <a:off x="4069080" y="6355080"/>
-            <a:ext cx="3657240" cy="110160"/>
+            <a:ext cx="3656880" cy="109800"/>
           </a:xfrm>
           <a:prstGeom prst="rect">
             <a:avLst/>
@@ -26348,7 +26421,7 @@
         <p:spPr>
           <a:xfrm>
             <a:off x="11045880" y="6355080"/>
-            <a:ext cx="273960" cy="129960"/>
+            <a:ext cx="273600" cy="129600"/>
           </a:xfrm>
           <a:prstGeom prst="rect">
             <a:avLst/>
@@ -26402,7 +26475,7 @@
         <p:spPr>
           <a:xfrm>
             <a:off x="4956120" y="5358240"/>
-            <a:ext cx="6144480" cy="117720"/>
+            <a:ext cx="6144120" cy="117360"/>
           </a:xfrm>
           <a:prstGeom prst="rect">
             <a:avLst/>
@@ -26456,7 +26529,7 @@
         <p:spPr>
           <a:xfrm>
             <a:off x="4956120" y="5577840"/>
-            <a:ext cx="962640" cy="273960"/>
+            <a:ext cx="962280" cy="273600"/>
           </a:xfrm>
           <a:prstGeom prst="roundRect">
             <a:avLst>
@@ -26514,7 +26587,7 @@
         <p:spPr>
           <a:xfrm>
             <a:off x="5010840" y="5667120"/>
-            <a:ext cx="853200" cy="131760"/>
+            <a:ext cx="852840" cy="131400"/>
           </a:xfrm>
           <a:prstGeom prst="rect">
             <a:avLst/>
@@ -26541,7 +26614,7 @@
               </a:lnSpc>
             </a:pPr>
             <a:r>
-              <a:rPr b="1" lang="en-US" sz="860" spc="-1" strike="noStrike" u="sng">
+              <a:rPr b="1" lang="en-US" sz="700" spc="-1" strike="noStrike" u="sng">
                 <a:solidFill>
                   <a:srgbClr val="0563c1"/>
                 </a:solidFill>
@@ -26570,7 +26643,7 @@
         <p:spPr>
           <a:xfrm>
             <a:off x="5992200" y="5577840"/>
-            <a:ext cx="962640" cy="273960"/>
+            <a:ext cx="962280" cy="273600"/>
           </a:xfrm>
           <a:prstGeom prst="roundRect">
             <a:avLst>
@@ -26628,7 +26701,7 @@
         <p:spPr>
           <a:xfrm>
             <a:off x="6047280" y="5667120"/>
-            <a:ext cx="853200" cy="131760"/>
+            <a:ext cx="852840" cy="131400"/>
           </a:xfrm>
           <a:prstGeom prst="rect">
             <a:avLst/>
@@ -26655,7 +26728,7 @@
               </a:lnSpc>
             </a:pPr>
             <a:r>
-              <a:rPr b="1" lang="en-US" sz="860" spc="-1" strike="noStrike" u="sng">
+              <a:rPr b="1" lang="en-US" sz="700" spc="-1" strike="noStrike" u="sng">
                 <a:solidFill>
                   <a:srgbClr val="0563c1"/>
                 </a:solidFill>
@@ -26684,7 +26757,7 @@
         <p:spPr>
           <a:xfrm>
             <a:off x="7028640" y="5577840"/>
-            <a:ext cx="962640" cy="273960"/>
+            <a:ext cx="962280" cy="273600"/>
           </a:xfrm>
           <a:prstGeom prst="roundRect">
             <a:avLst>
@@ -26742,7 +26815,7 @@
         <p:spPr>
           <a:xfrm>
             <a:off x="7083720" y="5667120"/>
-            <a:ext cx="853200" cy="131760"/>
+            <a:ext cx="852840" cy="131400"/>
           </a:xfrm>
           <a:prstGeom prst="rect">
             <a:avLst/>
@@ -26769,7 +26842,7 @@
               </a:lnSpc>
             </a:pPr>
             <a:r>
-              <a:rPr b="1" lang="en-US" sz="860" spc="-1" strike="noStrike" u="sng">
+              <a:rPr b="1" lang="en-US" sz="700" spc="-1" strike="noStrike" u="sng">
                 <a:solidFill>
                   <a:srgbClr val="0563c1"/>
                 </a:solidFill>
@@ -26798,7 +26871,7 @@
         <p:spPr>
           <a:xfrm>
             <a:off x="8065080" y="5577840"/>
-            <a:ext cx="962640" cy="273960"/>
+            <a:ext cx="962280" cy="273600"/>
           </a:xfrm>
           <a:prstGeom prst="roundRect">
             <a:avLst>
@@ -26856,7 +26929,7 @@
         <p:spPr>
           <a:xfrm>
             <a:off x="8119800" y="5667120"/>
-            <a:ext cx="853200" cy="131760"/>
+            <a:ext cx="852840" cy="131400"/>
           </a:xfrm>
           <a:prstGeom prst="rect">
             <a:avLst/>
@@ -26883,7 +26956,7 @@
               </a:lnSpc>
             </a:pPr>
             <a:r>
-              <a:rPr b="1" lang="en-US" sz="860" spc="-1" strike="noStrike" u="sng">
+              <a:rPr b="1" lang="en-US" sz="700" spc="-1" strike="noStrike" u="sng">
                 <a:solidFill>
                   <a:srgbClr val="0563c1"/>
                 </a:solidFill>
@@ -26912,7 +26985,7 @@
         <p:spPr>
           <a:xfrm>
             <a:off x="9101160" y="5577840"/>
-            <a:ext cx="962640" cy="273960"/>
+            <a:ext cx="962280" cy="273600"/>
           </a:xfrm>
           <a:prstGeom prst="roundRect">
             <a:avLst>
@@ -26970,7 +27043,7 @@
         <p:spPr>
           <a:xfrm>
             <a:off x="9156240" y="5667120"/>
-            <a:ext cx="853200" cy="131760"/>
+            <a:ext cx="852840" cy="131400"/>
           </a:xfrm>
           <a:prstGeom prst="rect">
             <a:avLst/>
@@ -26997,7 +27070,7 @@
               </a:lnSpc>
             </a:pPr>
             <a:r>
-              <a:rPr b="1" lang="en-US" sz="860" spc="-1" strike="noStrike" u="sng">
+              <a:rPr b="1" lang="en-US" sz="700" spc="-1" strike="noStrike" u="sng">
                 <a:solidFill>
                   <a:srgbClr val="0563c1"/>
                 </a:solidFill>
@@ -27026,7 +27099,7 @@
         <p:spPr>
           <a:xfrm>
             <a:off x="10137600" y="5577840"/>
-            <a:ext cx="962640" cy="273960"/>
+            <a:ext cx="962280" cy="273600"/>
           </a:xfrm>
           <a:prstGeom prst="roundRect">
             <a:avLst>
@@ -27084,7 +27157,7 @@
         <p:spPr>
           <a:xfrm>
             <a:off x="10192680" y="5667120"/>
-            <a:ext cx="853200" cy="131760"/>
+            <a:ext cx="852840" cy="131400"/>
           </a:xfrm>
           <a:prstGeom prst="rect">
             <a:avLst/>
@@ -27111,7 +27184,7 @@
               </a:lnSpc>
             </a:pPr>
             <a:r>
-              <a:rPr b="1" lang="en-US" sz="860" spc="-1" strike="noStrike" u="sng">
+              <a:rPr b="1" lang="en-US" sz="700" spc="-1" strike="noStrike" u="sng">
                 <a:solidFill>
                   <a:srgbClr val="0563c1"/>
                 </a:solidFill>
@@ -27140,7 +27213,7 @@
         <p:spPr>
           <a:xfrm>
             <a:off x="1195560" y="6510600"/>
-            <a:ext cx="2308320" cy="104040"/>
+            <a:ext cx="2307960" cy="103680"/>
           </a:xfrm>
           <a:prstGeom prst="rect">
             <a:avLst/>
@@ -27258,7 +27331,7 @@
         <p:spPr>
           <a:xfrm>
             <a:off x="585360" y="155520"/>
-            <a:ext cx="3200040" cy="220680"/>
+            <a:ext cx="3199680" cy="220680"/>
           </a:xfrm>
           <a:prstGeom prst="rect">
             <a:avLst/>
@@ -27312,7 +27385,7 @@
         <p:spPr>
           <a:xfrm>
             <a:off x="10561320" y="155520"/>
-            <a:ext cx="685440" cy="220680"/>
+            <a:ext cx="685080" cy="220680"/>
           </a:xfrm>
           <a:prstGeom prst="rect">
             <a:avLst/>
@@ -27366,7 +27439,7 @@
         <p:spPr>
           <a:xfrm>
             <a:off x="585360" y="457200"/>
-            <a:ext cx="10826280" cy="10440"/>
+            <a:ext cx="10825920" cy="10080"/>
           </a:xfrm>
           <a:prstGeom prst="rect">
             <a:avLst/>
@@ -27419,7 +27492,7 @@
         <p:spPr>
           <a:xfrm>
             <a:off x="585360" y="511920"/>
-            <a:ext cx="10826280" cy="5040"/>
+            <a:ext cx="10825920" cy="4680"/>
           </a:xfrm>
           <a:prstGeom prst="rect">
             <a:avLst/>
@@ -27472,7 +27545,7 @@
         <p:spPr>
           <a:xfrm>
             <a:off x="621720" y="694800"/>
-            <a:ext cx="10606680" cy="447840"/>
+            <a:ext cx="10606320" cy="447840"/>
           </a:xfrm>
           <a:prstGeom prst="rect">
             <a:avLst/>
@@ -27526,7 +27599,7 @@
         <p:spPr>
           <a:xfrm>
             <a:off x="621720" y="1152000"/>
-            <a:ext cx="10515240" cy="252360"/>
+            <a:ext cx="10514880" cy="252360"/>
           </a:xfrm>
           <a:prstGeom prst="rect">
             <a:avLst/>
@@ -27580,7 +27653,7 @@
         <p:spPr>
           <a:xfrm>
             <a:off x="585360" y="6446520"/>
-            <a:ext cx="10826280" cy="10440"/>
+            <a:ext cx="10825920" cy="10080"/>
           </a:xfrm>
           <a:prstGeom prst="rect">
             <a:avLst/>
@@ -27633,7 +27706,7 @@
         <p:spPr>
           <a:xfrm>
             <a:off x="567000" y="6510600"/>
-            <a:ext cx="5211720" cy="207000"/>
+            <a:ext cx="5211360" cy="207000"/>
           </a:xfrm>
           <a:prstGeom prst="rect">
             <a:avLst/>
@@ -27687,7 +27760,7 @@
         <p:spPr>
           <a:xfrm>
             <a:off x="4343400" y="6510600"/>
-            <a:ext cx="3657240" cy="205560"/>
+            <a:ext cx="3656880" cy="205560"/>
           </a:xfrm>
           <a:prstGeom prst="rect">
             <a:avLst/>
@@ -27741,7 +27814,7 @@
         <p:spPr>
           <a:xfrm>
             <a:off x="11018520" y="6510600"/>
-            <a:ext cx="228240" cy="219240"/>
+            <a:ext cx="227880" cy="219240"/>
           </a:xfrm>
           <a:prstGeom prst="rect">
             <a:avLst/>
@@ -27795,7 +27868,7 @@
         <p:spPr>
           <a:xfrm>
             <a:off x="621720" y="1664280"/>
-            <a:ext cx="5239080" cy="1672920"/>
+            <a:ext cx="5238720" cy="1672560"/>
           </a:xfrm>
           <a:prstGeom prst="roundRect">
             <a:avLst>
@@ -27853,7 +27926,7 @@
         <p:spPr>
           <a:xfrm>
             <a:off x="621720" y="1664280"/>
-            <a:ext cx="50040" cy="1672920"/>
+            <a:ext cx="49680" cy="1672560"/>
           </a:xfrm>
           <a:prstGeom prst="rect">
             <a:avLst/>
@@ -27906,7 +27979,7 @@
         <p:spPr>
           <a:xfrm>
             <a:off x="804600" y="1828800"/>
-            <a:ext cx="658080" cy="439920"/>
+            <a:ext cx="657720" cy="439920"/>
           </a:xfrm>
           <a:prstGeom prst="rect">
             <a:avLst/>
@@ -27960,7 +28033,7 @@
         <p:spPr>
           <a:xfrm>
             <a:off x="1472040" y="1847160"/>
-            <a:ext cx="4187520" cy="232920"/>
+            <a:ext cx="4187160" cy="232920"/>
           </a:xfrm>
           <a:prstGeom prst="rect">
             <a:avLst/>
@@ -28014,7 +28087,7 @@
         <p:spPr>
           <a:xfrm>
             <a:off x="822960" y="2258640"/>
-            <a:ext cx="4827600" cy="556200"/>
+            <a:ext cx="4827240" cy="556200"/>
           </a:xfrm>
           <a:prstGeom prst="rect">
             <a:avLst/>
@@ -28068,7 +28141,7 @@
         <p:spPr>
           <a:xfrm>
             <a:off x="6108120" y="1664280"/>
-            <a:ext cx="5175000" cy="1672920"/>
+            <a:ext cx="5174640" cy="1672560"/>
           </a:xfrm>
           <a:prstGeom prst="roundRect">
             <a:avLst>
@@ -28126,7 +28199,7 @@
         <p:spPr>
           <a:xfrm>
             <a:off x="6108120" y="1664280"/>
-            <a:ext cx="50040" cy="1672920"/>
+            <a:ext cx="49680" cy="1672560"/>
           </a:xfrm>
           <a:prstGeom prst="rect">
             <a:avLst/>
@@ -28179,7 +28252,7 @@
         <p:spPr>
           <a:xfrm>
             <a:off x="6291000" y="1828800"/>
-            <a:ext cx="658080" cy="439920"/>
+            <a:ext cx="657720" cy="439920"/>
           </a:xfrm>
           <a:prstGeom prst="rect">
             <a:avLst/>
@@ -28233,7 +28306,7 @@
         <p:spPr>
           <a:xfrm>
             <a:off x="6958440" y="1847160"/>
-            <a:ext cx="4123440" cy="232920"/>
+            <a:ext cx="4123080" cy="232920"/>
           </a:xfrm>
           <a:prstGeom prst="rect">
             <a:avLst/>
@@ -28287,7 +28360,7 @@
         <p:spPr>
           <a:xfrm>
             <a:off x="6309360" y="2258640"/>
-            <a:ext cx="4763520" cy="711720"/>
+            <a:ext cx="4763160" cy="711720"/>
           </a:xfrm>
           <a:prstGeom prst="rect">
             <a:avLst/>
@@ -28341,7 +28414,7 @@
         <p:spPr>
           <a:xfrm>
             <a:off x="621720" y="3584520"/>
-            <a:ext cx="5239080" cy="1672920"/>
+            <a:ext cx="5238720" cy="1672560"/>
           </a:xfrm>
           <a:prstGeom prst="roundRect">
             <a:avLst>
@@ -28399,7 +28472,7 @@
         <p:spPr>
           <a:xfrm>
             <a:off x="621720" y="3584520"/>
-            <a:ext cx="50040" cy="1672920"/>
+            <a:ext cx="49680" cy="1672560"/>
           </a:xfrm>
           <a:prstGeom prst="rect">
             <a:avLst/>
@@ -28452,7 +28525,7 @@
         <p:spPr>
           <a:xfrm>
             <a:off x="804600" y="3749040"/>
-            <a:ext cx="658080" cy="439920"/>
+            <a:ext cx="657720" cy="439920"/>
           </a:xfrm>
           <a:prstGeom prst="rect">
             <a:avLst/>
@@ -28506,7 +28579,7 @@
         <p:spPr>
           <a:xfrm>
             <a:off x="1472040" y="3767400"/>
-            <a:ext cx="4187520" cy="232920"/>
+            <a:ext cx="4187160" cy="232920"/>
           </a:xfrm>
           <a:prstGeom prst="rect">
             <a:avLst/>
@@ -28560,7 +28633,7 @@
         <p:spPr>
           <a:xfrm>
             <a:off x="822960" y="4178880"/>
-            <a:ext cx="4827600" cy="711720"/>
+            <a:ext cx="4827240" cy="711720"/>
           </a:xfrm>
           <a:prstGeom prst="rect">
             <a:avLst/>
@@ -28614,7 +28687,7 @@
         <p:spPr>
           <a:xfrm>
             <a:off x="6108120" y="3584520"/>
-            <a:ext cx="5175000" cy="1672920"/>
+            <a:ext cx="5174640" cy="1672560"/>
           </a:xfrm>
           <a:prstGeom prst="roundRect">
             <a:avLst>
@@ -28672,7 +28745,7 @@
         <p:spPr>
           <a:xfrm>
             <a:off x="6108120" y="3584520"/>
-            <a:ext cx="50040" cy="1672920"/>
+            <a:ext cx="49680" cy="1672560"/>
           </a:xfrm>
           <a:prstGeom prst="rect">
             <a:avLst/>
@@ -28725,7 +28798,7 @@
         <p:spPr>
           <a:xfrm>
             <a:off x="6291000" y="3749040"/>
-            <a:ext cx="658080" cy="439920"/>
+            <a:ext cx="657720" cy="439920"/>
           </a:xfrm>
           <a:prstGeom prst="rect">
             <a:avLst/>
@@ -28779,7 +28852,7 @@
         <p:spPr>
           <a:xfrm>
             <a:off x="6958440" y="3767400"/>
-            <a:ext cx="4123440" cy="232920"/>
+            <a:ext cx="4123080" cy="232920"/>
           </a:xfrm>
           <a:prstGeom prst="rect">
             <a:avLst/>
@@ -28833,7 +28906,7 @@
         <p:spPr>
           <a:xfrm>
             <a:off x="6309360" y="4178880"/>
-            <a:ext cx="4763520" cy="711720"/>
+            <a:ext cx="4763160" cy="711720"/>
           </a:xfrm>
           <a:prstGeom prst="rect">
             <a:avLst/>
@@ -28887,7 +28960,7 @@
         <p:spPr>
           <a:xfrm>
             <a:off x="621720" y="5486400"/>
-            <a:ext cx="10661400" cy="667080"/>
+            <a:ext cx="10661040" cy="666720"/>
           </a:xfrm>
           <a:prstGeom prst="roundRect">
             <a:avLst>
@@ -28942,7 +29015,7 @@
         <p:spPr>
           <a:xfrm>
             <a:off x="841320" y="5632560"/>
-            <a:ext cx="2285640" cy="230040"/>
+            <a:ext cx="2285280" cy="230040"/>
           </a:xfrm>
           <a:prstGeom prst="rect">
             <a:avLst/>
@@ -28996,7 +29069,7 @@
         <p:spPr>
           <a:xfrm>
             <a:off x="3063240" y="5596200"/>
-            <a:ext cx="7954920" cy="397080"/>
+            <a:ext cx="7954560" cy="379080"/>
           </a:xfrm>
           <a:prstGeom prst="rect">
             <a:avLst/>
@@ -29032,7 +29105,7 @@
               </a:rPr>
               <a:t>379/379 symbolic campaign  ·  full-cube minimality  ·  A23 conformance audit (partial)  ·  closure  ·  case-extensibility registry</a:t>
             </a:r>
-            <a:endParaRPr b="0" lang="en-US" sz="1010" spc="-1" strike="noStrike">
+            <a:endParaRPr b="0" lang="en-US" sz="950" spc="-1" strike="noStrike">
               <a:solidFill>
                 <a:srgbClr val="000000"/>
               </a:solidFill>
@@ -29050,7 +29123,7 @@
         <p:spPr>
           <a:xfrm>
             <a:off x="667440" y="6199560"/>
-            <a:ext cx="10606680" cy="213120"/>
+            <a:ext cx="10606320" cy="213120"/>
           </a:xfrm>
           <a:prstGeom prst="rect">
             <a:avLst/>

--- a/presentations/ecosystem-positioning/Ecosystem_Positioning_Requirements_Evidence_Canonical_v1.2.pptx
+++ b/presentations/ecosystem-positioning/Ecosystem_Positioning_Requirements_Evidence_Canonical_v1.2.pptx
@@ -351,7 +351,7 @@
             <a:pPr indent="0" algn="r">
               <a:buNone/>
             </a:pPr>
-            <a:fld id="{31D61ABB-DDF3-41FB-B776-221996EF0285}" type="slidenum">
+            <a:fld id="{80D58113-BEC4-4409-A282-2A66EB8AC3A6}" type="slidenum">
               <a:rPr b="0" lang="en-US" sz="1400" spc="-1" strike="noStrike">
                 <a:solidFill>
                   <a:srgbClr val="000000"/>
@@ -1906,7 +1906,7 @@
         <p:txBody>
           <a:bodyPr/>
           <a:p>
-            <a:fld id="{B29D2BFA-4BB7-4C19-BB58-BCD85D3EB5AB}" type="slidenum">
+            <a:fld id="{0CE29362-C1B1-44F3-8E17-E49D18BCB57F}" type="slidenum">
               <a:t>&lt;#&gt;</a:t>
             </a:fld>
           </a:p>
@@ -2098,7 +2098,7 @@
         <p:spPr>
           <a:xfrm>
             <a:off x="567000" y="6546960"/>
-            <a:ext cx="3245400" cy="163800"/>
+            <a:ext cx="3245040" cy="163440"/>
           </a:xfrm>
           <a:prstGeom prst="rect">
             <a:avLst/>
@@ -2146,7 +2146,7 @@
         <p:spPr>
           <a:xfrm>
             <a:off x="4187880" y="6546960"/>
-            <a:ext cx="3382560" cy="163800"/>
+            <a:ext cx="3382200" cy="163440"/>
           </a:xfrm>
           <a:prstGeom prst="rect">
             <a:avLst/>
@@ -2207,7 +2207,7 @@
         <p:spPr>
           <a:xfrm>
             <a:off x="11064240" y="6537960"/>
-            <a:ext cx="502200" cy="163800"/>
+            <a:ext cx="501840" cy="163440"/>
           </a:xfrm>
           <a:prstGeom prst="rect">
             <a:avLst/>
@@ -2249,7 +2249,7 @@
                 <a:tab algn="l" pos="0"/>
               </a:tabLst>
             </a:pPr>
-            <a:fld id="{880E8621-4C71-4EDD-ADEC-10CC32681508}" type="slidenum">
+            <a:fld id="{E138B932-9C32-4D08-9D65-D5AA06E86A63}" type="slidenum">
               <a:rPr b="1" lang="en-US" sz="750" spc="-1" strike="noStrike">
                 <a:solidFill>
                   <a:srgbClr val="1b273f"/>
@@ -2891,7 +2891,7 @@
         <p:spPr>
           <a:xfrm>
             <a:off x="9795960" y="365760"/>
-            <a:ext cx="1828080" cy="227880"/>
+            <a:ext cx="1827720" cy="227520"/>
           </a:xfrm>
           <a:prstGeom prst="rect">
             <a:avLst/>
@@ -3076,7 +3076,7 @@
               </a:rPr>
               <a:t>Ecosystem Positioning</a:t>
             </a:r>
-            <a:endParaRPr b="0" lang="en-US" sz="4600" spc="-1" strike="noStrike">
+            <a:endParaRPr b="0" lang="en-US" sz="4000" spc="-1" strike="noStrike">
               <a:solidFill>
                 <a:srgbClr val="ffffff"/>
               </a:solidFill>
@@ -3107,7 +3107,7 @@
               </a:rPr>
               <a:t>for Agentic Systems</a:t>
             </a:r>
-            <a:endParaRPr b="0" lang="en-US" sz="4600" spc="-1" strike="noStrike">
+            <a:endParaRPr b="0" lang="en-US" sz="4000" spc="-1" strike="noStrike">
               <a:solidFill>
                 <a:srgbClr val="ffffff"/>
               </a:solidFill>
@@ -3125,7 +3125,7 @@
         <p:spPr>
           <a:xfrm>
             <a:off x="567000" y="3383280"/>
-            <a:ext cx="6308640" cy="472320"/>
+            <a:ext cx="6308280" cy="471960"/>
           </a:xfrm>
           <a:prstGeom prst="rect">
             <a:avLst/>
@@ -3179,7 +3179,7 @@
         <p:spPr>
           <a:xfrm>
             <a:off x="631080" y="4928760"/>
-            <a:ext cx="291960" cy="291960"/>
+            <a:ext cx="291600" cy="291600"/>
           </a:xfrm>
           <a:prstGeom prst="ellipse">
             <a:avLst/>
@@ -3233,7 +3233,7 @@
         <p:spPr>
           <a:xfrm>
             <a:off x="2560320" y="4937760"/>
-            <a:ext cx="273600" cy="273600"/>
+            <a:ext cx="273240" cy="273240"/>
           </a:xfrm>
           <a:prstGeom prst="rect">
             <a:avLst/>
@@ -3287,7 +3287,7 @@
         <p:spPr>
           <a:xfrm>
             <a:off x="4480560" y="4937760"/>
-            <a:ext cx="273600" cy="273600"/>
+            <a:ext cx="273240" cy="273240"/>
           </a:xfrm>
           <a:prstGeom prst="rect">
             <a:avLst/>
@@ -3341,7 +3341,7 @@
         <p:spPr>
           <a:xfrm>
             <a:off x="6400800" y="4937760"/>
-            <a:ext cx="273600" cy="273600"/>
+            <a:ext cx="273240" cy="273240"/>
           </a:xfrm>
           <a:prstGeom prst="rect">
             <a:avLst/>
@@ -3542,7 +3542,7 @@
         <p:spPr>
           <a:xfrm>
             <a:off x="1188720" y="4782240"/>
-            <a:ext cx="1096560" cy="121680"/>
+            <a:ext cx="1096200" cy="121320"/>
           </a:xfrm>
           <a:prstGeom prst="rect">
             <a:avLst/>
@@ -3596,7 +3596,7 @@
         <p:spPr>
           <a:xfrm>
             <a:off x="3108960" y="4782240"/>
-            <a:ext cx="1096560" cy="121680"/>
+            <a:ext cx="1096200" cy="121320"/>
           </a:xfrm>
           <a:prstGeom prst="rect">
             <a:avLst/>
@@ -3650,7 +3650,7 @@
         <p:spPr>
           <a:xfrm>
             <a:off x="5029200" y="4782240"/>
-            <a:ext cx="1096560" cy="121680"/>
+            <a:ext cx="1096200" cy="121320"/>
           </a:xfrm>
           <a:prstGeom prst="rect">
             <a:avLst/>
@@ -3704,7 +3704,7 @@
         <p:spPr>
           <a:xfrm>
             <a:off x="137160" y="5330880"/>
-            <a:ext cx="1279440" cy="129600"/>
+            <a:ext cx="1279080" cy="129240"/>
           </a:xfrm>
           <a:prstGeom prst="rect">
             <a:avLst/>
@@ -3731,7 +3731,7 @@
               </a:lnSpc>
             </a:pPr>
             <a:r>
-              <a:rPr b="0" lang="en-US" sz="850" spc="126" strike="noStrike">
+              <a:rPr b="0" lang="en-US" sz="850" spc="123" strike="noStrike">
                 <a:solidFill>
                   <a:srgbClr val="a6abb5"/>
                 </a:solidFill>
@@ -3758,7 +3758,7 @@
         <p:spPr>
           <a:xfrm>
             <a:off x="2057400" y="5330880"/>
-            <a:ext cx="1279440" cy="129600"/>
+            <a:ext cx="1279080" cy="129240"/>
           </a:xfrm>
           <a:prstGeom prst="rect">
             <a:avLst/>
@@ -3785,7 +3785,7 @@
               </a:lnSpc>
             </a:pPr>
             <a:r>
-              <a:rPr b="0" lang="en-US" sz="850" spc="126" strike="noStrike">
+              <a:rPr b="0" lang="en-US" sz="850" spc="123" strike="noStrike">
                 <a:solidFill>
                   <a:srgbClr val="a6abb5"/>
                 </a:solidFill>
@@ -3812,7 +3812,7 @@
         <p:spPr>
           <a:xfrm>
             <a:off x="3977640" y="5330880"/>
-            <a:ext cx="1279440" cy="129600"/>
+            <a:ext cx="1279080" cy="129240"/>
           </a:xfrm>
           <a:prstGeom prst="rect">
             <a:avLst/>
@@ -3839,7 +3839,7 @@
               </a:lnSpc>
             </a:pPr>
             <a:r>
-              <a:rPr b="0" lang="en-US" sz="850" spc="126" strike="noStrike">
+              <a:rPr b="0" lang="en-US" sz="850" spc="123" strike="noStrike">
                 <a:solidFill>
                   <a:srgbClr val="a6abb5"/>
                 </a:solidFill>
@@ -3866,7 +3866,7 @@
         <p:spPr>
           <a:xfrm>
             <a:off x="5897880" y="5330880"/>
-            <a:ext cx="1279440" cy="129600"/>
+            <a:ext cx="1279080" cy="129240"/>
           </a:xfrm>
           <a:prstGeom prst="rect">
             <a:avLst/>
@@ -3893,7 +3893,7 @@
               </a:lnSpc>
             </a:pPr>
             <a:r>
-              <a:rPr b="0" lang="en-US" sz="850" spc="126" strike="noStrike">
+              <a:rPr b="0" lang="en-US" sz="850" spc="123" strike="noStrike">
                 <a:solidFill>
                   <a:srgbClr val="a6abb5"/>
                 </a:solidFill>
@@ -3920,7 +3920,7 @@
         <p:spPr>
           <a:xfrm>
             <a:off x="5440680" y="5550480"/>
-            <a:ext cx="2193840" cy="121680"/>
+            <a:ext cx="2193480" cy="121320"/>
           </a:xfrm>
           <a:prstGeom prst="rect">
             <a:avLst/>
@@ -3974,7 +3974,7 @@
         <p:spPr>
           <a:xfrm>
             <a:off x="8001000" y="1371600"/>
-            <a:ext cx="3620160" cy="3428280"/>
+            <a:ext cx="3619800" cy="3427920"/>
           </a:xfrm>
           <a:prstGeom prst="rect">
             <a:avLst/>
@@ -4030,7 +4030,7 @@
         <p:spPr>
           <a:xfrm>
             <a:off x="8001000" y="1371600"/>
-            <a:ext cx="40320" cy="3428280"/>
+            <a:ext cx="39960" cy="3427920"/>
           </a:xfrm>
           <a:prstGeom prst="rect">
             <a:avLst/>
@@ -4083,7 +4083,7 @@
         <p:spPr>
           <a:xfrm>
             <a:off x="8275320" y="1627560"/>
-            <a:ext cx="3162960" cy="137520"/>
+            <a:ext cx="3162600" cy="137160"/>
           </a:xfrm>
           <a:prstGeom prst="rect">
             <a:avLst/>
@@ -4137,7 +4137,7 @@
         <p:spPr>
           <a:xfrm>
             <a:off x="8275320" y="1938600"/>
-            <a:ext cx="3162960" cy="738720"/>
+            <a:ext cx="3162600" cy="738360"/>
           </a:xfrm>
           <a:prstGeom prst="rect">
             <a:avLst/>
@@ -4191,7 +4191,7 @@
         <p:spPr>
           <a:xfrm>
             <a:off x="8275320" y="2788920"/>
-            <a:ext cx="3071520" cy="618120"/>
+            <a:ext cx="3071160" cy="617760"/>
           </a:xfrm>
           <a:prstGeom prst="rect">
             <a:avLst/>
@@ -4291,7 +4291,7 @@
         <p:spPr>
           <a:xfrm>
             <a:off x="8275320" y="4114800"/>
-            <a:ext cx="3162960" cy="686520"/>
+            <a:ext cx="3162600" cy="686520"/>
           </a:xfrm>
           <a:prstGeom prst="rect">
             <a:avLst/>
@@ -4406,7 +4406,7 @@
         <p:spPr>
           <a:xfrm>
             <a:off x="10527480" y="6291000"/>
-            <a:ext cx="1096560" cy="273600"/>
+            <a:ext cx="1096200" cy="273240"/>
           </a:xfrm>
           <a:prstGeom prst="rect">
             <a:avLst/>
@@ -4451,7 +4451,7 @@
         <p:spPr>
           <a:xfrm>
             <a:off x="1383120" y="6510600"/>
-            <a:ext cx="1933200" cy="103680"/>
+            <a:ext cx="1932840" cy="103320"/>
           </a:xfrm>
           <a:prstGeom prst="rect">
             <a:avLst/>
@@ -4554,7 +4554,7 @@
         <p:spPr>
           <a:xfrm>
             <a:off x="1524600" y="320040"/>
-            <a:ext cx="3350520" cy="333360"/>
+            <a:ext cx="3350160" cy="333360"/>
           </a:xfrm>
           <a:prstGeom prst="rect">
             <a:avLst/>
@@ -4608,7 +4608,7 @@
         <p:spPr>
           <a:xfrm>
             <a:off x="11114280" y="320040"/>
-            <a:ext cx="447480" cy="303120"/>
+            <a:ext cx="447120" cy="303120"/>
           </a:xfrm>
           <a:prstGeom prst="rect">
             <a:avLst/>
@@ -4662,7 +4662,7 @@
         <p:spPr>
           <a:xfrm>
             <a:off x="685800" y="713160"/>
-            <a:ext cx="10972080" cy="12960"/>
+            <a:ext cx="10971720" cy="12600"/>
           </a:xfrm>
           <a:prstGeom prst="rect">
             <a:avLst/>
@@ -4715,7 +4715,7 @@
         <p:spPr>
           <a:xfrm>
             <a:off x="685800" y="822960"/>
-            <a:ext cx="10972080" cy="12960"/>
+            <a:ext cx="10971720" cy="12600"/>
           </a:xfrm>
           <a:prstGeom prst="rect">
             <a:avLst/>
@@ -4768,7 +4768,7 @@
         <p:spPr>
           <a:xfrm>
             <a:off x="3396960" y="1965960"/>
-            <a:ext cx="5549760" cy="546840"/>
+            <a:ext cx="5549400" cy="546840"/>
           </a:xfrm>
           <a:prstGeom prst="rect">
             <a:avLst/>
@@ -4824,7 +4824,7 @@
         <p:spPr>
           <a:xfrm>
             <a:off x="685800" y="2743200"/>
-            <a:ext cx="10514880" cy="577080"/>
+            <a:ext cx="10514520" cy="577080"/>
           </a:xfrm>
           <a:prstGeom prst="rect">
             <a:avLst/>
@@ -4878,7 +4878,7 @@
         <p:spPr>
           <a:xfrm>
             <a:off x="4527000" y="6400800"/>
-            <a:ext cx="3198240" cy="242280"/>
+            <a:ext cx="3197880" cy="242280"/>
           </a:xfrm>
           <a:prstGeom prst="rect">
             <a:avLst/>
@@ -4932,7 +4932,7 @@
         <p:spPr>
           <a:xfrm>
             <a:off x="1113480" y="6510600"/>
-            <a:ext cx="2472480" cy="103680"/>
+            <a:ext cx="2472120" cy="103320"/>
           </a:xfrm>
           <a:prstGeom prst="rect">
             <a:avLst/>
@@ -5028,7 +5028,7 @@
         <p:spPr>
           <a:xfrm>
             <a:off x="567000" y="164520"/>
-            <a:ext cx="3199680" cy="129600"/>
+            <a:ext cx="3199320" cy="129240"/>
           </a:xfrm>
           <a:prstGeom prst="rect">
             <a:avLst/>
@@ -5082,7 +5082,7 @@
         <p:spPr>
           <a:xfrm>
             <a:off x="10716840" y="164520"/>
-            <a:ext cx="685080" cy="129600"/>
+            <a:ext cx="684720" cy="129240"/>
           </a:xfrm>
           <a:prstGeom prst="rect">
             <a:avLst/>
@@ -5136,7 +5136,7 @@
         <p:spPr>
           <a:xfrm>
             <a:off x="567000" y="640080"/>
-            <a:ext cx="10514880" cy="358200"/>
+            <a:ext cx="10514520" cy="357840"/>
           </a:xfrm>
           <a:prstGeom prst="rect">
             <a:avLst/>
@@ -5190,7 +5190,7 @@
         <p:spPr>
           <a:xfrm>
             <a:off x="567000" y="1078920"/>
-            <a:ext cx="10514880" cy="328680"/>
+            <a:ext cx="10514520" cy="328680"/>
           </a:xfrm>
           <a:prstGeom prst="rect">
             <a:avLst/>
@@ -5244,7 +5244,7 @@
         <p:spPr>
           <a:xfrm>
             <a:off x="567000" y="457200"/>
-            <a:ext cx="10834920" cy="10080"/>
+            <a:ext cx="10834560" cy="9720"/>
           </a:xfrm>
           <a:prstGeom prst="rect">
             <a:avLst/>
@@ -5300,7 +5300,7 @@
         <p:spPr>
           <a:xfrm>
             <a:off x="567000" y="1572840"/>
-            <a:ext cx="5257080" cy="1416600"/>
+            <a:ext cx="5256720" cy="1416240"/>
           </a:xfrm>
           <a:prstGeom prst="roundRect">
             <a:avLst>
@@ -5358,7 +5358,7 @@
         <p:spPr>
           <a:xfrm>
             <a:off x="567000" y="1572840"/>
-            <a:ext cx="49680" cy="1416600"/>
+            <a:ext cx="49320" cy="1416240"/>
           </a:xfrm>
           <a:prstGeom prst="rect">
             <a:avLst/>
@@ -5414,7 +5414,7 @@
         <p:spPr>
           <a:xfrm>
             <a:off x="713160" y="1700640"/>
-            <a:ext cx="4982760" cy="190440"/>
+            <a:ext cx="4982400" cy="190080"/>
           </a:xfrm>
           <a:prstGeom prst="rect">
             <a:avLst/>
@@ -5468,7 +5468,7 @@
         <p:spPr>
           <a:xfrm>
             <a:off x="713160" y="2011680"/>
-            <a:ext cx="4982760" cy="293040"/>
+            <a:ext cx="4982400" cy="292680"/>
           </a:xfrm>
           <a:prstGeom prst="rect">
             <a:avLst/>
@@ -5522,7 +5522,7 @@
         <p:spPr>
           <a:xfrm>
             <a:off x="713160" y="2770560"/>
-            <a:ext cx="4982760" cy="127800"/>
+            <a:ext cx="4982400" cy="127440"/>
           </a:xfrm>
           <a:prstGeom prst="rect">
             <a:avLst/>
@@ -5578,7 +5578,7 @@
         <p:spPr>
           <a:xfrm>
             <a:off x="6144840" y="1572840"/>
-            <a:ext cx="5257080" cy="1416600"/>
+            <a:ext cx="5256720" cy="1416240"/>
           </a:xfrm>
           <a:prstGeom prst="roundRect">
             <a:avLst>
@@ -5636,7 +5636,7 @@
         <p:spPr>
           <a:xfrm>
             <a:off x="6144840" y="1572840"/>
-            <a:ext cx="49680" cy="1416600"/>
+            <a:ext cx="49320" cy="1416240"/>
           </a:xfrm>
           <a:prstGeom prst="rect">
             <a:avLst/>
@@ -5692,7 +5692,7 @@
         <p:spPr>
           <a:xfrm>
             <a:off x="6291000" y="1700640"/>
-            <a:ext cx="4982760" cy="190440"/>
+            <a:ext cx="4982400" cy="190080"/>
           </a:xfrm>
           <a:prstGeom prst="rect">
             <a:avLst/>
@@ -5746,7 +5746,7 @@
         <p:spPr>
           <a:xfrm>
             <a:off x="6291000" y="2011680"/>
-            <a:ext cx="4982760" cy="439560"/>
+            <a:ext cx="4982400" cy="439200"/>
           </a:xfrm>
           <a:prstGeom prst="rect">
             <a:avLst/>
@@ -5800,7 +5800,7 @@
         <p:spPr>
           <a:xfrm>
             <a:off x="6291000" y="2770560"/>
-            <a:ext cx="4982760" cy="127800"/>
+            <a:ext cx="4982400" cy="127440"/>
           </a:xfrm>
           <a:prstGeom prst="rect">
             <a:avLst/>
@@ -5856,7 +5856,7 @@
         <p:spPr>
           <a:xfrm>
             <a:off x="567000" y="3218760"/>
-            <a:ext cx="5257080" cy="1416600"/>
+            <a:ext cx="5256720" cy="1416240"/>
           </a:xfrm>
           <a:prstGeom prst="roundRect">
             <a:avLst>
@@ -5914,7 +5914,7 @@
         <p:spPr>
           <a:xfrm>
             <a:off x="567000" y="3218760"/>
-            <a:ext cx="49680" cy="1416600"/>
+            <a:ext cx="49320" cy="1416240"/>
           </a:xfrm>
           <a:prstGeom prst="rect">
             <a:avLst/>
@@ -5970,7 +5970,7 @@
         <p:spPr>
           <a:xfrm>
             <a:off x="713160" y="3346560"/>
-            <a:ext cx="4982760" cy="190440"/>
+            <a:ext cx="4982400" cy="190080"/>
           </a:xfrm>
           <a:prstGeom prst="rect">
             <a:avLst/>
@@ -6024,7 +6024,7 @@
         <p:spPr>
           <a:xfrm>
             <a:off x="713160" y="3657600"/>
-            <a:ext cx="4982760" cy="293040"/>
+            <a:ext cx="4982400" cy="292680"/>
           </a:xfrm>
           <a:prstGeom prst="rect">
             <a:avLst/>
@@ -6078,7 +6078,7 @@
         <p:spPr>
           <a:xfrm>
             <a:off x="713160" y="4416480"/>
-            <a:ext cx="4982760" cy="127800"/>
+            <a:ext cx="4982400" cy="127440"/>
           </a:xfrm>
           <a:prstGeom prst="rect">
             <a:avLst/>
@@ -6134,7 +6134,7 @@
         <p:spPr>
           <a:xfrm>
             <a:off x="6144840" y="3218760"/>
-            <a:ext cx="5257080" cy="1416600"/>
+            <a:ext cx="5256720" cy="1416240"/>
           </a:xfrm>
           <a:prstGeom prst="roundRect">
             <a:avLst>
@@ -6192,7 +6192,7 @@
         <p:spPr>
           <a:xfrm>
             <a:off x="6144840" y="3218760"/>
-            <a:ext cx="49680" cy="1416600"/>
+            <a:ext cx="49320" cy="1416240"/>
           </a:xfrm>
           <a:prstGeom prst="rect">
             <a:avLst/>
@@ -6248,7 +6248,7 @@
         <p:spPr>
           <a:xfrm>
             <a:off x="6291000" y="3346560"/>
-            <a:ext cx="4982760" cy="190440"/>
+            <a:ext cx="4982400" cy="190080"/>
           </a:xfrm>
           <a:prstGeom prst="rect">
             <a:avLst/>
@@ -6302,7 +6302,7 @@
         <p:spPr>
           <a:xfrm>
             <a:off x="6291000" y="3657600"/>
-            <a:ext cx="4982760" cy="439560"/>
+            <a:ext cx="4982400" cy="439200"/>
           </a:xfrm>
           <a:prstGeom prst="rect">
             <a:avLst/>
@@ -6356,7 +6356,7 @@
         <p:spPr>
           <a:xfrm>
             <a:off x="6291000" y="4416480"/>
-            <a:ext cx="4982760" cy="127800"/>
+            <a:ext cx="4982400" cy="127440"/>
           </a:xfrm>
           <a:prstGeom prst="rect">
             <a:avLst/>
@@ -6412,7 +6412,7 @@
         <p:spPr>
           <a:xfrm>
             <a:off x="567000" y="4956120"/>
-            <a:ext cx="10834920" cy="895320"/>
+            <a:ext cx="10834560" cy="894960"/>
           </a:xfrm>
           <a:prstGeom prst="roundRect">
             <a:avLst>
@@ -6470,7 +6470,7 @@
         <p:spPr>
           <a:xfrm>
             <a:off x="804600" y="5139000"/>
-            <a:ext cx="1873800" cy="131040"/>
+            <a:ext cx="1873440" cy="130680"/>
           </a:xfrm>
           <a:prstGeom prst="rect">
             <a:avLst/>
@@ -6524,7 +6524,7 @@
         <p:spPr>
           <a:xfrm>
             <a:off x="2670120" y="5083920"/>
-            <a:ext cx="8366040" cy="470520"/>
+            <a:ext cx="8365680" cy="470520"/>
           </a:xfrm>
           <a:prstGeom prst="rect">
             <a:avLst/>
@@ -6578,7 +6578,7 @@
         <p:spPr>
           <a:xfrm>
             <a:off x="8458200" y="5596200"/>
-            <a:ext cx="2577960" cy="127800"/>
+            <a:ext cx="2577600" cy="127440"/>
           </a:xfrm>
           <a:prstGeom prst="rect">
             <a:avLst/>
@@ -6634,7 +6634,7 @@
         <p:spPr>
           <a:xfrm>
             <a:off x="567000" y="6236280"/>
-            <a:ext cx="10834920" cy="10080"/>
+            <a:ext cx="10834560" cy="9720"/>
           </a:xfrm>
           <a:prstGeom prst="rect">
             <a:avLst/>
@@ -6690,7 +6690,7 @@
         <p:spPr>
           <a:xfrm>
             <a:off x="4069080" y="6355080"/>
-            <a:ext cx="3656880" cy="109800"/>
+            <a:ext cx="3656520" cy="109440"/>
           </a:xfrm>
           <a:prstGeom prst="rect">
             <a:avLst/>
@@ -6744,7 +6744,7 @@
         <p:spPr>
           <a:xfrm>
             <a:off x="11045880" y="6355080"/>
-            <a:ext cx="273600" cy="129600"/>
+            <a:ext cx="273240" cy="129240"/>
           </a:xfrm>
           <a:prstGeom prst="rect">
             <a:avLst/>
@@ -6798,7 +6798,7 @@
         <p:spPr>
           <a:xfrm>
             <a:off x="1202400" y="6510600"/>
-            <a:ext cx="2294280" cy="103680"/>
+            <a:ext cx="2293920" cy="103320"/>
           </a:xfrm>
           <a:prstGeom prst="rect">
             <a:avLst/>
@@ -6894,7 +6894,7 @@
         <p:spPr>
           <a:xfrm>
             <a:off x="567000" y="164520"/>
-            <a:ext cx="3199680" cy="129600"/>
+            <a:ext cx="3199320" cy="129240"/>
           </a:xfrm>
           <a:prstGeom prst="rect">
             <a:avLst/>
@@ -6948,7 +6948,7 @@
         <p:spPr>
           <a:xfrm>
             <a:off x="10716840" y="164520"/>
-            <a:ext cx="685080" cy="129600"/>
+            <a:ext cx="684720" cy="129240"/>
           </a:xfrm>
           <a:prstGeom prst="rect">
             <a:avLst/>
@@ -7002,7 +7002,7 @@
         <p:spPr>
           <a:xfrm>
             <a:off x="567000" y="640080"/>
-            <a:ext cx="10514880" cy="358200"/>
+            <a:ext cx="10514520" cy="357840"/>
           </a:xfrm>
           <a:prstGeom prst="rect">
             <a:avLst/>
@@ -7056,7 +7056,7 @@
         <p:spPr>
           <a:xfrm>
             <a:off x="567000" y="1078920"/>
-            <a:ext cx="10514880" cy="170640"/>
+            <a:ext cx="10514520" cy="170280"/>
           </a:xfrm>
           <a:prstGeom prst="rect">
             <a:avLst/>
@@ -7110,7 +7110,7 @@
         <p:spPr>
           <a:xfrm>
             <a:off x="567000" y="457200"/>
-            <a:ext cx="10834920" cy="10080"/>
+            <a:ext cx="10834560" cy="9720"/>
           </a:xfrm>
           <a:prstGeom prst="rect">
             <a:avLst/>
@@ -7166,7 +7166,7 @@
         <p:spPr>
           <a:xfrm>
             <a:off x="567000" y="1572840"/>
-            <a:ext cx="2541240" cy="1078200"/>
+            <a:ext cx="2540880" cy="1077840"/>
           </a:xfrm>
           <a:prstGeom prst="roundRect">
             <a:avLst>
@@ -7224,7 +7224,7 @@
         <p:spPr>
           <a:xfrm>
             <a:off x="676800" y="1664280"/>
-            <a:ext cx="383400" cy="152640"/>
+            <a:ext cx="383040" cy="152280"/>
           </a:xfrm>
           <a:prstGeom prst="rect">
             <a:avLst/>
@@ -7278,7 +7278,7 @@
         <p:spPr>
           <a:xfrm>
             <a:off x="1097280" y="1664280"/>
-            <a:ext cx="1882800" cy="178560"/>
+            <a:ext cx="1882440" cy="178200"/>
           </a:xfrm>
           <a:prstGeom prst="rect">
             <a:avLst/>
@@ -7332,7 +7332,7 @@
         <p:spPr>
           <a:xfrm>
             <a:off x="676800" y="2002680"/>
-            <a:ext cx="2322000" cy="275040"/>
+            <a:ext cx="2321640" cy="274680"/>
           </a:xfrm>
           <a:prstGeom prst="rect">
             <a:avLst/>
@@ -7386,7 +7386,7 @@
         <p:spPr>
           <a:xfrm>
             <a:off x="3319200" y="1572840"/>
-            <a:ext cx="2541240" cy="1078200"/>
+            <a:ext cx="2540880" cy="1077840"/>
           </a:xfrm>
           <a:prstGeom prst="roundRect">
             <a:avLst>
@@ -7444,7 +7444,7 @@
         <p:spPr>
           <a:xfrm>
             <a:off x="3429000" y="1664280"/>
-            <a:ext cx="383400" cy="152640"/>
+            <a:ext cx="383040" cy="152280"/>
           </a:xfrm>
           <a:prstGeom prst="rect">
             <a:avLst/>
@@ -7498,7 +7498,7 @@
         <p:spPr>
           <a:xfrm>
             <a:off x="3849480" y="1664280"/>
-            <a:ext cx="1882800" cy="178560"/>
+            <a:ext cx="1882440" cy="178200"/>
           </a:xfrm>
           <a:prstGeom prst="rect">
             <a:avLst/>
@@ -7552,7 +7552,7 @@
         <p:spPr>
           <a:xfrm>
             <a:off x="3429000" y="2002680"/>
-            <a:ext cx="2322000" cy="412560"/>
+            <a:ext cx="2321640" cy="412200"/>
           </a:xfrm>
           <a:prstGeom prst="rect">
             <a:avLst/>
@@ -7606,7 +7606,7 @@
         <p:spPr>
           <a:xfrm>
             <a:off x="6071760" y="1572840"/>
-            <a:ext cx="2541240" cy="1078200"/>
+            <a:ext cx="2540880" cy="1077840"/>
           </a:xfrm>
           <a:prstGeom prst="roundRect">
             <a:avLst>
@@ -7664,7 +7664,7 @@
         <p:spPr>
           <a:xfrm>
             <a:off x="6181200" y="1664280"/>
-            <a:ext cx="383400" cy="152640"/>
+            <a:ext cx="383040" cy="152280"/>
           </a:xfrm>
           <a:prstGeom prst="rect">
             <a:avLst/>
@@ -7718,7 +7718,7 @@
         <p:spPr>
           <a:xfrm>
             <a:off x="6602040" y="1664280"/>
-            <a:ext cx="1882800" cy="356760"/>
+            <a:ext cx="1882440" cy="356760"/>
           </a:xfrm>
           <a:prstGeom prst="rect">
             <a:avLst/>
@@ -7772,7 +7772,7 @@
         <p:spPr>
           <a:xfrm>
             <a:off x="6181200" y="2002680"/>
-            <a:ext cx="2322000" cy="412560"/>
+            <a:ext cx="2321640" cy="412200"/>
           </a:xfrm>
           <a:prstGeom prst="rect">
             <a:avLst/>
@@ -7826,7 +7826,7 @@
         <p:spPr>
           <a:xfrm>
             <a:off x="8823960" y="1572840"/>
-            <a:ext cx="2541240" cy="1078200"/>
+            <a:ext cx="2540880" cy="1077840"/>
           </a:xfrm>
           <a:prstGeom prst="roundRect">
             <a:avLst>
@@ -7884,7 +7884,7 @@
         <p:spPr>
           <a:xfrm>
             <a:off x="8933760" y="1664280"/>
-            <a:ext cx="383400" cy="152640"/>
+            <a:ext cx="383040" cy="152280"/>
           </a:xfrm>
           <a:prstGeom prst="rect">
             <a:avLst/>
@@ -7938,7 +7938,7 @@
         <p:spPr>
           <a:xfrm>
             <a:off x="9354240" y="1664280"/>
-            <a:ext cx="1882800" cy="178560"/>
+            <a:ext cx="1882440" cy="178200"/>
           </a:xfrm>
           <a:prstGeom prst="rect">
             <a:avLst/>
@@ -7992,7 +7992,7 @@
         <p:spPr>
           <a:xfrm>
             <a:off x="8933760" y="2002680"/>
-            <a:ext cx="2322000" cy="412560"/>
+            <a:ext cx="2321640" cy="412200"/>
           </a:xfrm>
           <a:prstGeom prst="rect">
             <a:avLst/>
@@ -8046,7 +8046,7 @@
         <p:spPr>
           <a:xfrm>
             <a:off x="567000" y="2907720"/>
-            <a:ext cx="5348520" cy="2331000"/>
+            <a:ext cx="5348160" cy="2330640"/>
           </a:xfrm>
           <a:prstGeom prst="roundRect">
             <a:avLst>
@@ -8104,7 +8104,7 @@
         <p:spPr>
           <a:xfrm>
             <a:off x="768240" y="3090600"/>
-            <a:ext cx="4937040" cy="133920"/>
+            <a:ext cx="4936680" cy="133560"/>
           </a:xfrm>
           <a:prstGeom prst="rect">
             <a:avLst/>
@@ -8158,7 +8158,7 @@
         <p:spPr>
           <a:xfrm>
             <a:off x="768240" y="3401640"/>
-            <a:ext cx="4863960" cy="1088280"/>
+            <a:ext cx="4863600" cy="1088280"/>
           </a:xfrm>
           <a:prstGeom prst="rect">
             <a:avLst/>
@@ -8248,7 +8248,7 @@
         <p:spPr>
           <a:xfrm>
             <a:off x="768240" y="4754880"/>
-            <a:ext cx="2422440" cy="133920"/>
+            <a:ext cx="2422080" cy="133560"/>
           </a:xfrm>
           <a:prstGeom prst="rect">
             <a:avLst/>
@@ -8304,7 +8304,7 @@
         <p:spPr>
           <a:xfrm>
             <a:off x="3127320" y="4754880"/>
-            <a:ext cx="2422440" cy="133920"/>
+            <a:ext cx="2422080" cy="133560"/>
           </a:xfrm>
           <a:prstGeom prst="rect">
             <a:avLst/>
@@ -8360,7 +8360,7 @@
         <p:spPr>
           <a:xfrm>
             <a:off x="6144840" y="2907720"/>
-            <a:ext cx="5257080" cy="2331000"/>
+            <a:ext cx="5256720" cy="2330640"/>
           </a:xfrm>
           <a:prstGeom prst="roundRect">
             <a:avLst>
@@ -8418,7 +8418,7 @@
         <p:spPr>
           <a:xfrm>
             <a:off x="6346080" y="3090600"/>
-            <a:ext cx="4754160" cy="133920"/>
+            <a:ext cx="4753800" cy="133560"/>
           </a:xfrm>
           <a:prstGeom prst="rect">
             <a:avLst/>
@@ -8472,7 +8472,7 @@
         <p:spPr>
           <a:xfrm>
             <a:off x="6346080" y="3401640"/>
-            <a:ext cx="4717440" cy="1033200"/>
+            <a:ext cx="4717080" cy="1032840"/>
           </a:xfrm>
           <a:prstGeom prst="rect">
             <a:avLst/>
@@ -8565,7 +8565,7 @@
         <p:spPr>
           <a:xfrm>
             <a:off x="6346080" y="4754880"/>
-            <a:ext cx="4388400" cy="133920"/>
+            <a:ext cx="4388040" cy="133560"/>
           </a:xfrm>
           <a:prstGeom prst="rect">
             <a:avLst/>
@@ -8621,7 +8621,7 @@
         <p:spPr>
           <a:xfrm>
             <a:off x="567000" y="5449680"/>
-            <a:ext cx="10834920" cy="529560"/>
+            <a:ext cx="10834560" cy="529200"/>
           </a:xfrm>
           <a:prstGeom prst="roundRect">
             <a:avLst>
@@ -8679,7 +8679,7 @@
         <p:spPr>
           <a:xfrm>
             <a:off x="768240" y="5577840"/>
-            <a:ext cx="10377720" cy="298440"/>
+            <a:ext cx="10377360" cy="298440"/>
           </a:xfrm>
           <a:prstGeom prst="rect">
             <a:avLst/>
@@ -8733,7 +8733,7 @@
         <p:spPr>
           <a:xfrm>
             <a:off x="785520" y="6510600"/>
-            <a:ext cx="3128400" cy="103680"/>
+            <a:ext cx="3128400" cy="103320"/>
           </a:xfrm>
           <a:prstGeom prst="rect">
             <a:avLst/>
@@ -8851,7 +8851,7 @@
         <p:spPr>
           <a:xfrm>
             <a:off x="567000" y="164520"/>
-            <a:ext cx="2193840" cy="163800"/>
+            <a:ext cx="2193480" cy="163440"/>
           </a:xfrm>
           <a:prstGeom prst="rect">
             <a:avLst/>
@@ -8908,7 +8908,7 @@
         <p:spPr>
           <a:xfrm>
             <a:off x="10927080" y="164520"/>
-            <a:ext cx="639360" cy="163800"/>
+            <a:ext cx="639000" cy="163440"/>
           </a:xfrm>
           <a:prstGeom prst="rect">
             <a:avLst/>
@@ -8965,7 +8965,7 @@
         <p:spPr>
           <a:xfrm>
             <a:off x="567000" y="658440"/>
-            <a:ext cx="10972080" cy="383400"/>
+            <a:ext cx="10971720" cy="383040"/>
           </a:xfrm>
           <a:prstGeom prst="rect">
             <a:avLst/>
@@ -9024,7 +9024,7 @@
         <p:spPr>
           <a:xfrm>
             <a:off x="567000" y="1115640"/>
-            <a:ext cx="10972080" cy="346680"/>
+            <a:ext cx="10971720" cy="346320"/>
           </a:xfrm>
           <a:prstGeom prst="rect">
             <a:avLst/>
@@ -9081,7 +9081,7 @@
         <p:spPr>
           <a:xfrm>
             <a:off x="594360" y="1591200"/>
-            <a:ext cx="1188000" cy="163800"/>
+            <a:ext cx="1187640" cy="163440"/>
           </a:xfrm>
           <a:prstGeom prst="rect">
             <a:avLst/>
@@ -9138,7 +9138,7 @@
         <p:spPr>
           <a:xfrm>
             <a:off x="1965960" y="1517760"/>
-            <a:ext cx="2148120" cy="346680"/>
+            <a:ext cx="2147760" cy="346320"/>
           </a:xfrm>
           <a:prstGeom prst="roundRect">
             <a:avLst>
@@ -9190,7 +9190,7 @@
         <p:spPr>
           <a:xfrm>
             <a:off x="2039040" y="1609200"/>
-            <a:ext cx="2001960" cy="127440"/>
+            <a:ext cx="2001600" cy="127080"/>
           </a:xfrm>
           <a:prstGeom prst="rect">
             <a:avLst/>
@@ -9247,7 +9247,7 @@
         <p:spPr>
           <a:xfrm>
             <a:off x="4233600" y="1517760"/>
-            <a:ext cx="1508040" cy="346680"/>
+            <a:ext cx="1507680" cy="346320"/>
           </a:xfrm>
           <a:prstGeom prst="roundRect">
             <a:avLst>
@@ -9299,7 +9299,7 @@
         <p:spPr>
           <a:xfrm>
             <a:off x="4306680" y="1609200"/>
-            <a:ext cx="1361880" cy="127440"/>
+            <a:ext cx="1361520" cy="127080"/>
           </a:xfrm>
           <a:prstGeom prst="rect">
             <a:avLst/>
@@ -9356,7 +9356,7 @@
         <p:spPr>
           <a:xfrm>
             <a:off x="5861160" y="1517760"/>
-            <a:ext cx="1572120" cy="346680"/>
+            <a:ext cx="1571760" cy="346320"/>
           </a:xfrm>
           <a:prstGeom prst="roundRect">
             <a:avLst>
@@ -9408,7 +9408,7 @@
         <p:spPr>
           <a:xfrm>
             <a:off x="5934600" y="1609200"/>
-            <a:ext cx="1425600" cy="127440"/>
+            <a:ext cx="1425240" cy="127080"/>
           </a:xfrm>
           <a:prstGeom prst="rect">
             <a:avLst/>
@@ -9465,7 +9465,7 @@
         <p:spPr>
           <a:xfrm>
             <a:off x="7552800" y="1517760"/>
-            <a:ext cx="1416600" cy="346680"/>
+            <a:ext cx="1416240" cy="346320"/>
           </a:xfrm>
           <a:prstGeom prst="roundRect">
             <a:avLst>
@@ -9517,7 +9517,7 @@
         <p:spPr>
           <a:xfrm>
             <a:off x="7626240" y="1609200"/>
-            <a:ext cx="1270440" cy="127440"/>
+            <a:ext cx="1270080" cy="127080"/>
           </a:xfrm>
           <a:prstGeom prst="rect">
             <a:avLst/>
@@ -9574,7 +9574,7 @@
         <p:spPr>
           <a:xfrm>
             <a:off x="685800" y="2514600"/>
-            <a:ext cx="1736640" cy="1233720"/>
+            <a:ext cx="1736280" cy="1233360"/>
           </a:xfrm>
           <a:prstGeom prst="roundRect">
             <a:avLst>
@@ -9626,7 +9626,7 @@
         <p:spPr>
           <a:xfrm>
             <a:off x="795600" y="2715840"/>
-            <a:ext cx="1517040" cy="310320"/>
+            <a:ext cx="1516680" cy="309960"/>
           </a:xfrm>
           <a:prstGeom prst="rect">
             <a:avLst/>
@@ -9683,7 +9683,7 @@
         <p:spPr>
           <a:xfrm>
             <a:off x="795600" y="3108960"/>
-            <a:ext cx="1517040" cy="383400"/>
+            <a:ext cx="1516680" cy="383040"/>
           </a:xfrm>
           <a:prstGeom prst="rect">
             <a:avLst/>
@@ -9783,7 +9783,7 @@
         <p:spPr>
           <a:xfrm>
             <a:off x="2880360" y="2514600"/>
-            <a:ext cx="1736640" cy="1233720"/>
+            <a:ext cx="1736280" cy="1233360"/>
           </a:xfrm>
           <a:prstGeom prst="roundRect">
             <a:avLst>
@@ -9835,7 +9835,7 @@
         <p:spPr>
           <a:xfrm>
             <a:off x="2990160" y="2715840"/>
-            <a:ext cx="1517040" cy="310320"/>
+            <a:ext cx="1516680" cy="309960"/>
           </a:xfrm>
           <a:prstGeom prst="rect">
             <a:avLst/>
@@ -9892,7 +9892,7 @@
         <p:spPr>
           <a:xfrm>
             <a:off x="2990160" y="3108960"/>
-            <a:ext cx="1517040" cy="383400"/>
+            <a:ext cx="1516680" cy="383040"/>
           </a:xfrm>
           <a:prstGeom prst="rect">
             <a:avLst/>
@@ -9992,7 +9992,7 @@
         <p:spPr>
           <a:xfrm>
             <a:off x="5166360" y="2514600"/>
-            <a:ext cx="1736640" cy="1233720"/>
+            <a:ext cx="1736280" cy="1233360"/>
           </a:xfrm>
           <a:prstGeom prst="roundRect">
             <a:avLst>
@@ -10044,7 +10044,7 @@
         <p:spPr>
           <a:xfrm>
             <a:off x="5276160" y="2715840"/>
-            <a:ext cx="1517040" cy="310320"/>
+            <a:ext cx="1516680" cy="309960"/>
           </a:xfrm>
           <a:prstGeom prst="rect">
             <a:avLst/>
@@ -10101,7 +10101,7 @@
         <p:spPr>
           <a:xfrm>
             <a:off x="5276160" y="3108960"/>
-            <a:ext cx="1517040" cy="383400"/>
+            <a:ext cx="1516680" cy="383040"/>
           </a:xfrm>
           <a:prstGeom prst="rect">
             <a:avLst/>
@@ -10201,7 +10201,7 @@
         <p:spPr>
           <a:xfrm>
             <a:off x="7452360" y="2514600"/>
-            <a:ext cx="1736640" cy="1233720"/>
+            <a:ext cx="1736280" cy="1233360"/>
           </a:xfrm>
           <a:prstGeom prst="roundRect">
             <a:avLst>
@@ -10253,7 +10253,7 @@
         <p:spPr>
           <a:xfrm>
             <a:off x="7562160" y="2715840"/>
-            <a:ext cx="1517040" cy="310320"/>
+            <a:ext cx="1516680" cy="309960"/>
           </a:xfrm>
           <a:prstGeom prst="rect">
             <a:avLst/>
@@ -10310,7 +10310,7 @@
         <p:spPr>
           <a:xfrm>
             <a:off x="7562160" y="3108960"/>
-            <a:ext cx="1517040" cy="383400"/>
+            <a:ext cx="1516680" cy="383040"/>
           </a:xfrm>
           <a:prstGeom prst="rect">
             <a:avLst/>
@@ -10410,7 +10410,7 @@
         <p:spPr>
           <a:xfrm>
             <a:off x="9646920" y="2514600"/>
-            <a:ext cx="1736640" cy="1233720"/>
+            <a:ext cx="1736280" cy="1233360"/>
           </a:xfrm>
           <a:prstGeom prst="roundRect">
             <a:avLst>
@@ -10462,7 +10462,7 @@
         <p:spPr>
           <a:xfrm>
             <a:off x="9756720" y="2715840"/>
-            <a:ext cx="1517040" cy="310320"/>
+            <a:ext cx="1516680" cy="309960"/>
           </a:xfrm>
           <a:prstGeom prst="rect">
             <a:avLst/>
@@ -10519,7 +10519,7 @@
         <p:spPr>
           <a:xfrm>
             <a:off x="9756720" y="3108960"/>
-            <a:ext cx="1517040" cy="383400"/>
+            <a:ext cx="1516680" cy="383040"/>
           </a:xfrm>
           <a:prstGeom prst="rect">
             <a:avLst/>
@@ -10576,7 +10576,7 @@
         <p:spPr>
           <a:xfrm>
             <a:off x="2423160" y="4316040"/>
-            <a:ext cx="7360200" cy="1114920"/>
+            <a:ext cx="7359840" cy="1114560"/>
           </a:xfrm>
           <a:prstGeom prst="roundRect">
             <a:avLst>
@@ -10628,7 +10628,7 @@
         <p:spPr>
           <a:xfrm>
             <a:off x="2651760" y="4553640"/>
-            <a:ext cx="2285280" cy="419760"/>
+            <a:ext cx="2284920" cy="419400"/>
           </a:xfrm>
           <a:prstGeom prst="rect">
             <a:avLst/>
@@ -10685,7 +10685,7 @@
         <p:spPr>
           <a:xfrm>
             <a:off x="2651760" y="5010840"/>
-            <a:ext cx="5119920" cy="273600"/>
+            <a:ext cx="5119560" cy="273240"/>
           </a:xfrm>
           <a:prstGeom prst="rect">
             <a:avLst/>
@@ -10742,7 +10742,7 @@
         <p:spPr>
           <a:xfrm>
             <a:off x="8028360" y="4645080"/>
-            <a:ext cx="639360" cy="163800"/>
+            <a:ext cx="639000" cy="163440"/>
           </a:xfrm>
           <a:prstGeom prst="rect">
             <a:avLst/>
@@ -10833,7 +10833,7 @@
         <p:spPr>
           <a:xfrm>
             <a:off x="8796600" y="4645080"/>
-            <a:ext cx="639360" cy="163800"/>
+            <a:ext cx="639000" cy="163440"/>
           </a:xfrm>
           <a:prstGeom prst="rect">
             <a:avLst/>
@@ -10881,7 +10881,7 @@
         <p:spPr>
           <a:xfrm>
             <a:off x="749880" y="5760720"/>
-            <a:ext cx="10652040" cy="383400"/>
+            <a:ext cx="10651680" cy="383040"/>
           </a:xfrm>
           <a:prstGeom prst="rect">
             <a:avLst/>
@@ -10942,7 +10942,7 @@
         <p:spPr>
           <a:xfrm>
             <a:off x="11064240" y="6537960"/>
-            <a:ext cx="502200" cy="163800"/>
+            <a:ext cx="501840" cy="163440"/>
           </a:xfrm>
           <a:prstGeom prst="rect">
             <a:avLst/>
@@ -11108,7 +11108,7 @@
         <p:spPr>
           <a:xfrm>
             <a:off x="7818120" y="4462200"/>
-            <a:ext cx="1965240" cy="867960"/>
+            <a:ext cx="1964880" cy="867600"/>
           </a:xfrm>
           <a:prstGeom prst="rect">
             <a:avLst/>
@@ -11161,7 +11161,7 @@
         <p:spPr>
           <a:xfrm>
             <a:off x="8001000" y="4617720"/>
-            <a:ext cx="776520" cy="203400"/>
+            <a:ext cx="776160" cy="203400"/>
           </a:xfrm>
           <a:prstGeom prst="rect">
             <a:avLst/>
@@ -11215,7 +11215,7 @@
         <p:spPr>
           <a:xfrm>
             <a:off x="8778240" y="4617720"/>
-            <a:ext cx="822240" cy="203400"/>
+            <a:ext cx="821880" cy="203400"/>
           </a:xfrm>
           <a:prstGeom prst="rect">
             <a:avLst/>
@@ -11269,7 +11269,7 @@
         <p:spPr>
           <a:xfrm>
             <a:off x="8321040" y="4873680"/>
-            <a:ext cx="109080" cy="218880"/>
+            <a:ext cx="108720" cy="218520"/>
           </a:xfrm>
           <a:prstGeom prst="downArrow">
             <a:avLst>
@@ -11324,8 +11324,8 @@
         </p:nvSpPr>
         <p:spPr>
           <a:xfrm rot="10800000">
-            <a:off x="9099000" y="4874400"/>
-            <a:ext cx="109080" cy="218880"/>
+            <a:off x="9099360" y="4874760"/>
+            <a:ext cx="108720" cy="218520"/>
           </a:xfrm>
           <a:prstGeom prst="downArrow">
             <a:avLst>
@@ -11381,7 +11381,7 @@
         <p:spPr>
           <a:xfrm>
             <a:off x="1189440" y="6510600"/>
-            <a:ext cx="2320200" cy="103680"/>
+            <a:ext cx="2319840" cy="103320"/>
           </a:xfrm>
           <a:prstGeom prst="rect">
             <a:avLst/>
@@ -11477,7 +11477,7 @@
         <p:spPr>
           <a:xfrm>
             <a:off x="567000" y="164520"/>
-            <a:ext cx="2193840" cy="163800"/>
+            <a:ext cx="2193480" cy="163440"/>
           </a:xfrm>
           <a:prstGeom prst="rect">
             <a:avLst/>
@@ -11534,7 +11534,7 @@
         <p:spPr>
           <a:xfrm>
             <a:off x="10927080" y="164520"/>
-            <a:ext cx="639360" cy="163800"/>
+            <a:ext cx="639000" cy="163440"/>
           </a:xfrm>
           <a:prstGeom prst="rect">
             <a:avLst/>
@@ -11591,7 +11591,7 @@
         <p:spPr>
           <a:xfrm>
             <a:off x="567000" y="658440"/>
-            <a:ext cx="10972080" cy="383400"/>
+            <a:ext cx="10971720" cy="383040"/>
           </a:xfrm>
           <a:prstGeom prst="rect">
             <a:avLst/>
@@ -11650,7 +11650,7 @@
         <p:spPr>
           <a:xfrm>
             <a:off x="567000" y="1115640"/>
-            <a:ext cx="10972080" cy="346680"/>
+            <a:ext cx="10971720" cy="346320"/>
           </a:xfrm>
           <a:prstGeom prst="rect">
             <a:avLst/>
@@ -11707,7 +11707,7 @@
         <p:spPr>
           <a:xfrm>
             <a:off x="640080" y="1691640"/>
-            <a:ext cx="3153960" cy="1261080"/>
+            <a:ext cx="3153600" cy="1260720"/>
           </a:xfrm>
           <a:prstGeom prst="roundRect">
             <a:avLst>
@@ -11759,7 +11759,7 @@
         <p:spPr>
           <a:xfrm>
             <a:off x="640080" y="1691640"/>
-            <a:ext cx="49680" cy="1261080"/>
+            <a:ext cx="49320" cy="1260720"/>
           </a:xfrm>
           <a:prstGeom prst="rect">
             <a:avLst/>
@@ -11809,7 +11809,7 @@
         <p:spPr>
           <a:xfrm>
             <a:off x="804600" y="1810440"/>
-            <a:ext cx="2898000" cy="255240"/>
+            <a:ext cx="2897640" cy="254880"/>
           </a:xfrm>
           <a:prstGeom prst="rect">
             <a:avLst/>
@@ -11866,7 +11866,7 @@
         <p:spPr>
           <a:xfrm>
             <a:off x="804600" y="2121480"/>
-            <a:ext cx="2879640" cy="730800"/>
+            <a:ext cx="2879280" cy="730440"/>
           </a:xfrm>
           <a:prstGeom prst="rect">
             <a:avLst/>
@@ -11923,7 +11923,7 @@
         <p:spPr>
           <a:xfrm>
             <a:off x="4178880" y="1700640"/>
-            <a:ext cx="3153960" cy="1261080"/>
+            <a:ext cx="3153600" cy="1260720"/>
           </a:xfrm>
           <a:prstGeom prst="roundRect">
             <a:avLst>
@@ -11975,7 +11975,7 @@
         <p:spPr>
           <a:xfrm>
             <a:off x="4160520" y="1691640"/>
-            <a:ext cx="49680" cy="1261080"/>
+            <a:ext cx="49320" cy="1260720"/>
           </a:xfrm>
           <a:prstGeom prst="rect">
             <a:avLst/>
@@ -12025,7 +12025,7 @@
         <p:spPr>
           <a:xfrm>
             <a:off x="4325040" y="1810440"/>
-            <a:ext cx="2898000" cy="255240"/>
+            <a:ext cx="2897640" cy="254880"/>
           </a:xfrm>
           <a:prstGeom prst="rect">
             <a:avLst/>
@@ -12082,7 +12082,7 @@
         <p:spPr>
           <a:xfrm>
             <a:off x="4325040" y="2121480"/>
-            <a:ext cx="2879640" cy="730800"/>
+            <a:ext cx="2879280" cy="730440"/>
           </a:xfrm>
           <a:prstGeom prst="rect">
             <a:avLst/>
@@ -12139,7 +12139,7 @@
         <p:spPr>
           <a:xfrm>
             <a:off x="7680960" y="1691640"/>
-            <a:ext cx="3153960" cy="1261080"/>
+            <a:ext cx="3153600" cy="1260720"/>
           </a:xfrm>
           <a:prstGeom prst="roundRect">
             <a:avLst>
@@ -12191,7 +12191,7 @@
         <p:spPr>
           <a:xfrm>
             <a:off x="7680960" y="1691640"/>
-            <a:ext cx="49680" cy="1261080"/>
+            <a:ext cx="49320" cy="1260720"/>
           </a:xfrm>
           <a:prstGeom prst="rect">
             <a:avLst/>
@@ -12241,7 +12241,7 @@
         <p:spPr>
           <a:xfrm>
             <a:off x="7845480" y="1810440"/>
-            <a:ext cx="2898000" cy="255240"/>
+            <a:ext cx="2897640" cy="254880"/>
           </a:xfrm>
           <a:prstGeom prst="rect">
             <a:avLst/>
@@ -12298,7 +12298,7 @@
         <p:spPr>
           <a:xfrm>
             <a:off x="7845480" y="2121480"/>
-            <a:ext cx="2879640" cy="730800"/>
+            <a:ext cx="2879280" cy="730440"/>
           </a:xfrm>
           <a:prstGeom prst="rect">
             <a:avLst/>
@@ -12355,7 +12355,7 @@
         <p:spPr>
           <a:xfrm>
             <a:off x="640080" y="3246120"/>
-            <a:ext cx="3153960" cy="1261080"/>
+            <a:ext cx="3153600" cy="1260720"/>
           </a:xfrm>
           <a:prstGeom prst="roundRect">
             <a:avLst>
@@ -12407,7 +12407,7 @@
         <p:spPr>
           <a:xfrm>
             <a:off x="640080" y="3246120"/>
-            <a:ext cx="49680" cy="1261080"/>
+            <a:ext cx="49320" cy="1260720"/>
           </a:xfrm>
           <a:prstGeom prst="rect">
             <a:avLst/>
@@ -12457,7 +12457,7 @@
         <p:spPr>
           <a:xfrm>
             <a:off x="804600" y="3364920"/>
-            <a:ext cx="2898000" cy="255240"/>
+            <a:ext cx="2897640" cy="254880"/>
           </a:xfrm>
           <a:prstGeom prst="rect">
             <a:avLst/>
@@ -12514,7 +12514,7 @@
         <p:spPr>
           <a:xfrm>
             <a:off x="804600" y="3675960"/>
-            <a:ext cx="2879640" cy="730800"/>
+            <a:ext cx="2879280" cy="730440"/>
           </a:xfrm>
           <a:prstGeom prst="rect">
             <a:avLst/>
@@ -12571,7 +12571,7 @@
         <p:spPr>
           <a:xfrm>
             <a:off x="4160520" y="3246120"/>
-            <a:ext cx="3153960" cy="1261080"/>
+            <a:ext cx="3153600" cy="1260720"/>
           </a:xfrm>
           <a:prstGeom prst="roundRect">
             <a:avLst>
@@ -12623,7 +12623,7 @@
         <p:spPr>
           <a:xfrm>
             <a:off x="4160520" y="3246120"/>
-            <a:ext cx="49680" cy="1261080"/>
+            <a:ext cx="49320" cy="1260720"/>
           </a:xfrm>
           <a:prstGeom prst="rect">
             <a:avLst/>
@@ -12673,7 +12673,7 @@
         <p:spPr>
           <a:xfrm>
             <a:off x="4325040" y="3364920"/>
-            <a:ext cx="2898000" cy="255240"/>
+            <a:ext cx="2897640" cy="254880"/>
           </a:xfrm>
           <a:prstGeom prst="rect">
             <a:avLst/>
@@ -12730,7 +12730,7 @@
         <p:spPr>
           <a:xfrm>
             <a:off x="4325040" y="3675960"/>
-            <a:ext cx="2879640" cy="730800"/>
+            <a:ext cx="2879280" cy="730440"/>
           </a:xfrm>
           <a:prstGeom prst="rect">
             <a:avLst/>
@@ -12787,7 +12787,7 @@
         <p:spPr>
           <a:xfrm>
             <a:off x="7680960" y="3246120"/>
-            <a:ext cx="3153960" cy="1261080"/>
+            <a:ext cx="3153600" cy="1260720"/>
           </a:xfrm>
           <a:prstGeom prst="roundRect">
             <a:avLst>
@@ -12839,7 +12839,7 @@
         <p:spPr>
           <a:xfrm>
             <a:off x="7680960" y="3246120"/>
-            <a:ext cx="49680" cy="1261080"/>
+            <a:ext cx="49320" cy="1260720"/>
           </a:xfrm>
           <a:prstGeom prst="rect">
             <a:avLst/>
@@ -12889,7 +12889,7 @@
         <p:spPr>
           <a:xfrm>
             <a:off x="7845480" y="3364920"/>
-            <a:ext cx="2898000" cy="255240"/>
+            <a:ext cx="2897640" cy="254880"/>
           </a:xfrm>
           <a:prstGeom prst="rect">
             <a:avLst/>
@@ -12946,7 +12946,7 @@
         <p:spPr>
           <a:xfrm>
             <a:off x="7845480" y="3675960"/>
-            <a:ext cx="2879640" cy="730800"/>
+            <a:ext cx="2879280" cy="730440"/>
           </a:xfrm>
           <a:prstGeom prst="rect">
             <a:avLst/>
@@ -13003,7 +13003,7 @@
         <p:spPr>
           <a:xfrm>
             <a:off x="658440" y="5074920"/>
-            <a:ext cx="10652040" cy="803880"/>
+            <a:ext cx="10651680" cy="803520"/>
           </a:xfrm>
           <a:prstGeom prst="roundRect">
             <a:avLst>
@@ -13055,7 +13055,7 @@
         <p:spPr>
           <a:xfrm>
             <a:off x="896040" y="5266800"/>
-            <a:ext cx="1919520" cy="163800"/>
+            <a:ext cx="1919160" cy="163440"/>
           </a:xfrm>
           <a:prstGeom prst="rect">
             <a:avLst/>
@@ -13112,7 +13112,7 @@
         <p:spPr>
           <a:xfrm>
             <a:off x="2743200" y="5193720"/>
-            <a:ext cx="8228880" cy="346680"/>
+            <a:ext cx="8228520" cy="346320"/>
           </a:xfrm>
           <a:prstGeom prst="rect">
             <a:avLst/>
@@ -13173,7 +13173,7 @@
         <p:spPr>
           <a:xfrm>
             <a:off x="11064240" y="6537960"/>
-            <a:ext cx="502200" cy="163800"/>
+            <a:ext cx="501840" cy="163440"/>
           </a:xfrm>
           <a:prstGeom prst="rect">
             <a:avLst/>
@@ -13243,7 +13243,7 @@
         <p:spPr>
           <a:xfrm>
             <a:off x="658440" y="4553640"/>
-            <a:ext cx="10652040" cy="429120"/>
+            <a:ext cx="10651680" cy="428760"/>
           </a:xfrm>
           <a:prstGeom prst="roundRect">
             <a:avLst>
@@ -13353,7 +13353,7 @@
         <p:spPr>
           <a:xfrm>
             <a:off x="1411200" y="6510600"/>
-            <a:ext cx="1876680" cy="103680"/>
+            <a:ext cx="1876320" cy="103320"/>
           </a:xfrm>
           <a:prstGeom prst="rect">
             <a:avLst/>
@@ -13471,7 +13471,7 @@
         <p:spPr>
           <a:xfrm>
             <a:off x="567000" y="164520"/>
-            <a:ext cx="2833920" cy="124920"/>
+            <a:ext cx="2833560" cy="124560"/>
           </a:xfrm>
           <a:prstGeom prst="rect">
             <a:avLst/>
@@ -13525,7 +13525,7 @@
         <p:spPr>
           <a:xfrm>
             <a:off x="10881360" y="164520"/>
-            <a:ext cx="657720" cy="124920"/>
+            <a:ext cx="657360" cy="124560"/>
           </a:xfrm>
           <a:prstGeom prst="rect">
             <a:avLst/>
@@ -13579,7 +13579,7 @@
         <p:spPr>
           <a:xfrm>
             <a:off x="567000" y="649080"/>
-            <a:ext cx="10606320" cy="365760"/>
+            <a:ext cx="10605960" cy="365400"/>
           </a:xfrm>
           <a:prstGeom prst="rect">
             <a:avLst/>
@@ -13633,7 +13633,7 @@
         <p:spPr>
           <a:xfrm>
             <a:off x="567000" y="1078920"/>
-            <a:ext cx="10606320" cy="175320"/>
+            <a:ext cx="10605960" cy="174960"/>
           </a:xfrm>
           <a:prstGeom prst="rect">
             <a:avLst/>
@@ -13687,7 +13687,7 @@
         <p:spPr>
           <a:xfrm>
             <a:off x="11064240" y="6409800"/>
-            <a:ext cx="319320" cy="129600"/>
+            <a:ext cx="318960" cy="129240"/>
           </a:xfrm>
           <a:prstGeom prst="rect">
             <a:avLst/>
@@ -13741,7 +13741,7 @@
         <p:spPr>
           <a:xfrm>
             <a:off x="658440" y="1627560"/>
-            <a:ext cx="2925360" cy="1663560"/>
+            <a:ext cx="2925000" cy="1663200"/>
           </a:xfrm>
           <a:prstGeom prst="roundRect">
             <a:avLst>
@@ -13799,7 +13799,7 @@
         <p:spPr>
           <a:xfrm>
             <a:off x="658440" y="1627560"/>
-            <a:ext cx="63360" cy="1663560"/>
+            <a:ext cx="63000" cy="1663200"/>
           </a:xfrm>
           <a:prstGeom prst="rect">
             <a:avLst/>
@@ -13855,7 +13855,7 @@
         <p:spPr>
           <a:xfrm>
             <a:off x="786240" y="1682640"/>
-            <a:ext cx="511200" cy="129600"/>
+            <a:ext cx="510840" cy="129240"/>
           </a:xfrm>
           <a:prstGeom prst="rect">
             <a:avLst/>
@@ -13909,7 +13909,7 @@
         <p:spPr>
           <a:xfrm>
             <a:off x="822960" y="1828800"/>
-            <a:ext cx="2669400" cy="219456"/>
+            <a:ext cx="2669040" cy="219456"/>
           </a:xfrm>
           <a:prstGeom prst="rect">
             <a:avLst/>
@@ -13947,7 +13947,7 @@
               </a:rPr>
               <a:t>The 100 Million Token Enterprise</a:t>
             </a:r>
-            <a:endParaRPr b="0" lang="en-US" sz="1320" spc="-1" strike="noStrike">
+            <a:endParaRPr b="0" lang="en-US" sz="1050" spc="-1" strike="noStrike">
               <a:solidFill>
                 <a:srgbClr val="000000"/>
               </a:solidFill>
@@ -13965,7 +13965,7 @@
         <p:spPr>
           <a:xfrm>
             <a:off x="822960" y="2139840"/>
-            <a:ext cx="2669400" cy="777600"/>
+            <a:ext cx="2669040" cy="777240"/>
           </a:xfrm>
           <a:prstGeom prst="rect">
             <a:avLst/>
@@ -14019,7 +14019,7 @@
         <p:spPr>
           <a:xfrm>
             <a:off x="3959280" y="1627560"/>
-            <a:ext cx="2925360" cy="1663560"/>
+            <a:ext cx="2925000" cy="1663200"/>
           </a:xfrm>
           <a:prstGeom prst="roundRect">
             <a:avLst>
@@ -14077,7 +14077,7 @@
         <p:spPr>
           <a:xfrm>
             <a:off x="3959280" y="1627560"/>
-            <a:ext cx="63360" cy="1663560"/>
+            <a:ext cx="63000" cy="1663200"/>
           </a:xfrm>
           <a:prstGeom prst="rect">
             <a:avLst/>
@@ -14133,7 +14133,7 @@
         <p:spPr>
           <a:xfrm>
             <a:off x="4087440" y="1682640"/>
-            <a:ext cx="511200" cy="129600"/>
+            <a:ext cx="510840" cy="129240"/>
           </a:xfrm>
           <a:prstGeom prst="rect">
             <a:avLst/>
@@ -14187,7 +14187,7 @@
         <p:spPr>
           <a:xfrm>
             <a:off x="4123800" y="1828800"/>
-            <a:ext cx="2669400" cy="219456"/>
+            <a:ext cx="2669040" cy="219456"/>
           </a:xfrm>
           <a:prstGeom prst="rect">
             <a:avLst/>
@@ -14225,7 +14225,7 @@
               </a:rPr>
               <a:t>Chaos in the Smartcity</a:t>
             </a:r>
-            <a:endParaRPr b="0" lang="en-US" sz="1320" spc="-1" strike="noStrike">
+            <a:endParaRPr b="0" lang="en-US" sz="1050" spc="-1" strike="noStrike">
               <a:solidFill>
                 <a:srgbClr val="000000"/>
               </a:solidFill>
@@ -14243,7 +14243,7 @@
         <p:spPr>
           <a:xfrm>
             <a:off x="4123800" y="2139840"/>
-            <a:ext cx="2669400" cy="777600"/>
+            <a:ext cx="2669040" cy="777240"/>
           </a:xfrm>
           <a:prstGeom prst="rect">
             <a:avLst/>
@@ -14297,7 +14297,7 @@
         <p:spPr>
           <a:xfrm>
             <a:off x="7260480" y="1627560"/>
-            <a:ext cx="2925360" cy="1663560"/>
+            <a:ext cx="2925000" cy="1663200"/>
           </a:xfrm>
           <a:prstGeom prst="roundRect">
             <a:avLst>
@@ -14355,7 +14355,7 @@
         <p:spPr>
           <a:xfrm>
             <a:off x="7260480" y="1627560"/>
-            <a:ext cx="63360" cy="1663560"/>
+            <a:ext cx="63000" cy="1663200"/>
           </a:xfrm>
           <a:prstGeom prst="rect">
             <a:avLst/>
@@ -14411,7 +14411,7 @@
         <p:spPr>
           <a:xfrm>
             <a:off x="7388280" y="1682640"/>
-            <a:ext cx="511200" cy="129600"/>
+            <a:ext cx="510840" cy="129240"/>
           </a:xfrm>
           <a:prstGeom prst="rect">
             <a:avLst/>
@@ -14465,7 +14465,7 @@
         <p:spPr>
           <a:xfrm>
             <a:off x="7425000" y="1828800"/>
-            <a:ext cx="2669400" cy="219456"/>
+            <a:ext cx="2669040" cy="219456"/>
           </a:xfrm>
           <a:prstGeom prst="rect">
             <a:avLst/>
@@ -14503,7 +14503,7 @@
               </a:rPr>
               <a:t>Ciber Napoleon Goes to Russia</a:t>
             </a:r>
-            <a:endParaRPr b="0" lang="en-US" sz="1320" spc="-1" strike="noStrike">
+            <a:endParaRPr b="0" lang="en-US" sz="1050" spc="-1" strike="noStrike">
               <a:solidFill>
                 <a:srgbClr val="000000"/>
               </a:solidFill>
@@ -14521,7 +14521,7 @@
         <p:spPr>
           <a:xfrm>
             <a:off x="7425000" y="2139840"/>
-            <a:ext cx="2669400" cy="777600"/>
+            <a:ext cx="2669040" cy="777240"/>
           </a:xfrm>
           <a:prstGeom prst="rect">
             <a:avLst/>
@@ -14575,7 +14575,7 @@
         <p:spPr>
           <a:xfrm>
             <a:off x="658440" y="3675960"/>
-            <a:ext cx="2925360" cy="1663560"/>
+            <a:ext cx="2925000" cy="1663200"/>
           </a:xfrm>
           <a:prstGeom prst="roundRect">
             <a:avLst>
@@ -14633,7 +14633,7 @@
         <p:spPr>
           <a:xfrm>
             <a:off x="658440" y="3675960"/>
-            <a:ext cx="63360" cy="1663560"/>
+            <a:ext cx="63000" cy="1663200"/>
           </a:xfrm>
           <a:prstGeom prst="rect">
             <a:avLst/>
@@ -14689,7 +14689,7 @@
         <p:spPr>
           <a:xfrm>
             <a:off x="786240" y="3730680"/>
-            <a:ext cx="511200" cy="129600"/>
+            <a:ext cx="510840" cy="129240"/>
           </a:xfrm>
           <a:prstGeom prst="rect">
             <a:avLst/>
@@ -14743,7 +14743,7 @@
         <p:spPr>
           <a:xfrm>
             <a:off x="822960" y="3877200"/>
-            <a:ext cx="2669400" cy="219456"/>
+            <a:ext cx="2669040" cy="219456"/>
           </a:xfrm>
           <a:prstGeom prst="rect">
             <a:avLst/>
@@ -14781,7 +14781,7 @@
               </a:rPr>
               <a:t>The Quiet Four Thousand</a:t>
             </a:r>
-            <a:endParaRPr b="0" lang="en-US" sz="1320" spc="-1" strike="noStrike">
+            <a:endParaRPr b="0" lang="en-US" sz="1050" spc="-1" strike="noStrike">
               <a:solidFill>
                 <a:srgbClr val="000000"/>
               </a:solidFill>
@@ -14799,7 +14799,7 @@
         <p:spPr>
           <a:xfrm>
             <a:off x="822960" y="4187880"/>
-            <a:ext cx="2669400" cy="622080"/>
+            <a:ext cx="2669040" cy="621720"/>
           </a:xfrm>
           <a:prstGeom prst="rect">
             <a:avLst/>
@@ -14853,7 +14853,7 @@
         <p:spPr>
           <a:xfrm>
             <a:off x="3959280" y="3675960"/>
-            <a:ext cx="2925360" cy="1663560"/>
+            <a:ext cx="2925000" cy="1663200"/>
           </a:xfrm>
           <a:prstGeom prst="roundRect">
             <a:avLst>
@@ -14911,7 +14911,7 @@
         <p:spPr>
           <a:xfrm>
             <a:off x="3959280" y="3675960"/>
-            <a:ext cx="63360" cy="1663560"/>
+            <a:ext cx="63000" cy="1663200"/>
           </a:xfrm>
           <a:prstGeom prst="rect">
             <a:avLst/>
@@ -14967,7 +14967,7 @@
         <p:spPr>
           <a:xfrm>
             <a:off x="4087440" y="3730680"/>
-            <a:ext cx="511200" cy="129600"/>
+            <a:ext cx="510840" cy="129240"/>
           </a:xfrm>
           <a:prstGeom prst="rect">
             <a:avLst/>
@@ -15021,7 +15021,7 @@
         <p:spPr>
           <a:xfrm>
             <a:off x="4123800" y="3877200"/>
-            <a:ext cx="2669400" cy="219456"/>
+            <a:ext cx="2669040" cy="219456"/>
           </a:xfrm>
           <a:prstGeom prst="rect">
             <a:avLst/>
@@ -15059,7 +15059,7 @@
               </a:rPr>
               <a:t>The Patch That Undid the Fix</a:t>
             </a:r>
-            <a:endParaRPr b="0" lang="en-US" sz="1320" spc="-1" strike="noStrike">
+            <a:endParaRPr b="0" lang="en-US" sz="1050" spc="-1" strike="noStrike">
               <a:solidFill>
                 <a:srgbClr val="000000"/>
               </a:solidFill>
@@ -15077,7 +15077,7 @@
         <p:spPr>
           <a:xfrm>
             <a:off x="4123800" y="4187880"/>
-            <a:ext cx="2669400" cy="622080"/>
+            <a:ext cx="2669040" cy="621720"/>
           </a:xfrm>
           <a:prstGeom prst="rect">
             <a:avLst/>
@@ -15131,7 +15131,7 @@
         <p:spPr>
           <a:xfrm>
             <a:off x="7260480" y="3675960"/>
-            <a:ext cx="2925360" cy="1663560"/>
+            <a:ext cx="2925000" cy="1663200"/>
           </a:xfrm>
           <a:prstGeom prst="roundRect">
             <a:avLst>
@@ -15189,7 +15189,7 @@
         <p:spPr>
           <a:xfrm>
             <a:off x="7260480" y="3675960"/>
-            <a:ext cx="63360" cy="1663560"/>
+            <a:ext cx="63000" cy="1663200"/>
           </a:xfrm>
           <a:prstGeom prst="rect">
             <a:avLst/>
@@ -15245,7 +15245,7 @@
         <p:spPr>
           <a:xfrm>
             <a:off x="7388280" y="3730680"/>
-            <a:ext cx="511200" cy="129600"/>
+            <a:ext cx="510840" cy="129240"/>
           </a:xfrm>
           <a:prstGeom prst="rect">
             <a:avLst/>
@@ -15299,7 +15299,7 @@
         <p:spPr>
           <a:xfrm>
             <a:off x="7425000" y="3877200"/>
-            <a:ext cx="2669400" cy="219456"/>
+            <a:ext cx="2669040" cy="219456"/>
           </a:xfrm>
           <a:prstGeom prst="rect">
             <a:avLst/>
@@ -15337,7 +15337,7 @@
               </a:rPr>
               <a:t>The Author Pays for His Own Work</a:t>
             </a:r>
-            <a:endParaRPr b="0" lang="en-US" sz="1320" spc="-1" strike="noStrike">
+            <a:endParaRPr b="0" lang="en-US" sz="1050" spc="-1" strike="noStrike">
               <a:solidFill>
                 <a:srgbClr val="000000"/>
               </a:solidFill>
@@ -15355,7 +15355,7 @@
         <p:spPr>
           <a:xfrm>
             <a:off x="7425000" y="4187880"/>
-            <a:ext cx="2669400" cy="777600"/>
+            <a:ext cx="2669040" cy="777240"/>
           </a:xfrm>
           <a:prstGeom prst="rect">
             <a:avLst/>
@@ -15409,7 +15409,7 @@
         <p:spPr>
           <a:xfrm>
             <a:off x="658440" y="6035040"/>
-            <a:ext cx="10853280" cy="410760"/>
+            <a:ext cx="10852920" cy="410400"/>
           </a:xfrm>
           <a:prstGeom prst="roundRect">
             <a:avLst>
@@ -15467,7 +15467,7 @@
         <p:spPr>
           <a:xfrm>
             <a:off x="786240" y="6144840"/>
-            <a:ext cx="10560600" cy="137520"/>
+            <a:ext cx="10560240" cy="137160"/>
           </a:xfrm>
           <a:prstGeom prst="rect">
             <a:avLst/>
@@ -15521,7 +15521,7 @@
         <p:spPr>
           <a:xfrm>
             <a:off x="1427400" y="6510600"/>
-            <a:ext cx="1844640" cy="103680"/>
+            <a:ext cx="1844280" cy="103320"/>
           </a:xfrm>
           <a:prstGeom prst="rect">
             <a:avLst/>
@@ -15617,7 +15617,7 @@
         <p:spPr>
           <a:xfrm>
             <a:off x="567000" y="164520"/>
-            <a:ext cx="2833920" cy="124920"/>
+            <a:ext cx="2833560" cy="124560"/>
           </a:xfrm>
           <a:prstGeom prst="rect">
             <a:avLst/>
@@ -15671,7 +15671,7 @@
         <p:spPr>
           <a:xfrm>
             <a:off x="10881360" y="164520"/>
-            <a:ext cx="657720" cy="124920"/>
+            <a:ext cx="657360" cy="124560"/>
           </a:xfrm>
           <a:prstGeom prst="rect">
             <a:avLst/>
@@ -15725,7 +15725,7 @@
         <p:spPr>
           <a:xfrm>
             <a:off x="567000" y="649080"/>
-            <a:ext cx="10606320" cy="347472"/>
+            <a:ext cx="10605960" cy="347472"/>
           </a:xfrm>
           <a:prstGeom prst="rect">
             <a:avLst/>
@@ -15761,7 +15761,7 @@
               </a:rPr>
               <a:t>Technology used in the scenario routes and the three validation trajectories</a:t>
             </a:r>
-            <a:endParaRPr b="0" lang="en-US" sz="2400" spc="-1" strike="noStrike">
+            <a:endParaRPr b="0" lang="en-US" sz="1850" spc="-1" strike="noStrike">
               <a:solidFill>
                 <a:srgbClr val="000000"/>
               </a:solidFill>
@@ -15779,7 +15779,7 @@
         <p:spPr>
           <a:xfrm>
             <a:off x="567000" y="1078920"/>
-            <a:ext cx="10606320" cy="350640"/>
+            <a:ext cx="10605960" cy="350280"/>
           </a:xfrm>
           <a:prstGeom prst="rect">
             <a:avLst/>
@@ -15833,7 +15833,7 @@
         <p:spPr>
           <a:xfrm>
             <a:off x="11064240" y="6409800"/>
-            <a:ext cx="319320" cy="129600"/>
+            <a:ext cx="318960" cy="129240"/>
           </a:xfrm>
           <a:prstGeom prst="rect">
             <a:avLst/>
@@ -15887,7 +15887,7 @@
         <p:spPr>
           <a:xfrm>
             <a:off x="658440" y="1600200"/>
-            <a:ext cx="10853280" cy="3016800"/>
+            <a:ext cx="10852920" cy="3016440"/>
           </a:xfrm>
           <a:prstGeom prst="roundRect">
             <a:avLst>
@@ -15945,7 +15945,7 @@
         <p:spPr>
           <a:xfrm>
             <a:off x="841320" y="1719000"/>
-            <a:ext cx="3108240" cy="131040"/>
+            <a:ext cx="3107880" cy="130680"/>
           </a:xfrm>
           <a:prstGeom prst="rect">
             <a:avLst/>
@@ -15999,7 +15999,7 @@
         <p:spPr>
           <a:xfrm>
             <a:off x="877680" y="2011680"/>
-            <a:ext cx="45000" cy="456480"/>
+            <a:ext cx="44640" cy="456120"/>
           </a:xfrm>
           <a:prstGeom prst="rect">
             <a:avLst/>
@@ -16055,7 +16055,7 @@
         <p:spPr>
           <a:xfrm>
             <a:off x="969120" y="1993320"/>
-            <a:ext cx="2559600" cy="170280"/>
+            <a:ext cx="2559240" cy="170280"/>
           </a:xfrm>
           <a:prstGeom prst="rect">
             <a:avLst/>
@@ -16109,7 +16109,7 @@
         <p:spPr>
           <a:xfrm>
             <a:off x="1880280" y="2176200"/>
-            <a:ext cx="2748600" cy="144720"/>
+            <a:ext cx="2748240" cy="144360"/>
           </a:xfrm>
           <a:prstGeom prst="rect">
             <a:avLst/>
@@ -16187,7 +16187,7 @@
         <p:spPr>
           <a:xfrm>
             <a:off x="877680" y="2743200"/>
-            <a:ext cx="45000" cy="456480"/>
+            <a:ext cx="44640" cy="456120"/>
           </a:xfrm>
           <a:prstGeom prst="rect">
             <a:avLst/>
@@ -16243,7 +16243,7 @@
         <p:spPr>
           <a:xfrm>
             <a:off x="969120" y="2724840"/>
-            <a:ext cx="2559600" cy="170280"/>
+            <a:ext cx="2559240" cy="170280"/>
           </a:xfrm>
           <a:prstGeom prst="rect">
             <a:avLst/>
@@ -16297,7 +16297,7 @@
         <p:spPr>
           <a:xfrm>
             <a:off x="1598400" y="2907720"/>
-            <a:ext cx="3312720" cy="144720"/>
+            <a:ext cx="3312360" cy="144360"/>
           </a:xfrm>
           <a:prstGeom prst="rect">
             <a:avLst/>
@@ -16375,7 +16375,7 @@
         <p:spPr>
           <a:xfrm>
             <a:off x="877680" y="3474720"/>
-            <a:ext cx="45000" cy="456480"/>
+            <a:ext cx="44640" cy="456120"/>
           </a:xfrm>
           <a:prstGeom prst="rect">
             <a:avLst/>
@@ -16431,7 +16431,7 @@
         <p:spPr>
           <a:xfrm>
             <a:off x="969120" y="3456360"/>
-            <a:ext cx="2559600" cy="201168"/>
+            <a:ext cx="2559240" cy="201168"/>
           </a:xfrm>
           <a:prstGeom prst="rect">
             <a:avLst/>
@@ -16467,7 +16467,7 @@
               </a:rPr>
               <a:t>00G  Ciber Napoleon Goes to Russia</a:t>
             </a:r>
-            <a:endParaRPr b="0" lang="en-US" sz="1120" spc="-1" strike="noStrike">
+            <a:endParaRPr b="0" lang="en-US" sz="980" spc="-1" strike="noStrike">
               <a:solidFill>
                 <a:srgbClr val="000000"/>
               </a:solidFill>
@@ -16485,7 +16485,7 @@
         <p:spPr>
           <a:xfrm>
             <a:off x="1353960" y="3730752"/>
-            <a:ext cx="3801600" cy="144720"/>
+            <a:ext cx="3801240" cy="144360"/>
           </a:xfrm>
           <a:prstGeom prst="rect">
             <a:avLst/>
@@ -16541,7 +16541,7 @@
         <p:spPr>
           <a:xfrm>
             <a:off x="5989320" y="2011680"/>
-            <a:ext cx="45000" cy="456480"/>
+            <a:ext cx="44640" cy="456120"/>
           </a:xfrm>
           <a:prstGeom prst="rect">
             <a:avLst/>
@@ -16597,7 +16597,7 @@
         <p:spPr>
           <a:xfrm>
             <a:off x="6080760" y="1993320"/>
-            <a:ext cx="2559600" cy="170280"/>
+            <a:ext cx="2559240" cy="170280"/>
           </a:xfrm>
           <a:prstGeom prst="rect">
             <a:avLst/>
@@ -16651,7 +16651,7 @@
         <p:spPr>
           <a:xfrm>
             <a:off x="7000560" y="2176200"/>
-            <a:ext cx="2731680" cy="144720"/>
+            <a:ext cx="2731320" cy="144360"/>
           </a:xfrm>
           <a:prstGeom prst="rect">
             <a:avLst/>
@@ -16729,7 +16729,7 @@
         <p:spPr>
           <a:xfrm>
             <a:off x="5989320" y="2743200"/>
-            <a:ext cx="45000" cy="456480"/>
+            <a:ext cx="44640" cy="456120"/>
           </a:xfrm>
           <a:prstGeom prst="rect">
             <a:avLst/>
@@ -16785,7 +16785,7 @@
         <p:spPr>
           <a:xfrm>
             <a:off x="6080760" y="2724840"/>
-            <a:ext cx="2559600" cy="170280"/>
+            <a:ext cx="2559240" cy="170280"/>
           </a:xfrm>
           <a:prstGeom prst="rect">
             <a:avLst/>
@@ -16839,7 +16839,7 @@
         <p:spPr>
           <a:xfrm>
             <a:off x="6092280" y="2907720"/>
-            <a:ext cx="4548240" cy="144720"/>
+            <a:ext cx="4547880" cy="144360"/>
           </a:xfrm>
           <a:prstGeom prst="rect">
             <a:avLst/>
@@ -16895,7 +16895,7 @@
         <p:spPr>
           <a:xfrm>
             <a:off x="5989320" y="3474720"/>
-            <a:ext cx="45000" cy="456480"/>
+            <a:ext cx="44640" cy="456120"/>
           </a:xfrm>
           <a:prstGeom prst="rect">
             <a:avLst/>
@@ -16951,7 +16951,7 @@
         <p:spPr>
           <a:xfrm>
             <a:off x="6080760" y="3456360"/>
-            <a:ext cx="2559600" cy="170280"/>
+            <a:ext cx="2559240" cy="170280"/>
           </a:xfrm>
           <a:prstGeom prst="rect">
             <a:avLst/>
@@ -17005,7 +17005,7 @@
         <p:spPr>
           <a:xfrm>
             <a:off x="6544080" y="3639240"/>
-            <a:ext cx="3644640" cy="144720"/>
+            <a:ext cx="3644280" cy="144360"/>
           </a:xfrm>
           <a:prstGeom prst="rect">
             <a:avLst/>
@@ -17061,7 +17061,7 @@
         <p:spPr>
           <a:xfrm>
             <a:off x="841320" y="4773240"/>
-            <a:ext cx="3016800" cy="131040"/>
+            <a:ext cx="3016440" cy="130680"/>
           </a:xfrm>
           <a:prstGeom prst="rect">
             <a:avLst/>
@@ -17117,7 +17117,7 @@
         <p:spPr>
           <a:xfrm>
             <a:off x="658440" y="4983480"/>
-            <a:ext cx="3400920" cy="913680"/>
+            <a:ext cx="3400560" cy="913320"/>
           </a:xfrm>
           <a:prstGeom prst="roundRect">
             <a:avLst>
@@ -17175,7 +17175,7 @@
         <p:spPr>
           <a:xfrm>
             <a:off x="786240" y="5148000"/>
-            <a:ext cx="365040" cy="365040"/>
+            <a:ext cx="364680" cy="364680"/>
           </a:xfrm>
           <a:prstGeom prst="ellipse">
             <a:avLst/>
@@ -17231,7 +17231,7 @@
         <p:spPr>
           <a:xfrm>
             <a:off x="786240" y="5152680"/>
-            <a:ext cx="365040" cy="152640"/>
+            <a:ext cx="364680" cy="152280"/>
           </a:xfrm>
           <a:prstGeom prst="rect">
             <a:avLst/>
@@ -17285,7 +17285,7 @@
         <p:spPr>
           <a:xfrm>
             <a:off x="1225440" y="5074920"/>
-            <a:ext cx="2815560" cy="162720"/>
+            <a:ext cx="2815200" cy="162360"/>
           </a:xfrm>
           <a:prstGeom prst="rect">
             <a:avLst/>
@@ -17339,7 +17339,7 @@
         <p:spPr>
           <a:xfrm>
             <a:off x="1225440" y="5285160"/>
-            <a:ext cx="2696760" cy="407160"/>
+            <a:ext cx="2696400" cy="406800"/>
           </a:xfrm>
           <a:prstGeom prst="rect">
             <a:avLst/>
@@ -17393,7 +17393,7 @@
         <p:spPr>
           <a:xfrm>
             <a:off x="4389120" y="4983480"/>
-            <a:ext cx="3400920" cy="913680"/>
+            <a:ext cx="3400560" cy="913320"/>
           </a:xfrm>
           <a:prstGeom prst="roundRect">
             <a:avLst>
@@ -17451,7 +17451,7 @@
         <p:spPr>
           <a:xfrm>
             <a:off x="4517280" y="5148000"/>
-            <a:ext cx="365040" cy="365040"/>
+            <a:ext cx="364680" cy="364680"/>
           </a:xfrm>
           <a:prstGeom prst="ellipse">
             <a:avLst/>
@@ -17507,7 +17507,7 @@
         <p:spPr>
           <a:xfrm>
             <a:off x="4517280" y="5152680"/>
-            <a:ext cx="365040" cy="152640"/>
+            <a:ext cx="364680" cy="152280"/>
           </a:xfrm>
           <a:prstGeom prst="rect">
             <a:avLst/>
@@ -17561,7 +17561,7 @@
         <p:spPr>
           <a:xfrm>
             <a:off x="4956120" y="5074920"/>
-            <a:ext cx="2815560" cy="292608"/>
+            <a:ext cx="2815200" cy="292608"/>
           </a:xfrm>
           <a:prstGeom prst="rect">
             <a:avLst/>
@@ -17597,7 +17597,7 @@
               </a:rPr>
               <a:t>Defended / top-notch implementation</a:t>
             </a:r>
-            <a:endParaRPr b="0" lang="en-US" sz="1070" spc="-1" strike="noStrike">
+            <a:endParaRPr b="0" lang="en-US" sz="920" spc="-1" strike="noStrike">
               <a:solidFill>
                 <a:srgbClr val="000000"/>
               </a:solidFill>
@@ -17615,7 +17615,7 @@
         <p:spPr>
           <a:xfrm>
             <a:off x="4956120" y="5431536"/>
-            <a:ext cx="2696760" cy="347472"/>
+            <a:ext cx="2696400" cy="347472"/>
           </a:xfrm>
           <a:prstGeom prst="rect">
             <a:avLst/>
@@ -17651,7 +17651,7 @@
               </a:rPr>
               <a:t>Strong implementation with explicit controls, supervision, authority boundaries, tracing and current best practices.</a:t>
             </a:r>
-            <a:endParaRPr b="0" lang="en-US" sz="889" spc="-1" strike="noStrike">
+            <a:endParaRPr b="0" lang="en-US" sz="850" spc="-1" strike="noStrike">
               <a:solidFill>
                 <a:srgbClr val="000000"/>
               </a:solidFill>
@@ -17669,7 +17669,7 @@
         <p:spPr>
           <a:xfrm>
             <a:off x="8119800" y="4983480"/>
-            <a:ext cx="3400920" cy="913680"/>
+            <a:ext cx="3400560" cy="913320"/>
           </a:xfrm>
           <a:prstGeom prst="roundRect">
             <a:avLst>
@@ -17727,7 +17727,7 @@
         <p:spPr>
           <a:xfrm>
             <a:off x="8247960" y="5148000"/>
-            <a:ext cx="365040" cy="365040"/>
+            <a:ext cx="364680" cy="364680"/>
           </a:xfrm>
           <a:prstGeom prst="ellipse">
             <a:avLst/>
@@ -17783,7 +17783,7 @@
         <p:spPr>
           <a:xfrm>
             <a:off x="8247960" y="5152680"/>
-            <a:ext cx="365040" cy="152640"/>
+            <a:ext cx="364680" cy="152280"/>
           </a:xfrm>
           <a:prstGeom prst="rect">
             <a:avLst/>
@@ -17837,7 +17837,7 @@
         <p:spPr>
           <a:xfrm>
             <a:off x="8686800" y="5074920"/>
-            <a:ext cx="2815560" cy="292608"/>
+            <a:ext cx="2815200" cy="292608"/>
           </a:xfrm>
           <a:prstGeom prst="rect">
             <a:avLst/>
@@ -17873,7 +17873,7 @@
               </a:rPr>
               <a:t>Frozen defended implementation under drift</a:t>
             </a:r>
-            <a:endParaRPr b="0" lang="en-US" sz="1020" spc="-1" strike="noStrike">
+            <a:endParaRPr b="0" lang="en-US" sz="900" spc="-1" strike="noStrike">
               <a:solidFill>
                 <a:srgbClr val="000000"/>
               </a:solidFill>
@@ -17891,7 +17891,7 @@
         <p:spPr>
           <a:xfrm>
             <a:off x="8686800" y="5431536"/>
-            <a:ext cx="2696760" cy="347472"/>
+            <a:ext cx="2696400" cy="347472"/>
           </a:xfrm>
           <a:prstGeom prst="rect">
             <a:avLst/>
@@ -17927,7 +17927,7 @@
               </a:rPr>
               <a:t>The same defended implementation is frozen, then tested as ecosystem, role, authority or regime conditions change silently over time.</a:t>
             </a:r>
-            <a:endParaRPr b="0" lang="en-US" sz="870" spc="-1" strike="noStrike">
+            <a:endParaRPr b="0" lang="en-US" sz="830" spc="-1" strike="noStrike">
               <a:solidFill>
                 <a:srgbClr val="000000"/>
               </a:solidFill>
@@ -17945,7 +17945,7 @@
         <p:spPr>
           <a:xfrm>
             <a:off x="658440" y="6035040"/>
-            <a:ext cx="10853280" cy="410760"/>
+            <a:ext cx="10852920" cy="410400"/>
           </a:xfrm>
           <a:prstGeom prst="roundRect">
             <a:avLst>
@@ -18003,7 +18003,7 @@
         <p:spPr>
           <a:xfrm>
             <a:off x="786240" y="6144840"/>
-            <a:ext cx="10560600" cy="274680"/>
+            <a:ext cx="10560240" cy="274680"/>
           </a:xfrm>
           <a:prstGeom prst="rect">
             <a:avLst/>
@@ -18057,7 +18057,7 @@
         <p:spPr>
           <a:xfrm>
             <a:off x="1293120" y="6510600"/>
-            <a:ext cx="2112840" cy="103680"/>
+            <a:ext cx="2112480" cy="103320"/>
           </a:xfrm>
           <a:prstGeom prst="rect">
             <a:avLst/>
@@ -18153,7 +18153,7 @@
         <p:spPr>
           <a:xfrm>
             <a:off x="567000" y="164520"/>
-            <a:ext cx="2193840" cy="163800"/>
+            <a:ext cx="2193480" cy="163440"/>
           </a:xfrm>
           <a:prstGeom prst="rect">
             <a:avLst/>
@@ -18210,7 +18210,7 @@
         <p:spPr>
           <a:xfrm>
             <a:off x="10927080" y="164520"/>
-            <a:ext cx="639360" cy="163800"/>
+            <a:ext cx="639000" cy="163440"/>
           </a:xfrm>
           <a:prstGeom prst="rect">
             <a:avLst/>
@@ -18267,7 +18267,7 @@
         <p:spPr>
           <a:xfrm>
             <a:off x="567000" y="658440"/>
-            <a:ext cx="10972080" cy="383400"/>
+            <a:ext cx="10971720" cy="383040"/>
           </a:xfrm>
           <a:prstGeom prst="rect">
             <a:avLst/>
@@ -18326,7 +18326,7 @@
         <p:spPr>
           <a:xfrm>
             <a:off x="567000" y="1115640"/>
-            <a:ext cx="10972080" cy="346680"/>
+            <a:ext cx="10971720" cy="346320"/>
           </a:xfrm>
           <a:prstGeom prst="rect">
             <a:avLst/>
@@ -18383,7 +18383,7 @@
         <p:spPr>
           <a:xfrm>
             <a:off x="685800" y="1572840"/>
-            <a:ext cx="2376720" cy="163800"/>
+            <a:ext cx="2376360" cy="163440"/>
           </a:xfrm>
           <a:prstGeom prst="rect">
             <a:avLst/>
@@ -18440,7 +18440,7 @@
         <p:spPr>
           <a:xfrm>
             <a:off x="685800" y="1847160"/>
-            <a:ext cx="2925360" cy="1297800"/>
+            <a:ext cx="2925000" cy="1297440"/>
           </a:xfrm>
           <a:prstGeom prst="roundRect">
             <a:avLst>
@@ -18492,7 +18492,7 @@
         <p:spPr>
           <a:xfrm>
             <a:off x="831960" y="2011680"/>
-            <a:ext cx="2605320" cy="310320"/>
+            <a:ext cx="2604960" cy="309960"/>
           </a:xfrm>
           <a:prstGeom prst="rect">
             <a:avLst/>
@@ -18549,7 +18549,7 @@
         <p:spPr>
           <a:xfrm>
             <a:off x="831960" y="2404800"/>
-            <a:ext cx="2605320" cy="566280"/>
+            <a:ext cx="2604960" cy="565920"/>
           </a:xfrm>
           <a:prstGeom prst="rect">
             <a:avLst/>
@@ -18701,7 +18701,7 @@
         <p:spPr>
           <a:xfrm>
             <a:off x="4160520" y="1572840"/>
-            <a:ext cx="2376720" cy="163800"/>
+            <a:ext cx="2376360" cy="163440"/>
           </a:xfrm>
           <a:prstGeom prst="rect">
             <a:avLst/>
@@ -18758,7 +18758,7 @@
         <p:spPr>
           <a:xfrm>
             <a:off x="4160520" y="1847160"/>
-            <a:ext cx="2925360" cy="1297800"/>
+            <a:ext cx="2925000" cy="1297440"/>
           </a:xfrm>
           <a:prstGeom prst="roundRect">
             <a:avLst>
@@ -18810,7 +18810,7 @@
         <p:spPr>
           <a:xfrm>
             <a:off x="4306680" y="2011680"/>
-            <a:ext cx="2605320" cy="310320"/>
+            <a:ext cx="2604960" cy="309960"/>
           </a:xfrm>
           <a:prstGeom prst="rect">
             <a:avLst/>
@@ -18867,7 +18867,7 @@
         <p:spPr>
           <a:xfrm>
             <a:off x="4306680" y="2404800"/>
-            <a:ext cx="2605320" cy="566280"/>
+            <a:ext cx="2604960" cy="565920"/>
           </a:xfrm>
           <a:prstGeom prst="rect">
             <a:avLst/>
@@ -19045,7 +19045,7 @@
         <p:spPr>
           <a:xfrm>
             <a:off x="7635240" y="1572840"/>
-            <a:ext cx="2376720" cy="163800"/>
+            <a:ext cx="2376360" cy="163440"/>
           </a:xfrm>
           <a:prstGeom prst="rect">
             <a:avLst/>
@@ -19102,7 +19102,7 @@
         <p:spPr>
           <a:xfrm>
             <a:off x="7635240" y="1847160"/>
-            <a:ext cx="2925360" cy="1297800"/>
+            <a:ext cx="2925000" cy="1297440"/>
           </a:xfrm>
           <a:prstGeom prst="roundRect">
             <a:avLst>
@@ -19154,7 +19154,7 @@
         <p:spPr>
           <a:xfrm>
             <a:off x="7781400" y="2011680"/>
-            <a:ext cx="2605320" cy="310320"/>
+            <a:ext cx="2604960" cy="309960"/>
           </a:xfrm>
           <a:prstGeom prst="rect">
             <a:avLst/>
@@ -19211,7 +19211,7 @@
         <p:spPr>
           <a:xfrm>
             <a:off x="7781400" y="2404800"/>
-            <a:ext cx="2605320" cy="566280"/>
+            <a:ext cx="2604960" cy="565920"/>
           </a:xfrm>
           <a:prstGeom prst="rect">
             <a:avLst/>
@@ -19346,7 +19346,7 @@
         <p:spPr>
           <a:xfrm>
             <a:off x="713160" y="3383280"/>
-            <a:ext cx="2925360" cy="163800"/>
+            <a:ext cx="2925000" cy="163440"/>
           </a:xfrm>
           <a:prstGeom prst="rect">
             <a:avLst/>
@@ -19403,7 +19403,7 @@
         <p:spPr>
           <a:xfrm>
             <a:off x="685800" y="3675960"/>
-            <a:ext cx="3409920" cy="1874519"/>
+            <a:ext cx="3409560" cy="1874519"/>
           </a:xfrm>
           <a:prstGeom prst="roundRect">
             <a:avLst>
@@ -19455,7 +19455,7 @@
         <p:spPr>
           <a:xfrm>
             <a:off x="685800" y="3675960"/>
-            <a:ext cx="49680" cy="1874519"/>
+            <a:ext cx="49320" cy="1874519"/>
           </a:xfrm>
           <a:prstGeom prst="rect">
             <a:avLst/>
@@ -19505,7 +19505,7 @@
         <p:spPr>
           <a:xfrm>
             <a:off x="850320" y="3749040"/>
-            <a:ext cx="3153960" cy="347472"/>
+            <a:ext cx="3153600" cy="347472"/>
           </a:xfrm>
           <a:prstGeom prst="rect">
             <a:avLst/>
@@ -19546,7 +19546,7 @@
               </a:rPr>
               <a:t>TYPE 0 · Structural non-determination</a:t>
             </a:r>
-            <a:endParaRPr b="0" lang="en-US" sz="1400" spc="-1" strike="noStrike">
+            <a:endParaRPr b="0" lang="en-US" sz="1050" spc="-1" strike="noStrike">
               <a:solidFill>
                 <a:srgbClr val="000000"/>
               </a:solidFill>
@@ -19564,7 +19564,7 @@
         <p:spPr>
           <a:xfrm>
             <a:off x="850320" y="4133087"/>
-            <a:ext cx="3135600" cy="1353312"/>
+            <a:ext cx="3135240" cy="1353312"/>
           </a:xfrm>
           <a:prstGeom prst="rect">
             <a:avLst/>
@@ -19609,7 +19609,7 @@
               </a:rPr>
               <a:t>Residual indeterminacy is not removable inside the current representation / capability boundary. More processing of the same evidence cannot manufacture the missing distinction.</a:t>
             </a:r>
-            <a:endParaRPr b="0" lang="en-US" sz="960" spc="-1" strike="noStrike">
+            <a:endParaRPr b="0" lang="en-US" sz="880" spc="-1" strike="noStrike">
               <a:solidFill>
                 <a:srgbClr val="000000"/>
               </a:solidFill>
@@ -19663,7 +19663,7 @@
               </a:rPr>
               <a:t>Response: preserve the residual, narrow the claim, add a genuinely new information channel or redesign the boundary.</a:t>
             </a:r>
-            <a:endParaRPr b="0" lang="en-US" sz="960" spc="-1" strike="noStrike">
+            <a:endParaRPr b="0" lang="en-US" sz="880" spc="-1" strike="noStrike">
               <a:solidFill>
                 <a:srgbClr val="000000"/>
               </a:solidFill>
@@ -19681,7 +19681,7 @@
         <p:spPr>
           <a:xfrm>
             <a:off x="4380120" y="3675960"/>
-            <a:ext cx="3409920" cy="1874519"/>
+            <a:ext cx="3409560" cy="1874519"/>
           </a:xfrm>
           <a:prstGeom prst="roundRect">
             <a:avLst>
@@ -19733,7 +19733,7 @@
         <p:spPr>
           <a:xfrm>
             <a:off x="4380120" y="3675960"/>
-            <a:ext cx="49680" cy="1874519"/>
+            <a:ext cx="49320" cy="1874519"/>
           </a:xfrm>
           <a:prstGeom prst="rect">
             <a:avLst/>
@@ -19782,8 +19782,8 @@
         </p:nvSpPr>
         <p:spPr>
           <a:xfrm>
-            <a:off x="4544640" y="3749040"/>
-            <a:ext cx="3153960" cy="347472"/>
+            <a:off x="4480560" y="3749040"/>
+            <a:ext cx="3282696" cy="292608"/>
           </a:xfrm>
           <a:prstGeom prst="rect">
             <a:avLst/>
@@ -19801,65 +19801,6 @@
         </p:style>
         <p:txBody>
           <a:bodyPr lIns="0" rIns="0" tIns="0" bIns="0" anchor="ctr">
-            <a:noAutofit/>
-          </a:bodyPr>
-          <a:p>
-            <a:pPr defTabSz="914400">
-              <a:lnSpc>
-                <a:spcPct val="100000"/>
-              </a:lnSpc>
-              <a:tabLst>
-                <a:tab algn="l" pos="0"/>
-              </a:tabLst>
-            </a:pPr>
-            <a:r>
-              <a:rPr b="1" lang="en-US" sz="1050" spc="-1" strike="noStrike" u="sng">
-                <a:solidFill>
-                  <a:srgbClr val="0563c1"/>
-                </a:solidFill>
-                <a:uFillTx/>
-                <a:latin typeface="Cambria"/>
-                <a:ea typeface="Cambria"/>
-                <a:hlinkClick r:id="rId3"/>
-              </a:rPr>
-              <a:t>TYPE 1 · Unbounded unresolved uncertainty</a:t>
-            </a:r>
-            <a:endParaRPr b="0" lang="en-US" sz="1200" spc="-1" strike="noStrike">
-              <a:solidFill>
-                <a:srgbClr val="000000"/>
-              </a:solidFill>
-              <a:latin typeface="Arial"/>
-            </a:endParaRPr>
-          </a:p>
-        </p:txBody>
-      </p:sp>
-      <p:sp>
-        <p:nvSpPr>
-          <p:cNvPr id="235" name="Text 26"/>
-          <p:cNvSpPr/>
-          <p:nvPr/>
-        </p:nvSpPr>
-        <p:spPr>
-          <a:xfrm>
-            <a:off x="4544640" y="4133087"/>
-            <a:ext cx="3135600" cy="1353312"/>
-          </a:xfrm>
-          <a:prstGeom prst="rect">
-            <a:avLst/>
-          </a:prstGeom>
-          <a:noFill/>
-          <a:ln w="0">
-            <a:noFill/>
-          </a:ln>
-        </p:spPr>
-        <p:style>
-          <a:lnRef idx="0"/>
-          <a:fillRef idx="0"/>
-          <a:effectRef idx="0"/>
-          <a:fontRef idx="minor"/>
-        </p:style>
-        <p:txBody>
-          <a:bodyPr lIns="360" rIns="360" tIns="360" bIns="360" anchor="t">
             <a:noAutofit/>
           </a:bodyPr>
           <a:p>
@@ -19878,22 +19819,55 @@
               </a:tabLst>
             </a:pPr>
             <a:r>
-              <a:rPr b="0" lang="en-US" sz="880" spc="-1" strike="noStrike">
-                <a:solidFill>
-                  <a:srgbClr val="55595f"/>
-                </a:solidFill>
-                <a:latin typeface="Calibri"/>
-                <a:ea typeface="Calibri"/>
-              </a:rPr>
-              <a:t>Uncertainty is recognized, but no legitimate bounded closure is reached: the system keeps waiting, searching or escalating without an escape condition (indefinite HOLD, paralysis). HOLD is not a safe terminal state.</a:t>
-            </a:r>
-            <a:endParaRPr b="0" lang="en-US" sz="960" spc="-1" strike="noStrike">
-              <a:solidFill>
-                <a:srgbClr val="000000"/>
-              </a:solidFill>
-              <a:latin typeface="Arial"/>
-            </a:endParaRPr>
-          </a:p>
+              <a:rPr b="1" lang="en-US" sz="950" spc="-1" strike="noStrike" u="sng">
+                <a:solidFill>
+                  <a:srgbClr val="0563c1"/>
+                </a:solidFill>
+                <a:uFillTx/>
+                <a:latin typeface="Cambria"/>
+                <a:ea typeface="Cambria"/>
+                <a:hlinkClick r:id="rId3"/>
+              </a:rPr>
+              <a:t>TYPE 1 · Unbounded unresolved uncertainty</a:t>
+            </a:r>
+            <a:endParaRPr b="0" lang="en-US" sz="1050" spc="-1" strike="noStrike">
+              <a:solidFill>
+                <a:srgbClr val="000000"/>
+              </a:solidFill>
+              <a:latin typeface="Arial"/>
+            </a:endParaRPr>
+          </a:p>
+        </p:txBody>
+      </p:sp>
+      <p:sp>
+        <p:nvSpPr>
+          <p:cNvPr id="235" name="Text 26"/>
+          <p:cNvSpPr/>
+          <p:nvPr/>
+        </p:nvSpPr>
+        <p:spPr>
+          <a:xfrm>
+            <a:off x="4544640" y="4133087"/>
+            <a:ext cx="3135240" cy="1353312"/>
+          </a:xfrm>
+          <a:prstGeom prst="rect">
+            <a:avLst/>
+          </a:prstGeom>
+          <a:noFill/>
+          <a:ln w="0">
+            <a:noFill/>
+          </a:ln>
+        </p:spPr>
+        <p:style>
+          <a:lnRef idx="0"/>
+          <a:fillRef idx="0"/>
+          <a:effectRef idx="0"/>
+          <a:fontRef idx="minor"/>
+        </p:style>
+        <p:txBody>
+          <a:bodyPr lIns="360" rIns="360" tIns="360" bIns="360" anchor="t">
+            <a:noAutofit/>
+          </a:bodyPr>
           <a:p>
             <a:pPr defTabSz="914400">
               <a:lnSpc>
@@ -19917,207 +19891,15 @@
                 <a:latin typeface="Calibri"/>
                 <a:ea typeface="Calibri"/>
               </a:rPr>
-              <a:t>Response: establish bounded closure: a stop condition plus a qualified posture that keeps the residual explicit.</a:t>
-            </a:r>
-            <a:endParaRPr b="0" lang="en-US" sz="960" spc="-1" strike="noStrike">
-              <a:solidFill>
-                <a:srgbClr val="000000"/>
-              </a:solidFill>
-              <a:latin typeface="Arial"/>
-            </a:endParaRPr>
-          </a:p>
-        </p:txBody>
-      </p:sp>
-      <p:sp>
-        <p:nvSpPr>
-          <p:cNvPr id="236" name="Shape 27"/>
-          <p:cNvSpPr/>
-          <p:nvPr/>
-        </p:nvSpPr>
-        <p:spPr>
-          <a:xfrm>
-            <a:off x="8074080" y="3675960"/>
-            <a:ext cx="3409920" cy="1874519"/>
-          </a:xfrm>
-          <a:prstGeom prst="roundRect">
-            <a:avLst>
-              <a:gd name="adj" fmla="val 3067"/>
-            </a:avLst>
-          </a:prstGeom>
-          <a:solidFill>
-            <a:srgbClr val="ffffff"/>
-          </a:solidFill>
-          <a:ln w="12700">
-            <a:solidFill>
-              <a:srgbClr val="d6dce4"/>
-            </a:solidFill>
-            <a:round/>
-          </a:ln>
-        </p:spPr>
-        <p:style>
-          <a:lnRef idx="0"/>
-          <a:fillRef idx="0"/>
-          <a:effectRef idx="0"/>
-          <a:fontRef idx="minor"/>
-        </p:style>
-        <p:txBody>
-          <a:bodyPr lIns="90000" rIns="90000" tIns="45000" bIns="45000" anchor="t">
-            <a:noAutofit/>
-          </a:bodyPr>
-          <a:p>
-            <a:pPr defTabSz="914400">
-              <a:lnSpc>
-                <a:spcPct val="100000"/>
-              </a:lnSpc>
-            </a:pPr>
-            <a:endParaRPr b="0" lang="en-US" sz="1800" spc="-1" strike="noStrike">
-              <a:solidFill>
-                <a:schemeClr val="dk1"/>
-              </a:solidFill>
-              <a:latin typeface="Calibri"/>
-              <a:ea typeface="Calibri"/>
-            </a:endParaRPr>
-          </a:p>
-        </p:txBody>
-      </p:sp>
-      <p:sp>
-        <p:nvSpPr>
-          <p:cNvPr id="237" name="Shape 28"/>
-          <p:cNvSpPr/>
-          <p:nvPr/>
-        </p:nvSpPr>
-        <p:spPr>
-          <a:xfrm>
-            <a:off x="8074080" y="3675960"/>
-            <a:ext cx="49680" cy="1874519"/>
-          </a:xfrm>
-          <a:prstGeom prst="rect">
-            <a:avLst/>
-          </a:prstGeom>
-          <a:solidFill>
-            <a:srgbClr val="a8642a"/>
-          </a:solidFill>
-          <a:ln w="12700">
-            <a:solidFill>
-              <a:srgbClr val="a8642a"/>
-            </a:solidFill>
-            <a:round/>
-          </a:ln>
-        </p:spPr>
-        <p:style>
-          <a:lnRef idx="0"/>
-          <a:fillRef idx="0"/>
-          <a:effectRef idx="0"/>
-          <a:fontRef idx="minor"/>
-        </p:style>
-        <p:txBody>
-          <a:bodyPr lIns="90000" rIns="90000" tIns="45000" bIns="45000" anchor="t">
-            <a:noAutofit/>
-          </a:bodyPr>
-          <a:p>
-            <a:pPr defTabSz="914400">
-              <a:lnSpc>
-                <a:spcPct val="100000"/>
-              </a:lnSpc>
-            </a:pPr>
-            <a:endParaRPr b="0" lang="en-US" sz="1800" spc="-1" strike="noStrike">
-              <a:solidFill>
-                <a:schemeClr val="dk1"/>
-              </a:solidFill>
-              <a:latin typeface="Calibri"/>
-              <a:ea typeface="Calibri"/>
-            </a:endParaRPr>
-          </a:p>
-        </p:txBody>
-      </p:sp>
-      <p:sp>
-        <p:nvSpPr>
-          <p:cNvPr id="238" name="Text 29"/>
-          <p:cNvSpPr/>
-          <p:nvPr/>
-        </p:nvSpPr>
-        <p:spPr>
-          <a:xfrm>
-            <a:off x="8238600" y="3794760"/>
-            <a:ext cx="3153960" cy="347472"/>
-          </a:xfrm>
-          <a:prstGeom prst="rect">
-            <a:avLst/>
-          </a:prstGeom>
-          <a:noFill/>
-          <a:ln w="0">
-            <a:noFill/>
-          </a:ln>
-        </p:spPr>
-        <p:style>
-          <a:lnRef idx="0"/>
-          <a:fillRef idx="0"/>
-          <a:effectRef idx="0"/>
-          <a:fontRef idx="minor"/>
-        </p:style>
-        <p:txBody>
-          <a:bodyPr lIns="0" rIns="0" tIns="0" bIns="0" anchor="ctr">
-            <a:noAutofit/>
-          </a:bodyPr>
-          <a:p>
-            <a:pPr defTabSz="914400">
-              <a:lnSpc>
-                <a:spcPct val="100000"/>
-              </a:lnSpc>
-              <a:tabLst>
-                <a:tab algn="l" pos="0"/>
-              </a:tabLst>
-            </a:pPr>
-            <a:r>
-              <a:rPr b="1" lang="en-US" sz="1050" spc="-1" strike="noStrike" u="sng">
-                <a:solidFill>
-                  <a:srgbClr val="0563c1"/>
-                </a:solidFill>
-                <a:uFillTx/>
-                <a:latin typeface="Cambria"/>
-                <a:ea typeface="Cambria"/>
-                <a:hlinkClick r:id="rId4"/>
-              </a:rPr>
-              <a:t>TYPE 2 · False certainty</a:t>
-            </a:r>
-            <a:endParaRPr b="0" lang="en-US" sz="1400" spc="-1" strike="noStrike">
-              <a:solidFill>
-                <a:srgbClr val="000000"/>
-              </a:solidFill>
-              <a:latin typeface="Arial"/>
-            </a:endParaRPr>
-          </a:p>
-        </p:txBody>
-      </p:sp>
-      <p:sp>
-        <p:nvSpPr>
-          <p:cNvPr id="239" name="Text 30"/>
-          <p:cNvSpPr/>
-          <p:nvPr/>
-        </p:nvSpPr>
-        <p:spPr>
-          <a:xfrm>
-            <a:off x="8238600" y="4133087"/>
-            <a:ext cx="3135600" cy="1353312"/>
-          </a:xfrm>
-          <a:prstGeom prst="rect">
-            <a:avLst/>
-          </a:prstGeom>
-          <a:noFill/>
-          <a:ln w="0">
-            <a:noFill/>
-          </a:ln>
-        </p:spPr>
-        <p:style>
-          <a:lnRef idx="0"/>
-          <a:fillRef idx="0"/>
-          <a:effectRef idx="0"/>
-          <a:fontRef idx="minor"/>
-        </p:style>
-        <p:txBody>
-          <a:bodyPr lIns="360" rIns="360" tIns="360" bIns="360" anchor="t">
-            <a:noAutofit/>
-          </a:bodyPr>
+              <a:t>Uncertainty is recognized, but no legitimate bounded closure is reached: the system keeps waiting, searching or escalating without an escape condition (indefinite HOLD, paralysis). HOLD is not a safe terminal state.</a:t>
+            </a:r>
+            <a:endParaRPr b="0" lang="en-US" sz="880" spc="-1" strike="noStrike">
+              <a:solidFill>
+                <a:srgbClr val="000000"/>
+              </a:solidFill>
+              <a:latin typeface="Arial"/>
+            </a:endParaRPr>
+          </a:p>
           <a:p>
             <a:pPr defTabSz="914400">
               <a:lnSpc>
@@ -20141,15 +19923,207 @@
                 <a:latin typeface="Calibri"/>
                 <a:ea typeface="Calibri"/>
               </a:rPr>
-              <a:t>The system closes by discarding what it does not know: missing input treated as present, low confidence promoted to certainty, a local result treated as globally valid (forced PASS/FAIL, false closure).</a:t>
-            </a:r>
-            <a:endParaRPr b="0" lang="en-US" sz="960" spc="-1" strike="noStrike">
-              <a:solidFill>
-                <a:srgbClr val="000000"/>
-              </a:solidFill>
-              <a:latin typeface="Arial"/>
-            </a:endParaRPr>
-          </a:p>
+              <a:t>Response: establish bounded closure: a stop condition plus a qualified posture that keeps the residual explicit.</a:t>
+            </a:r>
+            <a:endParaRPr b="0" lang="en-US" sz="880" spc="-1" strike="noStrike">
+              <a:solidFill>
+                <a:srgbClr val="000000"/>
+              </a:solidFill>
+              <a:latin typeface="Arial"/>
+            </a:endParaRPr>
+          </a:p>
+        </p:txBody>
+      </p:sp>
+      <p:sp>
+        <p:nvSpPr>
+          <p:cNvPr id="236" name="Shape 27"/>
+          <p:cNvSpPr/>
+          <p:nvPr/>
+        </p:nvSpPr>
+        <p:spPr>
+          <a:xfrm>
+            <a:off x="8074080" y="3675960"/>
+            <a:ext cx="3409560" cy="1874519"/>
+          </a:xfrm>
+          <a:prstGeom prst="roundRect">
+            <a:avLst>
+              <a:gd name="adj" fmla="val 3067"/>
+            </a:avLst>
+          </a:prstGeom>
+          <a:solidFill>
+            <a:srgbClr val="ffffff"/>
+          </a:solidFill>
+          <a:ln w="12700">
+            <a:solidFill>
+              <a:srgbClr val="d6dce4"/>
+            </a:solidFill>
+            <a:round/>
+          </a:ln>
+        </p:spPr>
+        <p:style>
+          <a:lnRef idx="0"/>
+          <a:fillRef idx="0"/>
+          <a:effectRef idx="0"/>
+          <a:fontRef idx="minor"/>
+        </p:style>
+        <p:txBody>
+          <a:bodyPr lIns="90000" rIns="90000" tIns="45000" bIns="45000" anchor="t">
+            <a:noAutofit/>
+          </a:bodyPr>
+          <a:p>
+            <a:pPr defTabSz="914400">
+              <a:lnSpc>
+                <a:spcPct val="100000"/>
+              </a:lnSpc>
+            </a:pPr>
+            <a:endParaRPr b="0" lang="en-US" sz="1800" spc="-1" strike="noStrike">
+              <a:solidFill>
+                <a:schemeClr val="dk1"/>
+              </a:solidFill>
+              <a:latin typeface="Calibri"/>
+              <a:ea typeface="Calibri"/>
+            </a:endParaRPr>
+          </a:p>
+        </p:txBody>
+      </p:sp>
+      <p:sp>
+        <p:nvSpPr>
+          <p:cNvPr id="237" name="Shape 28"/>
+          <p:cNvSpPr/>
+          <p:nvPr/>
+        </p:nvSpPr>
+        <p:spPr>
+          <a:xfrm>
+            <a:off x="8074080" y="3675960"/>
+            <a:ext cx="49320" cy="1874519"/>
+          </a:xfrm>
+          <a:prstGeom prst="rect">
+            <a:avLst/>
+          </a:prstGeom>
+          <a:solidFill>
+            <a:srgbClr val="a8642a"/>
+          </a:solidFill>
+          <a:ln w="12700">
+            <a:solidFill>
+              <a:srgbClr val="a8642a"/>
+            </a:solidFill>
+            <a:round/>
+          </a:ln>
+        </p:spPr>
+        <p:style>
+          <a:lnRef idx="0"/>
+          <a:fillRef idx="0"/>
+          <a:effectRef idx="0"/>
+          <a:fontRef idx="minor"/>
+        </p:style>
+        <p:txBody>
+          <a:bodyPr lIns="90000" rIns="90000" tIns="45000" bIns="45000" anchor="t">
+            <a:noAutofit/>
+          </a:bodyPr>
+          <a:p>
+            <a:pPr defTabSz="914400">
+              <a:lnSpc>
+                <a:spcPct val="100000"/>
+              </a:lnSpc>
+            </a:pPr>
+            <a:endParaRPr b="0" lang="en-US" sz="1800" spc="-1" strike="noStrike">
+              <a:solidFill>
+                <a:schemeClr val="dk1"/>
+              </a:solidFill>
+              <a:latin typeface="Calibri"/>
+              <a:ea typeface="Calibri"/>
+            </a:endParaRPr>
+          </a:p>
+        </p:txBody>
+      </p:sp>
+      <p:sp>
+        <p:nvSpPr>
+          <p:cNvPr id="238" name="Text 29"/>
+          <p:cNvSpPr/>
+          <p:nvPr/>
+        </p:nvSpPr>
+        <p:spPr>
+          <a:xfrm>
+            <a:off x="8238600" y="3794760"/>
+            <a:ext cx="3153600" cy="347472"/>
+          </a:xfrm>
+          <a:prstGeom prst="rect">
+            <a:avLst/>
+          </a:prstGeom>
+          <a:noFill/>
+          <a:ln w="0">
+            <a:noFill/>
+          </a:ln>
+        </p:spPr>
+        <p:style>
+          <a:lnRef idx="0"/>
+          <a:fillRef idx="0"/>
+          <a:effectRef idx="0"/>
+          <a:fontRef idx="minor"/>
+        </p:style>
+        <p:txBody>
+          <a:bodyPr lIns="0" rIns="0" tIns="0" bIns="0" anchor="ctr">
+            <a:noAutofit/>
+          </a:bodyPr>
+          <a:p>
+            <a:pPr defTabSz="914400">
+              <a:lnSpc>
+                <a:spcPct val="100000"/>
+              </a:lnSpc>
+              <a:tabLst>
+                <a:tab algn="l" pos="0"/>
+              </a:tabLst>
+            </a:pPr>
+            <a:r>
+              <a:rPr b="1" lang="en-US" sz="1050" spc="-1" strike="noStrike" u="sng">
+                <a:solidFill>
+                  <a:srgbClr val="0563c1"/>
+                </a:solidFill>
+                <a:uFillTx/>
+                <a:latin typeface="Cambria"/>
+                <a:ea typeface="Cambria"/>
+                <a:hlinkClick r:id="rId4"/>
+              </a:rPr>
+              <a:t>TYPE 2 · False certainty</a:t>
+            </a:r>
+            <a:endParaRPr b="0" lang="en-US" sz="1050" spc="-1" strike="noStrike">
+              <a:solidFill>
+                <a:srgbClr val="000000"/>
+              </a:solidFill>
+              <a:latin typeface="Arial"/>
+            </a:endParaRPr>
+          </a:p>
+        </p:txBody>
+      </p:sp>
+      <p:sp>
+        <p:nvSpPr>
+          <p:cNvPr id="239" name="Text 30"/>
+          <p:cNvSpPr/>
+          <p:nvPr/>
+        </p:nvSpPr>
+        <p:spPr>
+          <a:xfrm>
+            <a:off x="8238600" y="4133087"/>
+            <a:ext cx="3135240" cy="1353312"/>
+          </a:xfrm>
+          <a:prstGeom prst="rect">
+            <a:avLst/>
+          </a:prstGeom>
+          <a:noFill/>
+          <a:ln w="0">
+            <a:noFill/>
+          </a:ln>
+        </p:spPr>
+        <p:style>
+          <a:lnRef idx="0"/>
+          <a:fillRef idx="0"/>
+          <a:effectRef idx="0"/>
+          <a:fontRef idx="minor"/>
+        </p:style>
+        <p:txBody>
+          <a:bodyPr lIns="360" rIns="360" tIns="360" bIns="360" anchor="t">
+            <a:noAutofit/>
+          </a:bodyPr>
           <a:p>
             <a:pPr defTabSz="914400">
               <a:lnSpc>
@@ -20173,9 +20147,41 @@
                 <a:latin typeface="Calibri"/>
                 <a:ea typeface="Calibri"/>
               </a:rPr>
+              <a:t>The system closes by discarding what it does not know: missing input treated as present, low confidence promoted to certainty, a local result treated as globally valid (forced PASS/FAIL, false closure).</a:t>
+            </a:r>
+            <a:endParaRPr b="0" lang="en-US" sz="880" spc="-1" strike="noStrike">
+              <a:solidFill>
+                <a:srgbClr val="000000"/>
+              </a:solidFill>
+              <a:latin typeface="Arial"/>
+            </a:endParaRPr>
+          </a:p>
+          <a:p>
+            <a:pPr defTabSz="914400">
+              <a:lnSpc>
+                <a:spcPct val="100000"/>
+              </a:lnSpc>
+              <a:spcBef>
+                <a:spcPts val="0"/>
+              </a:spcBef>
+              <a:spcAft>
+                <a:spcPts val="0"/>
+              </a:spcAft>
+              <a:tabLst>
+                <a:tab algn="l" pos="0"/>
+              </a:tabLst>
+            </a:pPr>
+            <a:r>
+              <a:rPr b="0" lang="en-US" sz="880" spc="-1" strike="noStrike">
+                <a:solidFill>
+                  <a:srgbClr val="55595f"/>
+                </a:solidFill>
+                <a:latin typeface="Calibri"/>
+                <a:ea typeface="Calibri"/>
+              </a:rPr>
               <a:t>Response: restore uncertainty, scope and provenance, then re-enter the affected scope.</a:t>
             </a:r>
-            <a:endParaRPr b="0" lang="en-US" sz="960" spc="-1" strike="noStrike">
+            <a:endParaRPr b="0" lang="en-US" sz="880" spc="-1" strike="noStrike">
               <a:solidFill>
                 <a:srgbClr val="000000"/>
               </a:solidFill>
@@ -20197,7 +20203,7 @@
         <p:spPr>
           <a:xfrm>
             <a:off x="11064240" y="6537960"/>
-            <a:ext cx="502200" cy="163800"/>
+            <a:ext cx="501840" cy="163440"/>
           </a:xfrm>
           <a:prstGeom prst="rect">
             <a:avLst/>
@@ -20267,7 +20273,7 @@
         <p:spPr>
           <a:xfrm>
             <a:off x="1073880" y="6510600"/>
-            <a:ext cx="2551680" cy="103680"/>
+            <a:ext cx="2551320" cy="103320"/>
           </a:xfrm>
           <a:prstGeom prst="rect">
             <a:avLst/>
@@ -20392,7 +20398,7 @@
         <p:spPr>
           <a:xfrm>
             <a:off x="585360" y="164520"/>
-            <a:ext cx="2925360" cy="131040"/>
+            <a:ext cx="2925000" cy="130680"/>
           </a:xfrm>
           <a:prstGeom prst="rect">
             <a:avLst/>
@@ -20446,7 +20452,7 @@
         <p:spPr>
           <a:xfrm>
             <a:off x="10744200" y="164520"/>
-            <a:ext cx="685080" cy="131040"/>
+            <a:ext cx="684720" cy="130680"/>
           </a:xfrm>
           <a:prstGeom prst="rect">
             <a:avLst/>
@@ -20500,7 +20506,7 @@
         <p:spPr>
           <a:xfrm>
             <a:off x="585360" y="457200"/>
-            <a:ext cx="10825920" cy="10080"/>
+            <a:ext cx="10825560" cy="9720"/>
           </a:xfrm>
           <a:prstGeom prst="rect">
             <a:avLst/>
@@ -20556,7 +20562,7 @@
         <p:spPr>
           <a:xfrm>
             <a:off x="585360" y="530280"/>
-            <a:ext cx="10825920" cy="4680"/>
+            <a:ext cx="10825560" cy="4320"/>
           </a:xfrm>
           <a:prstGeom prst="rect">
             <a:avLst/>
@@ -20612,7 +20618,7 @@
         <p:spPr>
           <a:xfrm>
             <a:off x="621720" y="713160"/>
-            <a:ext cx="10697760" cy="384048"/>
+            <a:ext cx="10697400" cy="384048"/>
           </a:xfrm>
           <a:prstGeom prst="rect">
             <a:avLst/>
@@ -20648,7 +20654,7 @@
               </a:rPr>
               <a:t>Six severe failure routes. Fourteen requirements. One common contract.</a:t>
             </a:r>
-            <a:endParaRPr b="0" lang="en-US" sz="2350" spc="-1" strike="noStrike">
+            <a:endParaRPr b="0" lang="en-US" sz="1800" spc="-1" strike="noStrike">
               <a:solidFill>
                 <a:srgbClr val="000000"/>
               </a:solidFill>
@@ -20666,7 +20672,7 @@
         <p:spPr>
           <a:xfrm>
             <a:off x="621720" y="1161360"/>
-            <a:ext cx="10697760" cy="164520"/>
+            <a:ext cx="10697400" cy="164160"/>
           </a:xfrm>
           <a:prstGeom prst="rect">
             <a:avLst/>
@@ -20720,7 +20726,7 @@
         <p:spPr>
           <a:xfrm>
             <a:off x="585360" y="6446520"/>
-            <a:ext cx="10825920" cy="10080"/>
+            <a:ext cx="10825560" cy="9720"/>
           </a:xfrm>
           <a:prstGeom prst="rect">
             <a:avLst/>
@@ -20776,7 +20782,7 @@
         <p:spPr>
           <a:xfrm>
             <a:off x="4352400" y="6537960"/>
-            <a:ext cx="3455640" cy="117360"/>
+            <a:ext cx="3455280" cy="117000"/>
           </a:xfrm>
           <a:prstGeom prst="rect">
             <a:avLst/>
@@ -20830,7 +20836,7 @@
         <p:spPr>
           <a:xfrm>
             <a:off x="11018520" y="6537960"/>
-            <a:ext cx="273600" cy="129600"/>
+            <a:ext cx="273240" cy="129240"/>
           </a:xfrm>
           <a:prstGeom prst="rect">
             <a:avLst/>
@@ -20884,7 +20890,7 @@
         <p:spPr>
           <a:xfrm>
             <a:off x="820080" y="6510600"/>
-            <a:ext cx="3059280" cy="117360"/>
+            <a:ext cx="3058920" cy="117000"/>
           </a:xfrm>
           <a:prstGeom prst="rect">
             <a:avLst/>
@@ -20940,7 +20946,7 @@
         <p:spPr>
           <a:xfrm>
             <a:off x="621720" y="1627560"/>
-            <a:ext cx="3336840" cy="1416600"/>
+            <a:ext cx="3336480" cy="1416240"/>
           </a:xfrm>
           <a:prstGeom prst="roundRect">
             <a:avLst>
@@ -20998,7 +21004,7 @@
         <p:spPr>
           <a:xfrm>
             <a:off x="1051920" y="1761840"/>
-            <a:ext cx="336240" cy="535320"/>
+            <a:ext cx="335880" cy="535320"/>
           </a:xfrm>
           <a:prstGeom prst="rect">
             <a:avLst/>
@@ -21052,7 +21058,7 @@
         <p:spPr>
           <a:xfrm>
             <a:off x="1938240" y="1851120"/>
-            <a:ext cx="1599480" cy="146880"/>
+            <a:ext cx="1599120" cy="146880"/>
           </a:xfrm>
           <a:prstGeom prst="rect">
             <a:avLst/>
@@ -21160,7 +21166,7 @@
         <p:spPr>
           <a:xfrm>
             <a:off x="4160520" y="1627560"/>
-            <a:ext cx="3336840" cy="1416600"/>
+            <a:ext cx="3336480" cy="1416240"/>
           </a:xfrm>
           <a:prstGeom prst="roundRect">
             <a:avLst>
@@ -21218,7 +21224,7 @@
         <p:spPr>
           <a:xfrm>
             <a:off x="4440600" y="1761840"/>
-            <a:ext cx="636480" cy="535320"/>
+            <a:ext cx="636120" cy="535320"/>
           </a:xfrm>
           <a:prstGeom prst="rect">
             <a:avLst/>
@@ -21272,7 +21278,7 @@
         <p:spPr>
           <a:xfrm>
             <a:off x="5541840" y="1851120"/>
-            <a:ext cx="1469880" cy="146880"/>
+            <a:ext cx="1469520" cy="146880"/>
           </a:xfrm>
           <a:prstGeom prst="rect">
             <a:avLst/>
@@ -21380,7 +21386,7 @@
         <p:spPr>
           <a:xfrm>
             <a:off x="7699320" y="1627560"/>
-            <a:ext cx="3345840" cy="1416600"/>
+            <a:ext cx="3345480" cy="1416240"/>
           </a:xfrm>
           <a:prstGeom prst="roundRect">
             <a:avLst>
@@ -21438,7 +21444,7 @@
         <p:spPr>
           <a:xfrm>
             <a:off x="8129520" y="1761840"/>
-            <a:ext cx="336240" cy="535320"/>
+            <a:ext cx="335880" cy="535320"/>
           </a:xfrm>
           <a:prstGeom prst="rect">
             <a:avLst/>
@@ -21492,7 +21498,7 @@
         <p:spPr>
           <a:xfrm>
             <a:off x="9150840" y="1851120"/>
-            <a:ext cx="1338840" cy="146880"/>
+            <a:ext cx="1338480" cy="146880"/>
           </a:xfrm>
           <a:prstGeom prst="rect">
             <a:avLst/>
@@ -21600,7 +21606,7 @@
         <p:spPr>
           <a:xfrm>
             <a:off x="621720" y="3246120"/>
-            <a:ext cx="10944720" cy="1005120"/>
+            <a:ext cx="10944360" cy="1004760"/>
           </a:xfrm>
           <a:prstGeom prst="roundRect">
             <a:avLst>
@@ -21658,7 +21664,7 @@
         <p:spPr>
           <a:xfrm>
             <a:off x="1005480" y="3387240"/>
-            <a:ext cx="1014480" cy="146880"/>
+            <a:ext cx="1014120" cy="146880"/>
           </a:xfrm>
           <a:prstGeom prst="rect">
             <a:avLst/>
@@ -21712,7 +21718,7 @@
         <p:spPr>
           <a:xfrm>
             <a:off x="2148840" y="3328920"/>
-            <a:ext cx="8857440" cy="447120"/>
+            <a:ext cx="8857080" cy="446760"/>
           </a:xfrm>
           <a:prstGeom prst="rect">
             <a:avLst/>
@@ -21789,7 +21795,7 @@
         <p:spPr>
           <a:xfrm>
             <a:off x="2148840" y="3848040"/>
-            <a:ext cx="8857440" cy="208800"/>
+            <a:ext cx="8857080" cy="208440"/>
           </a:xfrm>
           <a:prstGeom prst="rect">
             <a:avLst/>
@@ -21843,7 +21849,7 @@
         <p:spPr>
           <a:xfrm>
             <a:off x="685800" y="4485960"/>
-            <a:ext cx="1809720" cy="144000"/>
+            <a:ext cx="1809360" cy="144000"/>
           </a:xfrm>
           <a:prstGeom prst="rect">
             <a:avLst/>
@@ -21897,7 +21903,7 @@
         <p:spPr>
           <a:xfrm>
             <a:off x="631080" y="4681800"/>
-            <a:ext cx="1325160" cy="511200"/>
+            <a:ext cx="1324800" cy="510840"/>
           </a:xfrm>
           <a:prstGeom prst="roundRect">
             <a:avLst>
@@ -21955,7 +21961,7 @@
         <p:spPr>
           <a:xfrm>
             <a:off x="1182600" y="4744800"/>
-            <a:ext cx="221760" cy="138960"/>
+            <a:ext cx="221400" cy="138960"/>
           </a:xfrm>
           <a:prstGeom prst="rect">
             <a:avLst/>
@@ -22011,7 +22017,7 @@
         <p:spPr>
           <a:xfrm>
             <a:off x="914400" y="4933440"/>
-            <a:ext cx="758160" cy="136080"/>
+            <a:ext cx="757800" cy="136080"/>
           </a:xfrm>
           <a:prstGeom prst="rect">
             <a:avLst/>
@@ -22067,7 +22073,7 @@
         <p:spPr>
           <a:xfrm>
             <a:off x="2066400" y="4681800"/>
-            <a:ext cx="1325160" cy="511200"/>
+            <a:ext cx="1324800" cy="510840"/>
           </a:xfrm>
           <a:prstGeom prst="roundRect">
             <a:avLst>
@@ -22125,7 +22131,7 @@
         <p:spPr>
           <a:xfrm>
             <a:off x="2617920" y="4744800"/>
-            <a:ext cx="221760" cy="138960"/>
+            <a:ext cx="221400" cy="138960"/>
           </a:xfrm>
           <a:prstGeom prst="rect">
             <a:avLst/>
@@ -22181,7 +22187,7 @@
         <p:spPr>
           <a:xfrm>
             <a:off x="2439720" y="4933440"/>
-            <a:ext cx="578520" cy="136080"/>
+            <a:ext cx="578160" cy="136080"/>
           </a:xfrm>
           <a:prstGeom prst="rect">
             <a:avLst/>
@@ -22237,7 +22243,7 @@
         <p:spPr>
           <a:xfrm>
             <a:off x="3502080" y="4681800"/>
-            <a:ext cx="1325160" cy="511200"/>
+            <a:ext cx="1324800" cy="510840"/>
           </a:xfrm>
           <a:prstGeom prst="roundRect">
             <a:avLst>
@@ -22295,7 +22301,7 @@
         <p:spPr>
           <a:xfrm>
             <a:off x="4053600" y="4744800"/>
-            <a:ext cx="221760" cy="138960"/>
+            <a:ext cx="221400" cy="138960"/>
           </a:xfrm>
           <a:prstGeom prst="rect">
             <a:avLst/>
@@ -22351,7 +22357,7 @@
         <p:spPr>
           <a:xfrm>
             <a:off x="3882240" y="4933440"/>
-            <a:ext cx="564840" cy="136080"/>
+            <a:ext cx="564480" cy="136080"/>
           </a:xfrm>
           <a:prstGeom prst="rect">
             <a:avLst/>
@@ -22407,7 +22413,7 @@
         <p:spPr>
           <a:xfrm>
             <a:off x="4937760" y="4681800"/>
-            <a:ext cx="1325160" cy="511200"/>
+            <a:ext cx="1324800" cy="510840"/>
           </a:xfrm>
           <a:prstGeom prst="roundRect">
             <a:avLst>
@@ -22465,7 +22471,7 @@
         <p:spPr>
           <a:xfrm>
             <a:off x="5489280" y="4744800"/>
-            <a:ext cx="221760" cy="138960"/>
+            <a:ext cx="221400" cy="138960"/>
           </a:xfrm>
           <a:prstGeom prst="rect">
             <a:avLst/>
@@ -22521,7 +22527,7 @@
         <p:spPr>
           <a:xfrm>
             <a:off x="5339880" y="4933440"/>
-            <a:ext cx="520560" cy="136080"/>
+            <a:ext cx="520200" cy="136080"/>
           </a:xfrm>
           <a:prstGeom prst="rect">
             <a:avLst/>
@@ -22577,7 +22583,7 @@
         <p:spPr>
           <a:xfrm>
             <a:off x="6373440" y="4681800"/>
-            <a:ext cx="1325160" cy="511200"/>
+            <a:ext cx="1324800" cy="510840"/>
           </a:xfrm>
           <a:prstGeom prst="roundRect">
             <a:avLst>
@@ -22635,7 +22641,7 @@
         <p:spPr>
           <a:xfrm>
             <a:off x="6924960" y="4744800"/>
-            <a:ext cx="221760" cy="138960"/>
+            <a:ext cx="221400" cy="138960"/>
           </a:xfrm>
           <a:prstGeom prst="rect">
             <a:avLst/>
@@ -22691,7 +22697,7 @@
         <p:spPr>
           <a:xfrm>
             <a:off x="6860880" y="4933440"/>
-            <a:ext cx="349920" cy="136080"/>
+            <a:ext cx="349560" cy="136080"/>
           </a:xfrm>
           <a:prstGeom prst="rect">
             <a:avLst/>
@@ -22747,7 +22753,7 @@
         <p:spPr>
           <a:xfrm>
             <a:off x="7809120" y="4681800"/>
-            <a:ext cx="1325160" cy="511200"/>
+            <a:ext cx="1324800" cy="510840"/>
           </a:xfrm>
           <a:prstGeom prst="roundRect">
             <a:avLst>
@@ -22805,7 +22811,7 @@
         <p:spPr>
           <a:xfrm>
             <a:off x="8360640" y="4744800"/>
-            <a:ext cx="221760" cy="138960"/>
+            <a:ext cx="221400" cy="138960"/>
           </a:xfrm>
           <a:prstGeom prst="rect">
             <a:avLst/>
@@ -22861,7 +22867,7 @@
         <p:spPr>
           <a:xfrm>
             <a:off x="8262360" y="4933440"/>
-            <a:ext cx="418320" cy="136080"/>
+            <a:ext cx="417960" cy="136080"/>
           </a:xfrm>
           <a:prstGeom prst="rect">
             <a:avLst/>
@@ -22917,7 +22923,7 @@
         <p:spPr>
           <a:xfrm>
             <a:off x="631080" y="5367600"/>
-            <a:ext cx="5284440" cy="566280"/>
+            <a:ext cx="5284080" cy="565920"/>
           </a:xfrm>
           <a:prstGeom prst="roundRect">
             <a:avLst>
@@ -22977,7 +22983,7 @@
         <p:spPr>
           <a:xfrm>
             <a:off x="2041200" y="5518440"/>
-            <a:ext cx="2445480" cy="154800"/>
+            <a:ext cx="2445120" cy="154800"/>
           </a:xfrm>
           <a:prstGeom prst="rect">
             <a:avLst/>
@@ -23031,7 +23037,7 @@
         <p:spPr>
           <a:xfrm>
             <a:off x="6089760" y="5367600"/>
-            <a:ext cx="3227040" cy="566280"/>
+            <a:ext cx="3226680" cy="565920"/>
           </a:xfrm>
           <a:prstGeom prst="roundRect">
             <a:avLst>
@@ -23091,7 +23097,7 @@
         <p:spPr>
           <a:xfrm>
             <a:off x="7104960" y="5518440"/>
-            <a:ext cx="1206360" cy="154800"/>
+            <a:ext cx="1206000" cy="154800"/>
           </a:xfrm>
           <a:prstGeom prst="rect">
             <a:avLst/>
@@ -23145,7 +23151,7 @@
         <p:spPr>
           <a:xfrm>
             <a:off x="9491400" y="5367600"/>
-            <a:ext cx="2075040" cy="566280"/>
+            <a:ext cx="2074680" cy="565920"/>
           </a:xfrm>
           <a:prstGeom prst="roundRect">
             <a:avLst>
@@ -23205,7 +23211,7 @@
         <p:spPr>
           <a:xfrm>
             <a:off x="10081080" y="5521680"/>
-            <a:ext cx="895320" cy="148320"/>
+            <a:ext cx="894960" cy="148320"/>
           </a:xfrm>
           <a:prstGeom prst="rect">
             <a:avLst/>
@@ -23259,7 +23265,7 @@
         <p:spPr>
           <a:xfrm>
             <a:off x="2605320" y="6022080"/>
-            <a:ext cx="5852880" cy="134640"/>
+            <a:ext cx="5852520" cy="134640"/>
           </a:xfrm>
           <a:prstGeom prst="rect">
             <a:avLst/>
@@ -23343,7 +23349,7 @@
         <p:spPr>
           <a:xfrm>
             <a:off x="567000" y="164520"/>
-            <a:ext cx="3199680" cy="129600"/>
+            <a:ext cx="3199320" cy="129240"/>
           </a:xfrm>
           <a:prstGeom prst="rect">
             <a:avLst/>
@@ -23397,7 +23403,7 @@
         <p:spPr>
           <a:xfrm>
             <a:off x="10716840" y="164520"/>
-            <a:ext cx="685080" cy="129600"/>
+            <a:ext cx="684720" cy="129240"/>
           </a:xfrm>
           <a:prstGeom prst="rect">
             <a:avLst/>
@@ -23451,7 +23457,7 @@
         <p:spPr>
           <a:xfrm>
             <a:off x="567000" y="640080"/>
-            <a:ext cx="10514880" cy="358200"/>
+            <a:ext cx="10514520" cy="357840"/>
           </a:xfrm>
           <a:prstGeom prst="rect">
             <a:avLst/>
@@ -23507,7 +23513,7 @@
         <p:spPr>
           <a:xfrm>
             <a:off x="567000" y="1078920"/>
-            <a:ext cx="10514880" cy="159840"/>
+            <a:ext cx="10514520" cy="159480"/>
           </a:xfrm>
           <a:prstGeom prst="rect">
             <a:avLst/>
@@ -23561,7 +23567,7 @@
         <p:spPr>
           <a:xfrm>
             <a:off x="567000" y="457200"/>
-            <a:ext cx="10834920" cy="10080"/>
+            <a:ext cx="10834560" cy="9720"/>
           </a:xfrm>
           <a:prstGeom prst="rect">
             <a:avLst/>
@@ -23617,7 +23623,7 @@
         <p:spPr>
           <a:xfrm>
             <a:off x="567000" y="1508760"/>
-            <a:ext cx="3455640" cy="749160"/>
+            <a:ext cx="3455280" cy="748800"/>
           </a:xfrm>
           <a:prstGeom prst="roundRect">
             <a:avLst>
@@ -23675,7 +23681,7 @@
         <p:spPr>
           <a:xfrm>
             <a:off x="676800" y="1581840"/>
-            <a:ext cx="346680" cy="141840"/>
+            <a:ext cx="346320" cy="141480"/>
           </a:xfrm>
           <a:prstGeom prst="rect">
             <a:avLst/>
@@ -23729,7 +23735,7 @@
         <p:spPr>
           <a:xfrm>
             <a:off x="1069920" y="1572840"/>
-            <a:ext cx="2696760" cy="162720"/>
+            <a:ext cx="2696400" cy="162360"/>
           </a:xfrm>
           <a:prstGeom prst="rect">
             <a:avLst/>
@@ -23783,7 +23789,7 @@
         <p:spPr>
           <a:xfrm>
             <a:off x="676800" y="1819800"/>
-            <a:ext cx="3236400" cy="259200"/>
+            <a:ext cx="3236040" cy="258840"/>
           </a:xfrm>
           <a:prstGeom prst="rect">
             <a:avLst/>
@@ -23837,7 +23843,7 @@
         <p:spPr>
           <a:xfrm>
             <a:off x="4087440" y="1508760"/>
-            <a:ext cx="3455640" cy="749160"/>
+            <a:ext cx="3455280" cy="748800"/>
           </a:xfrm>
           <a:prstGeom prst="roundRect">
             <a:avLst>
@@ -23895,7 +23901,7 @@
         <p:spPr>
           <a:xfrm>
             <a:off x="4197240" y="1581840"/>
-            <a:ext cx="346680" cy="141840"/>
+            <a:ext cx="346320" cy="141480"/>
           </a:xfrm>
           <a:prstGeom prst="rect">
             <a:avLst/>
@@ -23949,7 +23955,7 @@
         <p:spPr>
           <a:xfrm>
             <a:off x="4590360" y="1572840"/>
-            <a:ext cx="2696760" cy="162720"/>
+            <a:ext cx="2696400" cy="162360"/>
           </a:xfrm>
           <a:prstGeom prst="rect">
             <a:avLst/>
@@ -24003,7 +24009,7 @@
         <p:spPr>
           <a:xfrm>
             <a:off x="4197240" y="1819800"/>
-            <a:ext cx="3236400" cy="259200"/>
+            <a:ext cx="3236040" cy="258840"/>
           </a:xfrm>
           <a:prstGeom prst="rect">
             <a:avLst/>
@@ -24057,7 +24063,7 @@
         <p:spPr>
           <a:xfrm>
             <a:off x="7607880" y="1508760"/>
-            <a:ext cx="3455640" cy="749160"/>
+            <a:ext cx="3455280" cy="748800"/>
           </a:xfrm>
           <a:prstGeom prst="roundRect">
             <a:avLst>
@@ -24115,7 +24121,7 @@
         <p:spPr>
           <a:xfrm>
             <a:off x="7717680" y="1581840"/>
-            <a:ext cx="346680" cy="141840"/>
+            <a:ext cx="346320" cy="141480"/>
           </a:xfrm>
           <a:prstGeom prst="rect">
             <a:avLst/>
@@ -24169,7 +24175,7 @@
         <p:spPr>
           <a:xfrm>
             <a:off x="8110800" y="1572840"/>
-            <a:ext cx="2696760" cy="162720"/>
+            <a:ext cx="2696400" cy="162360"/>
           </a:xfrm>
           <a:prstGeom prst="rect">
             <a:avLst/>
@@ -24223,7 +24229,7 @@
         <p:spPr>
           <a:xfrm>
             <a:off x="7717680" y="1819800"/>
-            <a:ext cx="3236400" cy="259200"/>
+            <a:ext cx="3236040" cy="258840"/>
           </a:xfrm>
           <a:prstGeom prst="rect">
             <a:avLst/>
@@ -24277,7 +24283,7 @@
         <p:spPr>
           <a:xfrm>
             <a:off x="567000" y="2541960"/>
-            <a:ext cx="1617840" cy="913680"/>
+            <a:ext cx="1617480" cy="913320"/>
           </a:xfrm>
           <a:prstGeom prst="roundRect">
             <a:avLst>
@@ -24335,7 +24341,7 @@
         <p:spPr>
           <a:xfrm>
             <a:off x="640080" y="2615040"/>
-            <a:ext cx="319320" cy="133920"/>
+            <a:ext cx="318960" cy="133560"/>
           </a:xfrm>
           <a:prstGeom prst="rect">
             <a:avLst/>
@@ -24389,7 +24395,7 @@
         <p:spPr>
           <a:xfrm>
             <a:off x="640080" y="2825640"/>
-            <a:ext cx="1471320" cy="143280"/>
+            <a:ext cx="1470960" cy="142920"/>
           </a:xfrm>
           <a:prstGeom prst="rect">
             <a:avLst/>
@@ -24443,7 +24449,7 @@
         <p:spPr>
           <a:xfrm>
             <a:off x="640080" y="3108960"/>
-            <a:ext cx="1471320" cy="118800"/>
+            <a:ext cx="1470960" cy="118440"/>
           </a:xfrm>
           <a:prstGeom prst="rect">
             <a:avLst/>
@@ -24497,7 +24503,7 @@
         <p:spPr>
           <a:xfrm>
             <a:off x="2199240" y="2889360"/>
-            <a:ext cx="136440" cy="182520"/>
+            <a:ext cx="136080" cy="182520"/>
           </a:xfrm>
           <a:prstGeom prst="rect">
             <a:avLst/>
@@ -24551,7 +24557,7 @@
         <p:spPr>
           <a:xfrm>
             <a:off x="2350080" y="2541960"/>
-            <a:ext cx="1617840" cy="913680"/>
+            <a:ext cx="1617480" cy="913320"/>
           </a:xfrm>
           <a:prstGeom prst="roundRect">
             <a:avLst>
@@ -24609,7 +24615,7 @@
         <p:spPr>
           <a:xfrm>
             <a:off x="2423160" y="2615040"/>
-            <a:ext cx="319320" cy="133920"/>
+            <a:ext cx="318960" cy="133560"/>
           </a:xfrm>
           <a:prstGeom prst="rect">
             <a:avLst/>
@@ -24663,7 +24669,7 @@
         <p:spPr>
           <a:xfrm>
             <a:off x="2423160" y="2825640"/>
-            <a:ext cx="1471320" cy="143280"/>
+            <a:ext cx="1470960" cy="142920"/>
           </a:xfrm>
           <a:prstGeom prst="rect">
             <a:avLst/>
@@ -24717,7 +24723,7 @@
         <p:spPr>
           <a:xfrm>
             <a:off x="2423160" y="3108960"/>
-            <a:ext cx="1471320" cy="237240"/>
+            <a:ext cx="1470960" cy="237240"/>
           </a:xfrm>
           <a:prstGeom prst="rect">
             <a:avLst/>
@@ -24771,7 +24777,7 @@
         <p:spPr>
           <a:xfrm>
             <a:off x="3982320" y="2889360"/>
-            <a:ext cx="136440" cy="182520"/>
+            <a:ext cx="136080" cy="182520"/>
           </a:xfrm>
           <a:prstGeom prst="rect">
             <a:avLst/>
@@ -24825,7 +24831,7 @@
         <p:spPr>
           <a:xfrm>
             <a:off x="4133160" y="2541960"/>
-            <a:ext cx="1617840" cy="913680"/>
+            <a:ext cx="1617480" cy="913320"/>
           </a:xfrm>
           <a:prstGeom prst="roundRect">
             <a:avLst>
@@ -24883,7 +24889,7 @@
         <p:spPr>
           <a:xfrm>
             <a:off x="4206240" y="2615040"/>
-            <a:ext cx="319320" cy="133920"/>
+            <a:ext cx="318960" cy="133560"/>
           </a:xfrm>
           <a:prstGeom prst="rect">
             <a:avLst/>
@@ -24937,7 +24943,7 @@
         <p:spPr>
           <a:xfrm>
             <a:off x="4206240" y="2825640"/>
-            <a:ext cx="1471320" cy="143280"/>
+            <a:ext cx="1470960" cy="142920"/>
           </a:xfrm>
           <a:prstGeom prst="rect">
             <a:avLst/>
@@ -24991,7 +24997,7 @@
         <p:spPr>
           <a:xfrm>
             <a:off x="4206240" y="3108960"/>
-            <a:ext cx="1471320" cy="118800"/>
+            <a:ext cx="1470960" cy="118440"/>
           </a:xfrm>
           <a:prstGeom prst="rect">
             <a:avLst/>
@@ -25045,7 +25051,7 @@
         <p:spPr>
           <a:xfrm>
             <a:off x="5765400" y="2889360"/>
-            <a:ext cx="136440" cy="182520"/>
+            <a:ext cx="136080" cy="182520"/>
           </a:xfrm>
           <a:prstGeom prst="rect">
             <a:avLst/>
@@ -25099,7 +25105,7 @@
         <p:spPr>
           <a:xfrm>
             <a:off x="5916240" y="2541960"/>
-            <a:ext cx="1617840" cy="913680"/>
+            <a:ext cx="1617480" cy="913320"/>
           </a:xfrm>
           <a:prstGeom prst="roundRect">
             <a:avLst>
@@ -25157,7 +25163,7 @@
         <p:spPr>
           <a:xfrm>
             <a:off x="5989320" y="2615040"/>
-            <a:ext cx="319320" cy="133920"/>
+            <a:ext cx="318960" cy="133560"/>
           </a:xfrm>
           <a:prstGeom prst="rect">
             <a:avLst/>
@@ -25211,7 +25217,7 @@
         <p:spPr>
           <a:xfrm>
             <a:off x="5989320" y="2825640"/>
-            <a:ext cx="1471320" cy="143280"/>
+            <a:ext cx="1470960" cy="142920"/>
           </a:xfrm>
           <a:prstGeom prst="rect">
             <a:avLst/>
@@ -25265,7 +25271,7 @@
         <p:spPr>
           <a:xfrm>
             <a:off x="5989320" y="3108960"/>
-            <a:ext cx="1471320" cy="118800"/>
+            <a:ext cx="1470960" cy="118440"/>
           </a:xfrm>
           <a:prstGeom prst="rect">
             <a:avLst/>
@@ -25319,7 +25325,7 @@
         <p:spPr>
           <a:xfrm>
             <a:off x="7548480" y="2889360"/>
-            <a:ext cx="136440" cy="182520"/>
+            <a:ext cx="136080" cy="182520"/>
           </a:xfrm>
           <a:prstGeom prst="rect">
             <a:avLst/>
@@ -25373,7 +25379,7 @@
         <p:spPr>
           <a:xfrm>
             <a:off x="7699320" y="2541960"/>
-            <a:ext cx="1617840" cy="913680"/>
+            <a:ext cx="1617480" cy="913320"/>
           </a:xfrm>
           <a:prstGeom prst="roundRect">
             <a:avLst>
@@ -25431,7 +25437,7 @@
         <p:spPr>
           <a:xfrm>
             <a:off x="7772400" y="2615040"/>
-            <a:ext cx="319320" cy="133920"/>
+            <a:ext cx="318960" cy="133560"/>
           </a:xfrm>
           <a:prstGeom prst="rect">
             <a:avLst/>
@@ -25485,7 +25491,7 @@
         <p:spPr>
           <a:xfrm>
             <a:off x="7772400" y="2825640"/>
-            <a:ext cx="1471320" cy="286200"/>
+            <a:ext cx="1470960" cy="286200"/>
           </a:xfrm>
           <a:prstGeom prst="rect">
             <a:avLst/>
@@ -25539,7 +25545,7 @@
         <p:spPr>
           <a:xfrm>
             <a:off x="7772400" y="3108960"/>
-            <a:ext cx="1471320" cy="118800"/>
+            <a:ext cx="1470960" cy="118440"/>
           </a:xfrm>
           <a:prstGeom prst="rect">
             <a:avLst/>
@@ -25593,7 +25599,7 @@
         <p:spPr>
           <a:xfrm>
             <a:off x="9331560" y="2889360"/>
-            <a:ext cx="136440" cy="182520"/>
+            <a:ext cx="136080" cy="182520"/>
           </a:xfrm>
           <a:prstGeom prst="rect">
             <a:avLst/>
@@ -25647,7 +25653,7 @@
         <p:spPr>
           <a:xfrm>
             <a:off x="9482400" y="2541960"/>
-            <a:ext cx="1617840" cy="913680"/>
+            <a:ext cx="1617480" cy="913320"/>
           </a:xfrm>
           <a:prstGeom prst="roundRect">
             <a:avLst>
@@ -25705,7 +25711,7 @@
         <p:spPr>
           <a:xfrm>
             <a:off x="9555480" y="2615040"/>
-            <a:ext cx="319320" cy="133920"/>
+            <a:ext cx="318960" cy="133560"/>
           </a:xfrm>
           <a:prstGeom prst="rect">
             <a:avLst/>
@@ -25759,7 +25765,7 @@
         <p:spPr>
           <a:xfrm>
             <a:off x="9555480" y="2825640"/>
-            <a:ext cx="1471320" cy="143280"/>
+            <a:ext cx="1470960" cy="142920"/>
           </a:xfrm>
           <a:prstGeom prst="rect">
             <a:avLst/>
@@ -25813,7 +25819,7 @@
         <p:spPr>
           <a:xfrm>
             <a:off x="9555480" y="3108960"/>
-            <a:ext cx="1471320" cy="237240"/>
+            <a:ext cx="1470960" cy="237240"/>
           </a:xfrm>
           <a:prstGeom prst="rect">
             <a:avLst/>
@@ -25867,7 +25873,7 @@
         <p:spPr>
           <a:xfrm>
             <a:off x="567000" y="3703320"/>
-            <a:ext cx="5257080" cy="1425600"/>
+            <a:ext cx="5256720" cy="1425240"/>
           </a:xfrm>
           <a:prstGeom prst="roundRect">
             <a:avLst>
@@ -25925,7 +25931,7 @@
         <p:spPr>
           <a:xfrm>
             <a:off x="768240" y="3867840"/>
-            <a:ext cx="1279440" cy="258840"/>
+            <a:ext cx="1279080" cy="258840"/>
           </a:xfrm>
           <a:prstGeom prst="rect">
             <a:avLst/>
@@ -25979,7 +25985,7 @@
         <p:spPr>
           <a:xfrm>
             <a:off x="768240" y="4187880"/>
-            <a:ext cx="4681080" cy="586080"/>
+            <a:ext cx="4680720" cy="585720"/>
           </a:xfrm>
           <a:prstGeom prst="rect">
             <a:avLst/>
@@ -26033,7 +26039,7 @@
         <p:spPr>
           <a:xfrm>
             <a:off x="6144840" y="3703320"/>
-            <a:ext cx="5257080" cy="1425600"/>
+            <a:ext cx="5256720" cy="1425240"/>
           </a:xfrm>
           <a:prstGeom prst="roundRect">
             <a:avLst>
@@ -26091,7 +26097,7 @@
         <p:spPr>
           <a:xfrm>
             <a:off x="6346080" y="3867840"/>
-            <a:ext cx="1462320" cy="129600"/>
+            <a:ext cx="1461960" cy="129240"/>
           </a:xfrm>
           <a:prstGeom prst="rect">
             <a:avLst/>
@@ -26145,7 +26151,7 @@
         <p:spPr>
           <a:xfrm>
             <a:off x="6346080" y="4187880"/>
-            <a:ext cx="4681080" cy="586080"/>
+            <a:ext cx="4680720" cy="585720"/>
           </a:xfrm>
           <a:prstGeom prst="rect">
             <a:avLst/>
@@ -26199,7 +26205,7 @@
         <p:spPr>
           <a:xfrm>
             <a:off x="567000" y="5285160"/>
-            <a:ext cx="10834920" cy="694080"/>
+            <a:ext cx="10834560" cy="693720"/>
           </a:xfrm>
           <a:prstGeom prst="roundRect">
             <a:avLst>
@@ -26257,7 +26263,7 @@
         <p:spPr>
           <a:xfrm>
             <a:off x="768240" y="5394960"/>
-            <a:ext cx="3976920" cy="401760"/>
+            <a:ext cx="3976560" cy="401400"/>
           </a:xfrm>
           <a:prstGeom prst="rect">
             <a:avLst/>
@@ -26311,7 +26317,7 @@
         <p:spPr>
           <a:xfrm>
             <a:off x="567000" y="6236280"/>
-            <a:ext cx="10834920" cy="10080"/>
+            <a:ext cx="10834560" cy="9720"/>
           </a:xfrm>
           <a:prstGeom prst="rect">
             <a:avLst/>
@@ -26367,7 +26373,7 @@
         <p:spPr>
           <a:xfrm>
             <a:off x="4069080" y="6355080"/>
-            <a:ext cx="3656880" cy="109800"/>
+            <a:ext cx="3656520" cy="109440"/>
           </a:xfrm>
           <a:prstGeom prst="rect">
             <a:avLst/>
@@ -26421,7 +26427,7 @@
         <p:spPr>
           <a:xfrm>
             <a:off x="11045880" y="6355080"/>
-            <a:ext cx="273600" cy="129600"/>
+            <a:ext cx="273240" cy="129240"/>
           </a:xfrm>
           <a:prstGeom prst="rect">
             <a:avLst/>
@@ -26475,7 +26481,7 @@
         <p:spPr>
           <a:xfrm>
             <a:off x="4956120" y="5358240"/>
-            <a:ext cx="6144120" cy="117360"/>
+            <a:ext cx="6143760" cy="117000"/>
           </a:xfrm>
           <a:prstGeom prst="rect">
             <a:avLst/>
@@ -26529,7 +26535,7 @@
         <p:spPr>
           <a:xfrm>
             <a:off x="4956120" y="5577840"/>
-            <a:ext cx="962280" cy="273600"/>
+            <a:ext cx="961920" cy="273240"/>
           </a:xfrm>
           <a:prstGeom prst="roundRect">
             <a:avLst>
@@ -26586,8 +26592,8 @@
         </p:nvSpPr>
         <p:spPr>
           <a:xfrm>
-            <a:off x="5010840" y="5667120"/>
-            <a:ext cx="852840" cy="131400"/>
+            <a:off x="5010840" y="5679000"/>
+            <a:ext cx="852480" cy="107280"/>
           </a:xfrm>
           <a:prstGeom prst="rect">
             <a:avLst/>
@@ -26625,7 +26631,7 @@
               </a:rPr>
               <a:t>00E · 100M</a:t>
             </a:r>
-            <a:endParaRPr b="0" lang="en-US" sz="860" spc="-1" strike="noStrike">
+            <a:endParaRPr b="0" lang="en-US" sz="700" spc="-1" strike="noStrike">
               <a:solidFill>
                 <a:srgbClr val="000000"/>
               </a:solidFill>
@@ -26643,7 +26649,7 @@
         <p:spPr>
           <a:xfrm>
             <a:off x="5992200" y="5577840"/>
-            <a:ext cx="962280" cy="273600"/>
+            <a:ext cx="961920" cy="273240"/>
           </a:xfrm>
           <a:prstGeom prst="roundRect">
             <a:avLst>
@@ -26700,8 +26706,8 @@
         </p:nvSpPr>
         <p:spPr>
           <a:xfrm>
-            <a:off x="6047280" y="5667120"/>
-            <a:ext cx="852840" cy="131400"/>
+            <a:off x="6047280" y="5679000"/>
+            <a:ext cx="852480" cy="107280"/>
           </a:xfrm>
           <a:prstGeom prst="rect">
             <a:avLst/>
@@ -26739,7 +26745,7 @@
               </a:rPr>
               <a:t>00F · Smartcity</a:t>
             </a:r>
-            <a:endParaRPr b="0" lang="en-US" sz="860" spc="-1" strike="noStrike">
+            <a:endParaRPr b="0" lang="en-US" sz="700" spc="-1" strike="noStrike">
               <a:solidFill>
                 <a:srgbClr val="000000"/>
               </a:solidFill>
@@ -26757,7 +26763,7 @@
         <p:spPr>
           <a:xfrm>
             <a:off x="7028640" y="5577840"/>
-            <a:ext cx="962280" cy="273600"/>
+            <a:ext cx="961920" cy="273240"/>
           </a:xfrm>
           <a:prstGeom prst="roundRect">
             <a:avLst>
@@ -26814,8 +26820,8 @@
         </p:nvSpPr>
         <p:spPr>
           <a:xfrm>
-            <a:off x="7083720" y="5667120"/>
-            <a:ext cx="852840" cy="131400"/>
+            <a:off x="7083720" y="5679000"/>
+            <a:ext cx="852480" cy="107280"/>
           </a:xfrm>
           <a:prstGeom prst="rect">
             <a:avLst/>
@@ -26853,7 +26859,7 @@
               </a:rPr>
               <a:t>00G · Napoleon</a:t>
             </a:r>
-            <a:endParaRPr b="0" lang="en-US" sz="860" spc="-1" strike="noStrike">
+            <a:endParaRPr b="0" lang="en-US" sz="700" spc="-1" strike="noStrike">
               <a:solidFill>
                 <a:srgbClr val="000000"/>
               </a:solidFill>
@@ -26871,7 +26877,7 @@
         <p:spPr>
           <a:xfrm>
             <a:off x="8065080" y="5577840"/>
-            <a:ext cx="962280" cy="273600"/>
+            <a:ext cx="961920" cy="273240"/>
           </a:xfrm>
           <a:prstGeom prst="roundRect">
             <a:avLst>
@@ -26928,8 +26934,8 @@
         </p:nvSpPr>
         <p:spPr>
           <a:xfrm>
-            <a:off x="8119800" y="5667120"/>
-            <a:ext cx="852840" cy="131400"/>
+            <a:off x="8119800" y="5679000"/>
+            <a:ext cx="852480" cy="107280"/>
           </a:xfrm>
           <a:prstGeom prst="rect">
             <a:avLst/>
@@ -26967,7 +26973,7 @@
               </a:rPr>
               <a:t>00H · Quiet 4K</a:t>
             </a:r>
-            <a:endParaRPr b="0" lang="en-US" sz="860" spc="-1" strike="noStrike">
+            <a:endParaRPr b="0" lang="en-US" sz="700" spc="-1" strike="noStrike">
               <a:solidFill>
                 <a:srgbClr val="000000"/>
               </a:solidFill>
@@ -26985,7 +26991,7 @@
         <p:spPr>
           <a:xfrm>
             <a:off x="9101160" y="5577840"/>
-            <a:ext cx="962280" cy="273600"/>
+            <a:ext cx="961920" cy="273240"/>
           </a:xfrm>
           <a:prstGeom prst="roundRect">
             <a:avLst>
@@ -27042,8 +27048,8 @@
         </p:nvSpPr>
         <p:spPr>
           <a:xfrm>
-            <a:off x="9156240" y="5667120"/>
-            <a:ext cx="852840" cy="131400"/>
+            <a:off x="9156240" y="5679000"/>
+            <a:ext cx="852480" cy="107280"/>
           </a:xfrm>
           <a:prstGeom prst="rect">
             <a:avLst/>
@@ -27081,7 +27087,7 @@
               </a:rPr>
               <a:t>00I · Patch</a:t>
             </a:r>
-            <a:endParaRPr b="0" lang="en-US" sz="860" spc="-1" strike="noStrike">
+            <a:endParaRPr b="0" lang="en-US" sz="700" spc="-1" strike="noStrike">
               <a:solidFill>
                 <a:srgbClr val="000000"/>
               </a:solidFill>
@@ -27099,7 +27105,7 @@
         <p:spPr>
           <a:xfrm>
             <a:off x="10137600" y="5577840"/>
-            <a:ext cx="962280" cy="273600"/>
+            <a:ext cx="961920" cy="273240"/>
           </a:xfrm>
           <a:prstGeom prst="roundRect">
             <a:avLst>
@@ -27156,8 +27162,8 @@
         </p:nvSpPr>
         <p:spPr>
           <a:xfrm>
-            <a:off x="10192680" y="5667120"/>
-            <a:ext cx="852840" cy="131400"/>
+            <a:off x="10192680" y="5679000"/>
+            <a:ext cx="852480" cy="107280"/>
           </a:xfrm>
           <a:prstGeom prst="rect">
             <a:avLst/>
@@ -27195,7 +27201,7 @@
               </a:rPr>
               <a:t>00J · Author</a:t>
             </a:r>
-            <a:endParaRPr b="0" lang="en-US" sz="860" spc="-1" strike="noStrike">
+            <a:endParaRPr b="0" lang="en-US" sz="700" spc="-1" strike="noStrike">
               <a:solidFill>
                 <a:srgbClr val="000000"/>
               </a:solidFill>
@@ -27213,7 +27219,7 @@
         <p:spPr>
           <a:xfrm>
             <a:off x="1195560" y="6510600"/>
-            <a:ext cx="2307960" cy="103680"/>
+            <a:ext cx="2307600" cy="103320"/>
           </a:xfrm>
           <a:prstGeom prst="rect">
             <a:avLst/>
@@ -27331,7 +27337,7 @@
         <p:spPr>
           <a:xfrm>
             <a:off x="585360" y="155520"/>
-            <a:ext cx="3199680" cy="220680"/>
+            <a:ext cx="3199320" cy="220680"/>
           </a:xfrm>
           <a:prstGeom prst="rect">
             <a:avLst/>
@@ -27385,7 +27391,7 @@
         <p:spPr>
           <a:xfrm>
             <a:off x="10561320" y="155520"/>
-            <a:ext cx="685080" cy="220680"/>
+            <a:ext cx="684720" cy="220680"/>
           </a:xfrm>
           <a:prstGeom prst="rect">
             <a:avLst/>
@@ -27439,7 +27445,7 @@
         <p:spPr>
           <a:xfrm>
             <a:off x="585360" y="457200"/>
-            <a:ext cx="10825920" cy="10080"/>
+            <a:ext cx="10825560" cy="9720"/>
           </a:xfrm>
           <a:prstGeom prst="rect">
             <a:avLst/>
@@ -27492,7 +27498,7 @@
         <p:spPr>
           <a:xfrm>
             <a:off x="585360" y="511920"/>
-            <a:ext cx="10825920" cy="4680"/>
+            <a:ext cx="10825560" cy="4320"/>
           </a:xfrm>
           <a:prstGeom prst="rect">
             <a:avLst/>
@@ -27545,7 +27551,7 @@
         <p:spPr>
           <a:xfrm>
             <a:off x="621720" y="694800"/>
-            <a:ext cx="10606320" cy="447840"/>
+            <a:ext cx="10605960" cy="447840"/>
           </a:xfrm>
           <a:prstGeom prst="rect">
             <a:avLst/>
@@ -27599,7 +27605,7 @@
         <p:spPr>
           <a:xfrm>
             <a:off x="621720" y="1152000"/>
-            <a:ext cx="10514880" cy="252360"/>
+            <a:ext cx="10514520" cy="252360"/>
           </a:xfrm>
           <a:prstGeom prst="rect">
             <a:avLst/>
@@ -27653,7 +27659,7 @@
         <p:spPr>
           <a:xfrm>
             <a:off x="585360" y="6446520"/>
-            <a:ext cx="10825920" cy="10080"/>
+            <a:ext cx="10825560" cy="9720"/>
           </a:xfrm>
           <a:prstGeom prst="rect">
             <a:avLst/>
@@ -27706,7 +27712,7 @@
         <p:spPr>
           <a:xfrm>
             <a:off x="567000" y="6510600"/>
-            <a:ext cx="5211360" cy="207000"/>
+            <a:ext cx="5211000" cy="207000"/>
           </a:xfrm>
           <a:prstGeom prst="rect">
             <a:avLst/>
@@ -27760,7 +27766,7 @@
         <p:spPr>
           <a:xfrm>
             <a:off x="4343400" y="6510600"/>
-            <a:ext cx="3656880" cy="205560"/>
+            <a:ext cx="3656520" cy="205560"/>
           </a:xfrm>
           <a:prstGeom prst="rect">
             <a:avLst/>
@@ -27814,7 +27820,7 @@
         <p:spPr>
           <a:xfrm>
             <a:off x="11018520" y="6510600"/>
-            <a:ext cx="227880" cy="219240"/>
+            <a:ext cx="227520" cy="219240"/>
           </a:xfrm>
           <a:prstGeom prst="rect">
             <a:avLst/>
@@ -27868,7 +27874,7 @@
         <p:spPr>
           <a:xfrm>
             <a:off x="621720" y="1664280"/>
-            <a:ext cx="5238720" cy="1672560"/>
+            <a:ext cx="5238360" cy="1672200"/>
           </a:xfrm>
           <a:prstGeom prst="roundRect">
             <a:avLst>
@@ -27926,7 +27932,7 @@
         <p:spPr>
           <a:xfrm>
             <a:off x="621720" y="1664280"/>
-            <a:ext cx="49680" cy="1672560"/>
+            <a:ext cx="49320" cy="1672200"/>
           </a:xfrm>
           <a:prstGeom prst="rect">
             <a:avLst/>
@@ -27979,7 +27985,7 @@
         <p:spPr>
           <a:xfrm>
             <a:off x="804600" y="1828800"/>
-            <a:ext cx="657720" cy="439920"/>
+            <a:ext cx="657360" cy="439920"/>
           </a:xfrm>
           <a:prstGeom prst="rect">
             <a:avLst/>
@@ -28033,7 +28039,7 @@
         <p:spPr>
           <a:xfrm>
             <a:off x="1472040" y="1847160"/>
-            <a:ext cx="4187160" cy="232920"/>
+            <a:ext cx="4186800" cy="232920"/>
           </a:xfrm>
           <a:prstGeom prst="rect">
             <a:avLst/>
@@ -28087,7 +28093,7 @@
         <p:spPr>
           <a:xfrm>
             <a:off x="822960" y="2258640"/>
-            <a:ext cx="4827240" cy="556200"/>
+            <a:ext cx="4826880" cy="556200"/>
           </a:xfrm>
           <a:prstGeom prst="rect">
             <a:avLst/>
@@ -28141,7 +28147,7 @@
         <p:spPr>
           <a:xfrm>
             <a:off x="6108120" y="1664280"/>
-            <a:ext cx="5174640" cy="1672560"/>
+            <a:ext cx="5174280" cy="1672200"/>
           </a:xfrm>
           <a:prstGeom prst="roundRect">
             <a:avLst>
@@ -28199,7 +28205,7 @@
         <p:spPr>
           <a:xfrm>
             <a:off x="6108120" y="1664280"/>
-            <a:ext cx="49680" cy="1672560"/>
+            <a:ext cx="49320" cy="1672200"/>
           </a:xfrm>
           <a:prstGeom prst="rect">
             <a:avLst/>
@@ -28252,7 +28258,7 @@
         <p:spPr>
           <a:xfrm>
             <a:off x="6291000" y="1828800"/>
-            <a:ext cx="657720" cy="439920"/>
+            <a:ext cx="657360" cy="439920"/>
           </a:xfrm>
           <a:prstGeom prst="rect">
             <a:avLst/>
@@ -28306,7 +28312,7 @@
         <p:spPr>
           <a:xfrm>
             <a:off x="6958440" y="1847160"/>
-            <a:ext cx="4123080" cy="232920"/>
+            <a:ext cx="4122720" cy="232920"/>
           </a:xfrm>
           <a:prstGeom prst="rect">
             <a:avLst/>
@@ -28360,7 +28366,7 @@
         <p:spPr>
           <a:xfrm>
             <a:off x="6309360" y="2258640"/>
-            <a:ext cx="4763160" cy="711720"/>
+            <a:ext cx="4762800" cy="711720"/>
           </a:xfrm>
           <a:prstGeom prst="rect">
             <a:avLst/>
@@ -28414,7 +28420,7 @@
         <p:spPr>
           <a:xfrm>
             <a:off x="621720" y="3584520"/>
-            <a:ext cx="5238720" cy="1672560"/>
+            <a:ext cx="5238360" cy="1672200"/>
           </a:xfrm>
           <a:prstGeom prst="roundRect">
             <a:avLst>
@@ -28472,7 +28478,7 @@
         <p:spPr>
           <a:xfrm>
             <a:off x="621720" y="3584520"/>
-            <a:ext cx="49680" cy="1672560"/>
+            <a:ext cx="49320" cy="1672200"/>
           </a:xfrm>
           <a:prstGeom prst="rect">
             <a:avLst/>
@@ -28525,7 +28531,7 @@
         <p:spPr>
           <a:xfrm>
             <a:off x="804600" y="3749040"/>
-            <a:ext cx="657720" cy="439920"/>
+            <a:ext cx="657360" cy="439920"/>
           </a:xfrm>
           <a:prstGeom prst="rect">
             <a:avLst/>
@@ -28579,7 +28585,7 @@
         <p:spPr>
           <a:xfrm>
             <a:off x="1472040" y="3767400"/>
-            <a:ext cx="4187160" cy="232920"/>
+            <a:ext cx="4186800" cy="232920"/>
           </a:xfrm>
           <a:prstGeom prst="rect">
             <a:avLst/>
@@ -28633,7 +28639,7 @@
         <p:spPr>
           <a:xfrm>
             <a:off x="822960" y="4178880"/>
-            <a:ext cx="4827240" cy="711720"/>
+            <a:ext cx="4826880" cy="711720"/>
           </a:xfrm>
           <a:prstGeom prst="rect">
             <a:avLst/>
@@ -28687,7 +28693,7 @@
         <p:spPr>
           <a:xfrm>
             <a:off x="6108120" y="3584520"/>
-            <a:ext cx="5174640" cy="1672560"/>
+            <a:ext cx="5174280" cy="1672200"/>
           </a:xfrm>
           <a:prstGeom prst="roundRect">
             <a:avLst>
@@ -28745,7 +28751,7 @@
         <p:spPr>
           <a:xfrm>
             <a:off x="6108120" y="3584520"/>
-            <a:ext cx="49680" cy="1672560"/>
+            <a:ext cx="49320" cy="1672200"/>
           </a:xfrm>
           <a:prstGeom prst="rect">
             <a:avLst/>
@@ -28798,7 +28804,7 @@
         <p:spPr>
           <a:xfrm>
             <a:off x="6291000" y="3749040"/>
-            <a:ext cx="657720" cy="439920"/>
+            <a:ext cx="657360" cy="439920"/>
           </a:xfrm>
           <a:prstGeom prst="rect">
             <a:avLst/>
@@ -28852,7 +28858,7 @@
         <p:spPr>
           <a:xfrm>
             <a:off x="6958440" y="3767400"/>
-            <a:ext cx="4123080" cy="232920"/>
+            <a:ext cx="4122720" cy="232920"/>
           </a:xfrm>
           <a:prstGeom prst="rect">
             <a:avLst/>
@@ -28906,7 +28912,7 @@
         <p:spPr>
           <a:xfrm>
             <a:off x="6309360" y="4178880"/>
-            <a:ext cx="4763160" cy="711720"/>
+            <a:ext cx="4762800" cy="711720"/>
           </a:xfrm>
           <a:prstGeom prst="rect">
             <a:avLst/>
@@ -28960,7 +28966,7 @@
         <p:spPr>
           <a:xfrm>
             <a:off x="621720" y="5486400"/>
-            <a:ext cx="10661040" cy="666720"/>
+            <a:ext cx="10660680" cy="666360"/>
           </a:xfrm>
           <a:prstGeom prst="roundRect">
             <a:avLst>
@@ -29015,7 +29021,7 @@
         <p:spPr>
           <a:xfrm>
             <a:off x="841320" y="5632560"/>
-            <a:ext cx="2285280" cy="230040"/>
+            <a:ext cx="2284920" cy="230040"/>
           </a:xfrm>
           <a:prstGeom prst="rect">
             <a:avLst/>
@@ -29069,7 +29075,7 @@
         <p:spPr>
           <a:xfrm>
             <a:off x="3063240" y="5596200"/>
-            <a:ext cx="7954560" cy="379080"/>
+            <a:ext cx="7954200" cy="379080"/>
           </a:xfrm>
           <a:prstGeom prst="rect">
             <a:avLst/>
@@ -29123,7 +29129,7 @@
         <p:spPr>
           <a:xfrm>
             <a:off x="667440" y="6199560"/>
-            <a:ext cx="10606320" cy="213120"/>
+            <a:ext cx="10605960" cy="213120"/>
           </a:xfrm>
           <a:prstGeom prst="rect">
             <a:avLst/>

--- a/presentations/ecosystem-positioning/Ecosystem_Positioning_Requirements_Evidence_Canonical_v1.2.pptx
+++ b/presentations/ecosystem-positioning/Ecosystem_Positioning_Requirements_Evidence_Canonical_v1.2.pptx
@@ -351,7 +351,7 @@
             <a:pPr indent="0" algn="r">
               <a:buNone/>
             </a:pPr>
-            <a:fld id="{80D58113-BEC4-4409-A282-2A66EB8AC3A6}" type="slidenum">
+            <a:fld id="{D07EDE55-D5E3-41D4-9769-50BD7D3B3C06}" type="slidenum">
               <a:rPr b="0" lang="en-US" sz="1400" spc="-1" strike="noStrike">
                 <a:solidFill>
                   <a:srgbClr val="000000"/>
@@ -1906,7 +1906,7 @@
         <p:txBody>
           <a:bodyPr/>
           <a:p>
-            <a:fld id="{0CE29362-C1B1-44F3-8E17-E49D18BCB57F}" type="slidenum">
+            <a:fld id="{084D7B02-BDFD-4EE0-9B72-BD35DE3ED054}" type="slidenum">
               <a:t>&lt;#&gt;</a:t>
             </a:fld>
           </a:p>
@@ -2098,7 +2098,7 @@
         <p:spPr>
           <a:xfrm>
             <a:off x="567000" y="6546960"/>
-            <a:ext cx="3245040" cy="163440"/>
+            <a:ext cx="3244680" cy="163080"/>
           </a:xfrm>
           <a:prstGeom prst="rect">
             <a:avLst/>
@@ -2146,7 +2146,7 @@
         <p:spPr>
           <a:xfrm>
             <a:off x="4187880" y="6546960"/>
-            <a:ext cx="3382200" cy="163440"/>
+            <a:ext cx="3381840" cy="163080"/>
           </a:xfrm>
           <a:prstGeom prst="rect">
             <a:avLst/>
@@ -2207,7 +2207,7 @@
         <p:spPr>
           <a:xfrm>
             <a:off x="11064240" y="6537960"/>
-            <a:ext cx="501840" cy="163440"/>
+            <a:ext cx="501480" cy="163080"/>
           </a:xfrm>
           <a:prstGeom prst="rect">
             <a:avLst/>
@@ -2249,7 +2249,7 @@
                 <a:tab algn="l" pos="0"/>
               </a:tabLst>
             </a:pPr>
-            <a:fld id="{E138B932-9C32-4D08-9D65-D5AA06E86A63}" type="slidenum">
+            <a:fld id="{A5E5F97B-C61E-4F96-8E10-C0490C5DBFA1}" type="slidenum">
               <a:rPr b="1" lang="en-US" sz="750" spc="-1" strike="noStrike">
                 <a:solidFill>
                   <a:srgbClr val="1b273f"/>
@@ -2891,7 +2891,7 @@
         <p:spPr>
           <a:xfrm>
             <a:off x="9795960" y="365760"/>
-            <a:ext cx="1827720" cy="227520"/>
+            <a:ext cx="1827360" cy="227160"/>
           </a:xfrm>
           <a:prstGeom prst="rect">
             <a:avLst/>
@@ -3125,7 +3125,7 @@
         <p:spPr>
           <a:xfrm>
             <a:off x="567000" y="3383280"/>
-            <a:ext cx="6308280" cy="471960"/>
+            <a:ext cx="6307920" cy="471960"/>
           </a:xfrm>
           <a:prstGeom prst="rect">
             <a:avLst/>
@@ -3179,7 +3179,7 @@
         <p:spPr>
           <a:xfrm>
             <a:off x="631080" y="4928760"/>
-            <a:ext cx="291600" cy="291600"/>
+            <a:ext cx="291240" cy="291240"/>
           </a:xfrm>
           <a:prstGeom prst="ellipse">
             <a:avLst/>
@@ -3233,7 +3233,7 @@
         <p:spPr>
           <a:xfrm>
             <a:off x="2560320" y="4937760"/>
-            <a:ext cx="273240" cy="273240"/>
+            <a:ext cx="272880" cy="272880"/>
           </a:xfrm>
           <a:prstGeom prst="rect">
             <a:avLst/>
@@ -3287,7 +3287,7 @@
         <p:spPr>
           <a:xfrm>
             <a:off x="4480560" y="4937760"/>
-            <a:ext cx="273240" cy="273240"/>
+            <a:ext cx="272880" cy="272880"/>
           </a:xfrm>
           <a:prstGeom prst="rect">
             <a:avLst/>
@@ -3341,7 +3341,7 @@
         <p:spPr>
           <a:xfrm>
             <a:off x="6400800" y="4937760"/>
-            <a:ext cx="273240" cy="273240"/>
+            <a:ext cx="272880" cy="272880"/>
           </a:xfrm>
           <a:prstGeom prst="rect">
             <a:avLst/>
@@ -3542,7 +3542,7 @@
         <p:spPr>
           <a:xfrm>
             <a:off x="1188720" y="4782240"/>
-            <a:ext cx="1096200" cy="121320"/>
+            <a:ext cx="1095840" cy="121320"/>
           </a:xfrm>
           <a:prstGeom prst="rect">
             <a:avLst/>
@@ -3596,7 +3596,7 @@
         <p:spPr>
           <a:xfrm>
             <a:off x="3108960" y="4782240"/>
-            <a:ext cx="1096200" cy="121320"/>
+            <a:ext cx="1095840" cy="121320"/>
           </a:xfrm>
           <a:prstGeom prst="rect">
             <a:avLst/>
@@ -3650,7 +3650,7 @@
         <p:spPr>
           <a:xfrm>
             <a:off x="5029200" y="4782240"/>
-            <a:ext cx="1096200" cy="121320"/>
+            <a:ext cx="1095840" cy="121320"/>
           </a:xfrm>
           <a:prstGeom prst="rect">
             <a:avLst/>
@@ -3704,7 +3704,7 @@
         <p:spPr>
           <a:xfrm>
             <a:off x="137160" y="5330880"/>
-            <a:ext cx="1279080" cy="129240"/>
+            <a:ext cx="1278720" cy="129240"/>
           </a:xfrm>
           <a:prstGeom prst="rect">
             <a:avLst/>
@@ -3731,7 +3731,7 @@
               </a:lnSpc>
             </a:pPr>
             <a:r>
-              <a:rPr b="0" lang="en-US" sz="850" spc="123" strike="noStrike">
+              <a:rPr b="0" lang="en-US" sz="850" spc="120" strike="noStrike">
                 <a:solidFill>
                   <a:srgbClr val="a6abb5"/>
                 </a:solidFill>
@@ -3758,7 +3758,7 @@
         <p:spPr>
           <a:xfrm>
             <a:off x="2057400" y="5330880"/>
-            <a:ext cx="1279080" cy="129240"/>
+            <a:ext cx="1278720" cy="129240"/>
           </a:xfrm>
           <a:prstGeom prst="rect">
             <a:avLst/>
@@ -3785,7 +3785,7 @@
               </a:lnSpc>
             </a:pPr>
             <a:r>
-              <a:rPr b="0" lang="en-US" sz="850" spc="123" strike="noStrike">
+              <a:rPr b="0" lang="en-US" sz="850" spc="120" strike="noStrike">
                 <a:solidFill>
                   <a:srgbClr val="a6abb5"/>
                 </a:solidFill>
@@ -3812,7 +3812,7 @@
         <p:spPr>
           <a:xfrm>
             <a:off x="3977640" y="5330880"/>
-            <a:ext cx="1279080" cy="129240"/>
+            <a:ext cx="1278720" cy="129240"/>
           </a:xfrm>
           <a:prstGeom prst="rect">
             <a:avLst/>
@@ -3839,7 +3839,7 @@
               </a:lnSpc>
             </a:pPr>
             <a:r>
-              <a:rPr b="0" lang="en-US" sz="850" spc="123" strike="noStrike">
+              <a:rPr b="0" lang="en-US" sz="850" spc="120" strike="noStrike">
                 <a:solidFill>
                   <a:srgbClr val="a6abb5"/>
                 </a:solidFill>
@@ -3866,7 +3866,7 @@
         <p:spPr>
           <a:xfrm>
             <a:off x="5897880" y="5330880"/>
-            <a:ext cx="1279080" cy="129240"/>
+            <a:ext cx="1278720" cy="129240"/>
           </a:xfrm>
           <a:prstGeom prst="rect">
             <a:avLst/>
@@ -3893,7 +3893,7 @@
               </a:lnSpc>
             </a:pPr>
             <a:r>
-              <a:rPr b="0" lang="en-US" sz="850" spc="123" strike="noStrike">
+              <a:rPr b="0" lang="en-US" sz="850" spc="120" strike="noStrike">
                 <a:solidFill>
                   <a:srgbClr val="a6abb5"/>
                 </a:solidFill>
@@ -3920,7 +3920,7 @@
         <p:spPr>
           <a:xfrm>
             <a:off x="5440680" y="5550480"/>
-            <a:ext cx="2193480" cy="121320"/>
+            <a:ext cx="2193120" cy="121320"/>
           </a:xfrm>
           <a:prstGeom prst="rect">
             <a:avLst/>
@@ -3974,7 +3974,7 @@
         <p:spPr>
           <a:xfrm>
             <a:off x="8001000" y="1371600"/>
-            <a:ext cx="3619800" cy="3427920"/>
+            <a:ext cx="3619440" cy="3427560"/>
           </a:xfrm>
           <a:prstGeom prst="rect">
             <a:avLst/>
@@ -4030,7 +4030,7 @@
         <p:spPr>
           <a:xfrm>
             <a:off x="8001000" y="1371600"/>
-            <a:ext cx="39960" cy="3427920"/>
+            <a:ext cx="39600" cy="3427560"/>
           </a:xfrm>
           <a:prstGeom prst="rect">
             <a:avLst/>
@@ -4083,7 +4083,7 @@
         <p:spPr>
           <a:xfrm>
             <a:off x="8275320" y="1627560"/>
-            <a:ext cx="3162600" cy="137160"/>
+            <a:ext cx="3162240" cy="137160"/>
           </a:xfrm>
           <a:prstGeom prst="rect">
             <a:avLst/>
@@ -4137,7 +4137,7 @@
         <p:spPr>
           <a:xfrm>
             <a:off x="8275320" y="1938600"/>
-            <a:ext cx="3162600" cy="738360"/>
+            <a:ext cx="3162240" cy="738360"/>
           </a:xfrm>
           <a:prstGeom prst="rect">
             <a:avLst/>
@@ -4191,7 +4191,7 @@
         <p:spPr>
           <a:xfrm>
             <a:off x="8275320" y="2788920"/>
-            <a:ext cx="3071160" cy="617760"/>
+            <a:ext cx="3070800" cy="617760"/>
           </a:xfrm>
           <a:prstGeom prst="rect">
             <a:avLst/>
@@ -4291,7 +4291,7 @@
         <p:spPr>
           <a:xfrm>
             <a:off x="8275320" y="4114800"/>
-            <a:ext cx="3162600" cy="686520"/>
+            <a:ext cx="3162240" cy="686520"/>
           </a:xfrm>
           <a:prstGeom prst="rect">
             <a:avLst/>
@@ -4406,7 +4406,7 @@
         <p:spPr>
           <a:xfrm>
             <a:off x="10527480" y="6291000"/>
-            <a:ext cx="1096200" cy="273240"/>
+            <a:ext cx="1095840" cy="272880"/>
           </a:xfrm>
           <a:prstGeom prst="rect">
             <a:avLst/>
@@ -4451,7 +4451,7 @@
         <p:spPr>
           <a:xfrm>
             <a:off x="1383120" y="6510600"/>
-            <a:ext cx="1932840" cy="103320"/>
+            <a:ext cx="1932480" cy="103320"/>
           </a:xfrm>
           <a:prstGeom prst="rect">
             <a:avLst/>
@@ -4554,7 +4554,7 @@
         <p:spPr>
           <a:xfrm>
             <a:off x="1524600" y="320040"/>
-            <a:ext cx="3350160" cy="333360"/>
+            <a:ext cx="3349800" cy="333360"/>
           </a:xfrm>
           <a:prstGeom prst="rect">
             <a:avLst/>
@@ -4608,7 +4608,7 @@
         <p:spPr>
           <a:xfrm>
             <a:off x="11114280" y="320040"/>
-            <a:ext cx="447120" cy="303120"/>
+            <a:ext cx="446760" cy="303120"/>
           </a:xfrm>
           <a:prstGeom prst="rect">
             <a:avLst/>
@@ -4662,7 +4662,7 @@
         <p:spPr>
           <a:xfrm>
             <a:off x="685800" y="713160"/>
-            <a:ext cx="10971720" cy="12600"/>
+            <a:ext cx="10971360" cy="12240"/>
           </a:xfrm>
           <a:prstGeom prst="rect">
             <a:avLst/>
@@ -4715,7 +4715,7 @@
         <p:spPr>
           <a:xfrm>
             <a:off x="685800" y="822960"/>
-            <a:ext cx="10971720" cy="12600"/>
+            <a:ext cx="10971360" cy="12240"/>
           </a:xfrm>
           <a:prstGeom prst="rect">
             <a:avLst/>
@@ -4768,7 +4768,7 @@
         <p:spPr>
           <a:xfrm>
             <a:off x="3396960" y="1965960"/>
-            <a:ext cx="5549400" cy="546840"/>
+            <a:ext cx="5549040" cy="546840"/>
           </a:xfrm>
           <a:prstGeom prst="rect">
             <a:avLst/>
@@ -4824,7 +4824,7 @@
         <p:spPr>
           <a:xfrm>
             <a:off x="685800" y="2743200"/>
-            <a:ext cx="10514520" cy="577080"/>
+            <a:ext cx="10514160" cy="577080"/>
           </a:xfrm>
           <a:prstGeom prst="rect">
             <a:avLst/>
@@ -4878,7 +4878,7 @@
         <p:spPr>
           <a:xfrm>
             <a:off x="4527000" y="6400800"/>
-            <a:ext cx="3197880" cy="242280"/>
+            <a:ext cx="3197520" cy="242280"/>
           </a:xfrm>
           <a:prstGeom prst="rect">
             <a:avLst/>
@@ -4932,7 +4932,7 @@
         <p:spPr>
           <a:xfrm>
             <a:off x="1113480" y="6510600"/>
-            <a:ext cx="2472120" cy="103320"/>
+            <a:ext cx="2471760" cy="103320"/>
           </a:xfrm>
           <a:prstGeom prst="rect">
             <a:avLst/>
@@ -5028,7 +5028,7 @@
         <p:spPr>
           <a:xfrm>
             <a:off x="567000" y="164520"/>
-            <a:ext cx="3199320" cy="129240"/>
+            <a:ext cx="3198960" cy="129240"/>
           </a:xfrm>
           <a:prstGeom prst="rect">
             <a:avLst/>
@@ -5082,7 +5082,7 @@
         <p:spPr>
           <a:xfrm>
             <a:off x="10716840" y="164520"/>
-            <a:ext cx="684720" cy="129240"/>
+            <a:ext cx="684360" cy="129240"/>
           </a:xfrm>
           <a:prstGeom prst="rect">
             <a:avLst/>
@@ -5136,7 +5136,7 @@
         <p:spPr>
           <a:xfrm>
             <a:off x="567000" y="640080"/>
-            <a:ext cx="10514520" cy="357840"/>
+            <a:ext cx="10514160" cy="357840"/>
           </a:xfrm>
           <a:prstGeom prst="rect">
             <a:avLst/>
@@ -5190,7 +5190,7 @@
         <p:spPr>
           <a:xfrm>
             <a:off x="567000" y="1078920"/>
-            <a:ext cx="10514520" cy="328680"/>
+            <a:ext cx="10514160" cy="328680"/>
           </a:xfrm>
           <a:prstGeom prst="rect">
             <a:avLst/>
@@ -5244,7 +5244,7 @@
         <p:spPr>
           <a:xfrm>
             <a:off x="567000" y="457200"/>
-            <a:ext cx="10834560" cy="9720"/>
+            <a:ext cx="10834200" cy="9360"/>
           </a:xfrm>
           <a:prstGeom prst="rect">
             <a:avLst/>
@@ -5300,7 +5300,7 @@
         <p:spPr>
           <a:xfrm>
             <a:off x="567000" y="1572840"/>
-            <a:ext cx="5256720" cy="1416240"/>
+            <a:ext cx="5256360" cy="1415880"/>
           </a:xfrm>
           <a:prstGeom prst="roundRect">
             <a:avLst>
@@ -5358,7 +5358,7 @@
         <p:spPr>
           <a:xfrm>
             <a:off x="567000" y="1572840"/>
-            <a:ext cx="49320" cy="1416240"/>
+            <a:ext cx="48960" cy="1415880"/>
           </a:xfrm>
           <a:prstGeom prst="rect">
             <a:avLst/>
@@ -5414,7 +5414,7 @@
         <p:spPr>
           <a:xfrm>
             <a:off x="713160" y="1700640"/>
-            <a:ext cx="4982400" cy="190080"/>
+            <a:ext cx="4982040" cy="190080"/>
           </a:xfrm>
           <a:prstGeom prst="rect">
             <a:avLst/>
@@ -5468,7 +5468,7 @@
         <p:spPr>
           <a:xfrm>
             <a:off x="713160" y="2011680"/>
-            <a:ext cx="4982400" cy="292680"/>
+            <a:ext cx="4982040" cy="292680"/>
           </a:xfrm>
           <a:prstGeom prst="rect">
             <a:avLst/>
@@ -5522,7 +5522,7 @@
         <p:spPr>
           <a:xfrm>
             <a:off x="713160" y="2770560"/>
-            <a:ext cx="4982400" cy="127440"/>
+            <a:ext cx="4982040" cy="127440"/>
           </a:xfrm>
           <a:prstGeom prst="rect">
             <a:avLst/>
@@ -5578,7 +5578,7 @@
         <p:spPr>
           <a:xfrm>
             <a:off x="6144840" y="1572840"/>
-            <a:ext cx="5256720" cy="1416240"/>
+            <a:ext cx="5256360" cy="1415880"/>
           </a:xfrm>
           <a:prstGeom prst="roundRect">
             <a:avLst>
@@ -5636,7 +5636,7 @@
         <p:spPr>
           <a:xfrm>
             <a:off x="6144840" y="1572840"/>
-            <a:ext cx="49320" cy="1416240"/>
+            <a:ext cx="48960" cy="1415880"/>
           </a:xfrm>
           <a:prstGeom prst="rect">
             <a:avLst/>
@@ -5692,7 +5692,7 @@
         <p:spPr>
           <a:xfrm>
             <a:off x="6291000" y="1700640"/>
-            <a:ext cx="4982400" cy="190080"/>
+            <a:ext cx="4982040" cy="190080"/>
           </a:xfrm>
           <a:prstGeom prst="rect">
             <a:avLst/>
@@ -5746,7 +5746,7 @@
         <p:spPr>
           <a:xfrm>
             <a:off x="6291000" y="2011680"/>
-            <a:ext cx="4982400" cy="439200"/>
+            <a:ext cx="4982040" cy="439200"/>
           </a:xfrm>
           <a:prstGeom prst="rect">
             <a:avLst/>
@@ -5800,7 +5800,7 @@
         <p:spPr>
           <a:xfrm>
             <a:off x="6291000" y="2770560"/>
-            <a:ext cx="4982400" cy="127440"/>
+            <a:ext cx="4982040" cy="127440"/>
           </a:xfrm>
           <a:prstGeom prst="rect">
             <a:avLst/>
@@ -5856,7 +5856,7 @@
         <p:spPr>
           <a:xfrm>
             <a:off x="567000" y="3218760"/>
-            <a:ext cx="5256720" cy="1416240"/>
+            <a:ext cx="5256360" cy="1415880"/>
           </a:xfrm>
           <a:prstGeom prst="roundRect">
             <a:avLst>
@@ -5914,7 +5914,7 @@
         <p:spPr>
           <a:xfrm>
             <a:off x="567000" y="3218760"/>
-            <a:ext cx="49320" cy="1416240"/>
+            <a:ext cx="48960" cy="1415880"/>
           </a:xfrm>
           <a:prstGeom prst="rect">
             <a:avLst/>
@@ -5970,7 +5970,7 @@
         <p:spPr>
           <a:xfrm>
             <a:off x="713160" y="3346560"/>
-            <a:ext cx="4982400" cy="190080"/>
+            <a:ext cx="4982040" cy="190080"/>
           </a:xfrm>
           <a:prstGeom prst="rect">
             <a:avLst/>
@@ -6024,7 +6024,7 @@
         <p:spPr>
           <a:xfrm>
             <a:off x="713160" y="3657600"/>
-            <a:ext cx="4982400" cy="292680"/>
+            <a:ext cx="4982040" cy="292680"/>
           </a:xfrm>
           <a:prstGeom prst="rect">
             <a:avLst/>
@@ -6078,7 +6078,7 @@
         <p:spPr>
           <a:xfrm>
             <a:off x="713160" y="4416480"/>
-            <a:ext cx="4982400" cy="127440"/>
+            <a:ext cx="4982040" cy="127440"/>
           </a:xfrm>
           <a:prstGeom prst="rect">
             <a:avLst/>
@@ -6134,7 +6134,7 @@
         <p:spPr>
           <a:xfrm>
             <a:off x="6144840" y="3218760"/>
-            <a:ext cx="5256720" cy="1416240"/>
+            <a:ext cx="5256360" cy="1415880"/>
           </a:xfrm>
           <a:prstGeom prst="roundRect">
             <a:avLst>
@@ -6192,7 +6192,7 @@
         <p:spPr>
           <a:xfrm>
             <a:off x="6144840" y="3218760"/>
-            <a:ext cx="49320" cy="1416240"/>
+            <a:ext cx="48960" cy="1415880"/>
           </a:xfrm>
           <a:prstGeom prst="rect">
             <a:avLst/>
@@ -6248,7 +6248,7 @@
         <p:spPr>
           <a:xfrm>
             <a:off x="6291000" y="3346560"/>
-            <a:ext cx="4982400" cy="190080"/>
+            <a:ext cx="4982040" cy="190080"/>
           </a:xfrm>
           <a:prstGeom prst="rect">
             <a:avLst/>
@@ -6302,7 +6302,7 @@
         <p:spPr>
           <a:xfrm>
             <a:off x="6291000" y="3657600"/>
-            <a:ext cx="4982400" cy="439200"/>
+            <a:ext cx="4982040" cy="439200"/>
           </a:xfrm>
           <a:prstGeom prst="rect">
             <a:avLst/>
@@ -6356,7 +6356,7 @@
         <p:spPr>
           <a:xfrm>
             <a:off x="6291000" y="4416480"/>
-            <a:ext cx="4982400" cy="127440"/>
+            <a:ext cx="4982040" cy="127440"/>
           </a:xfrm>
           <a:prstGeom prst="rect">
             <a:avLst/>
@@ -6412,7 +6412,7 @@
         <p:spPr>
           <a:xfrm>
             <a:off x="567000" y="4956120"/>
-            <a:ext cx="10834560" cy="894960"/>
+            <a:ext cx="10834200" cy="894600"/>
           </a:xfrm>
           <a:prstGeom prst="roundRect">
             <a:avLst>
@@ -6470,7 +6470,7 @@
         <p:spPr>
           <a:xfrm>
             <a:off x="804600" y="5139000"/>
-            <a:ext cx="1873440" cy="130680"/>
+            <a:ext cx="1873080" cy="130680"/>
           </a:xfrm>
           <a:prstGeom prst="rect">
             <a:avLst/>
@@ -6524,7 +6524,7 @@
         <p:spPr>
           <a:xfrm>
             <a:off x="2670120" y="5083920"/>
-            <a:ext cx="8365680" cy="470520"/>
+            <a:ext cx="8365320" cy="470520"/>
           </a:xfrm>
           <a:prstGeom prst="rect">
             <a:avLst/>
@@ -6578,7 +6578,7 @@
         <p:spPr>
           <a:xfrm>
             <a:off x="8458200" y="5596200"/>
-            <a:ext cx="2577600" cy="127440"/>
+            <a:ext cx="2577240" cy="127440"/>
           </a:xfrm>
           <a:prstGeom prst="rect">
             <a:avLst/>
@@ -6634,7 +6634,7 @@
         <p:spPr>
           <a:xfrm>
             <a:off x="567000" y="6236280"/>
-            <a:ext cx="10834560" cy="9720"/>
+            <a:ext cx="10834200" cy="9360"/>
           </a:xfrm>
           <a:prstGeom prst="rect">
             <a:avLst/>
@@ -6690,7 +6690,7 @@
         <p:spPr>
           <a:xfrm>
             <a:off x="4069080" y="6355080"/>
-            <a:ext cx="3656520" cy="109440"/>
+            <a:ext cx="3656160" cy="109440"/>
           </a:xfrm>
           <a:prstGeom prst="rect">
             <a:avLst/>
@@ -6744,7 +6744,7 @@
         <p:spPr>
           <a:xfrm>
             <a:off x="11045880" y="6355080"/>
-            <a:ext cx="273240" cy="129240"/>
+            <a:ext cx="272880" cy="129240"/>
           </a:xfrm>
           <a:prstGeom prst="rect">
             <a:avLst/>
@@ -6798,7 +6798,7 @@
         <p:spPr>
           <a:xfrm>
             <a:off x="1202400" y="6510600"/>
-            <a:ext cx="2293920" cy="103320"/>
+            <a:ext cx="2293560" cy="103320"/>
           </a:xfrm>
           <a:prstGeom prst="rect">
             <a:avLst/>
@@ -6894,7 +6894,7 @@
         <p:spPr>
           <a:xfrm>
             <a:off x="567000" y="164520"/>
-            <a:ext cx="3199320" cy="129240"/>
+            <a:ext cx="3198960" cy="129240"/>
           </a:xfrm>
           <a:prstGeom prst="rect">
             <a:avLst/>
@@ -6948,7 +6948,7 @@
         <p:spPr>
           <a:xfrm>
             <a:off x="10716840" y="164520"/>
-            <a:ext cx="684720" cy="129240"/>
+            <a:ext cx="684360" cy="129240"/>
           </a:xfrm>
           <a:prstGeom prst="rect">
             <a:avLst/>
@@ -7002,7 +7002,7 @@
         <p:spPr>
           <a:xfrm>
             <a:off x="567000" y="640080"/>
-            <a:ext cx="10514520" cy="357840"/>
+            <a:ext cx="10514160" cy="357840"/>
           </a:xfrm>
           <a:prstGeom prst="rect">
             <a:avLst/>
@@ -7056,7 +7056,7 @@
         <p:spPr>
           <a:xfrm>
             <a:off x="567000" y="1078920"/>
-            <a:ext cx="10514520" cy="170280"/>
+            <a:ext cx="10514160" cy="170280"/>
           </a:xfrm>
           <a:prstGeom prst="rect">
             <a:avLst/>
@@ -7110,7 +7110,7 @@
         <p:spPr>
           <a:xfrm>
             <a:off x="567000" y="457200"/>
-            <a:ext cx="10834560" cy="9720"/>
+            <a:ext cx="10834200" cy="9360"/>
           </a:xfrm>
           <a:prstGeom prst="rect">
             <a:avLst/>
@@ -7166,7 +7166,7 @@
         <p:spPr>
           <a:xfrm>
             <a:off x="567000" y="1572840"/>
-            <a:ext cx="2540880" cy="1077840"/>
+            <a:ext cx="2540520" cy="1077480"/>
           </a:xfrm>
           <a:prstGeom prst="roundRect">
             <a:avLst>
@@ -7224,7 +7224,7 @@
         <p:spPr>
           <a:xfrm>
             <a:off x="676800" y="1664280"/>
-            <a:ext cx="383040" cy="152280"/>
+            <a:ext cx="382680" cy="152280"/>
           </a:xfrm>
           <a:prstGeom prst="rect">
             <a:avLst/>
@@ -7278,7 +7278,7 @@
         <p:spPr>
           <a:xfrm>
             <a:off x="1097280" y="1664280"/>
-            <a:ext cx="1882440" cy="178200"/>
+            <a:ext cx="1882080" cy="178200"/>
           </a:xfrm>
           <a:prstGeom prst="rect">
             <a:avLst/>
@@ -7332,7 +7332,7 @@
         <p:spPr>
           <a:xfrm>
             <a:off x="676800" y="2002680"/>
-            <a:ext cx="2321640" cy="274680"/>
+            <a:ext cx="2321280" cy="274680"/>
           </a:xfrm>
           <a:prstGeom prst="rect">
             <a:avLst/>
@@ -7386,7 +7386,7 @@
         <p:spPr>
           <a:xfrm>
             <a:off x="3319200" y="1572840"/>
-            <a:ext cx="2540880" cy="1077840"/>
+            <a:ext cx="2540520" cy="1077480"/>
           </a:xfrm>
           <a:prstGeom prst="roundRect">
             <a:avLst>
@@ -7444,7 +7444,7 @@
         <p:spPr>
           <a:xfrm>
             <a:off x="3429000" y="1664280"/>
-            <a:ext cx="383040" cy="152280"/>
+            <a:ext cx="382680" cy="152280"/>
           </a:xfrm>
           <a:prstGeom prst="rect">
             <a:avLst/>
@@ -7498,7 +7498,7 @@
         <p:spPr>
           <a:xfrm>
             <a:off x="3849480" y="1664280"/>
-            <a:ext cx="1882440" cy="178200"/>
+            <a:ext cx="1882080" cy="178200"/>
           </a:xfrm>
           <a:prstGeom prst="rect">
             <a:avLst/>
@@ -7552,7 +7552,7 @@
         <p:spPr>
           <a:xfrm>
             <a:off x="3429000" y="2002680"/>
-            <a:ext cx="2321640" cy="412200"/>
+            <a:ext cx="2321280" cy="412200"/>
           </a:xfrm>
           <a:prstGeom prst="rect">
             <a:avLst/>
@@ -7606,7 +7606,7 @@
         <p:spPr>
           <a:xfrm>
             <a:off x="6071760" y="1572840"/>
-            <a:ext cx="2540880" cy="1077840"/>
+            <a:ext cx="2540520" cy="1077480"/>
           </a:xfrm>
           <a:prstGeom prst="roundRect">
             <a:avLst>
@@ -7664,7 +7664,7 @@
         <p:spPr>
           <a:xfrm>
             <a:off x="6181200" y="1664280"/>
-            <a:ext cx="383040" cy="152280"/>
+            <a:ext cx="382680" cy="152280"/>
           </a:xfrm>
           <a:prstGeom prst="rect">
             <a:avLst/>
@@ -7718,7 +7718,7 @@
         <p:spPr>
           <a:xfrm>
             <a:off x="6602040" y="1664280"/>
-            <a:ext cx="1882440" cy="356760"/>
+            <a:ext cx="1882080" cy="356760"/>
           </a:xfrm>
           <a:prstGeom prst="rect">
             <a:avLst/>
@@ -7772,7 +7772,7 @@
         <p:spPr>
           <a:xfrm>
             <a:off x="6181200" y="2002680"/>
-            <a:ext cx="2321640" cy="412200"/>
+            <a:ext cx="2321280" cy="412200"/>
           </a:xfrm>
           <a:prstGeom prst="rect">
             <a:avLst/>
@@ -7826,7 +7826,7 @@
         <p:spPr>
           <a:xfrm>
             <a:off x="8823960" y="1572840"/>
-            <a:ext cx="2540880" cy="1077840"/>
+            <a:ext cx="2540520" cy="1077480"/>
           </a:xfrm>
           <a:prstGeom prst="roundRect">
             <a:avLst>
@@ -7884,7 +7884,7 @@
         <p:spPr>
           <a:xfrm>
             <a:off x="8933760" y="1664280"/>
-            <a:ext cx="383040" cy="152280"/>
+            <a:ext cx="382680" cy="152280"/>
           </a:xfrm>
           <a:prstGeom prst="rect">
             <a:avLst/>
@@ -7938,7 +7938,7 @@
         <p:spPr>
           <a:xfrm>
             <a:off x="9354240" y="1664280"/>
-            <a:ext cx="1882440" cy="178200"/>
+            <a:ext cx="1882080" cy="178200"/>
           </a:xfrm>
           <a:prstGeom prst="rect">
             <a:avLst/>
@@ -7992,7 +7992,7 @@
         <p:spPr>
           <a:xfrm>
             <a:off x="8933760" y="2002680"/>
-            <a:ext cx="2321640" cy="412200"/>
+            <a:ext cx="2321280" cy="412200"/>
           </a:xfrm>
           <a:prstGeom prst="rect">
             <a:avLst/>
@@ -8046,7 +8046,7 @@
         <p:spPr>
           <a:xfrm>
             <a:off x="567000" y="2907720"/>
-            <a:ext cx="5348160" cy="2330640"/>
+            <a:ext cx="5347800" cy="2330280"/>
           </a:xfrm>
           <a:prstGeom prst="roundRect">
             <a:avLst>
@@ -8104,7 +8104,7 @@
         <p:spPr>
           <a:xfrm>
             <a:off x="768240" y="3090600"/>
-            <a:ext cx="4936680" cy="133560"/>
+            <a:ext cx="4936320" cy="133560"/>
           </a:xfrm>
           <a:prstGeom prst="rect">
             <a:avLst/>
@@ -8158,7 +8158,7 @@
         <p:spPr>
           <a:xfrm>
             <a:off x="768240" y="3401640"/>
-            <a:ext cx="4863600" cy="1088280"/>
+            <a:ext cx="4863240" cy="1088280"/>
           </a:xfrm>
           <a:prstGeom prst="rect">
             <a:avLst/>
@@ -8248,7 +8248,7 @@
         <p:spPr>
           <a:xfrm>
             <a:off x="768240" y="4754880"/>
-            <a:ext cx="2422080" cy="133560"/>
+            <a:ext cx="2421720" cy="133560"/>
           </a:xfrm>
           <a:prstGeom prst="rect">
             <a:avLst/>
@@ -8304,7 +8304,7 @@
         <p:spPr>
           <a:xfrm>
             <a:off x="3127320" y="4754880"/>
-            <a:ext cx="2422080" cy="133560"/>
+            <a:ext cx="2421720" cy="133560"/>
           </a:xfrm>
           <a:prstGeom prst="rect">
             <a:avLst/>
@@ -8360,7 +8360,7 @@
         <p:spPr>
           <a:xfrm>
             <a:off x="6144840" y="2907720"/>
-            <a:ext cx="5256720" cy="2330640"/>
+            <a:ext cx="5256360" cy="2330280"/>
           </a:xfrm>
           <a:prstGeom prst="roundRect">
             <a:avLst>
@@ -8418,7 +8418,7 @@
         <p:spPr>
           <a:xfrm>
             <a:off x="6346080" y="3090600"/>
-            <a:ext cx="4753800" cy="133560"/>
+            <a:ext cx="4753440" cy="133560"/>
           </a:xfrm>
           <a:prstGeom prst="rect">
             <a:avLst/>
@@ -8472,7 +8472,7 @@
         <p:spPr>
           <a:xfrm>
             <a:off x="6346080" y="3401640"/>
-            <a:ext cx="4717080" cy="1032840"/>
+            <a:ext cx="4716720" cy="1032840"/>
           </a:xfrm>
           <a:prstGeom prst="rect">
             <a:avLst/>
@@ -8565,7 +8565,7 @@
         <p:spPr>
           <a:xfrm>
             <a:off x="6346080" y="4754880"/>
-            <a:ext cx="4388040" cy="133560"/>
+            <a:ext cx="4387680" cy="133560"/>
           </a:xfrm>
           <a:prstGeom prst="rect">
             <a:avLst/>
@@ -8621,7 +8621,7 @@
         <p:spPr>
           <a:xfrm>
             <a:off x="567000" y="5449680"/>
-            <a:ext cx="10834560" cy="529200"/>
+            <a:ext cx="10834200" cy="528840"/>
           </a:xfrm>
           <a:prstGeom prst="roundRect">
             <a:avLst>
@@ -8679,7 +8679,7 @@
         <p:spPr>
           <a:xfrm>
             <a:off x="768240" y="5577840"/>
-            <a:ext cx="10377360" cy="298440"/>
+            <a:ext cx="10377000" cy="298440"/>
           </a:xfrm>
           <a:prstGeom prst="rect">
             <a:avLst/>
@@ -8851,7 +8851,7 @@
         <p:spPr>
           <a:xfrm>
             <a:off x="567000" y="164520"/>
-            <a:ext cx="2193480" cy="163440"/>
+            <a:ext cx="2193120" cy="163080"/>
           </a:xfrm>
           <a:prstGeom prst="rect">
             <a:avLst/>
@@ -8908,7 +8908,7 @@
         <p:spPr>
           <a:xfrm>
             <a:off x="10927080" y="164520"/>
-            <a:ext cx="639000" cy="163440"/>
+            <a:ext cx="638640" cy="163080"/>
           </a:xfrm>
           <a:prstGeom prst="rect">
             <a:avLst/>
@@ -8965,7 +8965,7 @@
         <p:spPr>
           <a:xfrm>
             <a:off x="567000" y="658440"/>
-            <a:ext cx="10971720" cy="383040"/>
+            <a:ext cx="10971360" cy="382680"/>
           </a:xfrm>
           <a:prstGeom prst="rect">
             <a:avLst/>
@@ -9024,7 +9024,7 @@
         <p:spPr>
           <a:xfrm>
             <a:off x="567000" y="1115640"/>
-            <a:ext cx="10971720" cy="346320"/>
+            <a:ext cx="10971360" cy="345960"/>
           </a:xfrm>
           <a:prstGeom prst="rect">
             <a:avLst/>
@@ -9081,7 +9081,7 @@
         <p:spPr>
           <a:xfrm>
             <a:off x="594360" y="1591200"/>
-            <a:ext cx="1187640" cy="163440"/>
+            <a:ext cx="1187280" cy="163080"/>
           </a:xfrm>
           <a:prstGeom prst="rect">
             <a:avLst/>
@@ -9138,7 +9138,7 @@
         <p:spPr>
           <a:xfrm>
             <a:off x="1965960" y="1517760"/>
-            <a:ext cx="2147760" cy="346320"/>
+            <a:ext cx="2147400" cy="345960"/>
           </a:xfrm>
           <a:prstGeom prst="roundRect">
             <a:avLst>
@@ -9190,7 +9190,7 @@
         <p:spPr>
           <a:xfrm>
             <a:off x="2039040" y="1609200"/>
-            <a:ext cx="2001600" cy="127080"/>
+            <a:ext cx="2001240" cy="126720"/>
           </a:xfrm>
           <a:prstGeom prst="rect">
             <a:avLst/>
@@ -9247,7 +9247,7 @@
         <p:spPr>
           <a:xfrm>
             <a:off x="4233600" y="1517760"/>
-            <a:ext cx="1507680" cy="346320"/>
+            <a:ext cx="1507320" cy="345960"/>
           </a:xfrm>
           <a:prstGeom prst="roundRect">
             <a:avLst>
@@ -9299,7 +9299,7 @@
         <p:spPr>
           <a:xfrm>
             <a:off x="4306680" y="1609200"/>
-            <a:ext cx="1361520" cy="127080"/>
+            <a:ext cx="1361160" cy="126720"/>
           </a:xfrm>
           <a:prstGeom prst="rect">
             <a:avLst/>
@@ -9356,7 +9356,7 @@
         <p:spPr>
           <a:xfrm>
             <a:off x="5861160" y="1517760"/>
-            <a:ext cx="1571760" cy="346320"/>
+            <a:ext cx="1571400" cy="345960"/>
           </a:xfrm>
           <a:prstGeom prst="roundRect">
             <a:avLst>
@@ -9408,7 +9408,7 @@
         <p:spPr>
           <a:xfrm>
             <a:off x="5934600" y="1609200"/>
-            <a:ext cx="1425240" cy="127080"/>
+            <a:ext cx="1424880" cy="126720"/>
           </a:xfrm>
           <a:prstGeom prst="rect">
             <a:avLst/>
@@ -9465,7 +9465,7 @@
         <p:spPr>
           <a:xfrm>
             <a:off x="7552800" y="1517760"/>
-            <a:ext cx="1416240" cy="346320"/>
+            <a:ext cx="1415880" cy="345960"/>
           </a:xfrm>
           <a:prstGeom prst="roundRect">
             <a:avLst>
@@ -9517,7 +9517,7 @@
         <p:spPr>
           <a:xfrm>
             <a:off x="7626240" y="1609200"/>
-            <a:ext cx="1270080" cy="127080"/>
+            <a:ext cx="1269720" cy="126720"/>
           </a:xfrm>
           <a:prstGeom prst="rect">
             <a:avLst/>
@@ -9574,7 +9574,7 @@
         <p:spPr>
           <a:xfrm>
             <a:off x="685800" y="2514600"/>
-            <a:ext cx="1736280" cy="1233360"/>
+            <a:ext cx="1735920" cy="1233000"/>
           </a:xfrm>
           <a:prstGeom prst="roundRect">
             <a:avLst>
@@ -9626,7 +9626,7 @@
         <p:spPr>
           <a:xfrm>
             <a:off x="795600" y="2715840"/>
-            <a:ext cx="1516680" cy="309960"/>
+            <a:ext cx="1516320" cy="309600"/>
           </a:xfrm>
           <a:prstGeom prst="rect">
             <a:avLst/>
@@ -9683,7 +9683,7 @@
         <p:spPr>
           <a:xfrm>
             <a:off x="795600" y="3108960"/>
-            <a:ext cx="1516680" cy="383040"/>
+            <a:ext cx="1516320" cy="382680"/>
           </a:xfrm>
           <a:prstGeom prst="rect">
             <a:avLst/>
@@ -9783,7 +9783,7 @@
         <p:spPr>
           <a:xfrm>
             <a:off x="2880360" y="2514600"/>
-            <a:ext cx="1736280" cy="1233360"/>
+            <a:ext cx="1735920" cy="1233000"/>
           </a:xfrm>
           <a:prstGeom prst="roundRect">
             <a:avLst>
@@ -9835,7 +9835,7 @@
         <p:spPr>
           <a:xfrm>
             <a:off x="2990160" y="2715840"/>
-            <a:ext cx="1516680" cy="309960"/>
+            <a:ext cx="1516320" cy="309600"/>
           </a:xfrm>
           <a:prstGeom prst="rect">
             <a:avLst/>
@@ -9892,7 +9892,7 @@
         <p:spPr>
           <a:xfrm>
             <a:off x="2990160" y="3108960"/>
-            <a:ext cx="1516680" cy="383040"/>
+            <a:ext cx="1516320" cy="382680"/>
           </a:xfrm>
           <a:prstGeom prst="rect">
             <a:avLst/>
@@ -9992,7 +9992,7 @@
         <p:spPr>
           <a:xfrm>
             <a:off x="5166360" y="2514600"/>
-            <a:ext cx="1736280" cy="1233360"/>
+            <a:ext cx="1735920" cy="1233000"/>
           </a:xfrm>
           <a:prstGeom prst="roundRect">
             <a:avLst>
@@ -10044,7 +10044,7 @@
         <p:spPr>
           <a:xfrm>
             <a:off x="5276160" y="2715840"/>
-            <a:ext cx="1516680" cy="309960"/>
+            <a:ext cx="1516320" cy="309600"/>
           </a:xfrm>
           <a:prstGeom prst="rect">
             <a:avLst/>
@@ -10101,7 +10101,7 @@
         <p:spPr>
           <a:xfrm>
             <a:off x="5276160" y="3108960"/>
-            <a:ext cx="1516680" cy="383040"/>
+            <a:ext cx="1516320" cy="382680"/>
           </a:xfrm>
           <a:prstGeom prst="rect">
             <a:avLst/>
@@ -10201,7 +10201,7 @@
         <p:spPr>
           <a:xfrm>
             <a:off x="7452360" y="2514600"/>
-            <a:ext cx="1736280" cy="1233360"/>
+            <a:ext cx="1735920" cy="1233000"/>
           </a:xfrm>
           <a:prstGeom prst="roundRect">
             <a:avLst>
@@ -10253,7 +10253,7 @@
         <p:spPr>
           <a:xfrm>
             <a:off x="7562160" y="2715840"/>
-            <a:ext cx="1516680" cy="309960"/>
+            <a:ext cx="1516320" cy="309600"/>
           </a:xfrm>
           <a:prstGeom prst="rect">
             <a:avLst/>
@@ -10310,7 +10310,7 @@
         <p:spPr>
           <a:xfrm>
             <a:off x="7562160" y="3108960"/>
-            <a:ext cx="1516680" cy="383040"/>
+            <a:ext cx="1516320" cy="382680"/>
           </a:xfrm>
           <a:prstGeom prst="rect">
             <a:avLst/>
@@ -10410,7 +10410,7 @@
         <p:spPr>
           <a:xfrm>
             <a:off x="9646920" y="2514600"/>
-            <a:ext cx="1736280" cy="1233360"/>
+            <a:ext cx="1735920" cy="1233000"/>
           </a:xfrm>
           <a:prstGeom prst="roundRect">
             <a:avLst>
@@ -10462,7 +10462,7 @@
         <p:spPr>
           <a:xfrm>
             <a:off x="9756720" y="2715840"/>
-            <a:ext cx="1516680" cy="309960"/>
+            <a:ext cx="1516320" cy="309600"/>
           </a:xfrm>
           <a:prstGeom prst="rect">
             <a:avLst/>
@@ -10519,7 +10519,7 @@
         <p:spPr>
           <a:xfrm>
             <a:off x="9756720" y="3108960"/>
-            <a:ext cx="1516680" cy="383040"/>
+            <a:ext cx="1516320" cy="382680"/>
           </a:xfrm>
           <a:prstGeom prst="rect">
             <a:avLst/>
@@ -10576,7 +10576,7 @@
         <p:spPr>
           <a:xfrm>
             <a:off x="2423160" y="4316040"/>
-            <a:ext cx="7359840" cy="1114560"/>
+            <a:ext cx="7359480" cy="1114200"/>
           </a:xfrm>
           <a:prstGeom prst="roundRect">
             <a:avLst>
@@ -10628,7 +10628,7 @@
         <p:spPr>
           <a:xfrm>
             <a:off x="2651760" y="4553640"/>
-            <a:ext cx="2284920" cy="419400"/>
+            <a:ext cx="2284560" cy="419040"/>
           </a:xfrm>
           <a:prstGeom prst="rect">
             <a:avLst/>
@@ -10685,7 +10685,7 @@
         <p:spPr>
           <a:xfrm>
             <a:off x="2651760" y="5010840"/>
-            <a:ext cx="5119560" cy="273240"/>
+            <a:ext cx="5119200" cy="272880"/>
           </a:xfrm>
           <a:prstGeom prst="rect">
             <a:avLst/>
@@ -10742,7 +10742,7 @@
         <p:spPr>
           <a:xfrm>
             <a:off x="8028360" y="4645080"/>
-            <a:ext cx="639000" cy="163440"/>
+            <a:ext cx="638640" cy="163080"/>
           </a:xfrm>
           <a:prstGeom prst="rect">
             <a:avLst/>
@@ -10833,7 +10833,7 @@
         <p:spPr>
           <a:xfrm>
             <a:off x="8796600" y="4645080"/>
-            <a:ext cx="639000" cy="163440"/>
+            <a:ext cx="638640" cy="163080"/>
           </a:xfrm>
           <a:prstGeom prst="rect">
             <a:avLst/>
@@ -10881,7 +10881,7 @@
         <p:spPr>
           <a:xfrm>
             <a:off x="749880" y="5760720"/>
-            <a:ext cx="10651680" cy="383040"/>
+            <a:ext cx="10651320" cy="382680"/>
           </a:xfrm>
           <a:prstGeom prst="rect">
             <a:avLst/>
@@ -10942,7 +10942,7 @@
         <p:spPr>
           <a:xfrm>
             <a:off x="11064240" y="6537960"/>
-            <a:ext cx="501840" cy="163440"/>
+            <a:ext cx="501480" cy="163080"/>
           </a:xfrm>
           <a:prstGeom prst="rect">
             <a:avLst/>
@@ -11108,7 +11108,7 @@
         <p:spPr>
           <a:xfrm>
             <a:off x="7818120" y="4462200"/>
-            <a:ext cx="1964880" cy="867600"/>
+            <a:ext cx="1964520" cy="867240"/>
           </a:xfrm>
           <a:prstGeom prst="rect">
             <a:avLst/>
@@ -11161,7 +11161,7 @@
         <p:spPr>
           <a:xfrm>
             <a:off x="8001000" y="4617720"/>
-            <a:ext cx="776160" cy="203400"/>
+            <a:ext cx="775800" cy="203400"/>
           </a:xfrm>
           <a:prstGeom prst="rect">
             <a:avLst/>
@@ -11215,7 +11215,7 @@
         <p:spPr>
           <a:xfrm>
             <a:off x="8778240" y="4617720"/>
-            <a:ext cx="821880" cy="203400"/>
+            <a:ext cx="821520" cy="203400"/>
           </a:xfrm>
           <a:prstGeom prst="rect">
             <a:avLst/>
@@ -11269,7 +11269,7 @@
         <p:spPr>
           <a:xfrm>
             <a:off x="8321040" y="4873680"/>
-            <a:ext cx="108720" cy="218520"/>
+            <a:ext cx="108360" cy="218160"/>
           </a:xfrm>
           <a:prstGeom prst="downArrow">
             <a:avLst>
@@ -11324,8 +11324,8 @@
         </p:nvSpPr>
         <p:spPr>
           <a:xfrm rot="10800000">
-            <a:off x="9099360" y="4874760"/>
-            <a:ext cx="108720" cy="218520"/>
+            <a:off x="9099720" y="4875120"/>
+            <a:ext cx="108360" cy="218160"/>
           </a:xfrm>
           <a:prstGeom prst="downArrow">
             <a:avLst>
@@ -11381,7 +11381,7 @@
         <p:spPr>
           <a:xfrm>
             <a:off x="1189440" y="6510600"/>
-            <a:ext cx="2319840" cy="103320"/>
+            <a:ext cx="2319480" cy="103320"/>
           </a:xfrm>
           <a:prstGeom prst="rect">
             <a:avLst/>
@@ -11477,7 +11477,7 @@
         <p:spPr>
           <a:xfrm>
             <a:off x="567000" y="164520"/>
-            <a:ext cx="2193480" cy="163440"/>
+            <a:ext cx="2193120" cy="163080"/>
           </a:xfrm>
           <a:prstGeom prst="rect">
             <a:avLst/>
@@ -11534,7 +11534,7 @@
         <p:spPr>
           <a:xfrm>
             <a:off x="10927080" y="164520"/>
-            <a:ext cx="639000" cy="163440"/>
+            <a:ext cx="638640" cy="163080"/>
           </a:xfrm>
           <a:prstGeom prst="rect">
             <a:avLst/>
@@ -11591,7 +11591,7 @@
         <p:spPr>
           <a:xfrm>
             <a:off x="567000" y="658440"/>
-            <a:ext cx="10971720" cy="383040"/>
+            <a:ext cx="10971360" cy="382680"/>
           </a:xfrm>
           <a:prstGeom prst="rect">
             <a:avLst/>
@@ -11650,7 +11650,7 @@
         <p:spPr>
           <a:xfrm>
             <a:off x="567000" y="1115640"/>
-            <a:ext cx="10971720" cy="346320"/>
+            <a:ext cx="10971360" cy="345960"/>
           </a:xfrm>
           <a:prstGeom prst="rect">
             <a:avLst/>
@@ -11707,7 +11707,7 @@
         <p:spPr>
           <a:xfrm>
             <a:off x="640080" y="1691640"/>
-            <a:ext cx="3153600" cy="1260720"/>
+            <a:ext cx="3153240" cy="1260360"/>
           </a:xfrm>
           <a:prstGeom prst="roundRect">
             <a:avLst>
@@ -11759,7 +11759,7 @@
         <p:spPr>
           <a:xfrm>
             <a:off x="640080" y="1691640"/>
-            <a:ext cx="49320" cy="1260720"/>
+            <a:ext cx="48960" cy="1260360"/>
           </a:xfrm>
           <a:prstGeom prst="rect">
             <a:avLst/>
@@ -11809,7 +11809,7 @@
         <p:spPr>
           <a:xfrm>
             <a:off x="804600" y="1810440"/>
-            <a:ext cx="2897640" cy="254880"/>
+            <a:ext cx="2897280" cy="254520"/>
           </a:xfrm>
           <a:prstGeom prst="rect">
             <a:avLst/>
@@ -11866,7 +11866,7 @@
         <p:spPr>
           <a:xfrm>
             <a:off x="804600" y="2121480"/>
-            <a:ext cx="2879280" cy="730440"/>
+            <a:ext cx="2878920" cy="730080"/>
           </a:xfrm>
           <a:prstGeom prst="rect">
             <a:avLst/>
@@ -11923,7 +11923,7 @@
         <p:spPr>
           <a:xfrm>
             <a:off x="4178880" y="1700640"/>
-            <a:ext cx="3153600" cy="1260720"/>
+            <a:ext cx="3153240" cy="1260360"/>
           </a:xfrm>
           <a:prstGeom prst="roundRect">
             <a:avLst>
@@ -11975,7 +11975,7 @@
         <p:spPr>
           <a:xfrm>
             <a:off x="4160520" y="1691640"/>
-            <a:ext cx="49320" cy="1260720"/>
+            <a:ext cx="48960" cy="1260360"/>
           </a:xfrm>
           <a:prstGeom prst="rect">
             <a:avLst/>
@@ -12025,7 +12025,7 @@
         <p:spPr>
           <a:xfrm>
             <a:off x="4325040" y="1810440"/>
-            <a:ext cx="2897640" cy="254880"/>
+            <a:ext cx="2897280" cy="254520"/>
           </a:xfrm>
           <a:prstGeom prst="rect">
             <a:avLst/>
@@ -12082,7 +12082,7 @@
         <p:spPr>
           <a:xfrm>
             <a:off x="4325040" y="2121480"/>
-            <a:ext cx="2879280" cy="730440"/>
+            <a:ext cx="2878920" cy="730080"/>
           </a:xfrm>
           <a:prstGeom prst="rect">
             <a:avLst/>
@@ -12139,7 +12139,7 @@
         <p:spPr>
           <a:xfrm>
             <a:off x="7680960" y="1691640"/>
-            <a:ext cx="3153600" cy="1260720"/>
+            <a:ext cx="3153240" cy="1260360"/>
           </a:xfrm>
           <a:prstGeom prst="roundRect">
             <a:avLst>
@@ -12191,7 +12191,7 @@
         <p:spPr>
           <a:xfrm>
             <a:off x="7680960" y="1691640"/>
-            <a:ext cx="49320" cy="1260720"/>
+            <a:ext cx="48960" cy="1260360"/>
           </a:xfrm>
           <a:prstGeom prst="rect">
             <a:avLst/>
@@ -12241,7 +12241,7 @@
         <p:spPr>
           <a:xfrm>
             <a:off x="7845480" y="1810440"/>
-            <a:ext cx="2897640" cy="254880"/>
+            <a:ext cx="2897280" cy="254520"/>
           </a:xfrm>
           <a:prstGeom prst="rect">
             <a:avLst/>
@@ -12298,7 +12298,7 @@
         <p:spPr>
           <a:xfrm>
             <a:off x="7845480" y="2121480"/>
-            <a:ext cx="2879280" cy="730440"/>
+            <a:ext cx="2878920" cy="730080"/>
           </a:xfrm>
           <a:prstGeom prst="rect">
             <a:avLst/>
@@ -12355,7 +12355,7 @@
         <p:spPr>
           <a:xfrm>
             <a:off x="640080" y="3246120"/>
-            <a:ext cx="3153600" cy="1260720"/>
+            <a:ext cx="3153240" cy="1260360"/>
           </a:xfrm>
           <a:prstGeom prst="roundRect">
             <a:avLst>
@@ -12407,7 +12407,7 @@
         <p:spPr>
           <a:xfrm>
             <a:off x="640080" y="3246120"/>
-            <a:ext cx="49320" cy="1260720"/>
+            <a:ext cx="48960" cy="1260360"/>
           </a:xfrm>
           <a:prstGeom prst="rect">
             <a:avLst/>
@@ -12457,7 +12457,7 @@
         <p:spPr>
           <a:xfrm>
             <a:off x="804600" y="3364920"/>
-            <a:ext cx="2897640" cy="254880"/>
+            <a:ext cx="2897280" cy="254520"/>
           </a:xfrm>
           <a:prstGeom prst="rect">
             <a:avLst/>
@@ -12514,7 +12514,7 @@
         <p:spPr>
           <a:xfrm>
             <a:off x="804600" y="3675960"/>
-            <a:ext cx="2879280" cy="730440"/>
+            <a:ext cx="2878920" cy="730080"/>
           </a:xfrm>
           <a:prstGeom prst="rect">
             <a:avLst/>
@@ -12571,7 +12571,7 @@
         <p:spPr>
           <a:xfrm>
             <a:off x="4160520" y="3246120"/>
-            <a:ext cx="3153600" cy="1260720"/>
+            <a:ext cx="3153240" cy="1260360"/>
           </a:xfrm>
           <a:prstGeom prst="roundRect">
             <a:avLst>
@@ -12623,7 +12623,7 @@
         <p:spPr>
           <a:xfrm>
             <a:off x="4160520" y="3246120"/>
-            <a:ext cx="49320" cy="1260720"/>
+            <a:ext cx="48960" cy="1260360"/>
           </a:xfrm>
           <a:prstGeom prst="rect">
             <a:avLst/>
@@ -12673,7 +12673,7 @@
         <p:spPr>
           <a:xfrm>
             <a:off x="4325040" y="3364920"/>
-            <a:ext cx="2897640" cy="254880"/>
+            <a:ext cx="2897280" cy="254520"/>
           </a:xfrm>
           <a:prstGeom prst="rect">
             <a:avLst/>
@@ -12730,7 +12730,7 @@
         <p:spPr>
           <a:xfrm>
             <a:off x="4325040" y="3675960"/>
-            <a:ext cx="2879280" cy="730440"/>
+            <a:ext cx="2878920" cy="730080"/>
           </a:xfrm>
           <a:prstGeom prst="rect">
             <a:avLst/>
@@ -12787,7 +12787,7 @@
         <p:spPr>
           <a:xfrm>
             <a:off x="7680960" y="3246120"/>
-            <a:ext cx="3153600" cy="1260720"/>
+            <a:ext cx="3153240" cy="1260360"/>
           </a:xfrm>
           <a:prstGeom prst="roundRect">
             <a:avLst>
@@ -12839,7 +12839,7 @@
         <p:spPr>
           <a:xfrm>
             <a:off x="7680960" y="3246120"/>
-            <a:ext cx="49320" cy="1260720"/>
+            <a:ext cx="48960" cy="1260360"/>
           </a:xfrm>
           <a:prstGeom prst="rect">
             <a:avLst/>
@@ -12889,7 +12889,7 @@
         <p:spPr>
           <a:xfrm>
             <a:off x="7845480" y="3364920"/>
-            <a:ext cx="2897640" cy="254880"/>
+            <a:ext cx="2897280" cy="254520"/>
           </a:xfrm>
           <a:prstGeom prst="rect">
             <a:avLst/>
@@ -12946,7 +12946,7 @@
         <p:spPr>
           <a:xfrm>
             <a:off x="7845480" y="3675960"/>
-            <a:ext cx="2879280" cy="730440"/>
+            <a:ext cx="2878920" cy="730080"/>
           </a:xfrm>
           <a:prstGeom prst="rect">
             <a:avLst/>
@@ -13003,7 +13003,7 @@
         <p:spPr>
           <a:xfrm>
             <a:off x="658440" y="5074920"/>
-            <a:ext cx="10651680" cy="803520"/>
+            <a:ext cx="10651320" cy="803160"/>
           </a:xfrm>
           <a:prstGeom prst="roundRect">
             <a:avLst>
@@ -13055,7 +13055,7 @@
         <p:spPr>
           <a:xfrm>
             <a:off x="896040" y="5266800"/>
-            <a:ext cx="1919160" cy="163440"/>
+            <a:ext cx="1918800" cy="163080"/>
           </a:xfrm>
           <a:prstGeom prst="rect">
             <a:avLst/>
@@ -13112,7 +13112,7 @@
         <p:spPr>
           <a:xfrm>
             <a:off x="2743200" y="5193720"/>
-            <a:ext cx="8228520" cy="346320"/>
+            <a:ext cx="8228160" cy="345960"/>
           </a:xfrm>
           <a:prstGeom prst="rect">
             <a:avLst/>
@@ -13173,7 +13173,7 @@
         <p:spPr>
           <a:xfrm>
             <a:off x="11064240" y="6537960"/>
-            <a:ext cx="501840" cy="163440"/>
+            <a:ext cx="501480" cy="163080"/>
           </a:xfrm>
           <a:prstGeom prst="rect">
             <a:avLst/>
@@ -13243,7 +13243,7 @@
         <p:spPr>
           <a:xfrm>
             <a:off x="658440" y="4553640"/>
-            <a:ext cx="10651680" cy="428760"/>
+            <a:ext cx="10651320" cy="428400"/>
           </a:xfrm>
           <a:prstGeom prst="roundRect">
             <a:avLst>
@@ -13353,7 +13353,7 @@
         <p:spPr>
           <a:xfrm>
             <a:off x="1411200" y="6510600"/>
-            <a:ext cx="1876320" cy="103320"/>
+            <a:ext cx="1875960" cy="103320"/>
           </a:xfrm>
           <a:prstGeom prst="rect">
             <a:avLst/>
@@ -13471,7 +13471,7 @@
         <p:spPr>
           <a:xfrm>
             <a:off x="567000" y="164520"/>
-            <a:ext cx="2833560" cy="124560"/>
+            <a:ext cx="2833200" cy="124560"/>
           </a:xfrm>
           <a:prstGeom prst="rect">
             <a:avLst/>
@@ -13525,7 +13525,7 @@
         <p:spPr>
           <a:xfrm>
             <a:off x="10881360" y="164520"/>
-            <a:ext cx="657360" cy="124560"/>
+            <a:ext cx="657000" cy="124560"/>
           </a:xfrm>
           <a:prstGeom prst="rect">
             <a:avLst/>
@@ -13579,7 +13579,7 @@
         <p:spPr>
           <a:xfrm>
             <a:off x="567000" y="649080"/>
-            <a:ext cx="10605960" cy="365400"/>
+            <a:ext cx="10605600" cy="365400"/>
           </a:xfrm>
           <a:prstGeom prst="rect">
             <a:avLst/>
@@ -13633,7 +13633,7 @@
         <p:spPr>
           <a:xfrm>
             <a:off x="567000" y="1078920"/>
-            <a:ext cx="10605960" cy="174960"/>
+            <a:ext cx="10605600" cy="174960"/>
           </a:xfrm>
           <a:prstGeom prst="rect">
             <a:avLst/>
@@ -13687,7 +13687,7 @@
         <p:spPr>
           <a:xfrm>
             <a:off x="11064240" y="6409800"/>
-            <a:ext cx="318960" cy="129240"/>
+            <a:ext cx="318600" cy="129240"/>
           </a:xfrm>
           <a:prstGeom prst="rect">
             <a:avLst/>
@@ -13741,7 +13741,7 @@
         <p:spPr>
           <a:xfrm>
             <a:off x="658440" y="1627560"/>
-            <a:ext cx="2925000" cy="1663200"/>
+            <a:ext cx="2924640" cy="1662840"/>
           </a:xfrm>
           <a:prstGeom prst="roundRect">
             <a:avLst>
@@ -13799,7 +13799,7 @@
         <p:spPr>
           <a:xfrm>
             <a:off x="658440" y="1627560"/>
-            <a:ext cx="63000" cy="1663200"/>
+            <a:ext cx="62640" cy="1662840"/>
           </a:xfrm>
           <a:prstGeom prst="rect">
             <a:avLst/>
@@ -13855,7 +13855,7 @@
         <p:spPr>
           <a:xfrm>
             <a:off x="786240" y="1682640"/>
-            <a:ext cx="510840" cy="129240"/>
+            <a:ext cx="510480" cy="129240"/>
           </a:xfrm>
           <a:prstGeom prst="rect">
             <a:avLst/>
@@ -13909,7 +13909,7 @@
         <p:spPr>
           <a:xfrm>
             <a:off x="822960" y="1828800"/>
-            <a:ext cx="2669040" cy="219456"/>
+            <a:ext cx="2668680" cy="219456"/>
           </a:xfrm>
           <a:prstGeom prst="rect">
             <a:avLst/>
@@ -13965,7 +13965,7 @@
         <p:spPr>
           <a:xfrm>
             <a:off x="822960" y="2139840"/>
-            <a:ext cx="2669040" cy="777240"/>
+            <a:ext cx="2668680" cy="777240"/>
           </a:xfrm>
           <a:prstGeom prst="rect">
             <a:avLst/>
@@ -14019,7 +14019,7 @@
         <p:spPr>
           <a:xfrm>
             <a:off x="3959280" y="1627560"/>
-            <a:ext cx="2925000" cy="1663200"/>
+            <a:ext cx="2924640" cy="1662840"/>
           </a:xfrm>
           <a:prstGeom prst="roundRect">
             <a:avLst>
@@ -14077,7 +14077,7 @@
         <p:spPr>
           <a:xfrm>
             <a:off x="3959280" y="1627560"/>
-            <a:ext cx="63000" cy="1663200"/>
+            <a:ext cx="62640" cy="1662840"/>
           </a:xfrm>
           <a:prstGeom prst="rect">
             <a:avLst/>
@@ -14133,7 +14133,7 @@
         <p:spPr>
           <a:xfrm>
             <a:off x="4087440" y="1682640"/>
-            <a:ext cx="510840" cy="129240"/>
+            <a:ext cx="510480" cy="129240"/>
           </a:xfrm>
           <a:prstGeom prst="rect">
             <a:avLst/>
@@ -14187,7 +14187,7 @@
         <p:spPr>
           <a:xfrm>
             <a:off x="4123800" y="1828800"/>
-            <a:ext cx="2669040" cy="219456"/>
+            <a:ext cx="2668680" cy="219456"/>
           </a:xfrm>
           <a:prstGeom prst="rect">
             <a:avLst/>
@@ -14243,7 +14243,7 @@
         <p:spPr>
           <a:xfrm>
             <a:off x="4123800" y="2139840"/>
-            <a:ext cx="2669040" cy="777240"/>
+            <a:ext cx="2668680" cy="777240"/>
           </a:xfrm>
           <a:prstGeom prst="rect">
             <a:avLst/>
@@ -14297,7 +14297,7 @@
         <p:spPr>
           <a:xfrm>
             <a:off x="7260480" y="1627560"/>
-            <a:ext cx="2925000" cy="1663200"/>
+            <a:ext cx="2924640" cy="1662840"/>
           </a:xfrm>
           <a:prstGeom prst="roundRect">
             <a:avLst>
@@ -14355,7 +14355,7 @@
         <p:spPr>
           <a:xfrm>
             <a:off x="7260480" y="1627560"/>
-            <a:ext cx="63000" cy="1663200"/>
+            <a:ext cx="62640" cy="1662840"/>
           </a:xfrm>
           <a:prstGeom prst="rect">
             <a:avLst/>
@@ -14411,7 +14411,7 @@
         <p:spPr>
           <a:xfrm>
             <a:off x="7388280" y="1682640"/>
-            <a:ext cx="510840" cy="129240"/>
+            <a:ext cx="510480" cy="129240"/>
           </a:xfrm>
           <a:prstGeom prst="rect">
             <a:avLst/>
@@ -14465,7 +14465,7 @@
         <p:spPr>
           <a:xfrm>
             <a:off x="7425000" y="1828800"/>
-            <a:ext cx="2669040" cy="219456"/>
+            <a:ext cx="2668680" cy="219456"/>
           </a:xfrm>
           <a:prstGeom prst="rect">
             <a:avLst/>
@@ -14521,7 +14521,7 @@
         <p:spPr>
           <a:xfrm>
             <a:off x="7425000" y="2139840"/>
-            <a:ext cx="2669040" cy="777240"/>
+            <a:ext cx="2668680" cy="777240"/>
           </a:xfrm>
           <a:prstGeom prst="rect">
             <a:avLst/>
@@ -14575,7 +14575,7 @@
         <p:spPr>
           <a:xfrm>
             <a:off x="658440" y="3675960"/>
-            <a:ext cx="2925000" cy="1663200"/>
+            <a:ext cx="2924640" cy="1662840"/>
           </a:xfrm>
           <a:prstGeom prst="roundRect">
             <a:avLst>
@@ -14633,7 +14633,7 @@
         <p:spPr>
           <a:xfrm>
             <a:off x="658440" y="3675960"/>
-            <a:ext cx="63000" cy="1663200"/>
+            <a:ext cx="62640" cy="1662840"/>
           </a:xfrm>
           <a:prstGeom prst="rect">
             <a:avLst/>
@@ -14689,7 +14689,7 @@
         <p:spPr>
           <a:xfrm>
             <a:off x="786240" y="3730680"/>
-            <a:ext cx="510840" cy="129240"/>
+            <a:ext cx="510480" cy="129240"/>
           </a:xfrm>
           <a:prstGeom prst="rect">
             <a:avLst/>
@@ -14743,7 +14743,7 @@
         <p:spPr>
           <a:xfrm>
             <a:off x="822960" y="3877200"/>
-            <a:ext cx="2669040" cy="219456"/>
+            <a:ext cx="2668680" cy="219456"/>
           </a:xfrm>
           <a:prstGeom prst="rect">
             <a:avLst/>
@@ -14799,7 +14799,7 @@
         <p:spPr>
           <a:xfrm>
             <a:off x="822960" y="4187880"/>
-            <a:ext cx="2669040" cy="621720"/>
+            <a:ext cx="2668680" cy="621720"/>
           </a:xfrm>
           <a:prstGeom prst="rect">
             <a:avLst/>
@@ -14853,7 +14853,7 @@
         <p:spPr>
           <a:xfrm>
             <a:off x="3959280" y="3675960"/>
-            <a:ext cx="2925000" cy="1663200"/>
+            <a:ext cx="2924640" cy="1662840"/>
           </a:xfrm>
           <a:prstGeom prst="roundRect">
             <a:avLst>
@@ -14911,7 +14911,7 @@
         <p:spPr>
           <a:xfrm>
             <a:off x="3959280" y="3675960"/>
-            <a:ext cx="63000" cy="1663200"/>
+            <a:ext cx="62640" cy="1662840"/>
           </a:xfrm>
           <a:prstGeom prst="rect">
             <a:avLst/>
@@ -14967,7 +14967,7 @@
         <p:spPr>
           <a:xfrm>
             <a:off x="4087440" y="3730680"/>
-            <a:ext cx="510840" cy="129240"/>
+            <a:ext cx="510480" cy="129240"/>
           </a:xfrm>
           <a:prstGeom prst="rect">
             <a:avLst/>
@@ -15021,7 +15021,7 @@
         <p:spPr>
           <a:xfrm>
             <a:off x="4123800" y="3877200"/>
-            <a:ext cx="2669040" cy="219456"/>
+            <a:ext cx="2668680" cy="219456"/>
           </a:xfrm>
           <a:prstGeom prst="rect">
             <a:avLst/>
@@ -15077,7 +15077,7 @@
         <p:spPr>
           <a:xfrm>
             <a:off x="4123800" y="4187880"/>
-            <a:ext cx="2669040" cy="621720"/>
+            <a:ext cx="2668680" cy="621720"/>
           </a:xfrm>
           <a:prstGeom prst="rect">
             <a:avLst/>
@@ -15131,7 +15131,7 @@
         <p:spPr>
           <a:xfrm>
             <a:off x="7260480" y="3675960"/>
-            <a:ext cx="2925000" cy="1663200"/>
+            <a:ext cx="2924640" cy="1662840"/>
           </a:xfrm>
           <a:prstGeom prst="roundRect">
             <a:avLst>
@@ -15189,7 +15189,7 @@
         <p:spPr>
           <a:xfrm>
             <a:off x="7260480" y="3675960"/>
-            <a:ext cx="63000" cy="1663200"/>
+            <a:ext cx="62640" cy="1662840"/>
           </a:xfrm>
           <a:prstGeom prst="rect">
             <a:avLst/>
@@ -15245,7 +15245,7 @@
         <p:spPr>
           <a:xfrm>
             <a:off x="7388280" y="3730680"/>
-            <a:ext cx="510840" cy="129240"/>
+            <a:ext cx="510480" cy="129240"/>
           </a:xfrm>
           <a:prstGeom prst="rect">
             <a:avLst/>
@@ -15299,7 +15299,7 @@
         <p:spPr>
           <a:xfrm>
             <a:off x="7425000" y="3877200"/>
-            <a:ext cx="2669040" cy="219456"/>
+            <a:ext cx="2668680" cy="219456"/>
           </a:xfrm>
           <a:prstGeom prst="rect">
             <a:avLst/>
@@ -15355,7 +15355,7 @@
         <p:spPr>
           <a:xfrm>
             <a:off x="7425000" y="4187880"/>
-            <a:ext cx="2669040" cy="777240"/>
+            <a:ext cx="2668680" cy="777240"/>
           </a:xfrm>
           <a:prstGeom prst="rect">
             <a:avLst/>
@@ -15409,7 +15409,7 @@
         <p:spPr>
           <a:xfrm>
             <a:off x="658440" y="6035040"/>
-            <a:ext cx="10852920" cy="410400"/>
+            <a:ext cx="10852560" cy="410040"/>
           </a:xfrm>
           <a:prstGeom prst="roundRect">
             <a:avLst>
@@ -15467,7 +15467,7 @@
         <p:spPr>
           <a:xfrm>
             <a:off x="786240" y="6144840"/>
-            <a:ext cx="10560240" cy="137160"/>
+            <a:ext cx="10559880" cy="137160"/>
           </a:xfrm>
           <a:prstGeom prst="rect">
             <a:avLst/>
@@ -15521,7 +15521,7 @@
         <p:spPr>
           <a:xfrm>
             <a:off x="1427400" y="6510600"/>
-            <a:ext cx="1844280" cy="103320"/>
+            <a:ext cx="1843920" cy="103320"/>
           </a:xfrm>
           <a:prstGeom prst="rect">
             <a:avLst/>
@@ -15617,7 +15617,7 @@
         <p:spPr>
           <a:xfrm>
             <a:off x="567000" y="164520"/>
-            <a:ext cx="2833560" cy="124560"/>
+            <a:ext cx="2833200" cy="124560"/>
           </a:xfrm>
           <a:prstGeom prst="rect">
             <a:avLst/>
@@ -15671,7 +15671,7 @@
         <p:spPr>
           <a:xfrm>
             <a:off x="10881360" y="164520"/>
-            <a:ext cx="657360" cy="124560"/>
+            <a:ext cx="657000" cy="124560"/>
           </a:xfrm>
           <a:prstGeom prst="rect">
             <a:avLst/>
@@ -15725,7 +15725,7 @@
         <p:spPr>
           <a:xfrm>
             <a:off x="567000" y="649080"/>
-            <a:ext cx="10605960" cy="347472"/>
+            <a:ext cx="10605600" cy="347472"/>
           </a:xfrm>
           <a:prstGeom prst="rect">
             <a:avLst/>
@@ -15779,7 +15779,7 @@
         <p:spPr>
           <a:xfrm>
             <a:off x="567000" y="1078920"/>
-            <a:ext cx="10605960" cy="350280"/>
+            <a:ext cx="10605600" cy="350280"/>
           </a:xfrm>
           <a:prstGeom prst="rect">
             <a:avLst/>
@@ -15833,7 +15833,7 @@
         <p:spPr>
           <a:xfrm>
             <a:off x="11064240" y="6409800"/>
-            <a:ext cx="318960" cy="129240"/>
+            <a:ext cx="318600" cy="129240"/>
           </a:xfrm>
           <a:prstGeom prst="rect">
             <a:avLst/>
@@ -15887,7 +15887,7 @@
         <p:spPr>
           <a:xfrm>
             <a:off x="658440" y="1600200"/>
-            <a:ext cx="10852920" cy="3016440"/>
+            <a:ext cx="10852560" cy="3016080"/>
           </a:xfrm>
           <a:prstGeom prst="roundRect">
             <a:avLst>
@@ -15945,7 +15945,7 @@
         <p:spPr>
           <a:xfrm>
             <a:off x="841320" y="1719000"/>
-            <a:ext cx="3107880" cy="130680"/>
+            <a:ext cx="3107520" cy="130680"/>
           </a:xfrm>
           <a:prstGeom prst="rect">
             <a:avLst/>
@@ -15999,7 +15999,7 @@
         <p:spPr>
           <a:xfrm>
             <a:off x="877680" y="2011680"/>
-            <a:ext cx="44640" cy="456120"/>
+            <a:ext cx="44280" cy="455760"/>
           </a:xfrm>
           <a:prstGeom prst="rect">
             <a:avLst/>
@@ -16055,7 +16055,7 @@
         <p:spPr>
           <a:xfrm>
             <a:off x="969120" y="1993320"/>
-            <a:ext cx="2559240" cy="170280"/>
+            <a:ext cx="2558880" cy="170280"/>
           </a:xfrm>
           <a:prstGeom prst="rect">
             <a:avLst/>
@@ -16109,7 +16109,7 @@
         <p:spPr>
           <a:xfrm>
             <a:off x="1880280" y="2176200"/>
-            <a:ext cx="2748240" cy="144360"/>
+            <a:ext cx="2747880" cy="144360"/>
           </a:xfrm>
           <a:prstGeom prst="rect">
             <a:avLst/>
@@ -16187,7 +16187,7 @@
         <p:spPr>
           <a:xfrm>
             <a:off x="877680" y="2743200"/>
-            <a:ext cx="44640" cy="456120"/>
+            <a:ext cx="44280" cy="455760"/>
           </a:xfrm>
           <a:prstGeom prst="rect">
             <a:avLst/>
@@ -16243,7 +16243,7 @@
         <p:spPr>
           <a:xfrm>
             <a:off x="969120" y="2724840"/>
-            <a:ext cx="2559240" cy="170280"/>
+            <a:ext cx="2558880" cy="170280"/>
           </a:xfrm>
           <a:prstGeom prst="rect">
             <a:avLst/>
@@ -16297,7 +16297,7 @@
         <p:spPr>
           <a:xfrm>
             <a:off x="1598400" y="2907720"/>
-            <a:ext cx="3312360" cy="144360"/>
+            <a:ext cx="3312000" cy="144360"/>
           </a:xfrm>
           <a:prstGeom prst="rect">
             <a:avLst/>
@@ -16375,7 +16375,7 @@
         <p:spPr>
           <a:xfrm>
             <a:off x="877680" y="3474720"/>
-            <a:ext cx="44640" cy="456120"/>
+            <a:ext cx="44280" cy="455760"/>
           </a:xfrm>
           <a:prstGeom prst="rect">
             <a:avLst/>
@@ -16431,7 +16431,7 @@
         <p:spPr>
           <a:xfrm>
             <a:off x="969120" y="3456360"/>
-            <a:ext cx="2559240" cy="201168"/>
+            <a:ext cx="2558880" cy="201168"/>
           </a:xfrm>
           <a:prstGeom prst="rect">
             <a:avLst/>
@@ -16485,7 +16485,7 @@
         <p:spPr>
           <a:xfrm>
             <a:off x="1353960" y="3730752"/>
-            <a:ext cx="3801240" cy="144360"/>
+            <a:ext cx="3800880" cy="144360"/>
           </a:xfrm>
           <a:prstGeom prst="rect">
             <a:avLst/>
@@ -16541,7 +16541,7 @@
         <p:spPr>
           <a:xfrm>
             <a:off x="5989320" y="2011680"/>
-            <a:ext cx="44640" cy="456120"/>
+            <a:ext cx="44280" cy="455760"/>
           </a:xfrm>
           <a:prstGeom prst="rect">
             <a:avLst/>
@@ -16597,7 +16597,7 @@
         <p:spPr>
           <a:xfrm>
             <a:off x="6080760" y="1993320"/>
-            <a:ext cx="2559240" cy="170280"/>
+            <a:ext cx="2558880" cy="170280"/>
           </a:xfrm>
           <a:prstGeom prst="rect">
             <a:avLst/>
@@ -16651,7 +16651,7 @@
         <p:spPr>
           <a:xfrm>
             <a:off x="7000560" y="2176200"/>
-            <a:ext cx="2731320" cy="144360"/>
+            <a:ext cx="2730960" cy="144360"/>
           </a:xfrm>
           <a:prstGeom prst="rect">
             <a:avLst/>
@@ -16729,7 +16729,7 @@
         <p:spPr>
           <a:xfrm>
             <a:off x="5989320" y="2743200"/>
-            <a:ext cx="44640" cy="456120"/>
+            <a:ext cx="44280" cy="455760"/>
           </a:xfrm>
           <a:prstGeom prst="rect">
             <a:avLst/>
@@ -16785,7 +16785,7 @@
         <p:spPr>
           <a:xfrm>
             <a:off x="6080760" y="2724840"/>
-            <a:ext cx="2559240" cy="170280"/>
+            <a:ext cx="2558880" cy="170280"/>
           </a:xfrm>
           <a:prstGeom prst="rect">
             <a:avLst/>
@@ -16839,7 +16839,7 @@
         <p:spPr>
           <a:xfrm>
             <a:off x="6092280" y="2907720"/>
-            <a:ext cx="4547880" cy="144360"/>
+            <a:ext cx="4547520" cy="144360"/>
           </a:xfrm>
           <a:prstGeom prst="rect">
             <a:avLst/>
@@ -16895,7 +16895,7 @@
         <p:spPr>
           <a:xfrm>
             <a:off x="5989320" y="3474720"/>
-            <a:ext cx="44640" cy="456120"/>
+            <a:ext cx="44280" cy="455760"/>
           </a:xfrm>
           <a:prstGeom prst="rect">
             <a:avLst/>
@@ -16951,7 +16951,7 @@
         <p:spPr>
           <a:xfrm>
             <a:off x="6080760" y="3456360"/>
-            <a:ext cx="2559240" cy="170280"/>
+            <a:ext cx="2558880" cy="170280"/>
           </a:xfrm>
           <a:prstGeom prst="rect">
             <a:avLst/>
@@ -17005,7 +17005,7 @@
         <p:spPr>
           <a:xfrm>
             <a:off x="6544080" y="3639240"/>
-            <a:ext cx="3644280" cy="144360"/>
+            <a:ext cx="3643920" cy="144360"/>
           </a:xfrm>
           <a:prstGeom prst="rect">
             <a:avLst/>
@@ -17061,7 +17061,7 @@
         <p:spPr>
           <a:xfrm>
             <a:off x="841320" y="4773240"/>
-            <a:ext cx="3016440" cy="130680"/>
+            <a:ext cx="3016080" cy="130680"/>
           </a:xfrm>
           <a:prstGeom prst="rect">
             <a:avLst/>
@@ -17117,7 +17117,7 @@
         <p:spPr>
           <a:xfrm>
             <a:off x="658440" y="4983480"/>
-            <a:ext cx="3400560" cy="913320"/>
+            <a:ext cx="3400200" cy="912960"/>
           </a:xfrm>
           <a:prstGeom prst="roundRect">
             <a:avLst>
@@ -17175,7 +17175,7 @@
         <p:spPr>
           <a:xfrm>
             <a:off x="786240" y="5148000"/>
-            <a:ext cx="364680" cy="364680"/>
+            <a:ext cx="364320" cy="364320"/>
           </a:xfrm>
           <a:prstGeom prst="ellipse">
             <a:avLst/>
@@ -17231,7 +17231,7 @@
         <p:spPr>
           <a:xfrm>
             <a:off x="786240" y="5152680"/>
-            <a:ext cx="364680" cy="152280"/>
+            <a:ext cx="364320" cy="152280"/>
           </a:xfrm>
           <a:prstGeom prst="rect">
             <a:avLst/>
@@ -17285,7 +17285,7 @@
         <p:spPr>
           <a:xfrm>
             <a:off x="1225440" y="5074920"/>
-            <a:ext cx="2815200" cy="162360"/>
+            <a:ext cx="2814840" cy="162360"/>
           </a:xfrm>
           <a:prstGeom prst="rect">
             <a:avLst/>
@@ -17339,7 +17339,7 @@
         <p:spPr>
           <a:xfrm>
             <a:off x="1225440" y="5285160"/>
-            <a:ext cx="2696400" cy="406800"/>
+            <a:ext cx="2696040" cy="406800"/>
           </a:xfrm>
           <a:prstGeom prst="rect">
             <a:avLst/>
@@ -17393,7 +17393,7 @@
         <p:spPr>
           <a:xfrm>
             <a:off x="4389120" y="4983480"/>
-            <a:ext cx="3400560" cy="913320"/>
+            <a:ext cx="3400200" cy="912960"/>
           </a:xfrm>
           <a:prstGeom prst="roundRect">
             <a:avLst>
@@ -17451,7 +17451,7 @@
         <p:spPr>
           <a:xfrm>
             <a:off x="4517280" y="5148000"/>
-            <a:ext cx="364680" cy="364680"/>
+            <a:ext cx="364320" cy="364320"/>
           </a:xfrm>
           <a:prstGeom prst="ellipse">
             <a:avLst/>
@@ -17507,7 +17507,7 @@
         <p:spPr>
           <a:xfrm>
             <a:off x="4517280" y="5152680"/>
-            <a:ext cx="364680" cy="152280"/>
+            <a:ext cx="364320" cy="152280"/>
           </a:xfrm>
           <a:prstGeom prst="rect">
             <a:avLst/>
@@ -17561,7 +17561,7 @@
         <p:spPr>
           <a:xfrm>
             <a:off x="4956120" y="5074920"/>
-            <a:ext cx="2815200" cy="292608"/>
+            <a:ext cx="2814840" cy="292608"/>
           </a:xfrm>
           <a:prstGeom prst="rect">
             <a:avLst/>
@@ -17615,7 +17615,7 @@
         <p:spPr>
           <a:xfrm>
             <a:off x="4956120" y="5431536"/>
-            <a:ext cx="2696400" cy="347472"/>
+            <a:ext cx="2696040" cy="347472"/>
           </a:xfrm>
           <a:prstGeom prst="rect">
             <a:avLst/>
@@ -17669,7 +17669,7 @@
         <p:spPr>
           <a:xfrm>
             <a:off x="8119800" y="4983480"/>
-            <a:ext cx="3400560" cy="913320"/>
+            <a:ext cx="3400200" cy="912960"/>
           </a:xfrm>
           <a:prstGeom prst="roundRect">
             <a:avLst>
@@ -17727,7 +17727,7 @@
         <p:spPr>
           <a:xfrm>
             <a:off x="8247960" y="5148000"/>
-            <a:ext cx="364680" cy="364680"/>
+            <a:ext cx="364320" cy="364320"/>
           </a:xfrm>
           <a:prstGeom prst="ellipse">
             <a:avLst/>
@@ -17783,7 +17783,7 @@
         <p:spPr>
           <a:xfrm>
             <a:off x="8247960" y="5152680"/>
-            <a:ext cx="364680" cy="152280"/>
+            <a:ext cx="364320" cy="152280"/>
           </a:xfrm>
           <a:prstGeom prst="rect">
             <a:avLst/>
@@ -17837,7 +17837,7 @@
         <p:spPr>
           <a:xfrm>
             <a:off x="8686800" y="5074920"/>
-            <a:ext cx="2815200" cy="292608"/>
+            <a:ext cx="2814840" cy="292608"/>
           </a:xfrm>
           <a:prstGeom prst="rect">
             <a:avLst/>
@@ -17891,7 +17891,7 @@
         <p:spPr>
           <a:xfrm>
             <a:off x="8686800" y="5431536"/>
-            <a:ext cx="2696400" cy="347472"/>
+            <a:ext cx="2696040" cy="347472"/>
           </a:xfrm>
           <a:prstGeom prst="rect">
             <a:avLst/>
@@ -17945,7 +17945,7 @@
         <p:spPr>
           <a:xfrm>
             <a:off x="658440" y="6035040"/>
-            <a:ext cx="10852920" cy="410400"/>
+            <a:ext cx="10852560" cy="410040"/>
           </a:xfrm>
           <a:prstGeom prst="roundRect">
             <a:avLst>
@@ -18003,7 +18003,7 @@
         <p:spPr>
           <a:xfrm>
             <a:off x="786240" y="6144840"/>
-            <a:ext cx="10560240" cy="274680"/>
+            <a:ext cx="10559880" cy="274680"/>
           </a:xfrm>
           <a:prstGeom prst="rect">
             <a:avLst/>
@@ -18057,7 +18057,7 @@
         <p:spPr>
           <a:xfrm>
             <a:off x="1293120" y="6510600"/>
-            <a:ext cx="2112480" cy="103320"/>
+            <a:ext cx="2112120" cy="103320"/>
           </a:xfrm>
           <a:prstGeom prst="rect">
             <a:avLst/>
@@ -18153,7 +18153,7 @@
         <p:spPr>
           <a:xfrm>
             <a:off x="567000" y="164520"/>
-            <a:ext cx="2193480" cy="163440"/>
+            <a:ext cx="2193120" cy="163080"/>
           </a:xfrm>
           <a:prstGeom prst="rect">
             <a:avLst/>
@@ -18210,7 +18210,7 @@
         <p:spPr>
           <a:xfrm>
             <a:off x="10927080" y="164520"/>
-            <a:ext cx="639000" cy="163440"/>
+            <a:ext cx="638640" cy="163080"/>
           </a:xfrm>
           <a:prstGeom prst="rect">
             <a:avLst/>
@@ -18267,7 +18267,7 @@
         <p:spPr>
           <a:xfrm>
             <a:off x="567000" y="658440"/>
-            <a:ext cx="10971720" cy="383040"/>
+            <a:ext cx="10971360" cy="382680"/>
           </a:xfrm>
           <a:prstGeom prst="rect">
             <a:avLst/>
@@ -18326,7 +18326,7 @@
         <p:spPr>
           <a:xfrm>
             <a:off x="567000" y="1115640"/>
-            <a:ext cx="10971720" cy="346320"/>
+            <a:ext cx="10971360" cy="345960"/>
           </a:xfrm>
           <a:prstGeom prst="rect">
             <a:avLst/>
@@ -18383,7 +18383,7 @@
         <p:spPr>
           <a:xfrm>
             <a:off x="685800" y="1572840"/>
-            <a:ext cx="2376360" cy="163440"/>
+            <a:ext cx="2376000" cy="163080"/>
           </a:xfrm>
           <a:prstGeom prst="rect">
             <a:avLst/>
@@ -18440,7 +18440,7 @@
         <p:spPr>
           <a:xfrm>
             <a:off x="685800" y="1847160"/>
-            <a:ext cx="2925000" cy="1297440"/>
+            <a:ext cx="2924640" cy="1297080"/>
           </a:xfrm>
           <a:prstGeom prst="roundRect">
             <a:avLst>
@@ -18492,7 +18492,7 @@
         <p:spPr>
           <a:xfrm>
             <a:off x="831960" y="2011680"/>
-            <a:ext cx="2604960" cy="309960"/>
+            <a:ext cx="2604600" cy="309600"/>
           </a:xfrm>
           <a:prstGeom prst="rect">
             <a:avLst/>
@@ -18549,7 +18549,7 @@
         <p:spPr>
           <a:xfrm>
             <a:off x="831960" y="2404800"/>
-            <a:ext cx="2604960" cy="565920"/>
+            <a:ext cx="2604600" cy="565560"/>
           </a:xfrm>
           <a:prstGeom prst="rect">
             <a:avLst/>
@@ -18701,7 +18701,7 @@
         <p:spPr>
           <a:xfrm>
             <a:off x="4160520" y="1572840"/>
-            <a:ext cx="2376360" cy="163440"/>
+            <a:ext cx="2376000" cy="163080"/>
           </a:xfrm>
           <a:prstGeom prst="rect">
             <a:avLst/>
@@ -18758,7 +18758,7 @@
         <p:spPr>
           <a:xfrm>
             <a:off x="4160520" y="1847160"/>
-            <a:ext cx="2925000" cy="1297440"/>
+            <a:ext cx="2924640" cy="1297080"/>
           </a:xfrm>
           <a:prstGeom prst="roundRect">
             <a:avLst>
@@ -18810,7 +18810,7 @@
         <p:spPr>
           <a:xfrm>
             <a:off x="4306680" y="2011680"/>
-            <a:ext cx="2604960" cy="309960"/>
+            <a:ext cx="2604600" cy="309600"/>
           </a:xfrm>
           <a:prstGeom prst="rect">
             <a:avLst/>
@@ -18867,7 +18867,7 @@
         <p:spPr>
           <a:xfrm>
             <a:off x="4306680" y="2404800"/>
-            <a:ext cx="2604960" cy="565920"/>
+            <a:ext cx="2604600" cy="565560"/>
           </a:xfrm>
           <a:prstGeom prst="rect">
             <a:avLst/>
@@ -19045,7 +19045,7 @@
         <p:spPr>
           <a:xfrm>
             <a:off x="7635240" y="1572840"/>
-            <a:ext cx="2376360" cy="163440"/>
+            <a:ext cx="2376000" cy="163080"/>
           </a:xfrm>
           <a:prstGeom prst="rect">
             <a:avLst/>
@@ -19102,7 +19102,7 @@
         <p:spPr>
           <a:xfrm>
             <a:off x="7635240" y="1847160"/>
-            <a:ext cx="2925000" cy="1297440"/>
+            <a:ext cx="2924640" cy="1297080"/>
           </a:xfrm>
           <a:prstGeom prst="roundRect">
             <a:avLst>
@@ -19154,7 +19154,7 @@
         <p:spPr>
           <a:xfrm>
             <a:off x="7781400" y="2011680"/>
-            <a:ext cx="2604960" cy="309960"/>
+            <a:ext cx="2604600" cy="309600"/>
           </a:xfrm>
           <a:prstGeom prst="rect">
             <a:avLst/>
@@ -19211,7 +19211,7 @@
         <p:spPr>
           <a:xfrm>
             <a:off x="7781400" y="2404800"/>
-            <a:ext cx="2604960" cy="565920"/>
+            <a:ext cx="2604600" cy="565560"/>
           </a:xfrm>
           <a:prstGeom prst="rect">
             <a:avLst/>
@@ -19346,7 +19346,7 @@
         <p:spPr>
           <a:xfrm>
             <a:off x="713160" y="3383280"/>
-            <a:ext cx="2925000" cy="163440"/>
+            <a:ext cx="2924640" cy="163080"/>
           </a:xfrm>
           <a:prstGeom prst="rect">
             <a:avLst/>
@@ -19403,7 +19403,7 @@
         <p:spPr>
           <a:xfrm>
             <a:off x="685800" y="3675960"/>
-            <a:ext cx="3409560" cy="1874519"/>
+            <a:ext cx="3409200" cy="1874519"/>
           </a:xfrm>
           <a:prstGeom prst="roundRect">
             <a:avLst>
@@ -19455,7 +19455,7 @@
         <p:spPr>
           <a:xfrm>
             <a:off x="685800" y="3675960"/>
-            <a:ext cx="49320" cy="1874519"/>
+            <a:ext cx="48960" cy="1874519"/>
           </a:xfrm>
           <a:prstGeom prst="rect">
             <a:avLst/>
@@ -19505,7 +19505,7 @@
         <p:spPr>
           <a:xfrm>
             <a:off x="850320" y="3749040"/>
-            <a:ext cx="3153600" cy="347472"/>
+            <a:ext cx="3153240" cy="347472"/>
           </a:xfrm>
           <a:prstGeom prst="rect">
             <a:avLst/>
@@ -19564,7 +19564,7 @@
         <p:spPr>
           <a:xfrm>
             <a:off x="850320" y="4133087"/>
-            <a:ext cx="3135240" cy="1353312"/>
+            <a:ext cx="3134880" cy="1353312"/>
           </a:xfrm>
           <a:prstGeom prst="rect">
             <a:avLst/>
@@ -19681,7 +19681,7 @@
         <p:spPr>
           <a:xfrm>
             <a:off x="4380120" y="3675960"/>
-            <a:ext cx="3409560" cy="1874519"/>
+            <a:ext cx="3409200" cy="1874519"/>
           </a:xfrm>
           <a:prstGeom prst="roundRect">
             <a:avLst>
@@ -19733,7 +19733,7 @@
         <p:spPr>
           <a:xfrm>
             <a:off x="4380120" y="3675960"/>
-            <a:ext cx="49320" cy="1874519"/>
+            <a:ext cx="48960" cy="1874519"/>
           </a:xfrm>
           <a:prstGeom prst="rect">
             <a:avLst/>
@@ -19830,7 +19830,7 @@
               </a:rPr>
               <a:t>TYPE 1 · Unbounded unresolved uncertainty</a:t>
             </a:r>
-            <a:endParaRPr b="0" lang="en-US" sz="1050" spc="-1" strike="noStrike">
+            <a:endParaRPr b="0" lang="en-US" sz="950" spc="-1" strike="noStrike">
               <a:solidFill>
                 <a:srgbClr val="000000"/>
               </a:solidFill>
@@ -19848,7 +19848,7 @@
         <p:spPr>
           <a:xfrm>
             <a:off x="4544640" y="4133087"/>
-            <a:ext cx="3135240" cy="1353312"/>
+            <a:ext cx="3134880" cy="1353312"/>
           </a:xfrm>
           <a:prstGeom prst="rect">
             <a:avLst/>
@@ -19943,7 +19943,7 @@
         <p:spPr>
           <a:xfrm>
             <a:off x="8074080" y="3675960"/>
-            <a:ext cx="3409560" cy="1874519"/>
+            <a:ext cx="3409200" cy="1874519"/>
           </a:xfrm>
           <a:prstGeom prst="roundRect">
             <a:avLst>
@@ -19995,7 +19995,7 @@
         <p:spPr>
           <a:xfrm>
             <a:off x="8074080" y="3675960"/>
-            <a:ext cx="49320" cy="1874519"/>
+            <a:ext cx="48960" cy="1874519"/>
           </a:xfrm>
           <a:prstGeom prst="rect">
             <a:avLst/>
@@ -20045,7 +20045,7 @@
         <p:spPr>
           <a:xfrm>
             <a:off x="8238600" y="3794760"/>
-            <a:ext cx="3153600" cy="347472"/>
+            <a:ext cx="3153240" cy="347472"/>
           </a:xfrm>
           <a:prstGeom prst="rect">
             <a:avLst/>
@@ -20104,7 +20104,7 @@
         <p:spPr>
           <a:xfrm>
             <a:off x="8238600" y="4133087"/>
-            <a:ext cx="3135240" cy="1353312"/>
+            <a:ext cx="3134880" cy="1353312"/>
           </a:xfrm>
           <a:prstGeom prst="rect">
             <a:avLst/>
@@ -20203,7 +20203,7 @@
         <p:spPr>
           <a:xfrm>
             <a:off x="11064240" y="6537960"/>
-            <a:ext cx="501840" cy="163440"/>
+            <a:ext cx="501480" cy="163080"/>
           </a:xfrm>
           <a:prstGeom prst="rect">
             <a:avLst/>
@@ -20273,7 +20273,7 @@
         <p:spPr>
           <a:xfrm>
             <a:off x="1073880" y="6510600"/>
-            <a:ext cx="2551320" cy="103320"/>
+            <a:ext cx="2550960" cy="103320"/>
           </a:xfrm>
           <a:prstGeom prst="rect">
             <a:avLst/>
@@ -20398,7 +20398,7 @@
         <p:spPr>
           <a:xfrm>
             <a:off x="585360" y="164520"/>
-            <a:ext cx="2925000" cy="130680"/>
+            <a:ext cx="2924640" cy="130680"/>
           </a:xfrm>
           <a:prstGeom prst="rect">
             <a:avLst/>
@@ -20452,7 +20452,7 @@
         <p:spPr>
           <a:xfrm>
             <a:off x="10744200" y="164520"/>
-            <a:ext cx="684720" cy="130680"/>
+            <a:ext cx="684360" cy="130680"/>
           </a:xfrm>
           <a:prstGeom prst="rect">
             <a:avLst/>
@@ -20506,7 +20506,7 @@
         <p:spPr>
           <a:xfrm>
             <a:off x="585360" y="457200"/>
-            <a:ext cx="10825560" cy="9720"/>
+            <a:ext cx="10825200" cy="9360"/>
           </a:xfrm>
           <a:prstGeom prst="rect">
             <a:avLst/>
@@ -20562,7 +20562,7 @@
         <p:spPr>
           <a:xfrm>
             <a:off x="585360" y="530280"/>
-            <a:ext cx="10825560" cy="4320"/>
+            <a:ext cx="10825200" cy="3960"/>
           </a:xfrm>
           <a:prstGeom prst="rect">
             <a:avLst/>
@@ -20618,7 +20618,7 @@
         <p:spPr>
           <a:xfrm>
             <a:off x="621720" y="713160"/>
-            <a:ext cx="10697400" cy="384048"/>
+            <a:ext cx="10697040" cy="384048"/>
           </a:xfrm>
           <a:prstGeom prst="rect">
             <a:avLst/>
@@ -20672,7 +20672,7 @@
         <p:spPr>
           <a:xfrm>
             <a:off x="621720" y="1161360"/>
-            <a:ext cx="10697400" cy="164160"/>
+            <a:ext cx="10697040" cy="164160"/>
           </a:xfrm>
           <a:prstGeom prst="rect">
             <a:avLst/>
@@ -20726,7 +20726,7 @@
         <p:spPr>
           <a:xfrm>
             <a:off x="585360" y="6446520"/>
-            <a:ext cx="10825560" cy="9720"/>
+            <a:ext cx="10825200" cy="9360"/>
           </a:xfrm>
           <a:prstGeom prst="rect">
             <a:avLst/>
@@ -20782,7 +20782,7 @@
         <p:spPr>
           <a:xfrm>
             <a:off x="4352400" y="6537960"/>
-            <a:ext cx="3455280" cy="117000"/>
+            <a:ext cx="3454920" cy="117000"/>
           </a:xfrm>
           <a:prstGeom prst="rect">
             <a:avLst/>
@@ -20836,7 +20836,7 @@
         <p:spPr>
           <a:xfrm>
             <a:off x="11018520" y="6537960"/>
-            <a:ext cx="273240" cy="129240"/>
+            <a:ext cx="272880" cy="129240"/>
           </a:xfrm>
           <a:prstGeom prst="rect">
             <a:avLst/>
@@ -20890,7 +20890,7 @@
         <p:spPr>
           <a:xfrm>
             <a:off x="820080" y="6510600"/>
-            <a:ext cx="3058920" cy="117000"/>
+            <a:ext cx="3058560" cy="117000"/>
           </a:xfrm>
           <a:prstGeom prst="rect">
             <a:avLst/>
@@ -20946,7 +20946,7 @@
         <p:spPr>
           <a:xfrm>
             <a:off x="621720" y="1627560"/>
-            <a:ext cx="3336480" cy="1416240"/>
+            <a:ext cx="3336120" cy="1415880"/>
           </a:xfrm>
           <a:prstGeom prst="roundRect">
             <a:avLst>
@@ -21004,7 +21004,7 @@
         <p:spPr>
           <a:xfrm>
             <a:off x="1051920" y="1761840"/>
-            <a:ext cx="335880" cy="535320"/>
+            <a:ext cx="335520" cy="535320"/>
           </a:xfrm>
           <a:prstGeom prst="rect">
             <a:avLst/>
@@ -21058,7 +21058,7 @@
         <p:spPr>
           <a:xfrm>
             <a:off x="1938240" y="1851120"/>
-            <a:ext cx="1599120" cy="146880"/>
+            <a:ext cx="1598760" cy="146880"/>
           </a:xfrm>
           <a:prstGeom prst="rect">
             <a:avLst/>
@@ -21166,7 +21166,7 @@
         <p:spPr>
           <a:xfrm>
             <a:off x="4160520" y="1627560"/>
-            <a:ext cx="3336480" cy="1416240"/>
+            <a:ext cx="3336120" cy="1415880"/>
           </a:xfrm>
           <a:prstGeom prst="roundRect">
             <a:avLst>
@@ -21224,7 +21224,7 @@
         <p:spPr>
           <a:xfrm>
             <a:off x="4440600" y="1761840"/>
-            <a:ext cx="636120" cy="535320"/>
+            <a:ext cx="635760" cy="535320"/>
           </a:xfrm>
           <a:prstGeom prst="rect">
             <a:avLst/>
@@ -21278,7 +21278,7 @@
         <p:spPr>
           <a:xfrm>
             <a:off x="5541840" y="1851120"/>
-            <a:ext cx="1469520" cy="146880"/>
+            <a:ext cx="1469160" cy="146880"/>
           </a:xfrm>
           <a:prstGeom prst="rect">
             <a:avLst/>
@@ -21386,7 +21386,7 @@
         <p:spPr>
           <a:xfrm>
             <a:off x="7699320" y="1627560"/>
-            <a:ext cx="3345480" cy="1416240"/>
+            <a:ext cx="3345120" cy="1415880"/>
           </a:xfrm>
           <a:prstGeom prst="roundRect">
             <a:avLst>
@@ -21444,7 +21444,7 @@
         <p:spPr>
           <a:xfrm>
             <a:off x="8129520" y="1761840"/>
-            <a:ext cx="335880" cy="535320"/>
+            <a:ext cx="335520" cy="535320"/>
           </a:xfrm>
           <a:prstGeom prst="rect">
             <a:avLst/>
@@ -21498,7 +21498,7 @@
         <p:spPr>
           <a:xfrm>
             <a:off x="9150840" y="1851120"/>
-            <a:ext cx="1338480" cy="146880"/>
+            <a:ext cx="1338120" cy="146880"/>
           </a:xfrm>
           <a:prstGeom prst="rect">
             <a:avLst/>
@@ -21606,7 +21606,7 @@
         <p:spPr>
           <a:xfrm>
             <a:off x="621720" y="3246120"/>
-            <a:ext cx="10944360" cy="1004760"/>
+            <a:ext cx="10944000" cy="1004400"/>
           </a:xfrm>
           <a:prstGeom prst="roundRect">
             <a:avLst>
@@ -21664,7 +21664,7 @@
         <p:spPr>
           <a:xfrm>
             <a:off x="1005480" y="3387240"/>
-            <a:ext cx="1014120" cy="146880"/>
+            <a:ext cx="1013760" cy="146880"/>
           </a:xfrm>
           <a:prstGeom prst="rect">
             <a:avLst/>
@@ -21718,7 +21718,7 @@
         <p:spPr>
           <a:xfrm>
             <a:off x="2148840" y="3328920"/>
-            <a:ext cx="8857080" cy="446760"/>
+            <a:ext cx="8856720" cy="446400"/>
           </a:xfrm>
           <a:prstGeom prst="rect">
             <a:avLst/>
@@ -21795,7 +21795,7 @@
         <p:spPr>
           <a:xfrm>
             <a:off x="2148840" y="3848040"/>
-            <a:ext cx="8857080" cy="208440"/>
+            <a:ext cx="8856720" cy="208080"/>
           </a:xfrm>
           <a:prstGeom prst="rect">
             <a:avLst/>
@@ -21849,7 +21849,7 @@
         <p:spPr>
           <a:xfrm>
             <a:off x="685800" y="4485960"/>
-            <a:ext cx="1809360" cy="144000"/>
+            <a:ext cx="1809000" cy="144000"/>
           </a:xfrm>
           <a:prstGeom prst="rect">
             <a:avLst/>
@@ -21903,7 +21903,7 @@
         <p:spPr>
           <a:xfrm>
             <a:off x="631080" y="4681800"/>
-            <a:ext cx="1324800" cy="510840"/>
+            <a:ext cx="1324440" cy="510480"/>
           </a:xfrm>
           <a:prstGeom prst="roundRect">
             <a:avLst>
@@ -21961,7 +21961,7 @@
         <p:spPr>
           <a:xfrm>
             <a:off x="1182600" y="4744800"/>
-            <a:ext cx="221400" cy="138960"/>
+            <a:ext cx="221040" cy="138960"/>
           </a:xfrm>
           <a:prstGeom prst="rect">
             <a:avLst/>
@@ -22017,7 +22017,7 @@
         <p:spPr>
           <a:xfrm>
             <a:off x="914400" y="4933440"/>
-            <a:ext cx="757800" cy="136080"/>
+            <a:ext cx="757440" cy="136080"/>
           </a:xfrm>
           <a:prstGeom prst="rect">
             <a:avLst/>
@@ -22073,7 +22073,7 @@
         <p:spPr>
           <a:xfrm>
             <a:off x="2066400" y="4681800"/>
-            <a:ext cx="1324800" cy="510840"/>
+            <a:ext cx="1324440" cy="510480"/>
           </a:xfrm>
           <a:prstGeom prst="roundRect">
             <a:avLst>
@@ -22131,7 +22131,7 @@
         <p:spPr>
           <a:xfrm>
             <a:off x="2617920" y="4744800"/>
-            <a:ext cx="221400" cy="138960"/>
+            <a:ext cx="221040" cy="138960"/>
           </a:xfrm>
           <a:prstGeom prst="rect">
             <a:avLst/>
@@ -22187,7 +22187,7 @@
         <p:spPr>
           <a:xfrm>
             <a:off x="2439720" y="4933440"/>
-            <a:ext cx="578160" cy="136080"/>
+            <a:ext cx="577800" cy="136080"/>
           </a:xfrm>
           <a:prstGeom prst="rect">
             <a:avLst/>
@@ -22243,7 +22243,7 @@
         <p:spPr>
           <a:xfrm>
             <a:off x="3502080" y="4681800"/>
-            <a:ext cx="1324800" cy="510840"/>
+            <a:ext cx="1324440" cy="510480"/>
           </a:xfrm>
           <a:prstGeom prst="roundRect">
             <a:avLst>
@@ -22301,7 +22301,7 @@
         <p:spPr>
           <a:xfrm>
             <a:off x="4053600" y="4744800"/>
-            <a:ext cx="221400" cy="138960"/>
+            <a:ext cx="221040" cy="138960"/>
           </a:xfrm>
           <a:prstGeom prst="rect">
             <a:avLst/>
@@ -22357,7 +22357,7 @@
         <p:spPr>
           <a:xfrm>
             <a:off x="3882240" y="4933440"/>
-            <a:ext cx="564480" cy="136080"/>
+            <a:ext cx="564120" cy="136080"/>
           </a:xfrm>
           <a:prstGeom prst="rect">
             <a:avLst/>
@@ -22413,7 +22413,7 @@
         <p:spPr>
           <a:xfrm>
             <a:off x="4937760" y="4681800"/>
-            <a:ext cx="1324800" cy="510840"/>
+            <a:ext cx="1324440" cy="510480"/>
           </a:xfrm>
           <a:prstGeom prst="roundRect">
             <a:avLst>
@@ -22471,7 +22471,7 @@
         <p:spPr>
           <a:xfrm>
             <a:off x="5489280" y="4744800"/>
-            <a:ext cx="221400" cy="138960"/>
+            <a:ext cx="221040" cy="138960"/>
           </a:xfrm>
           <a:prstGeom prst="rect">
             <a:avLst/>
@@ -22527,7 +22527,7 @@
         <p:spPr>
           <a:xfrm>
             <a:off x="5339880" y="4933440"/>
-            <a:ext cx="520200" cy="136080"/>
+            <a:ext cx="519840" cy="136080"/>
           </a:xfrm>
           <a:prstGeom prst="rect">
             <a:avLst/>
@@ -22583,7 +22583,7 @@
         <p:spPr>
           <a:xfrm>
             <a:off x="6373440" y="4681800"/>
-            <a:ext cx="1324800" cy="510840"/>
+            <a:ext cx="1324440" cy="510480"/>
           </a:xfrm>
           <a:prstGeom prst="roundRect">
             <a:avLst>
@@ -22641,7 +22641,7 @@
         <p:spPr>
           <a:xfrm>
             <a:off x="6924960" y="4744800"/>
-            <a:ext cx="221400" cy="138960"/>
+            <a:ext cx="221040" cy="138960"/>
           </a:xfrm>
           <a:prstGeom prst="rect">
             <a:avLst/>
@@ -22697,7 +22697,7 @@
         <p:spPr>
           <a:xfrm>
             <a:off x="6860880" y="4933440"/>
-            <a:ext cx="349560" cy="136080"/>
+            <a:ext cx="349200" cy="136080"/>
           </a:xfrm>
           <a:prstGeom prst="rect">
             <a:avLst/>
@@ -22753,7 +22753,7 @@
         <p:spPr>
           <a:xfrm>
             <a:off x="7809120" y="4681800"/>
-            <a:ext cx="1324800" cy="510840"/>
+            <a:ext cx="1324440" cy="510480"/>
           </a:xfrm>
           <a:prstGeom prst="roundRect">
             <a:avLst>
@@ -22811,7 +22811,7 @@
         <p:spPr>
           <a:xfrm>
             <a:off x="8360640" y="4744800"/>
-            <a:ext cx="221400" cy="138960"/>
+            <a:ext cx="221040" cy="138960"/>
           </a:xfrm>
           <a:prstGeom prst="rect">
             <a:avLst/>
@@ -22867,7 +22867,7 @@
         <p:spPr>
           <a:xfrm>
             <a:off x="8262360" y="4933440"/>
-            <a:ext cx="417960" cy="136080"/>
+            <a:ext cx="417600" cy="136080"/>
           </a:xfrm>
           <a:prstGeom prst="rect">
             <a:avLst/>
@@ -22923,7 +22923,7 @@
         <p:spPr>
           <a:xfrm>
             <a:off x="631080" y="5367600"/>
-            <a:ext cx="5284080" cy="565920"/>
+            <a:ext cx="5283720" cy="565560"/>
           </a:xfrm>
           <a:prstGeom prst="roundRect">
             <a:avLst>
@@ -22983,7 +22983,7 @@
         <p:spPr>
           <a:xfrm>
             <a:off x="2041200" y="5518440"/>
-            <a:ext cx="2445120" cy="154800"/>
+            <a:ext cx="2444760" cy="154800"/>
           </a:xfrm>
           <a:prstGeom prst="rect">
             <a:avLst/>
@@ -23037,7 +23037,7 @@
         <p:spPr>
           <a:xfrm>
             <a:off x="6089760" y="5367600"/>
-            <a:ext cx="3226680" cy="565920"/>
+            <a:ext cx="3226320" cy="565560"/>
           </a:xfrm>
           <a:prstGeom prst="roundRect">
             <a:avLst>
@@ -23097,7 +23097,7 @@
         <p:spPr>
           <a:xfrm>
             <a:off x="7104960" y="5518440"/>
-            <a:ext cx="1206000" cy="154800"/>
+            <a:ext cx="1205640" cy="154800"/>
           </a:xfrm>
           <a:prstGeom prst="rect">
             <a:avLst/>
@@ -23151,7 +23151,7 @@
         <p:spPr>
           <a:xfrm>
             <a:off x="9491400" y="5367600"/>
-            <a:ext cx="2074680" cy="565920"/>
+            <a:ext cx="2074320" cy="565560"/>
           </a:xfrm>
           <a:prstGeom prst="roundRect">
             <a:avLst>
@@ -23211,7 +23211,7 @@
         <p:spPr>
           <a:xfrm>
             <a:off x="10081080" y="5521680"/>
-            <a:ext cx="894960" cy="148320"/>
+            <a:ext cx="894600" cy="148320"/>
           </a:xfrm>
           <a:prstGeom prst="rect">
             <a:avLst/>
@@ -23265,7 +23265,7 @@
         <p:spPr>
           <a:xfrm>
             <a:off x="2605320" y="6022080"/>
-            <a:ext cx="5852520" cy="134640"/>
+            <a:ext cx="5852160" cy="134640"/>
           </a:xfrm>
           <a:prstGeom prst="rect">
             <a:avLst/>
@@ -23349,7 +23349,7 @@
         <p:spPr>
           <a:xfrm>
             <a:off x="567000" y="164520"/>
-            <a:ext cx="3199320" cy="129240"/>
+            <a:ext cx="3198960" cy="129240"/>
           </a:xfrm>
           <a:prstGeom prst="rect">
             <a:avLst/>
@@ -23403,7 +23403,7 @@
         <p:spPr>
           <a:xfrm>
             <a:off x="10716840" y="164520"/>
-            <a:ext cx="684720" cy="129240"/>
+            <a:ext cx="684360" cy="129240"/>
           </a:xfrm>
           <a:prstGeom prst="rect">
             <a:avLst/>
@@ -23457,7 +23457,7 @@
         <p:spPr>
           <a:xfrm>
             <a:off x="567000" y="640080"/>
-            <a:ext cx="10514520" cy="357840"/>
+            <a:ext cx="10514160" cy="357840"/>
           </a:xfrm>
           <a:prstGeom prst="rect">
             <a:avLst/>
@@ -23513,7 +23513,7 @@
         <p:spPr>
           <a:xfrm>
             <a:off x="567000" y="1078920"/>
-            <a:ext cx="10514520" cy="159480"/>
+            <a:ext cx="10514160" cy="159480"/>
           </a:xfrm>
           <a:prstGeom prst="rect">
             <a:avLst/>
@@ -23567,7 +23567,7 @@
         <p:spPr>
           <a:xfrm>
             <a:off x="567000" y="457200"/>
-            <a:ext cx="10834560" cy="9720"/>
+            <a:ext cx="10834200" cy="9360"/>
           </a:xfrm>
           <a:prstGeom prst="rect">
             <a:avLst/>
@@ -23623,7 +23623,7 @@
         <p:spPr>
           <a:xfrm>
             <a:off x="567000" y="1508760"/>
-            <a:ext cx="3455280" cy="748800"/>
+            <a:ext cx="3454920" cy="748440"/>
           </a:xfrm>
           <a:prstGeom prst="roundRect">
             <a:avLst>
@@ -23681,7 +23681,7 @@
         <p:spPr>
           <a:xfrm>
             <a:off x="676800" y="1581840"/>
-            <a:ext cx="346320" cy="141480"/>
+            <a:ext cx="345960" cy="141480"/>
           </a:xfrm>
           <a:prstGeom prst="rect">
             <a:avLst/>
@@ -23735,7 +23735,7 @@
         <p:spPr>
           <a:xfrm>
             <a:off x="1069920" y="1572840"/>
-            <a:ext cx="2696400" cy="162360"/>
+            <a:ext cx="2696040" cy="162360"/>
           </a:xfrm>
           <a:prstGeom prst="rect">
             <a:avLst/>
@@ -23789,7 +23789,7 @@
         <p:spPr>
           <a:xfrm>
             <a:off x="676800" y="1819800"/>
-            <a:ext cx="3236040" cy="258840"/>
+            <a:ext cx="3235680" cy="258840"/>
           </a:xfrm>
           <a:prstGeom prst="rect">
             <a:avLst/>
@@ -23843,7 +23843,7 @@
         <p:spPr>
           <a:xfrm>
             <a:off x="4087440" y="1508760"/>
-            <a:ext cx="3455280" cy="748800"/>
+            <a:ext cx="3454920" cy="748440"/>
           </a:xfrm>
           <a:prstGeom prst="roundRect">
             <a:avLst>
@@ -23901,7 +23901,7 @@
         <p:spPr>
           <a:xfrm>
             <a:off x="4197240" y="1581840"/>
-            <a:ext cx="346320" cy="141480"/>
+            <a:ext cx="345960" cy="141480"/>
           </a:xfrm>
           <a:prstGeom prst="rect">
             <a:avLst/>
@@ -23955,7 +23955,7 @@
         <p:spPr>
           <a:xfrm>
             <a:off x="4590360" y="1572840"/>
-            <a:ext cx="2696400" cy="162360"/>
+            <a:ext cx="2696040" cy="162360"/>
           </a:xfrm>
           <a:prstGeom prst="rect">
             <a:avLst/>
@@ -24009,7 +24009,7 @@
         <p:spPr>
           <a:xfrm>
             <a:off x="4197240" y="1819800"/>
-            <a:ext cx="3236040" cy="258840"/>
+            <a:ext cx="3235680" cy="258840"/>
           </a:xfrm>
           <a:prstGeom prst="rect">
             <a:avLst/>
@@ -24063,7 +24063,7 @@
         <p:spPr>
           <a:xfrm>
             <a:off x="7607880" y="1508760"/>
-            <a:ext cx="3455280" cy="748800"/>
+            <a:ext cx="3454920" cy="748440"/>
           </a:xfrm>
           <a:prstGeom prst="roundRect">
             <a:avLst>
@@ -24121,7 +24121,7 @@
         <p:spPr>
           <a:xfrm>
             <a:off x="7717680" y="1581840"/>
-            <a:ext cx="346320" cy="141480"/>
+            <a:ext cx="345960" cy="141480"/>
           </a:xfrm>
           <a:prstGeom prst="rect">
             <a:avLst/>
@@ -24175,7 +24175,7 @@
         <p:spPr>
           <a:xfrm>
             <a:off x="8110800" y="1572840"/>
-            <a:ext cx="2696400" cy="162360"/>
+            <a:ext cx="2696040" cy="162360"/>
           </a:xfrm>
           <a:prstGeom prst="rect">
             <a:avLst/>
@@ -24229,7 +24229,7 @@
         <p:spPr>
           <a:xfrm>
             <a:off x="7717680" y="1819800"/>
-            <a:ext cx="3236040" cy="258840"/>
+            <a:ext cx="3235680" cy="258840"/>
           </a:xfrm>
           <a:prstGeom prst="rect">
             <a:avLst/>
@@ -24283,7 +24283,7 @@
         <p:spPr>
           <a:xfrm>
             <a:off x="567000" y="2541960"/>
-            <a:ext cx="1617480" cy="913320"/>
+            <a:ext cx="1617120" cy="912960"/>
           </a:xfrm>
           <a:prstGeom prst="roundRect">
             <a:avLst>
@@ -24341,7 +24341,7 @@
         <p:spPr>
           <a:xfrm>
             <a:off x="640080" y="2615040"/>
-            <a:ext cx="318960" cy="133560"/>
+            <a:ext cx="318600" cy="133560"/>
           </a:xfrm>
           <a:prstGeom prst="rect">
             <a:avLst/>
@@ -24395,7 +24395,7 @@
         <p:spPr>
           <a:xfrm>
             <a:off x="640080" y="2825640"/>
-            <a:ext cx="1470960" cy="142920"/>
+            <a:ext cx="1470600" cy="142920"/>
           </a:xfrm>
           <a:prstGeom prst="rect">
             <a:avLst/>
@@ -24449,7 +24449,7 @@
         <p:spPr>
           <a:xfrm>
             <a:off x="640080" y="3108960"/>
-            <a:ext cx="1470960" cy="118440"/>
+            <a:ext cx="1470600" cy="118440"/>
           </a:xfrm>
           <a:prstGeom prst="rect">
             <a:avLst/>
@@ -24503,7 +24503,7 @@
         <p:spPr>
           <a:xfrm>
             <a:off x="2199240" y="2889360"/>
-            <a:ext cx="136080" cy="182520"/>
+            <a:ext cx="135720" cy="182520"/>
           </a:xfrm>
           <a:prstGeom prst="rect">
             <a:avLst/>
@@ -24557,7 +24557,7 @@
         <p:spPr>
           <a:xfrm>
             <a:off x="2350080" y="2541960"/>
-            <a:ext cx="1617480" cy="913320"/>
+            <a:ext cx="1617120" cy="912960"/>
           </a:xfrm>
           <a:prstGeom prst="roundRect">
             <a:avLst>
@@ -24615,7 +24615,7 @@
         <p:spPr>
           <a:xfrm>
             <a:off x="2423160" y="2615040"/>
-            <a:ext cx="318960" cy="133560"/>
+            <a:ext cx="318600" cy="133560"/>
           </a:xfrm>
           <a:prstGeom prst="rect">
             <a:avLst/>
@@ -24669,7 +24669,7 @@
         <p:spPr>
           <a:xfrm>
             <a:off x="2423160" y="2825640"/>
-            <a:ext cx="1470960" cy="142920"/>
+            <a:ext cx="1470600" cy="142920"/>
           </a:xfrm>
           <a:prstGeom prst="rect">
             <a:avLst/>
@@ -24723,7 +24723,7 @@
         <p:spPr>
           <a:xfrm>
             <a:off x="2423160" y="3108960"/>
-            <a:ext cx="1470960" cy="237240"/>
+            <a:ext cx="1470600" cy="237240"/>
           </a:xfrm>
           <a:prstGeom prst="rect">
             <a:avLst/>
@@ -24777,7 +24777,7 @@
         <p:spPr>
           <a:xfrm>
             <a:off x="3982320" y="2889360"/>
-            <a:ext cx="136080" cy="182520"/>
+            <a:ext cx="135720" cy="182520"/>
           </a:xfrm>
           <a:prstGeom prst="rect">
             <a:avLst/>
@@ -24831,7 +24831,7 @@
         <p:spPr>
           <a:xfrm>
             <a:off x="4133160" y="2541960"/>
-            <a:ext cx="1617480" cy="913320"/>
+            <a:ext cx="1617120" cy="912960"/>
           </a:xfrm>
           <a:prstGeom prst="roundRect">
             <a:avLst>
@@ -24889,7 +24889,7 @@
         <p:spPr>
           <a:xfrm>
             <a:off x="4206240" y="2615040"/>
-            <a:ext cx="318960" cy="133560"/>
+            <a:ext cx="318600" cy="133560"/>
           </a:xfrm>
           <a:prstGeom prst="rect">
             <a:avLst/>
@@ -24943,7 +24943,7 @@
         <p:spPr>
           <a:xfrm>
             <a:off x="4206240" y="2825640"/>
-            <a:ext cx="1470960" cy="142920"/>
+            <a:ext cx="1470600" cy="142920"/>
           </a:xfrm>
           <a:prstGeom prst="rect">
             <a:avLst/>
@@ -24997,7 +24997,7 @@
         <p:spPr>
           <a:xfrm>
             <a:off x="4206240" y="3108960"/>
-            <a:ext cx="1470960" cy="118440"/>
+            <a:ext cx="1470600" cy="118440"/>
           </a:xfrm>
           <a:prstGeom prst="rect">
             <a:avLst/>
@@ -25051,7 +25051,7 @@
         <p:spPr>
           <a:xfrm>
             <a:off x="5765400" y="2889360"/>
-            <a:ext cx="136080" cy="182520"/>
+            <a:ext cx="135720" cy="182520"/>
           </a:xfrm>
           <a:prstGeom prst="rect">
             <a:avLst/>
@@ -25105,7 +25105,7 @@
         <p:spPr>
           <a:xfrm>
             <a:off x="5916240" y="2541960"/>
-            <a:ext cx="1617480" cy="913320"/>
+            <a:ext cx="1617120" cy="912960"/>
           </a:xfrm>
           <a:prstGeom prst="roundRect">
             <a:avLst>
@@ -25163,7 +25163,7 @@
         <p:spPr>
           <a:xfrm>
             <a:off x="5989320" y="2615040"/>
-            <a:ext cx="318960" cy="133560"/>
+            <a:ext cx="318600" cy="133560"/>
           </a:xfrm>
           <a:prstGeom prst="rect">
             <a:avLst/>
@@ -25217,7 +25217,7 @@
         <p:spPr>
           <a:xfrm>
             <a:off x="5989320" y="2825640"/>
-            <a:ext cx="1470960" cy="142920"/>
+            <a:ext cx="1470600" cy="142920"/>
           </a:xfrm>
           <a:prstGeom prst="rect">
             <a:avLst/>
@@ -25271,7 +25271,7 @@
         <p:spPr>
           <a:xfrm>
             <a:off x="5989320" y="3108960"/>
-            <a:ext cx="1470960" cy="118440"/>
+            <a:ext cx="1470600" cy="118440"/>
           </a:xfrm>
           <a:prstGeom prst="rect">
             <a:avLst/>
@@ -25325,7 +25325,7 @@
         <p:spPr>
           <a:xfrm>
             <a:off x="7548480" y="2889360"/>
-            <a:ext cx="136080" cy="182520"/>
+            <a:ext cx="135720" cy="182520"/>
           </a:xfrm>
           <a:prstGeom prst="rect">
             <a:avLst/>
@@ -25379,7 +25379,7 @@
         <p:spPr>
           <a:xfrm>
             <a:off x="7699320" y="2541960"/>
-            <a:ext cx="1617480" cy="913320"/>
+            <a:ext cx="1617120" cy="912960"/>
           </a:xfrm>
           <a:prstGeom prst="roundRect">
             <a:avLst>
@@ -25437,7 +25437,7 @@
         <p:spPr>
           <a:xfrm>
             <a:off x="7772400" y="2615040"/>
-            <a:ext cx="318960" cy="133560"/>
+            <a:ext cx="318600" cy="133560"/>
           </a:xfrm>
           <a:prstGeom prst="rect">
             <a:avLst/>
@@ -25491,7 +25491,7 @@
         <p:spPr>
           <a:xfrm>
             <a:off x="7772400" y="2825640"/>
-            <a:ext cx="1470960" cy="286200"/>
+            <a:ext cx="1470600" cy="286200"/>
           </a:xfrm>
           <a:prstGeom prst="rect">
             <a:avLst/>
@@ -25545,7 +25545,7 @@
         <p:spPr>
           <a:xfrm>
             <a:off x="7772400" y="3108960"/>
-            <a:ext cx="1470960" cy="118440"/>
+            <a:ext cx="1470600" cy="118440"/>
           </a:xfrm>
           <a:prstGeom prst="rect">
             <a:avLst/>
@@ -25599,7 +25599,7 @@
         <p:spPr>
           <a:xfrm>
             <a:off x="9331560" y="2889360"/>
-            <a:ext cx="136080" cy="182520"/>
+            <a:ext cx="135720" cy="182520"/>
           </a:xfrm>
           <a:prstGeom prst="rect">
             <a:avLst/>
@@ -25653,7 +25653,7 @@
         <p:spPr>
           <a:xfrm>
             <a:off x="9482400" y="2541960"/>
-            <a:ext cx="1617480" cy="913320"/>
+            <a:ext cx="1617120" cy="912960"/>
           </a:xfrm>
           <a:prstGeom prst="roundRect">
             <a:avLst>
@@ -25711,7 +25711,7 @@
         <p:spPr>
           <a:xfrm>
             <a:off x="9555480" y="2615040"/>
-            <a:ext cx="318960" cy="133560"/>
+            <a:ext cx="318600" cy="133560"/>
           </a:xfrm>
           <a:prstGeom prst="rect">
             <a:avLst/>
@@ -25765,7 +25765,7 @@
         <p:spPr>
           <a:xfrm>
             <a:off x="9555480" y="2825640"/>
-            <a:ext cx="1470960" cy="142920"/>
+            <a:ext cx="1470600" cy="142920"/>
           </a:xfrm>
           <a:prstGeom prst="rect">
             <a:avLst/>
@@ -25819,7 +25819,7 @@
         <p:spPr>
           <a:xfrm>
             <a:off x="9555480" y="3108960"/>
-            <a:ext cx="1470960" cy="237240"/>
+            <a:ext cx="1470600" cy="237240"/>
           </a:xfrm>
           <a:prstGeom prst="rect">
             <a:avLst/>
@@ -25873,7 +25873,7 @@
         <p:spPr>
           <a:xfrm>
             <a:off x="567000" y="3703320"/>
-            <a:ext cx="5256720" cy="1425240"/>
+            <a:ext cx="5256360" cy="1424880"/>
           </a:xfrm>
           <a:prstGeom prst="roundRect">
             <a:avLst>
@@ -25931,7 +25931,7 @@
         <p:spPr>
           <a:xfrm>
             <a:off x="768240" y="3867840"/>
-            <a:ext cx="1279080" cy="258840"/>
+            <a:ext cx="1278720" cy="258840"/>
           </a:xfrm>
           <a:prstGeom prst="rect">
             <a:avLst/>
@@ -25985,7 +25985,7 @@
         <p:spPr>
           <a:xfrm>
             <a:off x="768240" y="4187880"/>
-            <a:ext cx="4680720" cy="585720"/>
+            <a:ext cx="4680360" cy="585720"/>
           </a:xfrm>
           <a:prstGeom prst="rect">
             <a:avLst/>
@@ -26039,7 +26039,7 @@
         <p:spPr>
           <a:xfrm>
             <a:off x="6144840" y="3703320"/>
-            <a:ext cx="5256720" cy="1425240"/>
+            <a:ext cx="5256360" cy="1424880"/>
           </a:xfrm>
           <a:prstGeom prst="roundRect">
             <a:avLst>
@@ -26097,7 +26097,7 @@
         <p:spPr>
           <a:xfrm>
             <a:off x="6346080" y="3867840"/>
-            <a:ext cx="1461960" cy="129240"/>
+            <a:ext cx="1461600" cy="129240"/>
           </a:xfrm>
           <a:prstGeom prst="rect">
             <a:avLst/>
@@ -26151,7 +26151,7 @@
         <p:spPr>
           <a:xfrm>
             <a:off x="6346080" y="4187880"/>
-            <a:ext cx="4680720" cy="585720"/>
+            <a:ext cx="4680360" cy="585720"/>
           </a:xfrm>
           <a:prstGeom prst="rect">
             <a:avLst/>
@@ -26205,7 +26205,7 @@
         <p:spPr>
           <a:xfrm>
             <a:off x="567000" y="5285160"/>
-            <a:ext cx="10834560" cy="693720"/>
+            <a:ext cx="10834200" cy="693360"/>
           </a:xfrm>
           <a:prstGeom prst="roundRect">
             <a:avLst>
@@ -26263,7 +26263,7 @@
         <p:spPr>
           <a:xfrm>
             <a:off x="768240" y="5394960"/>
-            <a:ext cx="3976560" cy="401400"/>
+            <a:ext cx="3976200" cy="401400"/>
           </a:xfrm>
           <a:prstGeom prst="rect">
             <a:avLst/>
@@ -26317,7 +26317,7 @@
         <p:spPr>
           <a:xfrm>
             <a:off x="567000" y="6236280"/>
-            <a:ext cx="10834560" cy="9720"/>
+            <a:ext cx="10834200" cy="9360"/>
           </a:xfrm>
           <a:prstGeom prst="rect">
             <a:avLst/>
@@ -26373,7 +26373,7 @@
         <p:spPr>
           <a:xfrm>
             <a:off x="4069080" y="6355080"/>
-            <a:ext cx="3656520" cy="109440"/>
+            <a:ext cx="3656160" cy="109440"/>
           </a:xfrm>
           <a:prstGeom prst="rect">
             <a:avLst/>
@@ -26427,7 +26427,7 @@
         <p:spPr>
           <a:xfrm>
             <a:off x="11045880" y="6355080"/>
-            <a:ext cx="273240" cy="129240"/>
+            <a:ext cx="272880" cy="129240"/>
           </a:xfrm>
           <a:prstGeom prst="rect">
             <a:avLst/>
@@ -26481,7 +26481,7 @@
         <p:spPr>
           <a:xfrm>
             <a:off x="4956120" y="5358240"/>
-            <a:ext cx="6143760" cy="117000"/>
+            <a:ext cx="6143400" cy="117000"/>
           </a:xfrm>
           <a:prstGeom prst="rect">
             <a:avLst/>
@@ -26535,7 +26535,7 @@
         <p:spPr>
           <a:xfrm>
             <a:off x="4956120" y="5577840"/>
-            <a:ext cx="961920" cy="273240"/>
+            <a:ext cx="961560" cy="272880"/>
           </a:xfrm>
           <a:prstGeom prst="roundRect">
             <a:avLst>
@@ -26593,7 +26593,7 @@
         <p:spPr>
           <a:xfrm>
             <a:off x="5010840" y="5679000"/>
-            <a:ext cx="852480" cy="107280"/>
+            <a:ext cx="852120" cy="106920"/>
           </a:xfrm>
           <a:prstGeom prst="rect">
             <a:avLst/>
@@ -26649,7 +26649,7 @@
         <p:spPr>
           <a:xfrm>
             <a:off x="5992200" y="5577840"/>
-            <a:ext cx="961920" cy="273240"/>
+            <a:ext cx="961560" cy="272880"/>
           </a:xfrm>
           <a:prstGeom prst="roundRect">
             <a:avLst>
@@ -26707,7 +26707,7 @@
         <p:spPr>
           <a:xfrm>
             <a:off x="6047280" y="5679000"/>
-            <a:ext cx="852480" cy="107280"/>
+            <a:ext cx="852120" cy="106920"/>
           </a:xfrm>
           <a:prstGeom prst="rect">
             <a:avLst/>
@@ -26763,7 +26763,7 @@
         <p:spPr>
           <a:xfrm>
             <a:off x="7028640" y="5577840"/>
-            <a:ext cx="961920" cy="273240"/>
+            <a:ext cx="961560" cy="272880"/>
           </a:xfrm>
           <a:prstGeom prst="roundRect">
             <a:avLst>
@@ -26821,7 +26821,7 @@
         <p:spPr>
           <a:xfrm>
             <a:off x="7083720" y="5679000"/>
-            <a:ext cx="852480" cy="107280"/>
+            <a:ext cx="852120" cy="106920"/>
           </a:xfrm>
           <a:prstGeom prst="rect">
             <a:avLst/>
@@ -26877,7 +26877,7 @@
         <p:spPr>
           <a:xfrm>
             <a:off x="8065080" y="5577840"/>
-            <a:ext cx="961920" cy="273240"/>
+            <a:ext cx="961560" cy="272880"/>
           </a:xfrm>
           <a:prstGeom prst="roundRect">
             <a:avLst>
@@ -26935,7 +26935,7 @@
         <p:spPr>
           <a:xfrm>
             <a:off x="8119800" y="5679000"/>
-            <a:ext cx="852480" cy="107280"/>
+            <a:ext cx="852120" cy="106920"/>
           </a:xfrm>
           <a:prstGeom prst="rect">
             <a:avLst/>
@@ -26991,7 +26991,7 @@
         <p:spPr>
           <a:xfrm>
             <a:off x="9101160" y="5577840"/>
-            <a:ext cx="961920" cy="273240"/>
+            <a:ext cx="961560" cy="272880"/>
           </a:xfrm>
           <a:prstGeom prst="roundRect">
             <a:avLst>
@@ -27049,7 +27049,7 @@
         <p:spPr>
           <a:xfrm>
             <a:off x="9156240" y="5679000"/>
-            <a:ext cx="852480" cy="107280"/>
+            <a:ext cx="852120" cy="106920"/>
           </a:xfrm>
           <a:prstGeom prst="rect">
             <a:avLst/>
@@ -27105,7 +27105,7 @@
         <p:spPr>
           <a:xfrm>
             <a:off x="10137600" y="5577840"/>
-            <a:ext cx="961920" cy="273240"/>
+            <a:ext cx="961560" cy="272880"/>
           </a:xfrm>
           <a:prstGeom prst="roundRect">
             <a:avLst>
@@ -27163,7 +27163,7 @@
         <p:spPr>
           <a:xfrm>
             <a:off x="10192680" y="5679000"/>
-            <a:ext cx="852480" cy="107280"/>
+            <a:ext cx="852120" cy="106920"/>
           </a:xfrm>
           <a:prstGeom prst="rect">
             <a:avLst/>
@@ -27219,7 +27219,7 @@
         <p:spPr>
           <a:xfrm>
             <a:off x="1195560" y="6510600"/>
-            <a:ext cx="2307600" cy="103320"/>
+            <a:ext cx="2307240" cy="103320"/>
           </a:xfrm>
           <a:prstGeom prst="rect">
             <a:avLst/>
@@ -27337,7 +27337,7 @@
         <p:spPr>
           <a:xfrm>
             <a:off x="585360" y="155520"/>
-            <a:ext cx="3199320" cy="220680"/>
+            <a:ext cx="3198960" cy="220680"/>
           </a:xfrm>
           <a:prstGeom prst="rect">
             <a:avLst/>
@@ -27391,7 +27391,7 @@
         <p:spPr>
           <a:xfrm>
             <a:off x="10561320" y="155520"/>
-            <a:ext cx="684720" cy="220680"/>
+            <a:ext cx="684360" cy="220680"/>
           </a:xfrm>
           <a:prstGeom prst="rect">
             <a:avLst/>
@@ -27445,7 +27445,7 @@
         <p:spPr>
           <a:xfrm>
             <a:off x="585360" y="457200"/>
-            <a:ext cx="10825560" cy="9720"/>
+            <a:ext cx="10825200" cy="9360"/>
           </a:xfrm>
           <a:prstGeom prst="rect">
             <a:avLst/>
@@ -27498,7 +27498,7 @@
         <p:spPr>
           <a:xfrm>
             <a:off x="585360" y="511920"/>
-            <a:ext cx="10825560" cy="4320"/>
+            <a:ext cx="10825200" cy="3960"/>
           </a:xfrm>
           <a:prstGeom prst="rect">
             <a:avLst/>
@@ -27551,7 +27551,7 @@
         <p:spPr>
           <a:xfrm>
             <a:off x="621720" y="694800"/>
-            <a:ext cx="10605960" cy="447840"/>
+            <a:ext cx="10605600" cy="447840"/>
           </a:xfrm>
           <a:prstGeom prst="rect">
             <a:avLst/>
@@ -27605,7 +27605,7 @@
         <p:spPr>
           <a:xfrm>
             <a:off x="621720" y="1152000"/>
-            <a:ext cx="10514520" cy="252360"/>
+            <a:ext cx="10514160" cy="252360"/>
           </a:xfrm>
           <a:prstGeom prst="rect">
             <a:avLst/>
@@ -27659,7 +27659,7 @@
         <p:spPr>
           <a:xfrm>
             <a:off x="585360" y="6446520"/>
-            <a:ext cx="10825560" cy="9720"/>
+            <a:ext cx="10825200" cy="9360"/>
           </a:xfrm>
           <a:prstGeom prst="rect">
             <a:avLst/>
@@ -27712,7 +27712,7 @@
         <p:spPr>
           <a:xfrm>
             <a:off x="567000" y="6510600"/>
-            <a:ext cx="5211000" cy="207000"/>
+            <a:ext cx="5210640" cy="207000"/>
           </a:xfrm>
           <a:prstGeom prst="rect">
             <a:avLst/>
@@ -27766,7 +27766,7 @@
         <p:spPr>
           <a:xfrm>
             <a:off x="4343400" y="6510600"/>
-            <a:ext cx="3656520" cy="205560"/>
+            <a:ext cx="3656160" cy="205560"/>
           </a:xfrm>
           <a:prstGeom prst="rect">
             <a:avLst/>
@@ -27820,7 +27820,7 @@
         <p:spPr>
           <a:xfrm>
             <a:off x="11018520" y="6510600"/>
-            <a:ext cx="227520" cy="219240"/>
+            <a:ext cx="227160" cy="219240"/>
           </a:xfrm>
           <a:prstGeom prst="rect">
             <a:avLst/>
@@ -27874,7 +27874,7 @@
         <p:spPr>
           <a:xfrm>
             <a:off x="621720" y="1664280"/>
-            <a:ext cx="5238360" cy="1672200"/>
+            <a:ext cx="5238000" cy="1671840"/>
           </a:xfrm>
           <a:prstGeom prst="roundRect">
             <a:avLst>
@@ -27932,7 +27932,7 @@
         <p:spPr>
           <a:xfrm>
             <a:off x="621720" y="1664280"/>
-            <a:ext cx="49320" cy="1672200"/>
+            <a:ext cx="48960" cy="1671840"/>
           </a:xfrm>
           <a:prstGeom prst="rect">
             <a:avLst/>
@@ -27985,7 +27985,7 @@
         <p:spPr>
           <a:xfrm>
             <a:off x="804600" y="1828800"/>
-            <a:ext cx="657360" cy="439920"/>
+            <a:ext cx="657000" cy="439920"/>
           </a:xfrm>
           <a:prstGeom prst="rect">
             <a:avLst/>
@@ -28039,7 +28039,7 @@
         <p:spPr>
           <a:xfrm>
             <a:off x="1472040" y="1847160"/>
-            <a:ext cx="4186800" cy="232920"/>
+            <a:ext cx="4186440" cy="232920"/>
           </a:xfrm>
           <a:prstGeom prst="rect">
             <a:avLst/>
@@ -28093,7 +28093,7 @@
         <p:spPr>
           <a:xfrm>
             <a:off x="822960" y="2258640"/>
-            <a:ext cx="4826880" cy="556200"/>
+            <a:ext cx="4826520" cy="556200"/>
           </a:xfrm>
           <a:prstGeom prst="rect">
             <a:avLst/>
@@ -28147,7 +28147,7 @@
         <p:spPr>
           <a:xfrm>
             <a:off x="6108120" y="1664280"/>
-            <a:ext cx="5174280" cy="1672200"/>
+            <a:ext cx="5173920" cy="1671840"/>
           </a:xfrm>
           <a:prstGeom prst="roundRect">
             <a:avLst>
@@ -28205,7 +28205,7 @@
         <p:spPr>
           <a:xfrm>
             <a:off x="6108120" y="1664280"/>
-            <a:ext cx="49320" cy="1672200"/>
+            <a:ext cx="48960" cy="1671840"/>
           </a:xfrm>
           <a:prstGeom prst="rect">
             <a:avLst/>
@@ -28258,7 +28258,7 @@
         <p:spPr>
           <a:xfrm>
             <a:off x="6291000" y="1828800"/>
-            <a:ext cx="657360" cy="439920"/>
+            <a:ext cx="657000" cy="439920"/>
           </a:xfrm>
           <a:prstGeom prst="rect">
             <a:avLst/>
@@ -28312,7 +28312,7 @@
         <p:spPr>
           <a:xfrm>
             <a:off x="6958440" y="1847160"/>
-            <a:ext cx="4122720" cy="232920"/>
+            <a:ext cx="4122360" cy="232920"/>
           </a:xfrm>
           <a:prstGeom prst="rect">
             <a:avLst/>
@@ -28366,7 +28366,7 @@
         <p:spPr>
           <a:xfrm>
             <a:off x="6309360" y="2258640"/>
-            <a:ext cx="4762800" cy="711720"/>
+            <a:ext cx="4762440" cy="711720"/>
           </a:xfrm>
           <a:prstGeom prst="rect">
             <a:avLst/>
@@ -28420,7 +28420,7 @@
         <p:spPr>
           <a:xfrm>
             <a:off x="621720" y="3584520"/>
-            <a:ext cx="5238360" cy="1672200"/>
+            <a:ext cx="5238000" cy="1671840"/>
           </a:xfrm>
           <a:prstGeom prst="roundRect">
             <a:avLst>
@@ -28478,7 +28478,7 @@
         <p:spPr>
           <a:xfrm>
             <a:off x="621720" y="3584520"/>
-            <a:ext cx="49320" cy="1672200"/>
+            <a:ext cx="48960" cy="1671840"/>
           </a:xfrm>
           <a:prstGeom prst="rect">
             <a:avLst/>
@@ -28531,7 +28531,7 @@
         <p:spPr>
           <a:xfrm>
             <a:off x="804600" y="3749040"/>
-            <a:ext cx="657360" cy="439920"/>
+            <a:ext cx="657000" cy="439920"/>
           </a:xfrm>
           <a:prstGeom prst="rect">
             <a:avLst/>
@@ -28585,7 +28585,7 @@
         <p:spPr>
           <a:xfrm>
             <a:off x="1472040" y="3767400"/>
-            <a:ext cx="4186800" cy="232920"/>
+            <a:ext cx="4186440" cy="232920"/>
           </a:xfrm>
           <a:prstGeom prst="rect">
             <a:avLst/>
@@ -28639,7 +28639,7 @@
         <p:spPr>
           <a:xfrm>
             <a:off x="822960" y="4178880"/>
-            <a:ext cx="4826880" cy="711720"/>
+            <a:ext cx="4826520" cy="711720"/>
           </a:xfrm>
           <a:prstGeom prst="rect">
             <a:avLst/>
@@ -28693,7 +28693,7 @@
         <p:spPr>
           <a:xfrm>
             <a:off x="6108120" y="3584520"/>
-            <a:ext cx="5174280" cy="1672200"/>
+            <a:ext cx="5173920" cy="1671840"/>
           </a:xfrm>
           <a:prstGeom prst="roundRect">
             <a:avLst>
@@ -28751,7 +28751,7 @@
         <p:spPr>
           <a:xfrm>
             <a:off x="6108120" y="3584520"/>
-            <a:ext cx="49320" cy="1672200"/>
+            <a:ext cx="48960" cy="1671840"/>
           </a:xfrm>
           <a:prstGeom prst="rect">
             <a:avLst/>
@@ -28804,7 +28804,7 @@
         <p:spPr>
           <a:xfrm>
             <a:off x="6291000" y="3749040"/>
-            <a:ext cx="657360" cy="439920"/>
+            <a:ext cx="657000" cy="439920"/>
           </a:xfrm>
           <a:prstGeom prst="rect">
             <a:avLst/>
@@ -28858,7 +28858,7 @@
         <p:spPr>
           <a:xfrm>
             <a:off x="6958440" y="3767400"/>
-            <a:ext cx="4122720" cy="232920"/>
+            <a:ext cx="4122360" cy="232920"/>
           </a:xfrm>
           <a:prstGeom prst="rect">
             <a:avLst/>
@@ -28912,7 +28912,7 @@
         <p:spPr>
           <a:xfrm>
             <a:off x="6309360" y="4178880"/>
-            <a:ext cx="4762800" cy="711720"/>
+            <a:ext cx="4762440" cy="711720"/>
           </a:xfrm>
           <a:prstGeom prst="rect">
             <a:avLst/>
@@ -28966,7 +28966,7 @@
         <p:spPr>
           <a:xfrm>
             <a:off x="621720" y="5486400"/>
-            <a:ext cx="10660680" cy="666360"/>
+            <a:ext cx="10660320" cy="666000"/>
           </a:xfrm>
           <a:prstGeom prst="roundRect">
             <a:avLst>
@@ -29021,7 +29021,7 @@
         <p:spPr>
           <a:xfrm>
             <a:off x="841320" y="5632560"/>
-            <a:ext cx="2284920" cy="230040"/>
+            <a:ext cx="2284560" cy="230040"/>
           </a:xfrm>
           <a:prstGeom prst="rect">
             <a:avLst/>
@@ -29075,7 +29075,7 @@
         <p:spPr>
           <a:xfrm>
             <a:off x="3063240" y="5596200"/>
-            <a:ext cx="7954200" cy="379080"/>
+            <a:ext cx="7953840" cy="379080"/>
           </a:xfrm>
           <a:prstGeom prst="rect">
             <a:avLst/>
@@ -29129,7 +29129,7 @@
         <p:spPr>
           <a:xfrm>
             <a:off x="667440" y="6199560"/>
-            <a:ext cx="10605960" cy="213120"/>
+            <a:ext cx="10605600" cy="213120"/>
           </a:xfrm>
           <a:prstGeom prst="rect">
             <a:avLst/>
